--- a/downloads/presentations/modules/lesson-20-retrieval-augmented-generation-for-public-health-knowledge-work.pptx
+++ b/downloads/presentations/modules/lesson-20-retrieval-augmented-generation-for-public-health-knowledge-work.pptx
@@ -25,9 +25,11 @@
     <p:sldId id="273" r:id="rId19"/>
     <p:sldId id="274" r:id="rId20"/>
     <p:sldId id="275" r:id="rId21"/>
+    <p:sldId id="276" r:id="rId22"/>
+    <p:sldId id="277" r:id="rId23"/>
   </p:sldIdLst>
   <p:notesMasterIdLst>
-    <p:notesMasterId r:id="rId22"/>
+    <p:notesMasterId r:id="rId24"/>
   </p:notesMasterIdLst>
   <p:sldSz cx="12192000" cy="6858000"/>
   <p:notesSz cx="6858000" cy="12192000"/>
@@ -610,10 +612,10 @@
           <a:p>
             <a:r>
               <a:rPr lang="en-US" dirty="0"/>
-              <a:t>Risks, Failure Modes, and Guardrails
-Stale or conflicting content. Outdated or inconsistent documents can produce wrong answers. Guardrails include content ownership, version control, review dates, and archival rules.
-Permission leakage. RAG may retrieve content a user should not see. Guardrails include role-based access, document-level permissions, and audit logs.
-Poor retrieval. The system may retrieve irrelevant or incomplete chunks. Guardrails include test question sets, retrieval evaluation, chunking review, and user feedback.</a:t>
+              <a:t>Technical Deep Dive
+A RAG system begins with content selection. Agencies should decide which documents are authoritative, current, approved for the use case, and appropriate for the intended users. Content inventories should include owner, version, effective date, review date, sensitivity level, and access rules. Without this foundation, retrieval can surface obsolete or unauthorized material.
+Document processing affects retrieval quality. Files may need to be converted, cleaned, segmented, and indexed. Chunking decisions matter because overly small chunks may omit context while overly large chunks may retrieve irrelevant material. Tables, figures, scanned PDFs, forms, and appendices may require special handling. Public health documents often contain complex context, such as exceptions, legal caveats, and jurisdiction-specific rules.
+Embeddings and vector search help identify semantically similar content, but retrieval should be tested. Staff should use realistic questions and evaluate whether the system retrieves the best sources. Testing should include synonyms, acronyms, misspellings, role-specific questions, edge cases, and questions that should produce “not found” or escalation responses.</a:t>
             </a:r>
             <a:endParaRPr lang="en-US" dirty="0"/>
           </a:p>
@@ -701,8 +703,9 @@
           <a:p>
             <a:r>
               <a:rPr lang="en-US" dirty="0"/>
-              <a:t>Risks, Failure Modes, and Guardrails
-Unsupported generation. The model may add claims beyond retrieved sources. Guardrails include source-only instructions, citation requirements, and reviewer verification.</a:t>
+              <a:t>Technical Deep Dive
+Generation should be constrained by retrieved material. The system should be instructed to answer from sources, cite them, identify uncertainty, and avoid unsupported claims. It should also explain when guidance conflicts or when source material is insufficient. Users should be able to open the cited source and verify key statements.
+Monitoring should include retrieval failures, unsupported answers, stale content, user feedback, access-control incidents, and frequently asked questions. Content governance should define how documents are added, removed, updated, archived, and re-indexed.</a:t>
             </a:r>
             <a:endParaRPr lang="en-US" dirty="0"/>
           </a:p>
@@ -790,9 +793,10 @@
           <a:p>
             <a:r>
               <a:rPr lang="en-US" dirty="0"/>
-              <a:t>Application to AI-Supported Workflows
-RAG supports generative AI by grounding outputs in defined sources. It may be used in chat assistants, training tools, policy support, emergency operations, procurement review, and program knowledge bases. It can also support agentic workflows by giving agents access to approved guidance, but actions based on retrieved content require additional guardrails.
-Public health RAG systems should be built around trust. Users should know what content is included, what is excluded, how current it is, whether they have permission to use it, and when they must verify or escalate.</a:t>
+              <a:t>Risks, Failure Modes, and Guardrails
+Stale or conflicting content. Outdated or inconsistent documents can produce wrong answers. Guardrails include content ownership, version control, review dates, and archival rules.
+Permission leakage. RAG may retrieve content a user should not see. Guardrails include role-based access, document-level permissions, and audit logs.
+Poor retrieval. The system may retrieve irrelevant or incomplete chunks. Guardrails include test question sets, retrieval evaluation, chunking review, and user feedback.</a:t>
             </a:r>
             <a:endParaRPr lang="en-US" dirty="0"/>
           </a:p>
@@ -880,10 +884,8 @@
           <a:p>
             <a:r>
               <a:rPr lang="en-US" dirty="0"/>
-              <a:t>Reflection Questions
-What content collection would the RAG system use?
-Who owns and updates each source document?
-How will access permissions be enforced?</a:t>
+              <a:t>Risks, Failure Modes, and Guardrails
+Unsupported generation. The model may add claims beyond retrieved sources. Guardrails include source-only instructions, citation requirements, and reviewer verification.</a:t>
             </a:r>
             <a:endParaRPr lang="en-US" dirty="0"/>
           </a:p>
@@ -971,9 +973,9 @@
           <a:p>
             <a:r>
               <a:rPr lang="en-US" dirty="0"/>
-              <a:t>Reflection Questions
-How will retrieval quality and citation accuracy be tested?
-What should the system do when sources are missing, outdated, or conflicting?</a:t>
+              <a:t>Application to AI-Supported Workflows
+RAG supports generative AI by grounding outputs in defined sources. It may be used in chat assistants, training tools, policy support, emergency operations, procurement review, and program knowledge bases. It can also support agentic workflows by giving agents access to approved guidance, but actions based on retrieved content require additional guardrails.
+Public health RAG systems should be built around trust. Users should know what content is included, what is excluded, how current it is, whether they have permission to use it, and when they must verify or escalate.</a:t>
             </a:r>
             <a:endParaRPr lang="en-US" dirty="0"/>
           </a:p>
@@ -1061,9 +1063,10 @@
           <a:p>
             <a:r>
               <a:rPr lang="en-US" dirty="0"/>
-              <a:t>Practical Exercise
-Create a RAG readiness checklist for one public health knowledge workflow. Include content inventory, source authority, document owners, update schedule, sensitivity level, access controls, chunking concerns, retrieval test questions, citation requirements, user review expectations, and monitoring indicators.
-The checklist should identify at least three “do not answer” or escalation situations, such as missing guidance, conflicting sources, or questions outside approved scope.</a:t>
+              <a:t>Reflection Questions
+What content collection would the RAG system use?
+Who owns and updates each source document?
+How will access permissions be enforced?</a:t>
             </a:r>
             <a:endParaRPr lang="en-US" dirty="0"/>
           </a:p>
@@ -1151,10 +1154,9 @@
           <a:p>
             <a:r>
               <a:rPr lang="en-US" dirty="0"/>
-              <a:t>Expected Artifact or Evidence
-RAG readiness checklist
-Content inventory and ownership table
-Retrieval test question set</a:t>
+              <a:t>Reflection Questions
+How will retrieval quality and citation accuracy be tested?
+What should the system do when sources are missing, outdated, or conflicting?</a:t>
             </a:r>
             <a:endParaRPr lang="en-US" dirty="0"/>
           </a:p>
@@ -1242,8 +1244,9 @@
           <a:p>
             <a:r>
               <a:rPr lang="en-US" dirty="0"/>
-              <a:t>Expected Artifact or Evidence
-Citation and source verification protocol</a:t>
+              <a:t>Practical Exercise
+Create a RAG readiness checklist for one public health knowledge workflow. Include content inventory, source authority, document owners, update schedule, sensitivity level, access controls, chunking concerns, retrieval test questions, citation requirements, user review expectations, and monitoring indicators.
+The checklist should identify at least three “do not answer” or escalation situations, such as missing guidance, conflicting sources, or questions outside approved scope.</a:t>
             </a:r>
             <a:endParaRPr lang="en-US" dirty="0"/>
           </a:p>
@@ -1331,11 +1334,10 @@
           <a:p>
             <a:r>
               <a:rPr lang="en-US" dirty="0"/>
-              <a:t>Expected Assignment
+              <a:t>Expected Artifact or Evidence
 RAG readiness checklist
 Content inventory and ownership table
-Retrieval test question set
-Citation and source verification protocol</a:t>
+Retrieval test question set</a:t>
             </a:r>
             <a:endParaRPr lang="en-US" dirty="0"/>
           </a:p>
@@ -1423,12 +1425,8 @@
           <a:p>
             <a:r>
               <a:rPr lang="en-US" dirty="0"/>
-              <a:t>Knowledge Check
-1. What is RAG?
-2. Why does chunking matter?
-3. What is a major RAG governance risk?
-4. What should a RAG system do when sources are insufficient?
-5. What is strong completion evidence for this module?</a:t>
+              <a:t>Expected Artifact or Evidence
+Citation and source verification protocol</a:t>
             </a:r>
             <a:endParaRPr lang="en-US" dirty="0"/>
           </a:p>
@@ -1608,11 +1606,11 @@
           <a:p>
             <a:r>
               <a:rPr lang="en-US" dirty="0"/>
-              <a:t>References and Resources
-NIST AI RMF Generative AI Profile: https://www.nist.gov/publications/artificial-intelligence-risk-management-framework-generative-artificial-intelligence
-OWASP Top 10 for Large Language Model Applications: https://owasp.org/www-project-top-10-for-large-language-model-applications/
-NIST Artificial Intelligence Risk Management Framework: https://www.nist.gov/itl/ai-risk-management-framework
-ONC USCDI: https://isp.healthit.gov/united-states-core-data-interoperability-uscdi</a:t>
+              <a:t>Expected Assignment
+RAG readiness checklist
+Content inventory and ownership table
+Retrieval test question set
+Citation and source verification protocol</a:t>
             </a:r>
             <a:endParaRPr lang="en-US" dirty="0"/>
           </a:p>
@@ -1636,6 +1634,191 @@
             <a:fld id="{F7021451-1387-4CA6-816F-3879F97B5CBC}" type="slidenum">
               <a:rPr lang="en-US"/>
               <a:t>20</a:t>
+            </a:fld>
+            <a:endParaRPr lang="en-US"/>
+          </a:p>
+        </p:txBody>
+      </p:sp>
+    </p:spTree>
+    <p:extLst>
+      <p:ext uri="{BB962C8B-B14F-4D97-AF65-F5344CB8AC3E}">
+        <p14:creationId xmlns:p14="http://schemas.microsoft.com/office/powerpoint/2010/main" val="1024086991"/>
+      </p:ext>
+    </p:extLst>
+  </p:cSld>
+  <p:clrMapOvr>
+    <a:masterClrMapping/>
+  </p:clrMapOvr>
+</p:notes>
+</file>
+
+<file path=ppt/notesSlides/notesSlide21.xml><?xml version="1.0" encoding="utf-8"?>
+<p:notes xmlns:a="http://schemas.openxmlformats.org/drawingml/2006/main" xmlns:r="http://schemas.openxmlformats.org/officeDocument/2006/relationships" xmlns:p="http://schemas.openxmlformats.org/presentationml/2006/main">
+  <p:cSld>
+    <p:spTree>
+      <p:nvGrpSpPr>
+        <p:cNvPr id="1" name=""/>
+        <p:cNvGrpSpPr/>
+        <p:nvPr/>
+      </p:nvGrpSpPr>
+      <p:grpSpPr>
+        <a:xfrm>
+          <a:off x="0" y="0"/>
+          <a:ext cx="0" cy="0"/>
+          <a:chOff x="0" y="0"/>
+          <a:chExt cx="0" cy="0"/>
+        </a:xfrm>
+      </p:grpSpPr>
+      <p:sp>
+        <p:nvSpPr>
+          <p:cNvPr id="2" name="Slide Image Placeholder 1"/>
+          <p:cNvSpPr>
+            <a:spLocks noGrp="1" noRot="1" noChangeAspect="1"/>
+          </p:cNvSpPr>
+          <p:nvPr>
+            <p:ph type="sldImg"/>
+          </p:nvPr>
+        </p:nvSpPr>
+        <p:spPr/>
+      </p:sp>
+      <p:sp>
+        <p:nvSpPr>
+          <p:cNvPr id="3" name="Notes Placeholder 2"/>
+          <p:cNvSpPr>
+            <a:spLocks noGrp="1"/>
+          </p:cNvSpPr>
+          <p:nvPr>
+            <p:ph type="body" idx="1"/>
+          </p:nvPr>
+        </p:nvSpPr>
+        <p:spPr/>
+        <p:txBody>
+          <a:bodyPr/>
+          <a:lstStyle/>
+          <a:p>
+            <a:r>
+              <a:rPr lang="en-US" dirty="0"/>
+              <a:t>Knowledge Check
+1. What is RAG?
+2. Why does chunking matter?
+3. What is a major RAG governance risk?
+4. What should a RAG system do when sources are insufficient?
+5. What is strong completion evidence for this module?</a:t>
+            </a:r>
+            <a:endParaRPr lang="en-US" dirty="0"/>
+          </a:p>
+        </p:txBody>
+      </p:sp>
+      <p:sp>
+        <p:nvSpPr>
+          <p:cNvPr id="4" name="Slide Number Placeholder 3"/>
+          <p:cNvSpPr>
+            <a:spLocks noGrp="1"/>
+          </p:cNvSpPr>
+          <p:nvPr>
+            <p:ph type="sldNum" sz="quarter" idx="10"/>
+          </p:nvPr>
+        </p:nvSpPr>
+        <p:spPr/>
+        <p:txBody>
+          <a:bodyPr/>
+          <a:lstStyle/>
+          <a:p>
+            <a:fld id="{F7021451-1387-4CA6-816F-3879F97B5CBC}" type="slidenum">
+              <a:rPr lang="en-US"/>
+              <a:t>21</a:t>
+            </a:fld>
+            <a:endParaRPr lang="en-US"/>
+          </a:p>
+        </p:txBody>
+      </p:sp>
+    </p:spTree>
+    <p:extLst>
+      <p:ext uri="{BB962C8B-B14F-4D97-AF65-F5344CB8AC3E}">
+        <p14:creationId xmlns:p14="http://schemas.microsoft.com/office/powerpoint/2010/main" val="1024086991"/>
+      </p:ext>
+    </p:extLst>
+  </p:cSld>
+  <p:clrMapOvr>
+    <a:masterClrMapping/>
+  </p:clrMapOvr>
+</p:notes>
+</file>
+
+<file path=ppt/notesSlides/notesSlide22.xml><?xml version="1.0" encoding="utf-8"?>
+<p:notes xmlns:a="http://schemas.openxmlformats.org/drawingml/2006/main" xmlns:r="http://schemas.openxmlformats.org/officeDocument/2006/relationships" xmlns:p="http://schemas.openxmlformats.org/presentationml/2006/main">
+  <p:cSld>
+    <p:spTree>
+      <p:nvGrpSpPr>
+        <p:cNvPr id="1" name=""/>
+        <p:cNvGrpSpPr/>
+        <p:nvPr/>
+      </p:nvGrpSpPr>
+      <p:grpSpPr>
+        <a:xfrm>
+          <a:off x="0" y="0"/>
+          <a:ext cx="0" cy="0"/>
+          <a:chOff x="0" y="0"/>
+          <a:chExt cx="0" cy="0"/>
+        </a:xfrm>
+      </p:grpSpPr>
+      <p:sp>
+        <p:nvSpPr>
+          <p:cNvPr id="2" name="Slide Image Placeholder 1"/>
+          <p:cNvSpPr>
+            <a:spLocks noGrp="1" noRot="1" noChangeAspect="1"/>
+          </p:cNvSpPr>
+          <p:nvPr>
+            <p:ph type="sldImg"/>
+          </p:nvPr>
+        </p:nvSpPr>
+        <p:spPr/>
+      </p:sp>
+      <p:sp>
+        <p:nvSpPr>
+          <p:cNvPr id="3" name="Notes Placeholder 2"/>
+          <p:cNvSpPr>
+            <a:spLocks noGrp="1"/>
+          </p:cNvSpPr>
+          <p:nvPr>
+            <p:ph type="body" idx="1"/>
+          </p:nvPr>
+        </p:nvSpPr>
+        <p:spPr/>
+        <p:txBody>
+          <a:bodyPr/>
+          <a:lstStyle/>
+          <a:p>
+            <a:r>
+              <a:rPr lang="en-US" dirty="0"/>
+              <a:t>References and Resources
+NIST AI RMF Generative AI Profile: https://www.nist.gov/publications/artificial-intelligence-risk-management-framework-generative-artificial-intelligence
+OWASP Top 10 for Large Language Model Applications: https://owasp.org/www-project-top-10-for-large-language-model-applications/
+NIST Artificial Intelligence Risk Management Framework: https://www.nist.gov/itl/ai-risk-management-framework
+ONC USCDI: https://isp.healthit.gov/united-states-core-data-interoperability-uscdi</a:t>
+            </a:r>
+            <a:endParaRPr lang="en-US" dirty="0"/>
+          </a:p>
+        </p:txBody>
+      </p:sp>
+      <p:sp>
+        <p:nvSpPr>
+          <p:cNvPr id="4" name="Slide Number Placeholder 3"/>
+          <p:cNvSpPr>
+            <a:spLocks noGrp="1"/>
+          </p:cNvSpPr>
+          <p:nvPr>
+            <p:ph type="sldNum" sz="quarter" idx="10"/>
+          </p:nvPr>
+        </p:nvSpPr>
+        <p:spPr/>
+        <p:txBody>
+          <a:bodyPr/>
+          <a:lstStyle/>
+          <a:p>
+            <a:fld id="{F7021451-1387-4CA6-816F-3879F97B5CBC}" type="slidenum">
+              <a:rPr lang="en-US"/>
+              <a:t>22</a:t>
             </a:fld>
             <a:endParaRPr lang="en-US"/>
           </a:p>
@@ -1700,12 +1883,11 @@
           <a:p>
             <a:r>
               <a:rPr lang="en-US" dirty="0"/>
-              <a:t>Learning Objectives
-Define retrieval-augmented generation in plain language.
-Describe the major components of a RAG system, including document ingestion, chunking, embeddings, vector search, retrieval, generation, and citation.
-Identify public health use cases where RAG may improve knowledge work.
-Assess risks related to stale content, access control, retrieval quality, hallucination, and source misuse.
-Design governance and monitoring requirements for agency RAG systems.</a:t>
+              <a:t>Related Playbook Plays
+Play 3: Establish AI Governance - This lesson informs Play 3 by helping learners connect the lesson topic to establish ai governance work in the AI Playbook sequence.
+Play 12: Execute Governance and Oversight - This lesson informs Play 12 by helping learners connect the lesson topic to execute governance and oversight work in the AI Playbook.
+Play 11: Build and Deploy AI Solutions - This lesson informs Play 11 by helping learners connect the lesson topic to build and deploy ai solutions work in the AI Playbook.
+Play 1: Vision &amp; Guardrails - This lesson informs Play 1 by helping learners connect the lesson topic to vision &amp; guardrails work in the AI Playbook sequence.</a:t>
             </a:r>
             <a:endParaRPr lang="en-US" dirty="0"/>
           </a:p>
@@ -1793,8 +1975,13 @@
           <a:p>
             <a:r>
               <a:rPr lang="en-US" dirty="0"/>
-              <a:t>Learning Objectives
-Produce a RAG readiness checklist for a public health knowledge workflow.</a:t>
+              <a:t>Related Toolkit Resources
+Tool 16: Incident Response Checklist (Checklist) - Use Incident Response Checklist to translate this lesson into a documented public health AI planning, governance,.
+Tool 17: Compliance Audit Checklist (Checklist) - Use Compliance Audit Checklist to translate this lesson into a documented public health AI planning, governance, implementation,.
+Tool 18: Policy Update &amp; Version Control Log (Log) - Use this tool to complete or strengthen the practical exercise for the module using fictional, de-identified, or generalized.
+Tool 19: Plain-Language AI Public Notice Template (Template) - Use Plain-Language AI Public Notice Template to translate this lesson into a documented public health AI planning, governance,.
+Tool 4: AI Policy Landscape Scan (Worksheet) - Use AI Policy Landscape Scan to translate this lesson into a documented public health AI planning, governance, implementation,.
+Tool 5: AI Environmental and Resource Impact Review (Checklist) - Use AI Environmental and Resource Impact Review to translate this lesson into a documented public health AI planning,.</a:t>
             </a:r>
             <a:endParaRPr lang="en-US" dirty="0"/>
           </a:p>
@@ -1882,10 +2069,12 @@
           <a:p>
             <a:r>
               <a:rPr lang="en-US" dirty="0"/>
-              <a:t>Module Overview
-Retrieval-augmented generation, often called RAG, combines generative AI with retrieval from a defined set of documents or data sources. Instead of relying only on a model’s general training, a RAG system searches approved content and uses retrieved material to generate an answer or summary. In public health, RAG may support policy lookup, protocol interpretation, internal help desks, training support, grant review, emergency response, or program knowledge management.
-RAG can make generative AI more useful and safer when it is designed well. It can ground responses in agency documents, cite sources, and reduce the risk of unsupported answers. However, RAG does not automatically solve hallucination, privacy, access control, outdated guidance, conflicting documents, or poor retrieval. The system is only as reliable as the content collection, search process, permissions, and review workflow.
-This module teaches learners the core components of RAG and how to evaluate whether a RAG tool is ready for public health use.</a:t>
+              <a:t>Learning Objectives
+Define retrieval-augmented generation in plain language.
+Describe the major components of a RAG system, including document ingestion, chunking, embeddings, vector search, retrieval, generation, and citation.
+Identify public health use cases where RAG may improve knowledge work.
+Assess risks related to stale content, access control, retrieval quality, hallucination, and source misuse.
+Design governance and monitoring requirements for agency RAG systems.</a:t>
             </a:r>
             <a:endParaRPr lang="en-US" dirty="0"/>
           </a:p>
@@ -1973,10 +2162,8 @@
           <a:p>
             <a:r>
               <a:rPr lang="en-US" dirty="0"/>
-              <a:t>Why This Topic Matters for Public Health AI
-RAG matters because public health agencies manage large collections of guidance, protocols, policies, contracts, plans, reports, forms, FAQs, and training materials. Staff may spend substantial time searching for answers across shared drives, websites, portals, and outdated files. A well-designed RAG system can help users find relevant guidance and produce concise, source-linked answers.
-The public health value of RAG depends on governance. If a RAG tool includes outdated guidance, draft policies, documents outside a user’s permission level, or conflicting versions, it may generate misleading answers. If it fails to retrieve the most relevant source, the generated answer may be incomplete or wrong. RAG improves the grounding problem only when the content collection and retrieval process are managed carefully.
-RAG is especially important for responsible AI because it offers a middle path between generic public AI tools and fully custom systems. Agencies can build assistants around approved content, but they must define content ownership, update schedules, access rules, citation requirements, testing, monitoring, and user responsibilities.</a:t>
+              <a:t>Learning Objectives
+Produce a RAG readiness checklist for a public health knowledge workflow.</a:t>
             </a:r>
             <a:endParaRPr lang="en-US" dirty="0"/>
           </a:p>
@@ -2064,9 +2251,10 @@
           <a:p>
             <a:r>
               <a:rPr lang="en-US" dirty="0"/>
-              <a:t>Public Health Example
-A state health department may create an internal RAG assistant to help staff find current infectious disease investigation protocols. The assistant could search approved protocols, case definitions, reporting rules, and escalation procedures. When a user asks what steps to take for a suspected condition, the system could summarize relevant guidance and cite the source documents.
-This workflow requires strong controls. The assistant must include only current approved guidance, respect role-based access, cite sources, and warn users when content is outdated or missing. Staff should verify the cited protocol before acting, especially when the situation is unusual or high risk.</a:t>
+              <a:t>Module Overview
+Retrieval-augmented generation, often called RAG, combines generative AI with retrieval from a defined set of documents or data sources. Instead of relying only on a model’s general training, a RAG system searches approved content and uses retrieved material to generate an answer or summary. In public health, RAG may support policy lookup, protocol interpretation, internal help desks, training support, grant review, emergency response, or program knowledge management.
+RAG can make generative AI more useful and safer when it is designed well. It can ground responses in agency documents, cite sources, and reduce the risk of unsupported answers. However, RAG does not automatically solve hallucination, privacy, access control, outdated guidance, conflicting documents, or poor retrieval. The system is only as reliable as the content collection, search process, permissions, and review workflow.
+This module teaches learners the core components of RAG and how to evaluate whether a RAG tool is ready for public health use.</a:t>
             </a:r>
             <a:endParaRPr lang="en-US" dirty="0"/>
           </a:p>
@@ -2154,10 +2342,10 @@
           <a:p>
             <a:r>
               <a:rPr lang="en-US" dirty="0"/>
-              <a:t>Technical Deep Dive
-A RAG system begins with content selection. Agencies should decide which documents are authoritative, current, approved for the use case, and appropriate for the intended users. Content inventories should include owner, version, effective date, review date, sensitivity level, and access rules. Without this foundation, retrieval can surface obsolete or unauthorized material.
-Document processing affects retrieval quality. Files may need to be converted, cleaned, segmented, and indexed. Chunking decisions matter because overly small chunks may omit context while overly large chunks may retrieve irrelevant material. Tables, figures, scanned PDFs, forms, and appendices may require special handling. Public health documents often contain complex context, such as exceptions, legal caveats, and jurisdiction-specific rules.
-Embeddings and vector search help identify semantically similar content, but retrieval should be tested. Staff should use realistic questions and evaluate whether the system retrieves the best sources. Testing should include synonyms, acronyms, misspellings, role-specific questions, edge cases, and questions that should produce “not found” or escalation responses.</a:t>
+              <a:t>Why This Topic Matters for Public Health AI
+RAG matters because public health agencies manage large collections of guidance, protocols, policies, contracts, plans, reports, forms, FAQs, and training materials. Staff may spend substantial time searching for answers across shared drives, websites, portals, and outdated files. A well-designed RAG system can help users find relevant guidance and produce concise, source-linked answers.
+The public health value of RAG depends on governance. If a RAG tool includes outdated guidance, draft policies, documents outside a user’s permission level, or conflicting versions, it may generate misleading answers. If it fails to retrieve the most relevant source, the generated answer may be incomplete or wrong. RAG improves the grounding problem only when the content collection and retrieval process are managed carefully.
+RAG is especially important for responsible AI because it offers a middle path between generic public AI tools and fully custom systems. Agencies can build assistants around approved content, but they must define content ownership, update schedules, access rules, citation requirements, testing, monitoring, and user responsibilities.</a:t>
             </a:r>
             <a:endParaRPr lang="en-US" dirty="0"/>
           </a:p>
@@ -2245,9 +2433,9 @@
           <a:p>
             <a:r>
               <a:rPr lang="en-US" dirty="0"/>
-              <a:t>Technical Deep Dive
-Generation should be constrained by retrieved material. The system should be instructed to answer from sources, cite them, identify uncertainty, and avoid unsupported claims. It should also explain when guidance conflicts or when source material is insufficient. Users should be able to open the cited source and verify key statements.
-Monitoring should include retrieval failures, unsupported answers, stale content, user feedback, access-control incidents, and frequently asked questions. Content governance should define how documents are added, removed, updated, archived, and re-indexed.</a:t>
+              <a:t>Public Health Example
+A state health department may create an internal RAG assistant to help staff find current infectious disease investigation protocols. The assistant could search approved protocols, case definitions, reporting rules, and escalation procedures. When a user asks what steps to take for a suspected condition, the system could summarize relevant guidance and cite the source documents.
+This workflow requires strong controls. The assistant must include only current approved guidance, respect role-based access, cite sources, and warn users when content is outdated or missing. Staff should verify the cited protocol before acting, especially when the situation is unusual or high risk.</a:t>
             </a:r>
             <a:endParaRPr lang="en-US" dirty="0"/>
           </a:p>
@@ -2870,7 +3058,32 @@
       </p:sp>
       <p:sp>
         <p:nvSpPr>
-          <p:cNvPr id="3" name="Text 1"/>
+          <p:cNvPr id="3" name="Shape 1"/>
+          <p:cNvSpPr/>
+          <p:nvPr/>
+        </p:nvSpPr>
+        <p:spPr>
+          <a:xfrm>
+            <a:off x="0" y="164592"/>
+            <a:ext cx="146304" cy="6693408"/>
+          </a:xfrm>
+          <a:prstGeom prst="rect">
+            <a:avLst/>
+          </a:prstGeom>
+          <a:solidFill>
+            <a:srgbClr val="2F8A28"/>
+          </a:solidFill>
+          <a:ln w="12700">
+            <a:solidFill>
+              <a:srgbClr val="2F8A28"/>
+            </a:solidFill>
+            <a:prstDash val="solid"/>
+          </a:ln>
+        </p:spPr>
+      </p:sp>
+      <p:sp>
+        <p:nvSpPr>
+          <p:cNvPr id="4" name="Text 2"/>
           <p:cNvSpPr/>
           <p:nvPr/>
         </p:nvSpPr>
@@ -2909,7 +3122,7 @@
       </p:sp>
       <p:sp>
         <p:nvSpPr>
-          <p:cNvPr id="4" name="Text 2"/>
+          <p:cNvPr id="5" name="Text 3"/>
           <p:cNvSpPr/>
           <p:nvPr/>
         </p:nvSpPr>
@@ -2948,7 +3161,7 @@
       </p:sp>
       <p:sp>
         <p:nvSpPr>
-          <p:cNvPr id="5" name="Text 3"/>
+          <p:cNvPr id="6" name="Text 4"/>
           <p:cNvSpPr/>
           <p:nvPr/>
         </p:nvSpPr>
@@ -2987,13 +3200,77 @@
       </p:sp>
       <p:sp>
         <p:nvSpPr>
-          <p:cNvPr id="6" name="Text 4"/>
+          <p:cNvPr id="7" name="Shape 5"/>
           <p:cNvSpPr/>
           <p:nvPr/>
         </p:nvSpPr>
         <p:spPr>
           <a:xfrm>
             <a:off x="640080" y="658368"/>
+            <a:ext cx="420624" cy="420624"/>
+          </a:xfrm>
+          <a:prstGeom prst="ellipse">
+            <a:avLst/>
+          </a:prstGeom>
+          <a:solidFill>
+            <a:srgbClr val="0068B7"/>
+          </a:solidFill>
+          <a:ln w="12700">
+            <a:solidFill>
+              <a:srgbClr val="0068B7"/>
+            </a:solidFill>
+            <a:prstDash val="solid"/>
+          </a:ln>
+        </p:spPr>
+      </p:sp>
+      <p:sp>
+        <p:nvSpPr>
+          <p:cNvPr id="8" name="Text 6"/>
+          <p:cNvSpPr/>
+          <p:nvPr/>
+        </p:nvSpPr>
+        <p:spPr>
+          <a:xfrm>
+            <a:off x="640080" y="731520"/>
+            <a:ext cx="420624" cy="164592"/>
+          </a:xfrm>
+          <a:prstGeom prst="rect">
+            <a:avLst/>
+          </a:prstGeom>
+          <a:noFill/>
+          <a:ln/>
+        </p:spPr>
+        <p:txBody>
+          <a:bodyPr wrap="square" lIns="0" tIns="0" rIns="0" bIns="0" rtlCol="0" anchor="ctr"/>
+          <a:lstStyle/>
+          <a:p>
+            <a:pPr algn="ctr" indent="0" marL="0">
+              <a:buNone/>
+            </a:pPr>
+            <a:r>
+              <a:rPr lang="en-US" sz="1100" b="1" dirty="0">
+                <a:solidFill>
+                  <a:srgbClr val="FFFFFF"/>
+                </a:solidFill>
+                <a:latin typeface="Aptos" pitchFamily="34" charset="0"/>
+                <a:ea typeface="Aptos" pitchFamily="34" charset="-122"/>
+                <a:cs typeface="Aptos" pitchFamily="34" charset="-120"/>
+              </a:rPr>
+              <a:t>5</a:t>
+            </a:r>
+            <a:endParaRPr lang="en-US" sz="1100" dirty="0"/>
+          </a:p>
+        </p:txBody>
+      </p:sp>
+      <p:sp>
+        <p:nvSpPr>
+          <p:cNvPr id="9" name="Text 7"/>
+          <p:cNvSpPr/>
+          <p:nvPr/>
+        </p:nvSpPr>
+        <p:spPr>
+          <a:xfrm>
+            <a:off x="640080" y="621792"/>
             <a:ext cx="10881360" cy="566928"/>
           </a:xfrm>
           <a:prstGeom prst="rect">
@@ -3020,7 +3297,7 @@
                 <a:ea typeface="Aptos Display" pitchFamily="34" charset="-122"/>
                 <a:cs typeface="Aptos Display" pitchFamily="34" charset="-120"/>
               </a:rPr>
-              <a:t>Risks, Failure Modes, and Guardrails</a:t>
+              <a:t>Technical Deep Dive</a:t>
             </a:r>
             <a:endParaRPr lang="en-US" sz="2700" dirty="0"/>
           </a:p>
@@ -3028,32 +3305,178 @@
       </p:sp>
       <p:sp>
         <p:nvSpPr>
-          <p:cNvPr id="7" name="Text 5"/>
-          <p:cNvSpPr/>
-          <p:nvPr/>
-        </p:nvSpPr>
-        <p:spPr>
-          <a:xfrm>
-            <a:off x="822960" y="1325880"/>
-            <a:ext cx="10378440" cy="4800600"/>
-          </a:xfrm>
-          <a:prstGeom prst="rect">
-            <a:avLst/>
-          </a:prstGeom>
-          <a:noFill/>
-          <a:ln/>
-        </p:spPr>
-        <p:txBody>
-          <a:bodyPr wrap="square" lIns="1016" tIns="1016" rIns="1016" bIns="1016" rtlCol="0" anchor="t">
+          <p:cNvPr id="10" name="Text 8"/>
+          <p:cNvSpPr/>
+          <p:nvPr/>
+        </p:nvSpPr>
+        <p:spPr>
+          <a:xfrm>
+            <a:off x="868680" y="1417320"/>
+            <a:ext cx="6675120" cy="4434840"/>
+          </a:xfrm>
+          <a:prstGeom prst="rect">
+            <a:avLst/>
+          </a:prstGeom>
+          <a:noFill/>
+          <a:ln/>
+        </p:spPr>
+        <p:txBody>
+          <a:bodyPr wrap="square" lIns="635" tIns="635" rIns="635" bIns="635" rtlCol="0" anchor="t">
             <a:normAutofit/>
           </a:bodyPr>
           <a:lstStyle/>
           <a:p>
+            <a:r>
+              <a:rPr lang="en-US" sz="1700" dirty="0">
+                <a:solidFill>
+                  <a:srgbClr val="17364A"/>
+                </a:solidFill>
+                <a:latin typeface="Aptos" pitchFamily="34" charset="0"/>
+                <a:ea typeface="Aptos" pitchFamily="34" charset="-122"/>
+                <a:cs typeface="Aptos" pitchFamily="34" charset="-120"/>
+              </a:rPr>
+              <a:t>A RAG system begins with content selection.</a:t>
+            </a:r>
+            <a:endParaRPr lang="en-US" sz="1700" dirty="0"/>
+          </a:p>
+          <a:p>
+            <a:r>
+              <a:rPr lang="en-US" sz="1700" dirty="0">
+                <a:solidFill>
+                  <a:srgbClr val="17364A"/>
+                </a:solidFill>
+                <a:latin typeface="Aptos" pitchFamily="34" charset="0"/>
+                <a:ea typeface="Aptos" pitchFamily="34" charset="-122"/>
+                <a:cs typeface="Aptos" pitchFamily="34" charset="-120"/>
+              </a:rPr>
+              <a:t>Agencies should decide which documents are authoritative, current, approved for the use case, and appropriate for the.</a:t>
+            </a:r>
+            <a:endParaRPr lang="en-US" sz="1700" dirty="0"/>
+          </a:p>
+          <a:p>
+            <a:r>
+              <a:rPr lang="en-US" sz="1700" dirty="0">
+                <a:solidFill>
+                  <a:srgbClr val="17364A"/>
+                </a:solidFill>
+                <a:latin typeface="Aptos" pitchFamily="34" charset="0"/>
+                <a:ea typeface="Aptos" pitchFamily="34" charset="-122"/>
+                <a:cs typeface="Aptos" pitchFamily="34" charset="-120"/>
+              </a:rPr>
+              <a:t>Content inventories should include owner, version, effective date, review date, sensitivity level, and access rules.</a:t>
+            </a:r>
+            <a:endParaRPr lang="en-US" sz="1700" dirty="0"/>
+          </a:p>
+          <a:p>
+            <a:r>
+              <a:rPr lang="en-US" sz="1700" dirty="0">
+                <a:solidFill>
+                  <a:srgbClr val="17364A"/>
+                </a:solidFill>
+                <a:latin typeface="Aptos" pitchFamily="34" charset="0"/>
+                <a:ea typeface="Aptos" pitchFamily="34" charset="-122"/>
+                <a:cs typeface="Aptos" pitchFamily="34" charset="-120"/>
+              </a:rPr>
+              <a:t>Without this foundation, retrieval can surface obsolete or unauthorized material.</a:t>
+            </a:r>
+            <a:endParaRPr lang="en-US" sz="1700" dirty="0"/>
+          </a:p>
+        </p:txBody>
+      </p:sp>
+      <p:sp>
+        <p:nvSpPr>
+          <p:cNvPr id="11" name="Shape 9"/>
+          <p:cNvSpPr/>
+          <p:nvPr/>
+        </p:nvSpPr>
+        <p:spPr>
+          <a:xfrm>
+            <a:off x="7909560" y="1417320"/>
+            <a:ext cx="3154680" cy="1828800"/>
+          </a:xfrm>
+          <a:prstGeom prst="roundRect">
+            <a:avLst>
+              <a:gd name="adj" fmla="val 6000"/>
+            </a:avLst>
+          </a:prstGeom>
+          <a:solidFill>
+            <a:srgbClr val="EEF8ED"/>
+          </a:solidFill>
+          <a:ln w="12700">
+            <a:solidFill>
+              <a:srgbClr val="B9D7E6"/>
+            </a:solidFill>
+            <a:prstDash val="solid"/>
+          </a:ln>
+        </p:spPr>
+      </p:sp>
+      <p:sp>
+        <p:nvSpPr>
+          <p:cNvPr id="12" name="Text 10"/>
+          <p:cNvSpPr/>
+          <p:nvPr/>
+        </p:nvSpPr>
+        <p:spPr>
+          <a:xfrm>
+            <a:off x="8074152" y="1563624"/>
+            <a:ext cx="2825496" cy="201168"/>
+          </a:xfrm>
+          <a:prstGeom prst="rect">
+            <a:avLst/>
+          </a:prstGeom>
+          <a:noFill/>
+          <a:ln/>
+        </p:spPr>
+        <p:txBody>
+          <a:bodyPr wrap="square" lIns="0" tIns="0" rIns="0" bIns="0" rtlCol="0" anchor="ctr"/>
+          <a:lstStyle/>
+          <a:p>
             <a:pPr indent="0" marL="0">
               <a:buNone/>
             </a:pPr>
             <a:r>
-              <a:rPr lang="en-US" sz="1420" dirty="0">
+              <a:rPr lang="en-US" sz="950" b="1" dirty="0">
+                <a:solidFill>
+                  <a:srgbClr val="0068B7"/>
+                </a:solidFill>
+                <a:latin typeface="Aptos" pitchFamily="34" charset="0"/>
+                <a:ea typeface="Aptos" pitchFamily="34" charset="-122"/>
+                <a:cs typeface="Aptos" pitchFamily="34" charset="-120"/>
+              </a:rPr>
+              <a:t>Key idea</a:t>
+            </a:r>
+            <a:endParaRPr lang="en-US" sz="950" dirty="0"/>
+          </a:p>
+        </p:txBody>
+      </p:sp>
+      <p:sp>
+        <p:nvSpPr>
+          <p:cNvPr id="13" name="Text 11"/>
+          <p:cNvSpPr/>
+          <p:nvPr/>
+        </p:nvSpPr>
+        <p:spPr>
+          <a:xfrm>
+            <a:off x="8074152" y="1856232"/>
+            <a:ext cx="2825496" cy="1261872"/>
+          </a:xfrm>
+          <a:prstGeom prst="rect">
+            <a:avLst/>
+          </a:prstGeom>
+          <a:noFill/>
+          <a:ln/>
+        </p:spPr>
+        <p:txBody>
+          <a:bodyPr wrap="square" lIns="0" tIns="0" rIns="0" bIns="0" rtlCol="0" anchor="t">
+            <a:normAutofit/>
+          </a:bodyPr>
+          <a:lstStyle/>
+          <a:p>
+            <a:pPr indent="0" marL="0">
+              <a:buNone/>
+            </a:pPr>
+            <a:r>
+              <a:rPr lang="en-US" sz="1250" dirty="0">
                 <a:solidFill>
                   <a:srgbClr val="17364A"/>
                 </a:solidFill>
@@ -3061,9 +3484,116 @@
                 <a:ea typeface="Aptos" pitchFamily="34" charset="-122"/>
                 <a:cs typeface="Aptos" pitchFamily="34" charset="-120"/>
               </a:rPr>
-              <a:t>Stale or conflicting content. Outdated or inconsistent documents can produce wrong answers. Guardrails include content ownership, version control, review dates, and archival rules. Permission leakage. RAG may retrieve content a user should not see. Guardrails include role-based access, document-level permissions, and audit logs. Poor retrieval. The system may retrieve irrelevant or incomplete chunks. Guardrails include test question sets, retrieval evaluation, chunking review, and user feedback.</a:t>
-            </a:r>
-            <a:endParaRPr lang="en-US" sz="1420" dirty="0"/>
+              <a:t>A RAG system begins with content selection.</a:t>
+            </a:r>
+            <a:endParaRPr lang="en-US" sz="1250" dirty="0"/>
+          </a:p>
+        </p:txBody>
+      </p:sp>
+      <p:sp>
+        <p:nvSpPr>
+          <p:cNvPr id="14" name="Shape 12"/>
+          <p:cNvSpPr/>
+          <p:nvPr/>
+        </p:nvSpPr>
+        <p:spPr>
+          <a:xfrm>
+            <a:off x="7909560" y="3520440"/>
+            <a:ext cx="3154680" cy="1737360"/>
+          </a:xfrm>
+          <a:prstGeom prst="roundRect">
+            <a:avLst>
+              <a:gd name="adj" fmla="val 6316"/>
+            </a:avLst>
+          </a:prstGeom>
+          <a:solidFill>
+            <a:srgbClr val="EAF6F8"/>
+          </a:solidFill>
+          <a:ln w="12700">
+            <a:solidFill>
+              <a:srgbClr val="B9D7E6"/>
+            </a:solidFill>
+            <a:prstDash val="solid"/>
+          </a:ln>
+        </p:spPr>
+      </p:sp>
+      <p:sp>
+        <p:nvSpPr>
+          <p:cNvPr id="15" name="Text 13"/>
+          <p:cNvSpPr/>
+          <p:nvPr/>
+        </p:nvSpPr>
+        <p:spPr>
+          <a:xfrm>
+            <a:off x="8074152" y="3666744"/>
+            <a:ext cx="2825496" cy="201168"/>
+          </a:xfrm>
+          <a:prstGeom prst="rect">
+            <a:avLst/>
+          </a:prstGeom>
+          <a:noFill/>
+          <a:ln/>
+        </p:spPr>
+        <p:txBody>
+          <a:bodyPr wrap="square" lIns="0" tIns="0" rIns="0" bIns="0" rtlCol="0" anchor="ctr"/>
+          <a:lstStyle/>
+          <a:p>
+            <a:pPr indent="0" marL="0">
+              <a:buNone/>
+            </a:pPr>
+            <a:r>
+              <a:rPr lang="en-US" sz="950" b="1" dirty="0">
+                <a:solidFill>
+                  <a:srgbClr val="0068B7"/>
+                </a:solidFill>
+                <a:latin typeface="Aptos" pitchFamily="34" charset="0"/>
+                <a:ea typeface="Aptos" pitchFamily="34" charset="-122"/>
+                <a:cs typeface="Aptos" pitchFamily="34" charset="-120"/>
+              </a:rPr>
+              <a:t>Use this for</a:t>
+            </a:r>
+            <a:endParaRPr lang="en-US" sz="950" dirty="0"/>
+          </a:p>
+        </p:txBody>
+      </p:sp>
+      <p:sp>
+        <p:nvSpPr>
+          <p:cNvPr id="16" name="Text 14"/>
+          <p:cNvSpPr/>
+          <p:nvPr/>
+        </p:nvSpPr>
+        <p:spPr>
+          <a:xfrm>
+            <a:off x="8074152" y="3959352"/>
+            <a:ext cx="2825496" cy="1170432"/>
+          </a:xfrm>
+          <a:prstGeom prst="rect">
+            <a:avLst/>
+          </a:prstGeom>
+          <a:noFill/>
+          <a:ln/>
+        </p:spPr>
+        <p:txBody>
+          <a:bodyPr wrap="square" lIns="0" tIns="0" rIns="0" bIns="0" rtlCol="0" anchor="t">
+            <a:normAutofit/>
+          </a:bodyPr>
+          <a:lstStyle/>
+          <a:p>
+            <a:pPr indent="0" marL="0">
+              <a:buNone/>
+            </a:pPr>
+            <a:r>
+              <a:rPr lang="en-US" sz="1250" dirty="0">
+                <a:solidFill>
+                  <a:srgbClr val="17364A"/>
+                </a:solidFill>
+                <a:latin typeface="Aptos" pitchFamily="34" charset="0"/>
+                <a:ea typeface="Aptos" pitchFamily="34" charset="-122"/>
+                <a:cs typeface="Aptos" pitchFamily="34" charset="-120"/>
+              </a:rPr>
+              <a:t>Connect the concept to public health decisions, safeguards, documentation, or implementation work.</a:t>
+            </a:r>
+            <a:endParaRPr lang="en-US" sz="1250" dirty="0"/>
           </a:p>
         </p:txBody>
       </p:sp>
@@ -3126,7 +3656,32 @@
       </p:sp>
       <p:sp>
         <p:nvSpPr>
-          <p:cNvPr id="3" name="Text 1"/>
+          <p:cNvPr id="3" name="Shape 1"/>
+          <p:cNvSpPr/>
+          <p:nvPr/>
+        </p:nvSpPr>
+        <p:spPr>
+          <a:xfrm>
+            <a:off x="0" y="164592"/>
+            <a:ext cx="146304" cy="6693408"/>
+          </a:xfrm>
+          <a:prstGeom prst="rect">
+            <a:avLst/>
+          </a:prstGeom>
+          <a:solidFill>
+            <a:srgbClr val="2F8A28"/>
+          </a:solidFill>
+          <a:ln w="12700">
+            <a:solidFill>
+              <a:srgbClr val="2F8A28"/>
+            </a:solidFill>
+            <a:prstDash val="solid"/>
+          </a:ln>
+        </p:spPr>
+      </p:sp>
+      <p:sp>
+        <p:nvSpPr>
+          <p:cNvPr id="4" name="Text 2"/>
           <p:cNvSpPr/>
           <p:nvPr/>
         </p:nvSpPr>
@@ -3165,7 +3720,7 @@
       </p:sp>
       <p:sp>
         <p:nvSpPr>
-          <p:cNvPr id="4" name="Text 2"/>
+          <p:cNvPr id="5" name="Text 3"/>
           <p:cNvSpPr/>
           <p:nvPr/>
         </p:nvSpPr>
@@ -3204,7 +3759,7 @@
       </p:sp>
       <p:sp>
         <p:nvSpPr>
-          <p:cNvPr id="5" name="Text 3"/>
+          <p:cNvPr id="6" name="Text 4"/>
           <p:cNvSpPr/>
           <p:nvPr/>
         </p:nvSpPr>
@@ -3243,7 +3798,7 @@
       </p:sp>
       <p:sp>
         <p:nvSpPr>
-          <p:cNvPr id="6" name="Text 4"/>
+          <p:cNvPr id="7" name="Text 5"/>
           <p:cNvSpPr/>
           <p:nvPr/>
         </p:nvSpPr>
@@ -3276,7 +3831,7 @@
                 <a:ea typeface="Aptos Display" pitchFamily="34" charset="-122"/>
                 <a:cs typeface="Aptos Display" pitchFamily="34" charset="-120"/>
               </a:rPr>
-              <a:t>Risks, Failure Modes, and Guardrails Continued</a:t>
+              <a:t>Technical Deep Dive Continued</a:t>
             </a:r>
             <a:endParaRPr lang="en-US" sz="2700" dirty="0"/>
           </a:p>
@@ -3284,32 +3839,178 @@
       </p:sp>
       <p:sp>
         <p:nvSpPr>
-          <p:cNvPr id="7" name="Text 5"/>
-          <p:cNvSpPr/>
-          <p:nvPr/>
-        </p:nvSpPr>
-        <p:spPr>
-          <a:xfrm>
-            <a:off x="822960" y="1325880"/>
-            <a:ext cx="10378440" cy="4800600"/>
-          </a:xfrm>
-          <a:prstGeom prst="rect">
-            <a:avLst/>
-          </a:prstGeom>
-          <a:noFill/>
-          <a:ln/>
-        </p:spPr>
-        <p:txBody>
-          <a:bodyPr wrap="square" lIns="1016" tIns="1016" rIns="1016" bIns="1016" rtlCol="0" anchor="t">
+          <p:cNvPr id="8" name="Text 6"/>
+          <p:cNvSpPr/>
+          <p:nvPr/>
+        </p:nvSpPr>
+        <p:spPr>
+          <a:xfrm>
+            <a:off x="868680" y="1417320"/>
+            <a:ext cx="6675120" cy="4434840"/>
+          </a:xfrm>
+          <a:prstGeom prst="rect">
+            <a:avLst/>
+          </a:prstGeom>
+          <a:noFill/>
+          <a:ln/>
+        </p:spPr>
+        <p:txBody>
+          <a:bodyPr wrap="square" lIns="635" tIns="635" rIns="635" bIns="635" rtlCol="0" anchor="t">
             <a:normAutofit/>
           </a:bodyPr>
           <a:lstStyle/>
           <a:p>
+            <a:r>
+              <a:rPr lang="en-US" sz="1700" dirty="0">
+                <a:solidFill>
+                  <a:srgbClr val="17364A"/>
+                </a:solidFill>
+                <a:latin typeface="Aptos" pitchFamily="34" charset="0"/>
+                <a:ea typeface="Aptos" pitchFamily="34" charset="-122"/>
+                <a:cs typeface="Aptos" pitchFamily="34" charset="-120"/>
+              </a:rPr>
+              <a:t>Generation should be constrained by retrieved material.</a:t>
+            </a:r>
+            <a:endParaRPr lang="en-US" sz="1700" dirty="0"/>
+          </a:p>
+          <a:p>
+            <a:r>
+              <a:rPr lang="en-US" sz="1700" dirty="0">
+                <a:solidFill>
+                  <a:srgbClr val="17364A"/>
+                </a:solidFill>
+                <a:latin typeface="Aptos" pitchFamily="34" charset="0"/>
+                <a:ea typeface="Aptos" pitchFamily="34" charset="-122"/>
+                <a:cs typeface="Aptos" pitchFamily="34" charset="-120"/>
+              </a:rPr>
+              <a:t>The system should be instructed to answer from sources, cite them, identify uncertainty, and avoid unsupported claims.</a:t>
+            </a:r>
+            <a:endParaRPr lang="en-US" sz="1700" dirty="0"/>
+          </a:p>
+          <a:p>
+            <a:r>
+              <a:rPr lang="en-US" sz="1700" dirty="0">
+                <a:solidFill>
+                  <a:srgbClr val="17364A"/>
+                </a:solidFill>
+                <a:latin typeface="Aptos" pitchFamily="34" charset="0"/>
+                <a:ea typeface="Aptos" pitchFamily="34" charset="-122"/>
+                <a:cs typeface="Aptos" pitchFamily="34" charset="-120"/>
+              </a:rPr>
+              <a:t>It should also explain when guidance conflicts or when source material is insufficient.</a:t>
+            </a:r>
+            <a:endParaRPr lang="en-US" sz="1700" dirty="0"/>
+          </a:p>
+          <a:p>
+            <a:r>
+              <a:rPr lang="en-US" sz="1700" dirty="0">
+                <a:solidFill>
+                  <a:srgbClr val="17364A"/>
+                </a:solidFill>
+                <a:latin typeface="Aptos" pitchFamily="34" charset="0"/>
+                <a:ea typeface="Aptos" pitchFamily="34" charset="-122"/>
+                <a:cs typeface="Aptos" pitchFamily="34" charset="-120"/>
+              </a:rPr>
+              <a:t>Users should be able to open the cited source and verify key statements.</a:t>
+            </a:r>
+            <a:endParaRPr lang="en-US" sz="1700" dirty="0"/>
+          </a:p>
+        </p:txBody>
+      </p:sp>
+      <p:sp>
+        <p:nvSpPr>
+          <p:cNvPr id="9" name="Shape 7"/>
+          <p:cNvSpPr/>
+          <p:nvPr/>
+        </p:nvSpPr>
+        <p:spPr>
+          <a:xfrm>
+            <a:off x="7909560" y="1417320"/>
+            <a:ext cx="3154680" cy="1828800"/>
+          </a:xfrm>
+          <a:prstGeom prst="roundRect">
+            <a:avLst>
+              <a:gd name="adj" fmla="val 6000"/>
+            </a:avLst>
+          </a:prstGeom>
+          <a:solidFill>
+            <a:srgbClr val="EEF8ED"/>
+          </a:solidFill>
+          <a:ln w="12700">
+            <a:solidFill>
+              <a:srgbClr val="B9D7E6"/>
+            </a:solidFill>
+            <a:prstDash val="solid"/>
+          </a:ln>
+        </p:spPr>
+      </p:sp>
+      <p:sp>
+        <p:nvSpPr>
+          <p:cNvPr id="10" name="Text 8"/>
+          <p:cNvSpPr/>
+          <p:nvPr/>
+        </p:nvSpPr>
+        <p:spPr>
+          <a:xfrm>
+            <a:off x="8074152" y="1563624"/>
+            <a:ext cx="2825496" cy="201168"/>
+          </a:xfrm>
+          <a:prstGeom prst="rect">
+            <a:avLst/>
+          </a:prstGeom>
+          <a:noFill/>
+          <a:ln/>
+        </p:spPr>
+        <p:txBody>
+          <a:bodyPr wrap="square" lIns="0" tIns="0" rIns="0" bIns="0" rtlCol="0" anchor="ctr"/>
+          <a:lstStyle/>
+          <a:p>
             <a:pPr indent="0" marL="0">
               <a:buNone/>
             </a:pPr>
             <a:r>
-              <a:rPr lang="en-US" sz="1420" dirty="0">
+              <a:rPr lang="en-US" sz="950" b="1" dirty="0">
+                <a:solidFill>
+                  <a:srgbClr val="0068B7"/>
+                </a:solidFill>
+                <a:latin typeface="Aptos" pitchFamily="34" charset="0"/>
+                <a:ea typeface="Aptos" pitchFamily="34" charset="-122"/>
+                <a:cs typeface="Aptos" pitchFamily="34" charset="-120"/>
+              </a:rPr>
+              <a:t>Key idea</a:t>
+            </a:r>
+            <a:endParaRPr lang="en-US" sz="950" dirty="0"/>
+          </a:p>
+        </p:txBody>
+      </p:sp>
+      <p:sp>
+        <p:nvSpPr>
+          <p:cNvPr id="11" name="Text 9"/>
+          <p:cNvSpPr/>
+          <p:nvPr/>
+        </p:nvSpPr>
+        <p:spPr>
+          <a:xfrm>
+            <a:off x="8074152" y="1856232"/>
+            <a:ext cx="2825496" cy="1261872"/>
+          </a:xfrm>
+          <a:prstGeom prst="rect">
+            <a:avLst/>
+          </a:prstGeom>
+          <a:noFill/>
+          <a:ln/>
+        </p:spPr>
+        <p:txBody>
+          <a:bodyPr wrap="square" lIns="0" tIns="0" rIns="0" bIns="0" rtlCol="0" anchor="t">
+            <a:normAutofit/>
+          </a:bodyPr>
+          <a:lstStyle/>
+          <a:p>
+            <a:pPr indent="0" marL="0">
+              <a:buNone/>
+            </a:pPr>
+            <a:r>
+              <a:rPr lang="en-US" sz="1250" dirty="0">
                 <a:solidFill>
                   <a:srgbClr val="17364A"/>
                 </a:solidFill>
@@ -3317,9 +4018,116 @@
                 <a:ea typeface="Aptos" pitchFamily="34" charset="-122"/>
                 <a:cs typeface="Aptos" pitchFamily="34" charset="-120"/>
               </a:rPr>
-              <a:t>Unsupported generation. The model may add claims beyond retrieved sources. Guardrails include source-only instructions, citation requirements, and reviewer verification.</a:t>
-            </a:r>
-            <a:endParaRPr lang="en-US" sz="1420" dirty="0"/>
+              <a:t>Generation should be constrained by retrieved material.</a:t>
+            </a:r>
+            <a:endParaRPr lang="en-US" sz="1250" dirty="0"/>
+          </a:p>
+        </p:txBody>
+      </p:sp>
+      <p:sp>
+        <p:nvSpPr>
+          <p:cNvPr id="12" name="Shape 10"/>
+          <p:cNvSpPr/>
+          <p:nvPr/>
+        </p:nvSpPr>
+        <p:spPr>
+          <a:xfrm>
+            <a:off x="7909560" y="3520440"/>
+            <a:ext cx="3154680" cy="1737360"/>
+          </a:xfrm>
+          <a:prstGeom prst="roundRect">
+            <a:avLst>
+              <a:gd name="adj" fmla="val 6316"/>
+            </a:avLst>
+          </a:prstGeom>
+          <a:solidFill>
+            <a:srgbClr val="EAF6F8"/>
+          </a:solidFill>
+          <a:ln w="12700">
+            <a:solidFill>
+              <a:srgbClr val="B9D7E6"/>
+            </a:solidFill>
+            <a:prstDash val="solid"/>
+          </a:ln>
+        </p:spPr>
+      </p:sp>
+      <p:sp>
+        <p:nvSpPr>
+          <p:cNvPr id="13" name="Text 11"/>
+          <p:cNvSpPr/>
+          <p:nvPr/>
+        </p:nvSpPr>
+        <p:spPr>
+          <a:xfrm>
+            <a:off x="8074152" y="3666744"/>
+            <a:ext cx="2825496" cy="201168"/>
+          </a:xfrm>
+          <a:prstGeom prst="rect">
+            <a:avLst/>
+          </a:prstGeom>
+          <a:noFill/>
+          <a:ln/>
+        </p:spPr>
+        <p:txBody>
+          <a:bodyPr wrap="square" lIns="0" tIns="0" rIns="0" bIns="0" rtlCol="0" anchor="ctr"/>
+          <a:lstStyle/>
+          <a:p>
+            <a:pPr indent="0" marL="0">
+              <a:buNone/>
+            </a:pPr>
+            <a:r>
+              <a:rPr lang="en-US" sz="950" b="1" dirty="0">
+                <a:solidFill>
+                  <a:srgbClr val="0068B7"/>
+                </a:solidFill>
+                <a:latin typeface="Aptos" pitchFamily="34" charset="0"/>
+                <a:ea typeface="Aptos" pitchFamily="34" charset="-122"/>
+                <a:cs typeface="Aptos" pitchFamily="34" charset="-120"/>
+              </a:rPr>
+              <a:t>Use this for</a:t>
+            </a:r>
+            <a:endParaRPr lang="en-US" sz="950" dirty="0"/>
+          </a:p>
+        </p:txBody>
+      </p:sp>
+      <p:sp>
+        <p:nvSpPr>
+          <p:cNvPr id="14" name="Text 12"/>
+          <p:cNvSpPr/>
+          <p:nvPr/>
+        </p:nvSpPr>
+        <p:spPr>
+          <a:xfrm>
+            <a:off x="8074152" y="3959352"/>
+            <a:ext cx="2825496" cy="1170432"/>
+          </a:xfrm>
+          <a:prstGeom prst="rect">
+            <a:avLst/>
+          </a:prstGeom>
+          <a:noFill/>
+          <a:ln/>
+        </p:spPr>
+        <p:txBody>
+          <a:bodyPr wrap="square" lIns="0" tIns="0" rIns="0" bIns="0" rtlCol="0" anchor="t">
+            <a:normAutofit/>
+          </a:bodyPr>
+          <a:lstStyle/>
+          <a:p>
+            <a:pPr indent="0" marL="0">
+              <a:buNone/>
+            </a:pPr>
+            <a:r>
+              <a:rPr lang="en-US" sz="1250" dirty="0">
+                <a:solidFill>
+                  <a:srgbClr val="17364A"/>
+                </a:solidFill>
+                <a:latin typeface="Aptos" pitchFamily="34" charset="0"/>
+                <a:ea typeface="Aptos" pitchFamily="34" charset="-122"/>
+                <a:cs typeface="Aptos" pitchFamily="34" charset="-120"/>
+              </a:rPr>
+              <a:t>Connect the concept to public health decisions, safeguards, documentation, or implementation work.</a:t>
+            </a:r>
+            <a:endParaRPr lang="en-US" sz="1250" dirty="0"/>
           </a:p>
         </p:txBody>
       </p:sp>
@@ -3382,7 +4190,32 @@
       </p:sp>
       <p:sp>
         <p:nvSpPr>
-          <p:cNvPr id="3" name="Text 1"/>
+          <p:cNvPr id="3" name="Shape 1"/>
+          <p:cNvSpPr/>
+          <p:nvPr/>
+        </p:nvSpPr>
+        <p:spPr>
+          <a:xfrm>
+            <a:off x="0" y="164592"/>
+            <a:ext cx="146304" cy="6693408"/>
+          </a:xfrm>
+          <a:prstGeom prst="rect">
+            <a:avLst/>
+          </a:prstGeom>
+          <a:solidFill>
+            <a:srgbClr val="2F8A28"/>
+          </a:solidFill>
+          <a:ln w="12700">
+            <a:solidFill>
+              <a:srgbClr val="2F8A28"/>
+            </a:solidFill>
+            <a:prstDash val="solid"/>
+          </a:ln>
+        </p:spPr>
+      </p:sp>
+      <p:sp>
+        <p:nvSpPr>
+          <p:cNvPr id="4" name="Text 2"/>
           <p:cNvSpPr/>
           <p:nvPr/>
         </p:nvSpPr>
@@ -3421,7 +4254,7 @@
       </p:sp>
       <p:sp>
         <p:nvSpPr>
-          <p:cNvPr id="4" name="Text 2"/>
+          <p:cNvPr id="5" name="Text 3"/>
           <p:cNvSpPr/>
           <p:nvPr/>
         </p:nvSpPr>
@@ -3460,7 +4293,7 @@
       </p:sp>
       <p:sp>
         <p:nvSpPr>
-          <p:cNvPr id="5" name="Text 3"/>
+          <p:cNvPr id="6" name="Text 4"/>
           <p:cNvSpPr/>
           <p:nvPr/>
         </p:nvSpPr>
@@ -3499,13 +4332,77 @@
       </p:sp>
       <p:sp>
         <p:nvSpPr>
-          <p:cNvPr id="6" name="Text 4"/>
+          <p:cNvPr id="7" name="Shape 5"/>
           <p:cNvSpPr/>
           <p:nvPr/>
         </p:nvSpPr>
         <p:spPr>
           <a:xfrm>
             <a:off x="640080" y="658368"/>
+            <a:ext cx="420624" cy="420624"/>
+          </a:xfrm>
+          <a:prstGeom prst="ellipse">
+            <a:avLst/>
+          </a:prstGeom>
+          <a:solidFill>
+            <a:srgbClr val="0068B7"/>
+          </a:solidFill>
+          <a:ln w="12700">
+            <a:solidFill>
+              <a:srgbClr val="0068B7"/>
+            </a:solidFill>
+            <a:prstDash val="solid"/>
+          </a:ln>
+        </p:spPr>
+      </p:sp>
+      <p:sp>
+        <p:nvSpPr>
+          <p:cNvPr id="8" name="Text 6"/>
+          <p:cNvSpPr/>
+          <p:nvPr/>
+        </p:nvSpPr>
+        <p:spPr>
+          <a:xfrm>
+            <a:off x="640080" y="731520"/>
+            <a:ext cx="420624" cy="164592"/>
+          </a:xfrm>
+          <a:prstGeom prst="rect">
+            <a:avLst/>
+          </a:prstGeom>
+          <a:noFill/>
+          <a:ln/>
+        </p:spPr>
+        <p:txBody>
+          <a:bodyPr wrap="square" lIns="0" tIns="0" rIns="0" bIns="0" rtlCol="0" anchor="ctr"/>
+          <a:lstStyle/>
+          <a:p>
+            <a:pPr algn="ctr" indent="0" marL="0">
+              <a:buNone/>
+            </a:pPr>
+            <a:r>
+              <a:rPr lang="en-US" sz="1100" b="1" dirty="0">
+                <a:solidFill>
+                  <a:srgbClr val="FFFFFF"/>
+                </a:solidFill>
+                <a:latin typeface="Aptos" pitchFamily="34" charset="0"/>
+                <a:ea typeface="Aptos" pitchFamily="34" charset="-122"/>
+                <a:cs typeface="Aptos" pitchFamily="34" charset="-120"/>
+              </a:rPr>
+              <a:t>6</a:t>
+            </a:r>
+            <a:endParaRPr lang="en-US" sz="1100" dirty="0"/>
+          </a:p>
+        </p:txBody>
+      </p:sp>
+      <p:sp>
+        <p:nvSpPr>
+          <p:cNvPr id="9" name="Text 7"/>
+          <p:cNvSpPr/>
+          <p:nvPr/>
+        </p:nvSpPr>
+        <p:spPr>
+          <a:xfrm>
+            <a:off x="640080" y="621792"/>
             <a:ext cx="10881360" cy="566928"/>
           </a:xfrm>
           <a:prstGeom prst="rect">
@@ -3532,7 +4429,7 @@
                 <a:ea typeface="Aptos Display" pitchFamily="34" charset="-122"/>
                 <a:cs typeface="Aptos Display" pitchFamily="34" charset="-120"/>
               </a:rPr>
-              <a:t>Application to AI-Supported Workflows</a:t>
+              <a:t>Risks, Failure Modes, and Guardrails</a:t>
             </a:r>
             <a:endParaRPr lang="en-US" sz="2700" dirty="0"/>
           </a:p>
@@ -3540,32 +4437,178 @@
       </p:sp>
       <p:sp>
         <p:nvSpPr>
-          <p:cNvPr id="7" name="Text 5"/>
-          <p:cNvSpPr/>
-          <p:nvPr/>
-        </p:nvSpPr>
-        <p:spPr>
-          <a:xfrm>
-            <a:off x="822960" y="1325880"/>
-            <a:ext cx="10378440" cy="4800600"/>
-          </a:xfrm>
-          <a:prstGeom prst="rect">
-            <a:avLst/>
-          </a:prstGeom>
-          <a:noFill/>
-          <a:ln/>
-        </p:spPr>
-        <p:txBody>
-          <a:bodyPr wrap="square" lIns="1016" tIns="1016" rIns="1016" bIns="1016" rtlCol="0" anchor="t">
+          <p:cNvPr id="10" name="Text 8"/>
+          <p:cNvSpPr/>
+          <p:nvPr/>
+        </p:nvSpPr>
+        <p:spPr>
+          <a:xfrm>
+            <a:off x="868680" y="1417320"/>
+            <a:ext cx="6675120" cy="4434840"/>
+          </a:xfrm>
+          <a:prstGeom prst="rect">
+            <a:avLst/>
+          </a:prstGeom>
+          <a:noFill/>
+          <a:ln/>
+        </p:spPr>
+        <p:txBody>
+          <a:bodyPr wrap="square" lIns="635" tIns="635" rIns="635" bIns="635" rtlCol="0" anchor="t">
             <a:normAutofit/>
           </a:bodyPr>
           <a:lstStyle/>
           <a:p>
+            <a:r>
+              <a:rPr lang="en-US" sz="1700" dirty="0">
+                <a:solidFill>
+                  <a:srgbClr val="17364A"/>
+                </a:solidFill>
+                <a:latin typeface="Aptos" pitchFamily="34" charset="0"/>
+                <a:ea typeface="Aptos" pitchFamily="34" charset="-122"/>
+                <a:cs typeface="Aptos" pitchFamily="34" charset="-120"/>
+              </a:rPr>
+              <a:t>Stale or conflicting content.</a:t>
+            </a:r>
+            <a:endParaRPr lang="en-US" sz="1700" dirty="0"/>
+          </a:p>
+          <a:p>
+            <a:r>
+              <a:rPr lang="en-US" sz="1700" dirty="0">
+                <a:solidFill>
+                  <a:srgbClr val="17364A"/>
+                </a:solidFill>
+                <a:latin typeface="Aptos" pitchFamily="34" charset="0"/>
+                <a:ea typeface="Aptos" pitchFamily="34" charset="-122"/>
+                <a:cs typeface="Aptos" pitchFamily="34" charset="-120"/>
+              </a:rPr>
+              <a:t>Outdated or inconsistent documents can produce wrong answers.</a:t>
+            </a:r>
+            <a:endParaRPr lang="en-US" sz="1700" dirty="0"/>
+          </a:p>
+          <a:p>
+            <a:r>
+              <a:rPr lang="en-US" sz="1700" dirty="0">
+                <a:solidFill>
+                  <a:srgbClr val="17364A"/>
+                </a:solidFill>
+                <a:latin typeface="Aptos" pitchFamily="34" charset="0"/>
+                <a:ea typeface="Aptos" pitchFamily="34" charset="-122"/>
+                <a:cs typeface="Aptos" pitchFamily="34" charset="-120"/>
+              </a:rPr>
+              <a:t>Guardrails include content ownership, version control, review dates, and archival rules.</a:t>
+            </a:r>
+            <a:endParaRPr lang="en-US" sz="1700" dirty="0"/>
+          </a:p>
+          <a:p>
+            <a:r>
+              <a:rPr lang="en-US" sz="1700" dirty="0">
+                <a:solidFill>
+                  <a:srgbClr val="17364A"/>
+                </a:solidFill>
+                <a:latin typeface="Aptos" pitchFamily="34" charset="0"/>
+                <a:ea typeface="Aptos" pitchFamily="34" charset="-122"/>
+                <a:cs typeface="Aptos" pitchFamily="34" charset="-120"/>
+              </a:rPr>
+              <a:t>Permission leakage.</a:t>
+            </a:r>
+            <a:endParaRPr lang="en-US" sz="1700" dirty="0"/>
+          </a:p>
+        </p:txBody>
+      </p:sp>
+      <p:sp>
+        <p:nvSpPr>
+          <p:cNvPr id="11" name="Shape 9"/>
+          <p:cNvSpPr/>
+          <p:nvPr/>
+        </p:nvSpPr>
+        <p:spPr>
+          <a:xfrm>
+            <a:off x="7909560" y="1417320"/>
+            <a:ext cx="3154680" cy="1828800"/>
+          </a:xfrm>
+          <a:prstGeom prst="roundRect">
+            <a:avLst>
+              <a:gd name="adj" fmla="val 6000"/>
+            </a:avLst>
+          </a:prstGeom>
+          <a:solidFill>
+            <a:srgbClr val="EEF8ED"/>
+          </a:solidFill>
+          <a:ln w="12700">
+            <a:solidFill>
+              <a:srgbClr val="B9D7E6"/>
+            </a:solidFill>
+            <a:prstDash val="solid"/>
+          </a:ln>
+        </p:spPr>
+      </p:sp>
+      <p:sp>
+        <p:nvSpPr>
+          <p:cNvPr id="12" name="Text 10"/>
+          <p:cNvSpPr/>
+          <p:nvPr/>
+        </p:nvSpPr>
+        <p:spPr>
+          <a:xfrm>
+            <a:off x="8074152" y="1563624"/>
+            <a:ext cx="2825496" cy="201168"/>
+          </a:xfrm>
+          <a:prstGeom prst="rect">
+            <a:avLst/>
+          </a:prstGeom>
+          <a:noFill/>
+          <a:ln/>
+        </p:spPr>
+        <p:txBody>
+          <a:bodyPr wrap="square" lIns="0" tIns="0" rIns="0" bIns="0" rtlCol="0" anchor="ctr"/>
+          <a:lstStyle/>
+          <a:p>
             <a:pPr indent="0" marL="0">
               <a:buNone/>
             </a:pPr>
             <a:r>
-              <a:rPr lang="en-US" sz="1420" dirty="0">
+              <a:rPr lang="en-US" sz="950" b="1" dirty="0">
+                <a:solidFill>
+                  <a:srgbClr val="0068B7"/>
+                </a:solidFill>
+                <a:latin typeface="Aptos" pitchFamily="34" charset="0"/>
+                <a:ea typeface="Aptos" pitchFamily="34" charset="-122"/>
+                <a:cs typeface="Aptos" pitchFamily="34" charset="-120"/>
+              </a:rPr>
+              <a:t>Key idea</a:t>
+            </a:r>
+            <a:endParaRPr lang="en-US" sz="950" dirty="0"/>
+          </a:p>
+        </p:txBody>
+      </p:sp>
+      <p:sp>
+        <p:nvSpPr>
+          <p:cNvPr id="13" name="Text 11"/>
+          <p:cNvSpPr/>
+          <p:nvPr/>
+        </p:nvSpPr>
+        <p:spPr>
+          <a:xfrm>
+            <a:off x="8074152" y="1856232"/>
+            <a:ext cx="2825496" cy="1261872"/>
+          </a:xfrm>
+          <a:prstGeom prst="rect">
+            <a:avLst/>
+          </a:prstGeom>
+          <a:noFill/>
+          <a:ln/>
+        </p:spPr>
+        <p:txBody>
+          <a:bodyPr wrap="square" lIns="0" tIns="0" rIns="0" bIns="0" rtlCol="0" anchor="t">
+            <a:normAutofit/>
+          </a:bodyPr>
+          <a:lstStyle/>
+          <a:p>
+            <a:pPr indent="0" marL="0">
+              <a:buNone/>
+            </a:pPr>
+            <a:r>
+              <a:rPr lang="en-US" sz="1250" dirty="0">
                 <a:solidFill>
                   <a:srgbClr val="17364A"/>
                 </a:solidFill>
@@ -3573,9 +4616,116 @@
                 <a:ea typeface="Aptos" pitchFamily="34" charset="-122"/>
                 <a:cs typeface="Aptos" pitchFamily="34" charset="-120"/>
               </a:rPr>
-              <a:t>RAG supports generative AI by grounding outputs in defined sources. It may be used in chat assistants, training tools, policy support, emergency operations, procurement review, and program knowledge bases. It can also support agentic workflows by giving agents access to approved guidance, but actions based on retrieved content require additional guardrails. Public health RAG systems should be built around trust. Users should know what content is included, what is excluded, how current it is, whether they have permission to use it, and when they must verify or escalate.</a:t>
-            </a:r>
-            <a:endParaRPr lang="en-US" sz="1420" dirty="0"/>
+              <a:t>Stale or conflicting content.</a:t>
+            </a:r>
+            <a:endParaRPr lang="en-US" sz="1250" dirty="0"/>
+          </a:p>
+        </p:txBody>
+      </p:sp>
+      <p:sp>
+        <p:nvSpPr>
+          <p:cNvPr id="14" name="Shape 12"/>
+          <p:cNvSpPr/>
+          <p:nvPr/>
+        </p:nvSpPr>
+        <p:spPr>
+          <a:xfrm>
+            <a:off x="7909560" y="3520440"/>
+            <a:ext cx="3154680" cy="1737360"/>
+          </a:xfrm>
+          <a:prstGeom prst="roundRect">
+            <a:avLst>
+              <a:gd name="adj" fmla="val 6316"/>
+            </a:avLst>
+          </a:prstGeom>
+          <a:solidFill>
+            <a:srgbClr val="EAF6F8"/>
+          </a:solidFill>
+          <a:ln w="12700">
+            <a:solidFill>
+              <a:srgbClr val="B9D7E6"/>
+            </a:solidFill>
+            <a:prstDash val="solid"/>
+          </a:ln>
+        </p:spPr>
+      </p:sp>
+      <p:sp>
+        <p:nvSpPr>
+          <p:cNvPr id="15" name="Text 13"/>
+          <p:cNvSpPr/>
+          <p:nvPr/>
+        </p:nvSpPr>
+        <p:spPr>
+          <a:xfrm>
+            <a:off x="8074152" y="3666744"/>
+            <a:ext cx="2825496" cy="201168"/>
+          </a:xfrm>
+          <a:prstGeom prst="rect">
+            <a:avLst/>
+          </a:prstGeom>
+          <a:noFill/>
+          <a:ln/>
+        </p:spPr>
+        <p:txBody>
+          <a:bodyPr wrap="square" lIns="0" tIns="0" rIns="0" bIns="0" rtlCol="0" anchor="ctr"/>
+          <a:lstStyle/>
+          <a:p>
+            <a:pPr indent="0" marL="0">
+              <a:buNone/>
+            </a:pPr>
+            <a:r>
+              <a:rPr lang="en-US" sz="950" b="1" dirty="0">
+                <a:solidFill>
+                  <a:srgbClr val="0068B7"/>
+                </a:solidFill>
+                <a:latin typeface="Aptos" pitchFamily="34" charset="0"/>
+                <a:ea typeface="Aptos" pitchFamily="34" charset="-122"/>
+                <a:cs typeface="Aptos" pitchFamily="34" charset="-120"/>
+              </a:rPr>
+              <a:t>Use this for</a:t>
+            </a:r>
+            <a:endParaRPr lang="en-US" sz="950" dirty="0"/>
+          </a:p>
+        </p:txBody>
+      </p:sp>
+      <p:sp>
+        <p:nvSpPr>
+          <p:cNvPr id="16" name="Text 14"/>
+          <p:cNvSpPr/>
+          <p:nvPr/>
+        </p:nvSpPr>
+        <p:spPr>
+          <a:xfrm>
+            <a:off x="8074152" y="3959352"/>
+            <a:ext cx="2825496" cy="1170432"/>
+          </a:xfrm>
+          <a:prstGeom prst="rect">
+            <a:avLst/>
+          </a:prstGeom>
+          <a:noFill/>
+          <a:ln/>
+        </p:spPr>
+        <p:txBody>
+          <a:bodyPr wrap="square" lIns="0" tIns="0" rIns="0" bIns="0" rtlCol="0" anchor="t">
+            <a:normAutofit/>
+          </a:bodyPr>
+          <a:lstStyle/>
+          <a:p>
+            <a:pPr indent="0" marL="0">
+              <a:buNone/>
+            </a:pPr>
+            <a:r>
+              <a:rPr lang="en-US" sz="1250" dirty="0">
+                <a:solidFill>
+                  <a:srgbClr val="17364A"/>
+                </a:solidFill>
+                <a:latin typeface="Aptos" pitchFamily="34" charset="0"/>
+                <a:ea typeface="Aptos" pitchFamily="34" charset="-122"/>
+                <a:cs typeface="Aptos" pitchFamily="34" charset="-120"/>
+              </a:rPr>
+              <a:t>Connect the concept to public health decisions, safeguards, documentation, or implementation work.</a:t>
+            </a:r>
+            <a:endParaRPr lang="en-US" sz="1250" dirty="0"/>
           </a:p>
         </p:txBody>
       </p:sp>
@@ -3638,7 +4788,32 @@
       </p:sp>
       <p:sp>
         <p:nvSpPr>
-          <p:cNvPr id="3" name="Text 1"/>
+          <p:cNvPr id="3" name="Shape 1"/>
+          <p:cNvSpPr/>
+          <p:nvPr/>
+        </p:nvSpPr>
+        <p:spPr>
+          <a:xfrm>
+            <a:off x="0" y="164592"/>
+            <a:ext cx="146304" cy="6693408"/>
+          </a:xfrm>
+          <a:prstGeom prst="rect">
+            <a:avLst/>
+          </a:prstGeom>
+          <a:solidFill>
+            <a:srgbClr val="2F8A28"/>
+          </a:solidFill>
+          <a:ln w="12700">
+            <a:solidFill>
+              <a:srgbClr val="2F8A28"/>
+            </a:solidFill>
+            <a:prstDash val="solid"/>
+          </a:ln>
+        </p:spPr>
+      </p:sp>
+      <p:sp>
+        <p:nvSpPr>
+          <p:cNvPr id="4" name="Text 2"/>
           <p:cNvSpPr/>
           <p:nvPr/>
         </p:nvSpPr>
@@ -3677,7 +4852,7 @@
       </p:sp>
       <p:sp>
         <p:nvSpPr>
-          <p:cNvPr id="4" name="Text 2"/>
+          <p:cNvPr id="5" name="Text 3"/>
           <p:cNvSpPr/>
           <p:nvPr/>
         </p:nvSpPr>
@@ -3716,7 +4891,7 @@
       </p:sp>
       <p:sp>
         <p:nvSpPr>
-          <p:cNvPr id="5" name="Text 3"/>
+          <p:cNvPr id="6" name="Text 4"/>
           <p:cNvSpPr/>
           <p:nvPr/>
         </p:nvSpPr>
@@ -3755,7 +4930,7 @@
       </p:sp>
       <p:sp>
         <p:nvSpPr>
-          <p:cNvPr id="6" name="Text 4"/>
+          <p:cNvPr id="7" name="Text 5"/>
           <p:cNvSpPr/>
           <p:nvPr/>
         </p:nvSpPr>
@@ -3788,7 +4963,7 @@
                 <a:ea typeface="Aptos Display" pitchFamily="34" charset="-122"/>
                 <a:cs typeface="Aptos Display" pitchFamily="34" charset="-120"/>
               </a:rPr>
-              <a:t>Reflection Questions</a:t>
+              <a:t>Risks, Failure Modes, and Guardrails Continued</a:t>
             </a:r>
             <a:endParaRPr lang="en-US" sz="2700" dirty="0"/>
           </a:p>
@@ -3796,32 +4971,164 @@
       </p:sp>
       <p:sp>
         <p:nvSpPr>
-          <p:cNvPr id="7" name="Text 5"/>
-          <p:cNvSpPr/>
-          <p:nvPr/>
-        </p:nvSpPr>
-        <p:spPr>
-          <a:xfrm>
-            <a:off x="822960" y="1325880"/>
-            <a:ext cx="10378440" cy="4800600"/>
-          </a:xfrm>
-          <a:prstGeom prst="rect">
-            <a:avLst/>
-          </a:prstGeom>
-          <a:noFill/>
-          <a:ln/>
-        </p:spPr>
-        <p:txBody>
-          <a:bodyPr wrap="square" lIns="1016" tIns="1016" rIns="1016" bIns="1016" rtlCol="0" anchor="t">
+          <p:cNvPr id="8" name="Text 6"/>
+          <p:cNvSpPr/>
+          <p:nvPr/>
+        </p:nvSpPr>
+        <p:spPr>
+          <a:xfrm>
+            <a:off x="868680" y="1417320"/>
+            <a:ext cx="6675120" cy="4434840"/>
+          </a:xfrm>
+          <a:prstGeom prst="rect">
+            <a:avLst/>
+          </a:prstGeom>
+          <a:noFill/>
+          <a:ln/>
+        </p:spPr>
+        <p:txBody>
+          <a:bodyPr wrap="square" lIns="635" tIns="635" rIns="635" bIns="635" rtlCol="0" anchor="t">
             <a:normAutofit/>
           </a:bodyPr>
           <a:lstStyle/>
           <a:p>
+            <a:r>
+              <a:rPr lang="en-US" sz="1700" dirty="0">
+                <a:solidFill>
+                  <a:srgbClr val="17364A"/>
+                </a:solidFill>
+                <a:latin typeface="Aptos" pitchFamily="34" charset="0"/>
+                <a:ea typeface="Aptos" pitchFamily="34" charset="-122"/>
+                <a:cs typeface="Aptos" pitchFamily="34" charset="-120"/>
+              </a:rPr>
+              <a:t>Unsupported generation.</a:t>
+            </a:r>
+            <a:endParaRPr lang="en-US" sz="1700" dirty="0"/>
+          </a:p>
+          <a:p>
+            <a:r>
+              <a:rPr lang="en-US" sz="1700" dirty="0">
+                <a:solidFill>
+                  <a:srgbClr val="17364A"/>
+                </a:solidFill>
+                <a:latin typeface="Aptos" pitchFamily="34" charset="0"/>
+                <a:ea typeface="Aptos" pitchFamily="34" charset="-122"/>
+                <a:cs typeface="Aptos" pitchFamily="34" charset="-120"/>
+              </a:rPr>
+              <a:t>The model may add claims beyond retrieved sources.</a:t>
+            </a:r>
+            <a:endParaRPr lang="en-US" sz="1700" dirty="0"/>
+          </a:p>
+          <a:p>
+            <a:r>
+              <a:rPr lang="en-US" sz="1700" dirty="0">
+                <a:solidFill>
+                  <a:srgbClr val="17364A"/>
+                </a:solidFill>
+                <a:latin typeface="Aptos" pitchFamily="34" charset="0"/>
+                <a:ea typeface="Aptos" pitchFamily="34" charset="-122"/>
+                <a:cs typeface="Aptos" pitchFamily="34" charset="-120"/>
+              </a:rPr>
+              <a:t>Guardrails include source-only instructions, citation requirements, and reviewer verification.</a:t>
+            </a:r>
+            <a:endParaRPr lang="en-US" sz="1700" dirty="0"/>
+          </a:p>
+        </p:txBody>
+      </p:sp>
+      <p:sp>
+        <p:nvSpPr>
+          <p:cNvPr id="9" name="Shape 7"/>
+          <p:cNvSpPr/>
+          <p:nvPr/>
+        </p:nvSpPr>
+        <p:spPr>
+          <a:xfrm>
+            <a:off x="7909560" y="1417320"/>
+            <a:ext cx="3154680" cy="1828800"/>
+          </a:xfrm>
+          <a:prstGeom prst="roundRect">
+            <a:avLst>
+              <a:gd name="adj" fmla="val 6000"/>
+            </a:avLst>
+          </a:prstGeom>
+          <a:solidFill>
+            <a:srgbClr val="EEF8ED"/>
+          </a:solidFill>
+          <a:ln w="12700">
+            <a:solidFill>
+              <a:srgbClr val="B9D7E6"/>
+            </a:solidFill>
+            <a:prstDash val="solid"/>
+          </a:ln>
+        </p:spPr>
+      </p:sp>
+      <p:sp>
+        <p:nvSpPr>
+          <p:cNvPr id="10" name="Text 8"/>
+          <p:cNvSpPr/>
+          <p:nvPr/>
+        </p:nvSpPr>
+        <p:spPr>
+          <a:xfrm>
+            <a:off x="8074152" y="1563624"/>
+            <a:ext cx="2825496" cy="201168"/>
+          </a:xfrm>
+          <a:prstGeom prst="rect">
+            <a:avLst/>
+          </a:prstGeom>
+          <a:noFill/>
+          <a:ln/>
+        </p:spPr>
+        <p:txBody>
+          <a:bodyPr wrap="square" lIns="0" tIns="0" rIns="0" bIns="0" rtlCol="0" anchor="ctr"/>
+          <a:lstStyle/>
+          <a:p>
             <a:pPr indent="0" marL="0">
               <a:buNone/>
             </a:pPr>
             <a:r>
-              <a:rPr lang="en-US" sz="1420" dirty="0">
+              <a:rPr lang="en-US" sz="950" b="1" dirty="0">
+                <a:solidFill>
+                  <a:srgbClr val="0068B7"/>
+                </a:solidFill>
+                <a:latin typeface="Aptos" pitchFamily="34" charset="0"/>
+                <a:ea typeface="Aptos" pitchFamily="34" charset="-122"/>
+                <a:cs typeface="Aptos" pitchFamily="34" charset="-120"/>
+              </a:rPr>
+              <a:t>Key idea</a:t>
+            </a:r>
+            <a:endParaRPr lang="en-US" sz="950" dirty="0"/>
+          </a:p>
+        </p:txBody>
+      </p:sp>
+      <p:sp>
+        <p:nvSpPr>
+          <p:cNvPr id="11" name="Text 9"/>
+          <p:cNvSpPr/>
+          <p:nvPr/>
+        </p:nvSpPr>
+        <p:spPr>
+          <a:xfrm>
+            <a:off x="8074152" y="1856232"/>
+            <a:ext cx="2825496" cy="1261872"/>
+          </a:xfrm>
+          <a:prstGeom prst="rect">
+            <a:avLst/>
+          </a:prstGeom>
+          <a:noFill/>
+          <a:ln/>
+        </p:spPr>
+        <p:txBody>
+          <a:bodyPr wrap="square" lIns="0" tIns="0" rIns="0" bIns="0" rtlCol="0" anchor="t">
+            <a:normAutofit/>
+          </a:bodyPr>
+          <a:lstStyle/>
+          <a:p>
+            <a:pPr indent="0" marL="0">
+              <a:buNone/>
+            </a:pPr>
+            <a:r>
+              <a:rPr lang="en-US" sz="1250" dirty="0">
                 <a:solidFill>
                   <a:srgbClr val="17364A"/>
                 </a:solidFill>
@@ -3829,9 +5136,116 @@
                 <a:ea typeface="Aptos" pitchFamily="34" charset="-122"/>
                 <a:cs typeface="Aptos" pitchFamily="34" charset="-120"/>
               </a:rPr>
-              <a:t>What content collection would the RAG system use? Who owns and updates each source document? How will access permissions be enforced?</a:t>
-            </a:r>
-            <a:endParaRPr lang="en-US" sz="1420" dirty="0"/>
+              <a:t>Unsupported generation.</a:t>
+            </a:r>
+            <a:endParaRPr lang="en-US" sz="1250" dirty="0"/>
+          </a:p>
+        </p:txBody>
+      </p:sp>
+      <p:sp>
+        <p:nvSpPr>
+          <p:cNvPr id="12" name="Shape 10"/>
+          <p:cNvSpPr/>
+          <p:nvPr/>
+        </p:nvSpPr>
+        <p:spPr>
+          <a:xfrm>
+            <a:off x="7909560" y="3520440"/>
+            <a:ext cx="3154680" cy="1737360"/>
+          </a:xfrm>
+          <a:prstGeom prst="roundRect">
+            <a:avLst>
+              <a:gd name="adj" fmla="val 6316"/>
+            </a:avLst>
+          </a:prstGeom>
+          <a:solidFill>
+            <a:srgbClr val="EAF6F8"/>
+          </a:solidFill>
+          <a:ln w="12700">
+            <a:solidFill>
+              <a:srgbClr val="B9D7E6"/>
+            </a:solidFill>
+            <a:prstDash val="solid"/>
+          </a:ln>
+        </p:spPr>
+      </p:sp>
+      <p:sp>
+        <p:nvSpPr>
+          <p:cNvPr id="13" name="Text 11"/>
+          <p:cNvSpPr/>
+          <p:nvPr/>
+        </p:nvSpPr>
+        <p:spPr>
+          <a:xfrm>
+            <a:off x="8074152" y="3666744"/>
+            <a:ext cx="2825496" cy="201168"/>
+          </a:xfrm>
+          <a:prstGeom prst="rect">
+            <a:avLst/>
+          </a:prstGeom>
+          <a:noFill/>
+          <a:ln/>
+        </p:spPr>
+        <p:txBody>
+          <a:bodyPr wrap="square" lIns="0" tIns="0" rIns="0" bIns="0" rtlCol="0" anchor="ctr"/>
+          <a:lstStyle/>
+          <a:p>
+            <a:pPr indent="0" marL="0">
+              <a:buNone/>
+            </a:pPr>
+            <a:r>
+              <a:rPr lang="en-US" sz="950" b="1" dirty="0">
+                <a:solidFill>
+                  <a:srgbClr val="0068B7"/>
+                </a:solidFill>
+                <a:latin typeface="Aptos" pitchFamily="34" charset="0"/>
+                <a:ea typeface="Aptos" pitchFamily="34" charset="-122"/>
+                <a:cs typeface="Aptos" pitchFamily="34" charset="-120"/>
+              </a:rPr>
+              <a:t>Use this for</a:t>
+            </a:r>
+            <a:endParaRPr lang="en-US" sz="950" dirty="0"/>
+          </a:p>
+        </p:txBody>
+      </p:sp>
+      <p:sp>
+        <p:nvSpPr>
+          <p:cNvPr id="14" name="Text 12"/>
+          <p:cNvSpPr/>
+          <p:nvPr/>
+        </p:nvSpPr>
+        <p:spPr>
+          <a:xfrm>
+            <a:off x="8074152" y="3959352"/>
+            <a:ext cx="2825496" cy="1170432"/>
+          </a:xfrm>
+          <a:prstGeom prst="rect">
+            <a:avLst/>
+          </a:prstGeom>
+          <a:noFill/>
+          <a:ln/>
+        </p:spPr>
+        <p:txBody>
+          <a:bodyPr wrap="square" lIns="0" tIns="0" rIns="0" bIns="0" rtlCol="0" anchor="t">
+            <a:normAutofit/>
+          </a:bodyPr>
+          <a:lstStyle/>
+          <a:p>
+            <a:pPr indent="0" marL="0">
+              <a:buNone/>
+            </a:pPr>
+            <a:r>
+              <a:rPr lang="en-US" sz="1250" dirty="0">
+                <a:solidFill>
+                  <a:srgbClr val="17364A"/>
+                </a:solidFill>
+                <a:latin typeface="Aptos" pitchFamily="34" charset="0"/>
+                <a:ea typeface="Aptos" pitchFamily="34" charset="-122"/>
+                <a:cs typeface="Aptos" pitchFamily="34" charset="-120"/>
+              </a:rPr>
+              <a:t>Connect the concept to public health decisions, safeguards, documentation, or implementation work.</a:t>
+            </a:r>
+            <a:endParaRPr lang="en-US" sz="1250" dirty="0"/>
           </a:p>
         </p:txBody>
       </p:sp>
@@ -3894,7 +5308,32 @@
       </p:sp>
       <p:sp>
         <p:nvSpPr>
-          <p:cNvPr id="3" name="Text 1"/>
+          <p:cNvPr id="3" name="Shape 1"/>
+          <p:cNvSpPr/>
+          <p:nvPr/>
+        </p:nvSpPr>
+        <p:spPr>
+          <a:xfrm>
+            <a:off x="0" y="164592"/>
+            <a:ext cx="146304" cy="6693408"/>
+          </a:xfrm>
+          <a:prstGeom prst="rect">
+            <a:avLst/>
+          </a:prstGeom>
+          <a:solidFill>
+            <a:srgbClr val="2F8A28"/>
+          </a:solidFill>
+          <a:ln w="12700">
+            <a:solidFill>
+              <a:srgbClr val="2F8A28"/>
+            </a:solidFill>
+            <a:prstDash val="solid"/>
+          </a:ln>
+        </p:spPr>
+      </p:sp>
+      <p:sp>
+        <p:nvSpPr>
+          <p:cNvPr id="4" name="Text 2"/>
           <p:cNvSpPr/>
           <p:nvPr/>
         </p:nvSpPr>
@@ -3933,7 +5372,7 @@
       </p:sp>
       <p:sp>
         <p:nvSpPr>
-          <p:cNvPr id="4" name="Text 2"/>
+          <p:cNvPr id="5" name="Text 3"/>
           <p:cNvSpPr/>
           <p:nvPr/>
         </p:nvSpPr>
@@ -3972,7 +5411,7 @@
       </p:sp>
       <p:sp>
         <p:nvSpPr>
-          <p:cNvPr id="5" name="Text 3"/>
+          <p:cNvPr id="6" name="Text 4"/>
           <p:cNvSpPr/>
           <p:nvPr/>
         </p:nvSpPr>
@@ -4011,13 +5450,77 @@
       </p:sp>
       <p:sp>
         <p:nvSpPr>
-          <p:cNvPr id="6" name="Text 4"/>
+          <p:cNvPr id="7" name="Shape 5"/>
           <p:cNvSpPr/>
           <p:nvPr/>
         </p:nvSpPr>
         <p:spPr>
           <a:xfrm>
             <a:off x="640080" y="658368"/>
+            <a:ext cx="420624" cy="420624"/>
+          </a:xfrm>
+          <a:prstGeom prst="ellipse">
+            <a:avLst/>
+          </a:prstGeom>
+          <a:solidFill>
+            <a:srgbClr val="0068B7"/>
+          </a:solidFill>
+          <a:ln w="12700">
+            <a:solidFill>
+              <a:srgbClr val="0068B7"/>
+            </a:solidFill>
+            <a:prstDash val="solid"/>
+          </a:ln>
+        </p:spPr>
+      </p:sp>
+      <p:sp>
+        <p:nvSpPr>
+          <p:cNvPr id="8" name="Text 6"/>
+          <p:cNvSpPr/>
+          <p:nvPr/>
+        </p:nvSpPr>
+        <p:spPr>
+          <a:xfrm>
+            <a:off x="640080" y="731520"/>
+            <a:ext cx="420624" cy="164592"/>
+          </a:xfrm>
+          <a:prstGeom prst="rect">
+            <a:avLst/>
+          </a:prstGeom>
+          <a:noFill/>
+          <a:ln/>
+        </p:spPr>
+        <p:txBody>
+          <a:bodyPr wrap="square" lIns="0" tIns="0" rIns="0" bIns="0" rtlCol="0" anchor="ctr"/>
+          <a:lstStyle/>
+          <a:p>
+            <a:pPr algn="ctr" indent="0" marL="0">
+              <a:buNone/>
+            </a:pPr>
+            <a:r>
+              <a:rPr lang="en-US" sz="1100" b="1" dirty="0">
+                <a:solidFill>
+                  <a:srgbClr val="FFFFFF"/>
+                </a:solidFill>
+                <a:latin typeface="Aptos" pitchFamily="34" charset="0"/>
+                <a:ea typeface="Aptos" pitchFamily="34" charset="-122"/>
+                <a:cs typeface="Aptos" pitchFamily="34" charset="-120"/>
+              </a:rPr>
+              <a:t>7</a:t>
+            </a:r>
+            <a:endParaRPr lang="en-US" sz="1100" dirty="0"/>
+          </a:p>
+        </p:txBody>
+      </p:sp>
+      <p:sp>
+        <p:nvSpPr>
+          <p:cNvPr id="9" name="Text 7"/>
+          <p:cNvSpPr/>
+          <p:nvPr/>
+        </p:nvSpPr>
+        <p:spPr>
+          <a:xfrm>
+            <a:off x="640080" y="621792"/>
             <a:ext cx="10881360" cy="566928"/>
           </a:xfrm>
           <a:prstGeom prst="rect">
@@ -4044,7 +5547,7 @@
                 <a:ea typeface="Aptos Display" pitchFamily="34" charset="-122"/>
                 <a:cs typeface="Aptos Display" pitchFamily="34" charset="-120"/>
               </a:rPr>
-              <a:t>Reflection Questions Continued</a:t>
+              <a:t>Application to AI-Supported Workflows</a:t>
             </a:r>
             <a:endParaRPr lang="en-US" sz="2700" dirty="0"/>
           </a:p>
@@ -4052,32 +5555,178 @@
       </p:sp>
       <p:sp>
         <p:nvSpPr>
-          <p:cNvPr id="7" name="Text 5"/>
-          <p:cNvSpPr/>
-          <p:nvPr/>
-        </p:nvSpPr>
-        <p:spPr>
-          <a:xfrm>
-            <a:off x="822960" y="1325880"/>
-            <a:ext cx="10378440" cy="4800600"/>
-          </a:xfrm>
-          <a:prstGeom prst="rect">
-            <a:avLst/>
-          </a:prstGeom>
-          <a:noFill/>
-          <a:ln/>
-        </p:spPr>
-        <p:txBody>
-          <a:bodyPr wrap="square" lIns="1016" tIns="1016" rIns="1016" bIns="1016" rtlCol="0" anchor="t">
+          <p:cNvPr id="10" name="Text 8"/>
+          <p:cNvSpPr/>
+          <p:nvPr/>
+        </p:nvSpPr>
+        <p:spPr>
+          <a:xfrm>
+            <a:off x="868680" y="1417320"/>
+            <a:ext cx="6675120" cy="4434840"/>
+          </a:xfrm>
+          <a:prstGeom prst="rect">
+            <a:avLst/>
+          </a:prstGeom>
+          <a:noFill/>
+          <a:ln/>
+        </p:spPr>
+        <p:txBody>
+          <a:bodyPr wrap="square" lIns="635" tIns="635" rIns="635" bIns="635" rtlCol="0" anchor="t">
             <a:normAutofit/>
           </a:bodyPr>
           <a:lstStyle/>
           <a:p>
+            <a:r>
+              <a:rPr lang="en-US" sz="1700" dirty="0">
+                <a:solidFill>
+                  <a:srgbClr val="17364A"/>
+                </a:solidFill>
+                <a:latin typeface="Aptos" pitchFamily="34" charset="0"/>
+                <a:ea typeface="Aptos" pitchFamily="34" charset="-122"/>
+                <a:cs typeface="Aptos" pitchFamily="34" charset="-120"/>
+              </a:rPr>
+              <a:t>RAG supports generative AI by grounding outputs in defined sources.</a:t>
+            </a:r>
+            <a:endParaRPr lang="en-US" sz="1700" dirty="0"/>
+          </a:p>
+          <a:p>
+            <a:r>
+              <a:rPr lang="en-US" sz="1700" dirty="0">
+                <a:solidFill>
+                  <a:srgbClr val="17364A"/>
+                </a:solidFill>
+                <a:latin typeface="Aptos" pitchFamily="34" charset="0"/>
+                <a:ea typeface="Aptos" pitchFamily="34" charset="-122"/>
+                <a:cs typeface="Aptos" pitchFamily="34" charset="-120"/>
+              </a:rPr>
+              <a:t>It may be used in chat assistants, training tools, policy support, emergency operations, procurement review, and program.</a:t>
+            </a:r>
+            <a:endParaRPr lang="en-US" sz="1700" dirty="0"/>
+          </a:p>
+          <a:p>
+            <a:r>
+              <a:rPr lang="en-US" sz="1700" dirty="0">
+                <a:solidFill>
+                  <a:srgbClr val="17364A"/>
+                </a:solidFill>
+                <a:latin typeface="Aptos" pitchFamily="34" charset="0"/>
+                <a:ea typeface="Aptos" pitchFamily="34" charset="-122"/>
+                <a:cs typeface="Aptos" pitchFamily="34" charset="-120"/>
+              </a:rPr>
+              <a:t>It can also support agentic workflows by giving agents access to approved guidance, but actions based on retrieved content.</a:t>
+            </a:r>
+            <a:endParaRPr lang="en-US" sz="1700" dirty="0"/>
+          </a:p>
+          <a:p>
+            <a:r>
+              <a:rPr lang="en-US" sz="1700" dirty="0">
+                <a:solidFill>
+                  <a:srgbClr val="17364A"/>
+                </a:solidFill>
+                <a:latin typeface="Aptos" pitchFamily="34" charset="0"/>
+                <a:ea typeface="Aptos" pitchFamily="34" charset="-122"/>
+                <a:cs typeface="Aptos" pitchFamily="34" charset="-120"/>
+              </a:rPr>
+              <a:t>Public health RAG systems should be built around trust.</a:t>
+            </a:r>
+            <a:endParaRPr lang="en-US" sz="1700" dirty="0"/>
+          </a:p>
+        </p:txBody>
+      </p:sp>
+      <p:sp>
+        <p:nvSpPr>
+          <p:cNvPr id="11" name="Shape 9"/>
+          <p:cNvSpPr/>
+          <p:nvPr/>
+        </p:nvSpPr>
+        <p:spPr>
+          <a:xfrm>
+            <a:off x="7909560" y="1417320"/>
+            <a:ext cx="3154680" cy="1828800"/>
+          </a:xfrm>
+          <a:prstGeom prst="roundRect">
+            <a:avLst>
+              <a:gd name="adj" fmla="val 6000"/>
+            </a:avLst>
+          </a:prstGeom>
+          <a:solidFill>
+            <a:srgbClr val="EEF8ED"/>
+          </a:solidFill>
+          <a:ln w="12700">
+            <a:solidFill>
+              <a:srgbClr val="B9D7E6"/>
+            </a:solidFill>
+            <a:prstDash val="solid"/>
+          </a:ln>
+        </p:spPr>
+      </p:sp>
+      <p:sp>
+        <p:nvSpPr>
+          <p:cNvPr id="12" name="Text 10"/>
+          <p:cNvSpPr/>
+          <p:nvPr/>
+        </p:nvSpPr>
+        <p:spPr>
+          <a:xfrm>
+            <a:off x="8074152" y="1563624"/>
+            <a:ext cx="2825496" cy="201168"/>
+          </a:xfrm>
+          <a:prstGeom prst="rect">
+            <a:avLst/>
+          </a:prstGeom>
+          <a:noFill/>
+          <a:ln/>
+        </p:spPr>
+        <p:txBody>
+          <a:bodyPr wrap="square" lIns="0" tIns="0" rIns="0" bIns="0" rtlCol="0" anchor="ctr"/>
+          <a:lstStyle/>
+          <a:p>
             <a:pPr indent="0" marL="0">
               <a:buNone/>
             </a:pPr>
             <a:r>
-              <a:rPr lang="en-US" sz="1420" dirty="0">
+              <a:rPr lang="en-US" sz="950" b="1" dirty="0">
+                <a:solidFill>
+                  <a:srgbClr val="0068B7"/>
+                </a:solidFill>
+                <a:latin typeface="Aptos" pitchFamily="34" charset="0"/>
+                <a:ea typeface="Aptos" pitchFamily="34" charset="-122"/>
+                <a:cs typeface="Aptos" pitchFamily="34" charset="-120"/>
+              </a:rPr>
+              <a:t>Key idea</a:t>
+            </a:r>
+            <a:endParaRPr lang="en-US" sz="950" dirty="0"/>
+          </a:p>
+        </p:txBody>
+      </p:sp>
+      <p:sp>
+        <p:nvSpPr>
+          <p:cNvPr id="13" name="Text 11"/>
+          <p:cNvSpPr/>
+          <p:nvPr/>
+        </p:nvSpPr>
+        <p:spPr>
+          <a:xfrm>
+            <a:off x="8074152" y="1856232"/>
+            <a:ext cx="2825496" cy="1261872"/>
+          </a:xfrm>
+          <a:prstGeom prst="rect">
+            <a:avLst/>
+          </a:prstGeom>
+          <a:noFill/>
+          <a:ln/>
+        </p:spPr>
+        <p:txBody>
+          <a:bodyPr wrap="square" lIns="0" tIns="0" rIns="0" bIns="0" rtlCol="0" anchor="t">
+            <a:normAutofit/>
+          </a:bodyPr>
+          <a:lstStyle/>
+          <a:p>
+            <a:pPr indent="0" marL="0">
+              <a:buNone/>
+            </a:pPr>
+            <a:r>
+              <a:rPr lang="en-US" sz="1250" dirty="0">
                 <a:solidFill>
                   <a:srgbClr val="17364A"/>
                 </a:solidFill>
@@ -4085,9 +5734,116 @@
                 <a:ea typeface="Aptos" pitchFamily="34" charset="-122"/>
                 <a:cs typeface="Aptos" pitchFamily="34" charset="-120"/>
               </a:rPr>
-              <a:t>How will retrieval quality and citation accuracy be tested? What should the system do when sources are missing, outdated, or conflicting?</a:t>
-            </a:r>
-            <a:endParaRPr lang="en-US" sz="1420" dirty="0"/>
+              <a:t>RAG supports generative AI by grounding outputs in defined sources.</a:t>
+            </a:r>
+            <a:endParaRPr lang="en-US" sz="1250" dirty="0"/>
+          </a:p>
+        </p:txBody>
+      </p:sp>
+      <p:sp>
+        <p:nvSpPr>
+          <p:cNvPr id="14" name="Shape 12"/>
+          <p:cNvSpPr/>
+          <p:nvPr/>
+        </p:nvSpPr>
+        <p:spPr>
+          <a:xfrm>
+            <a:off x="7909560" y="3520440"/>
+            <a:ext cx="3154680" cy="1737360"/>
+          </a:xfrm>
+          <a:prstGeom prst="roundRect">
+            <a:avLst>
+              <a:gd name="adj" fmla="val 6316"/>
+            </a:avLst>
+          </a:prstGeom>
+          <a:solidFill>
+            <a:srgbClr val="EAF6F8"/>
+          </a:solidFill>
+          <a:ln w="12700">
+            <a:solidFill>
+              <a:srgbClr val="B9D7E6"/>
+            </a:solidFill>
+            <a:prstDash val="solid"/>
+          </a:ln>
+        </p:spPr>
+      </p:sp>
+      <p:sp>
+        <p:nvSpPr>
+          <p:cNvPr id="15" name="Text 13"/>
+          <p:cNvSpPr/>
+          <p:nvPr/>
+        </p:nvSpPr>
+        <p:spPr>
+          <a:xfrm>
+            <a:off x="8074152" y="3666744"/>
+            <a:ext cx="2825496" cy="201168"/>
+          </a:xfrm>
+          <a:prstGeom prst="rect">
+            <a:avLst/>
+          </a:prstGeom>
+          <a:noFill/>
+          <a:ln/>
+        </p:spPr>
+        <p:txBody>
+          <a:bodyPr wrap="square" lIns="0" tIns="0" rIns="0" bIns="0" rtlCol="0" anchor="ctr"/>
+          <a:lstStyle/>
+          <a:p>
+            <a:pPr indent="0" marL="0">
+              <a:buNone/>
+            </a:pPr>
+            <a:r>
+              <a:rPr lang="en-US" sz="950" b="1" dirty="0">
+                <a:solidFill>
+                  <a:srgbClr val="0068B7"/>
+                </a:solidFill>
+                <a:latin typeface="Aptos" pitchFamily="34" charset="0"/>
+                <a:ea typeface="Aptos" pitchFamily="34" charset="-122"/>
+                <a:cs typeface="Aptos" pitchFamily="34" charset="-120"/>
+              </a:rPr>
+              <a:t>Use this for</a:t>
+            </a:r>
+            <a:endParaRPr lang="en-US" sz="950" dirty="0"/>
+          </a:p>
+        </p:txBody>
+      </p:sp>
+      <p:sp>
+        <p:nvSpPr>
+          <p:cNvPr id="16" name="Text 14"/>
+          <p:cNvSpPr/>
+          <p:nvPr/>
+        </p:nvSpPr>
+        <p:spPr>
+          <a:xfrm>
+            <a:off x="8074152" y="3959352"/>
+            <a:ext cx="2825496" cy="1170432"/>
+          </a:xfrm>
+          <a:prstGeom prst="rect">
+            <a:avLst/>
+          </a:prstGeom>
+          <a:noFill/>
+          <a:ln/>
+        </p:spPr>
+        <p:txBody>
+          <a:bodyPr wrap="square" lIns="0" tIns="0" rIns="0" bIns="0" rtlCol="0" anchor="t">
+            <a:normAutofit/>
+          </a:bodyPr>
+          <a:lstStyle/>
+          <a:p>
+            <a:pPr indent="0" marL="0">
+              <a:buNone/>
+            </a:pPr>
+            <a:r>
+              <a:rPr lang="en-US" sz="1250" dirty="0">
+                <a:solidFill>
+                  <a:srgbClr val="17364A"/>
+                </a:solidFill>
+                <a:latin typeface="Aptos" pitchFamily="34" charset="0"/>
+                <a:ea typeface="Aptos" pitchFamily="34" charset="-122"/>
+                <a:cs typeface="Aptos" pitchFamily="34" charset="-120"/>
+              </a:rPr>
+              <a:t>Connect the concept to public health decisions, safeguards, documentation, or implementation work.</a:t>
+            </a:r>
+            <a:endParaRPr lang="en-US" sz="1250" dirty="0"/>
           </a:p>
         </p:txBody>
       </p:sp>
@@ -4150,7 +5906,32 @@
       </p:sp>
       <p:sp>
         <p:nvSpPr>
-          <p:cNvPr id="3" name="Text 1"/>
+          <p:cNvPr id="3" name="Shape 1"/>
+          <p:cNvSpPr/>
+          <p:nvPr/>
+        </p:nvSpPr>
+        <p:spPr>
+          <a:xfrm>
+            <a:off x="0" y="164592"/>
+            <a:ext cx="146304" cy="6693408"/>
+          </a:xfrm>
+          <a:prstGeom prst="rect">
+            <a:avLst/>
+          </a:prstGeom>
+          <a:solidFill>
+            <a:srgbClr val="2F8A28"/>
+          </a:solidFill>
+          <a:ln w="12700">
+            <a:solidFill>
+              <a:srgbClr val="2F8A28"/>
+            </a:solidFill>
+            <a:prstDash val="solid"/>
+          </a:ln>
+        </p:spPr>
+      </p:sp>
+      <p:sp>
+        <p:nvSpPr>
+          <p:cNvPr id="4" name="Text 2"/>
           <p:cNvSpPr/>
           <p:nvPr/>
         </p:nvSpPr>
@@ -4189,7 +5970,7 @@
       </p:sp>
       <p:sp>
         <p:nvSpPr>
-          <p:cNvPr id="4" name="Text 2"/>
+          <p:cNvPr id="5" name="Text 3"/>
           <p:cNvSpPr/>
           <p:nvPr/>
         </p:nvSpPr>
@@ -4228,7 +6009,7 @@
       </p:sp>
       <p:sp>
         <p:nvSpPr>
-          <p:cNvPr id="5" name="Text 3"/>
+          <p:cNvPr id="6" name="Text 4"/>
           <p:cNvSpPr/>
           <p:nvPr/>
         </p:nvSpPr>
@@ -4267,13 +6048,77 @@
       </p:sp>
       <p:sp>
         <p:nvSpPr>
-          <p:cNvPr id="6" name="Text 4"/>
+          <p:cNvPr id="7" name="Shape 5"/>
           <p:cNvSpPr/>
           <p:nvPr/>
         </p:nvSpPr>
         <p:spPr>
           <a:xfrm>
             <a:off x="640080" y="658368"/>
+            <a:ext cx="420624" cy="420624"/>
+          </a:xfrm>
+          <a:prstGeom prst="ellipse">
+            <a:avLst/>
+          </a:prstGeom>
+          <a:solidFill>
+            <a:srgbClr val="0068B7"/>
+          </a:solidFill>
+          <a:ln w="12700">
+            <a:solidFill>
+              <a:srgbClr val="0068B7"/>
+            </a:solidFill>
+            <a:prstDash val="solid"/>
+          </a:ln>
+        </p:spPr>
+      </p:sp>
+      <p:sp>
+        <p:nvSpPr>
+          <p:cNvPr id="8" name="Text 6"/>
+          <p:cNvSpPr/>
+          <p:nvPr/>
+        </p:nvSpPr>
+        <p:spPr>
+          <a:xfrm>
+            <a:off x="640080" y="731520"/>
+            <a:ext cx="420624" cy="164592"/>
+          </a:xfrm>
+          <a:prstGeom prst="rect">
+            <a:avLst/>
+          </a:prstGeom>
+          <a:noFill/>
+          <a:ln/>
+        </p:spPr>
+        <p:txBody>
+          <a:bodyPr wrap="square" lIns="0" tIns="0" rIns="0" bIns="0" rtlCol="0" anchor="ctr"/>
+          <a:lstStyle/>
+          <a:p>
+            <a:pPr algn="ctr" indent="0" marL="0">
+              <a:buNone/>
+            </a:pPr>
+            <a:r>
+              <a:rPr lang="en-US" sz="1100" b="1" dirty="0">
+                <a:solidFill>
+                  <a:srgbClr val="FFFFFF"/>
+                </a:solidFill>
+                <a:latin typeface="Aptos" pitchFamily="34" charset="0"/>
+                <a:ea typeface="Aptos" pitchFamily="34" charset="-122"/>
+                <a:cs typeface="Aptos" pitchFamily="34" charset="-120"/>
+              </a:rPr>
+              <a:t>8</a:t>
+            </a:r>
+            <a:endParaRPr lang="en-US" sz="1100" dirty="0"/>
+          </a:p>
+        </p:txBody>
+      </p:sp>
+      <p:sp>
+        <p:nvSpPr>
+          <p:cNvPr id="9" name="Text 7"/>
+          <p:cNvSpPr/>
+          <p:nvPr/>
+        </p:nvSpPr>
+        <p:spPr>
+          <a:xfrm>
+            <a:off x="640080" y="621792"/>
             <a:ext cx="10881360" cy="566928"/>
           </a:xfrm>
           <a:prstGeom prst="rect">
@@ -4300,7 +6145,7 @@
                 <a:ea typeface="Aptos Display" pitchFamily="34" charset="-122"/>
                 <a:cs typeface="Aptos Display" pitchFamily="34" charset="-120"/>
               </a:rPr>
-              <a:t>Practical Exercise</a:t>
+              <a:t>Reflection Questions</a:t>
             </a:r>
             <a:endParaRPr lang="en-US" sz="2700" dirty="0"/>
           </a:p>
@@ -4308,32 +6153,164 @@
       </p:sp>
       <p:sp>
         <p:nvSpPr>
-          <p:cNvPr id="7" name="Text 5"/>
-          <p:cNvSpPr/>
-          <p:nvPr/>
-        </p:nvSpPr>
-        <p:spPr>
-          <a:xfrm>
-            <a:off x="822960" y="1325880"/>
-            <a:ext cx="10378440" cy="4800600"/>
-          </a:xfrm>
-          <a:prstGeom prst="rect">
-            <a:avLst/>
-          </a:prstGeom>
-          <a:noFill/>
-          <a:ln/>
-        </p:spPr>
-        <p:txBody>
-          <a:bodyPr wrap="square" lIns="1016" tIns="1016" rIns="1016" bIns="1016" rtlCol="0" anchor="t">
+          <p:cNvPr id="10" name="Text 8"/>
+          <p:cNvSpPr/>
+          <p:nvPr/>
+        </p:nvSpPr>
+        <p:spPr>
+          <a:xfrm>
+            <a:off x="868680" y="1417320"/>
+            <a:ext cx="6675120" cy="4434840"/>
+          </a:xfrm>
+          <a:prstGeom prst="rect">
+            <a:avLst/>
+          </a:prstGeom>
+          <a:noFill/>
+          <a:ln/>
+        </p:spPr>
+        <p:txBody>
+          <a:bodyPr wrap="square" lIns="635" tIns="635" rIns="635" bIns="635" rtlCol="0" anchor="t">
             <a:normAutofit/>
           </a:bodyPr>
           <a:lstStyle/>
           <a:p>
+            <a:r>
+              <a:rPr lang="en-US" sz="1700" dirty="0">
+                <a:solidFill>
+                  <a:srgbClr val="17364A"/>
+                </a:solidFill>
+                <a:latin typeface="Aptos" pitchFamily="34" charset="0"/>
+                <a:ea typeface="Aptos" pitchFamily="34" charset="-122"/>
+                <a:cs typeface="Aptos" pitchFamily="34" charset="-120"/>
+              </a:rPr>
+              <a:t>What content collection would the RAG system use?</a:t>
+            </a:r>
+            <a:endParaRPr lang="en-US" sz="1700" dirty="0"/>
+          </a:p>
+          <a:p>
+            <a:r>
+              <a:rPr lang="en-US" sz="1700" dirty="0">
+                <a:solidFill>
+                  <a:srgbClr val="17364A"/>
+                </a:solidFill>
+                <a:latin typeface="Aptos" pitchFamily="34" charset="0"/>
+                <a:ea typeface="Aptos" pitchFamily="34" charset="-122"/>
+                <a:cs typeface="Aptos" pitchFamily="34" charset="-120"/>
+              </a:rPr>
+              <a:t>Who owns and updates each source document?</a:t>
+            </a:r>
+            <a:endParaRPr lang="en-US" sz="1700" dirty="0"/>
+          </a:p>
+          <a:p>
+            <a:r>
+              <a:rPr lang="en-US" sz="1700" dirty="0">
+                <a:solidFill>
+                  <a:srgbClr val="17364A"/>
+                </a:solidFill>
+                <a:latin typeface="Aptos" pitchFamily="34" charset="0"/>
+                <a:ea typeface="Aptos" pitchFamily="34" charset="-122"/>
+                <a:cs typeface="Aptos" pitchFamily="34" charset="-120"/>
+              </a:rPr>
+              <a:t>How will access permissions be enforced?</a:t>
+            </a:r>
+            <a:endParaRPr lang="en-US" sz="1700" dirty="0"/>
+          </a:p>
+        </p:txBody>
+      </p:sp>
+      <p:sp>
+        <p:nvSpPr>
+          <p:cNvPr id="11" name="Shape 9"/>
+          <p:cNvSpPr/>
+          <p:nvPr/>
+        </p:nvSpPr>
+        <p:spPr>
+          <a:xfrm>
+            <a:off x="7909560" y="1417320"/>
+            <a:ext cx="3154680" cy="1828800"/>
+          </a:xfrm>
+          <a:prstGeom prst="roundRect">
+            <a:avLst>
+              <a:gd name="adj" fmla="val 6000"/>
+            </a:avLst>
+          </a:prstGeom>
+          <a:solidFill>
+            <a:srgbClr val="EEF8ED"/>
+          </a:solidFill>
+          <a:ln w="12700">
+            <a:solidFill>
+              <a:srgbClr val="B9D7E6"/>
+            </a:solidFill>
+            <a:prstDash val="solid"/>
+          </a:ln>
+        </p:spPr>
+      </p:sp>
+      <p:sp>
+        <p:nvSpPr>
+          <p:cNvPr id="12" name="Text 10"/>
+          <p:cNvSpPr/>
+          <p:nvPr/>
+        </p:nvSpPr>
+        <p:spPr>
+          <a:xfrm>
+            <a:off x="8074152" y="1563624"/>
+            <a:ext cx="2825496" cy="201168"/>
+          </a:xfrm>
+          <a:prstGeom prst="rect">
+            <a:avLst/>
+          </a:prstGeom>
+          <a:noFill/>
+          <a:ln/>
+        </p:spPr>
+        <p:txBody>
+          <a:bodyPr wrap="square" lIns="0" tIns="0" rIns="0" bIns="0" rtlCol="0" anchor="ctr"/>
+          <a:lstStyle/>
+          <a:p>
             <a:pPr indent="0" marL="0">
               <a:buNone/>
             </a:pPr>
             <a:r>
-              <a:rPr lang="en-US" sz="1420" dirty="0">
+              <a:rPr lang="en-US" sz="950" b="1" dirty="0">
+                <a:solidFill>
+                  <a:srgbClr val="0068B7"/>
+                </a:solidFill>
+                <a:latin typeface="Aptos" pitchFamily="34" charset="0"/>
+                <a:ea typeface="Aptos" pitchFamily="34" charset="-122"/>
+                <a:cs typeface="Aptos" pitchFamily="34" charset="-120"/>
+              </a:rPr>
+              <a:t>Key idea</a:t>
+            </a:r>
+            <a:endParaRPr lang="en-US" sz="950" dirty="0"/>
+          </a:p>
+        </p:txBody>
+      </p:sp>
+      <p:sp>
+        <p:nvSpPr>
+          <p:cNvPr id="13" name="Text 11"/>
+          <p:cNvSpPr/>
+          <p:nvPr/>
+        </p:nvSpPr>
+        <p:spPr>
+          <a:xfrm>
+            <a:off x="8074152" y="1856232"/>
+            <a:ext cx="2825496" cy="1261872"/>
+          </a:xfrm>
+          <a:prstGeom prst="rect">
+            <a:avLst/>
+          </a:prstGeom>
+          <a:noFill/>
+          <a:ln/>
+        </p:spPr>
+        <p:txBody>
+          <a:bodyPr wrap="square" lIns="0" tIns="0" rIns="0" bIns="0" rtlCol="0" anchor="t">
+            <a:normAutofit/>
+          </a:bodyPr>
+          <a:lstStyle/>
+          <a:p>
+            <a:pPr indent="0" marL="0">
+              <a:buNone/>
+            </a:pPr>
+            <a:r>
+              <a:rPr lang="en-US" sz="1250" dirty="0">
                 <a:solidFill>
                   <a:srgbClr val="17364A"/>
                 </a:solidFill>
@@ -4341,9 +6318,116 @@
                 <a:ea typeface="Aptos" pitchFamily="34" charset="-122"/>
                 <a:cs typeface="Aptos" pitchFamily="34" charset="-120"/>
               </a:rPr>
-              <a:t>Create a RAG readiness checklist for one public health knowledge workflow. Include content inventory, source authority, document owners, update schedule, sensitivity level, access controls, chunking concerns, retrieval test questions, citation requirements, user review expectations, and monitoring indicators. The checklist should identify at least three “do not answer” or escalation situations, such as missing guidance, conflicting sources, or questions outside approved scope.</a:t>
-            </a:r>
-            <a:endParaRPr lang="en-US" sz="1420" dirty="0"/>
+              <a:t>What content collection would the RAG system use?</a:t>
+            </a:r>
+            <a:endParaRPr lang="en-US" sz="1250" dirty="0"/>
+          </a:p>
+        </p:txBody>
+      </p:sp>
+      <p:sp>
+        <p:nvSpPr>
+          <p:cNvPr id="14" name="Shape 12"/>
+          <p:cNvSpPr/>
+          <p:nvPr/>
+        </p:nvSpPr>
+        <p:spPr>
+          <a:xfrm>
+            <a:off x="7909560" y="3520440"/>
+            <a:ext cx="3154680" cy="1737360"/>
+          </a:xfrm>
+          <a:prstGeom prst="roundRect">
+            <a:avLst>
+              <a:gd name="adj" fmla="val 6316"/>
+            </a:avLst>
+          </a:prstGeom>
+          <a:solidFill>
+            <a:srgbClr val="EAF6F8"/>
+          </a:solidFill>
+          <a:ln w="12700">
+            <a:solidFill>
+              <a:srgbClr val="B9D7E6"/>
+            </a:solidFill>
+            <a:prstDash val="solid"/>
+          </a:ln>
+        </p:spPr>
+      </p:sp>
+      <p:sp>
+        <p:nvSpPr>
+          <p:cNvPr id="15" name="Text 13"/>
+          <p:cNvSpPr/>
+          <p:nvPr/>
+        </p:nvSpPr>
+        <p:spPr>
+          <a:xfrm>
+            <a:off x="8074152" y="3666744"/>
+            <a:ext cx="2825496" cy="201168"/>
+          </a:xfrm>
+          <a:prstGeom prst="rect">
+            <a:avLst/>
+          </a:prstGeom>
+          <a:noFill/>
+          <a:ln/>
+        </p:spPr>
+        <p:txBody>
+          <a:bodyPr wrap="square" lIns="0" tIns="0" rIns="0" bIns="0" rtlCol="0" anchor="ctr"/>
+          <a:lstStyle/>
+          <a:p>
+            <a:pPr indent="0" marL="0">
+              <a:buNone/>
+            </a:pPr>
+            <a:r>
+              <a:rPr lang="en-US" sz="950" b="1" dirty="0">
+                <a:solidFill>
+                  <a:srgbClr val="0068B7"/>
+                </a:solidFill>
+                <a:latin typeface="Aptos" pitchFamily="34" charset="0"/>
+                <a:ea typeface="Aptos" pitchFamily="34" charset="-122"/>
+                <a:cs typeface="Aptos" pitchFamily="34" charset="-120"/>
+              </a:rPr>
+              <a:t>Use this for</a:t>
+            </a:r>
+            <a:endParaRPr lang="en-US" sz="950" dirty="0"/>
+          </a:p>
+        </p:txBody>
+      </p:sp>
+      <p:sp>
+        <p:nvSpPr>
+          <p:cNvPr id="16" name="Text 14"/>
+          <p:cNvSpPr/>
+          <p:nvPr/>
+        </p:nvSpPr>
+        <p:spPr>
+          <a:xfrm>
+            <a:off x="8074152" y="3959352"/>
+            <a:ext cx="2825496" cy="1170432"/>
+          </a:xfrm>
+          <a:prstGeom prst="rect">
+            <a:avLst/>
+          </a:prstGeom>
+          <a:noFill/>
+          <a:ln/>
+        </p:spPr>
+        <p:txBody>
+          <a:bodyPr wrap="square" lIns="0" tIns="0" rIns="0" bIns="0" rtlCol="0" anchor="t">
+            <a:normAutofit/>
+          </a:bodyPr>
+          <a:lstStyle/>
+          <a:p>
+            <a:pPr indent="0" marL="0">
+              <a:buNone/>
+            </a:pPr>
+            <a:r>
+              <a:rPr lang="en-US" sz="1250" dirty="0">
+                <a:solidFill>
+                  <a:srgbClr val="17364A"/>
+                </a:solidFill>
+                <a:latin typeface="Aptos" pitchFamily="34" charset="0"/>
+                <a:ea typeface="Aptos" pitchFamily="34" charset="-122"/>
+                <a:cs typeface="Aptos" pitchFamily="34" charset="-120"/>
+              </a:rPr>
+              <a:t>Connect the concept to public health decisions, safeguards, documentation, or implementation work.</a:t>
+            </a:r>
+            <a:endParaRPr lang="en-US" sz="1250" dirty="0"/>
           </a:p>
         </p:txBody>
       </p:sp>
@@ -4406,7 +6490,32 @@
       </p:sp>
       <p:sp>
         <p:nvSpPr>
-          <p:cNvPr id="3" name="Text 1"/>
+          <p:cNvPr id="3" name="Shape 1"/>
+          <p:cNvSpPr/>
+          <p:nvPr/>
+        </p:nvSpPr>
+        <p:spPr>
+          <a:xfrm>
+            <a:off x="0" y="164592"/>
+            <a:ext cx="146304" cy="6693408"/>
+          </a:xfrm>
+          <a:prstGeom prst="rect">
+            <a:avLst/>
+          </a:prstGeom>
+          <a:solidFill>
+            <a:srgbClr val="2F8A28"/>
+          </a:solidFill>
+          <a:ln w="12700">
+            <a:solidFill>
+              <a:srgbClr val="2F8A28"/>
+            </a:solidFill>
+            <a:prstDash val="solid"/>
+          </a:ln>
+        </p:spPr>
+      </p:sp>
+      <p:sp>
+        <p:nvSpPr>
+          <p:cNvPr id="4" name="Text 2"/>
           <p:cNvSpPr/>
           <p:nvPr/>
         </p:nvSpPr>
@@ -4445,7 +6554,7 @@
       </p:sp>
       <p:sp>
         <p:nvSpPr>
-          <p:cNvPr id="4" name="Text 2"/>
+          <p:cNvPr id="5" name="Text 3"/>
           <p:cNvSpPr/>
           <p:nvPr/>
         </p:nvSpPr>
@@ -4484,7 +6593,7 @@
       </p:sp>
       <p:sp>
         <p:nvSpPr>
-          <p:cNvPr id="5" name="Text 3"/>
+          <p:cNvPr id="6" name="Text 4"/>
           <p:cNvSpPr/>
           <p:nvPr/>
         </p:nvSpPr>
@@ -4523,7 +6632,7 @@
       </p:sp>
       <p:sp>
         <p:nvSpPr>
-          <p:cNvPr id="6" name="Text 4"/>
+          <p:cNvPr id="7" name="Text 5"/>
           <p:cNvSpPr/>
           <p:nvPr/>
         </p:nvSpPr>
@@ -4556,7 +6665,7 @@
                 <a:ea typeface="Aptos Display" pitchFamily="34" charset="-122"/>
                 <a:cs typeface="Aptos Display" pitchFamily="34" charset="-120"/>
               </a:rPr>
-              <a:t>Expected Artifact or Evidence</a:t>
+              <a:t>Reflection Questions Continued</a:t>
             </a:r>
             <a:endParaRPr lang="en-US" sz="2700" dirty="0"/>
           </a:p>
@@ -4564,32 +6673,150 @@
       </p:sp>
       <p:sp>
         <p:nvSpPr>
-          <p:cNvPr id="7" name="Text 5"/>
-          <p:cNvSpPr/>
-          <p:nvPr/>
-        </p:nvSpPr>
-        <p:spPr>
-          <a:xfrm>
-            <a:off x="822960" y="1325880"/>
-            <a:ext cx="10378440" cy="4800600"/>
-          </a:xfrm>
-          <a:prstGeom prst="rect">
-            <a:avLst/>
-          </a:prstGeom>
-          <a:noFill/>
-          <a:ln/>
-        </p:spPr>
-        <p:txBody>
-          <a:bodyPr wrap="square" lIns="1016" tIns="1016" rIns="1016" bIns="1016" rtlCol="0" anchor="t">
+          <p:cNvPr id="8" name="Text 6"/>
+          <p:cNvSpPr/>
+          <p:nvPr/>
+        </p:nvSpPr>
+        <p:spPr>
+          <a:xfrm>
+            <a:off x="868680" y="1417320"/>
+            <a:ext cx="6675120" cy="4434840"/>
+          </a:xfrm>
+          <a:prstGeom prst="rect">
+            <a:avLst/>
+          </a:prstGeom>
+          <a:noFill/>
+          <a:ln/>
+        </p:spPr>
+        <p:txBody>
+          <a:bodyPr wrap="square" lIns="635" tIns="635" rIns="635" bIns="635" rtlCol="0" anchor="t">
             <a:normAutofit/>
           </a:bodyPr>
           <a:lstStyle/>
           <a:p>
+            <a:r>
+              <a:rPr lang="en-US" sz="1700" dirty="0">
+                <a:solidFill>
+                  <a:srgbClr val="17364A"/>
+                </a:solidFill>
+                <a:latin typeface="Aptos" pitchFamily="34" charset="0"/>
+                <a:ea typeface="Aptos" pitchFamily="34" charset="-122"/>
+                <a:cs typeface="Aptos" pitchFamily="34" charset="-120"/>
+              </a:rPr>
+              <a:t>How will retrieval quality and citation accuracy be tested?</a:t>
+            </a:r>
+            <a:endParaRPr lang="en-US" sz="1700" dirty="0"/>
+          </a:p>
+          <a:p>
+            <a:r>
+              <a:rPr lang="en-US" sz="1700" dirty="0">
+                <a:solidFill>
+                  <a:srgbClr val="17364A"/>
+                </a:solidFill>
+                <a:latin typeface="Aptos" pitchFamily="34" charset="0"/>
+                <a:ea typeface="Aptos" pitchFamily="34" charset="-122"/>
+                <a:cs typeface="Aptos" pitchFamily="34" charset="-120"/>
+              </a:rPr>
+              <a:t>What should the system do when sources are missing, outdated, or conflicting?</a:t>
+            </a:r>
+            <a:endParaRPr lang="en-US" sz="1700" dirty="0"/>
+          </a:p>
+        </p:txBody>
+      </p:sp>
+      <p:sp>
+        <p:nvSpPr>
+          <p:cNvPr id="9" name="Shape 7"/>
+          <p:cNvSpPr/>
+          <p:nvPr/>
+        </p:nvSpPr>
+        <p:spPr>
+          <a:xfrm>
+            <a:off x="7909560" y="1417320"/>
+            <a:ext cx="3154680" cy="1828800"/>
+          </a:xfrm>
+          <a:prstGeom prst="roundRect">
+            <a:avLst>
+              <a:gd name="adj" fmla="val 6000"/>
+            </a:avLst>
+          </a:prstGeom>
+          <a:solidFill>
+            <a:srgbClr val="EEF8ED"/>
+          </a:solidFill>
+          <a:ln w="12700">
+            <a:solidFill>
+              <a:srgbClr val="B9D7E6"/>
+            </a:solidFill>
+            <a:prstDash val="solid"/>
+          </a:ln>
+        </p:spPr>
+      </p:sp>
+      <p:sp>
+        <p:nvSpPr>
+          <p:cNvPr id="10" name="Text 8"/>
+          <p:cNvSpPr/>
+          <p:nvPr/>
+        </p:nvSpPr>
+        <p:spPr>
+          <a:xfrm>
+            <a:off x="8074152" y="1563624"/>
+            <a:ext cx="2825496" cy="201168"/>
+          </a:xfrm>
+          <a:prstGeom prst="rect">
+            <a:avLst/>
+          </a:prstGeom>
+          <a:noFill/>
+          <a:ln/>
+        </p:spPr>
+        <p:txBody>
+          <a:bodyPr wrap="square" lIns="0" tIns="0" rIns="0" bIns="0" rtlCol="0" anchor="ctr"/>
+          <a:lstStyle/>
+          <a:p>
             <a:pPr indent="0" marL="0">
               <a:buNone/>
             </a:pPr>
             <a:r>
-              <a:rPr lang="en-US" sz="1420" dirty="0">
+              <a:rPr lang="en-US" sz="950" b="1" dirty="0">
+                <a:solidFill>
+                  <a:srgbClr val="0068B7"/>
+                </a:solidFill>
+                <a:latin typeface="Aptos" pitchFamily="34" charset="0"/>
+                <a:ea typeface="Aptos" pitchFamily="34" charset="-122"/>
+                <a:cs typeface="Aptos" pitchFamily="34" charset="-120"/>
+              </a:rPr>
+              <a:t>Key idea</a:t>
+            </a:r>
+            <a:endParaRPr lang="en-US" sz="950" dirty="0"/>
+          </a:p>
+        </p:txBody>
+      </p:sp>
+      <p:sp>
+        <p:nvSpPr>
+          <p:cNvPr id="11" name="Text 9"/>
+          <p:cNvSpPr/>
+          <p:nvPr/>
+        </p:nvSpPr>
+        <p:spPr>
+          <a:xfrm>
+            <a:off x="8074152" y="1856232"/>
+            <a:ext cx="2825496" cy="1261872"/>
+          </a:xfrm>
+          <a:prstGeom prst="rect">
+            <a:avLst/>
+          </a:prstGeom>
+          <a:noFill/>
+          <a:ln/>
+        </p:spPr>
+        <p:txBody>
+          <a:bodyPr wrap="square" lIns="0" tIns="0" rIns="0" bIns="0" rtlCol="0" anchor="t">
+            <a:normAutofit/>
+          </a:bodyPr>
+          <a:lstStyle/>
+          <a:p>
+            <a:pPr indent="0" marL="0">
+              <a:buNone/>
+            </a:pPr>
+            <a:r>
+              <a:rPr lang="en-US" sz="1250" dirty="0">
                 <a:solidFill>
                   <a:srgbClr val="17364A"/>
                 </a:solidFill>
@@ -4597,9 +6824,116 @@
                 <a:ea typeface="Aptos" pitchFamily="34" charset="-122"/>
                 <a:cs typeface="Aptos" pitchFamily="34" charset="-120"/>
               </a:rPr>
-              <a:t>RAG readiness checklist Content inventory and ownership table Retrieval test question set</a:t>
-            </a:r>
-            <a:endParaRPr lang="en-US" sz="1420" dirty="0"/>
+              <a:t>How will retrieval quality and citation accuracy be tested?</a:t>
+            </a:r>
+            <a:endParaRPr lang="en-US" sz="1250" dirty="0"/>
+          </a:p>
+        </p:txBody>
+      </p:sp>
+      <p:sp>
+        <p:nvSpPr>
+          <p:cNvPr id="12" name="Shape 10"/>
+          <p:cNvSpPr/>
+          <p:nvPr/>
+        </p:nvSpPr>
+        <p:spPr>
+          <a:xfrm>
+            <a:off x="7909560" y="3520440"/>
+            <a:ext cx="3154680" cy="1737360"/>
+          </a:xfrm>
+          <a:prstGeom prst="roundRect">
+            <a:avLst>
+              <a:gd name="adj" fmla="val 6316"/>
+            </a:avLst>
+          </a:prstGeom>
+          <a:solidFill>
+            <a:srgbClr val="EAF6F8"/>
+          </a:solidFill>
+          <a:ln w="12700">
+            <a:solidFill>
+              <a:srgbClr val="B9D7E6"/>
+            </a:solidFill>
+            <a:prstDash val="solid"/>
+          </a:ln>
+        </p:spPr>
+      </p:sp>
+      <p:sp>
+        <p:nvSpPr>
+          <p:cNvPr id="13" name="Text 11"/>
+          <p:cNvSpPr/>
+          <p:nvPr/>
+        </p:nvSpPr>
+        <p:spPr>
+          <a:xfrm>
+            <a:off x="8074152" y="3666744"/>
+            <a:ext cx="2825496" cy="201168"/>
+          </a:xfrm>
+          <a:prstGeom prst="rect">
+            <a:avLst/>
+          </a:prstGeom>
+          <a:noFill/>
+          <a:ln/>
+        </p:spPr>
+        <p:txBody>
+          <a:bodyPr wrap="square" lIns="0" tIns="0" rIns="0" bIns="0" rtlCol="0" anchor="ctr"/>
+          <a:lstStyle/>
+          <a:p>
+            <a:pPr indent="0" marL="0">
+              <a:buNone/>
+            </a:pPr>
+            <a:r>
+              <a:rPr lang="en-US" sz="950" b="1" dirty="0">
+                <a:solidFill>
+                  <a:srgbClr val="0068B7"/>
+                </a:solidFill>
+                <a:latin typeface="Aptos" pitchFamily="34" charset="0"/>
+                <a:ea typeface="Aptos" pitchFamily="34" charset="-122"/>
+                <a:cs typeface="Aptos" pitchFamily="34" charset="-120"/>
+              </a:rPr>
+              <a:t>Use this for</a:t>
+            </a:r>
+            <a:endParaRPr lang="en-US" sz="950" dirty="0"/>
+          </a:p>
+        </p:txBody>
+      </p:sp>
+      <p:sp>
+        <p:nvSpPr>
+          <p:cNvPr id="14" name="Text 12"/>
+          <p:cNvSpPr/>
+          <p:nvPr/>
+        </p:nvSpPr>
+        <p:spPr>
+          <a:xfrm>
+            <a:off x="8074152" y="3959352"/>
+            <a:ext cx="2825496" cy="1170432"/>
+          </a:xfrm>
+          <a:prstGeom prst="rect">
+            <a:avLst/>
+          </a:prstGeom>
+          <a:noFill/>
+          <a:ln/>
+        </p:spPr>
+        <p:txBody>
+          <a:bodyPr wrap="square" lIns="0" tIns="0" rIns="0" bIns="0" rtlCol="0" anchor="t">
+            <a:normAutofit/>
+          </a:bodyPr>
+          <a:lstStyle/>
+          <a:p>
+            <a:pPr indent="0" marL="0">
+              <a:buNone/>
+            </a:pPr>
+            <a:r>
+              <a:rPr lang="en-US" sz="1250" dirty="0">
+                <a:solidFill>
+                  <a:srgbClr val="17364A"/>
+                </a:solidFill>
+                <a:latin typeface="Aptos" pitchFamily="34" charset="0"/>
+                <a:ea typeface="Aptos" pitchFamily="34" charset="-122"/>
+                <a:cs typeface="Aptos" pitchFamily="34" charset="-120"/>
+              </a:rPr>
+              <a:t>Connect the concept to public health decisions, safeguards, documentation, or implementation work.</a:t>
+            </a:r>
+            <a:endParaRPr lang="en-US" sz="1250" dirty="0"/>
           </a:p>
         </p:txBody>
       </p:sp>
@@ -4662,7 +6996,32 @@
       </p:sp>
       <p:sp>
         <p:nvSpPr>
-          <p:cNvPr id="3" name="Text 1"/>
+          <p:cNvPr id="3" name="Shape 1"/>
+          <p:cNvSpPr/>
+          <p:nvPr/>
+        </p:nvSpPr>
+        <p:spPr>
+          <a:xfrm>
+            <a:off x="0" y="164592"/>
+            <a:ext cx="146304" cy="6693408"/>
+          </a:xfrm>
+          <a:prstGeom prst="rect">
+            <a:avLst/>
+          </a:prstGeom>
+          <a:solidFill>
+            <a:srgbClr val="2F8A28"/>
+          </a:solidFill>
+          <a:ln w="12700">
+            <a:solidFill>
+              <a:srgbClr val="2F8A28"/>
+            </a:solidFill>
+            <a:prstDash val="solid"/>
+          </a:ln>
+        </p:spPr>
+      </p:sp>
+      <p:sp>
+        <p:nvSpPr>
+          <p:cNvPr id="4" name="Text 2"/>
           <p:cNvSpPr/>
           <p:nvPr/>
         </p:nvSpPr>
@@ -4701,7 +7060,7 @@
       </p:sp>
       <p:sp>
         <p:nvSpPr>
-          <p:cNvPr id="4" name="Text 2"/>
+          <p:cNvPr id="5" name="Text 3"/>
           <p:cNvSpPr/>
           <p:nvPr/>
         </p:nvSpPr>
@@ -4740,7 +7099,7 @@
       </p:sp>
       <p:sp>
         <p:nvSpPr>
-          <p:cNvPr id="5" name="Text 3"/>
+          <p:cNvPr id="6" name="Text 4"/>
           <p:cNvSpPr/>
           <p:nvPr/>
         </p:nvSpPr>
@@ -4779,13 +7138,77 @@
       </p:sp>
       <p:sp>
         <p:nvSpPr>
-          <p:cNvPr id="6" name="Text 4"/>
+          <p:cNvPr id="7" name="Shape 5"/>
           <p:cNvSpPr/>
           <p:nvPr/>
         </p:nvSpPr>
         <p:spPr>
           <a:xfrm>
             <a:off x="640080" y="658368"/>
+            <a:ext cx="420624" cy="420624"/>
+          </a:xfrm>
+          <a:prstGeom prst="ellipse">
+            <a:avLst/>
+          </a:prstGeom>
+          <a:solidFill>
+            <a:srgbClr val="0068B7"/>
+          </a:solidFill>
+          <a:ln w="12700">
+            <a:solidFill>
+              <a:srgbClr val="0068B7"/>
+            </a:solidFill>
+            <a:prstDash val="solid"/>
+          </a:ln>
+        </p:spPr>
+      </p:sp>
+      <p:sp>
+        <p:nvSpPr>
+          <p:cNvPr id="8" name="Text 6"/>
+          <p:cNvSpPr/>
+          <p:nvPr/>
+        </p:nvSpPr>
+        <p:spPr>
+          <a:xfrm>
+            <a:off x="640080" y="731520"/>
+            <a:ext cx="420624" cy="164592"/>
+          </a:xfrm>
+          <a:prstGeom prst="rect">
+            <a:avLst/>
+          </a:prstGeom>
+          <a:noFill/>
+          <a:ln/>
+        </p:spPr>
+        <p:txBody>
+          <a:bodyPr wrap="square" lIns="0" tIns="0" rIns="0" bIns="0" rtlCol="0" anchor="ctr"/>
+          <a:lstStyle/>
+          <a:p>
+            <a:pPr algn="ctr" indent="0" marL="0">
+              <a:buNone/>
+            </a:pPr>
+            <a:r>
+              <a:rPr lang="en-US" sz="1100" b="1" dirty="0">
+                <a:solidFill>
+                  <a:srgbClr val="FFFFFF"/>
+                </a:solidFill>
+                <a:latin typeface="Aptos" pitchFamily="34" charset="0"/>
+                <a:ea typeface="Aptos" pitchFamily="34" charset="-122"/>
+                <a:cs typeface="Aptos" pitchFamily="34" charset="-120"/>
+              </a:rPr>
+              <a:t>9</a:t>
+            </a:r>
+            <a:endParaRPr lang="en-US" sz="1100" dirty="0"/>
+          </a:p>
+        </p:txBody>
+      </p:sp>
+      <p:sp>
+        <p:nvSpPr>
+          <p:cNvPr id="9" name="Text 7"/>
+          <p:cNvSpPr/>
+          <p:nvPr/>
+        </p:nvSpPr>
+        <p:spPr>
+          <a:xfrm>
+            <a:off x="640080" y="621792"/>
             <a:ext cx="10881360" cy="566928"/>
           </a:xfrm>
           <a:prstGeom prst="rect">
@@ -4812,7 +7235,7 @@
                 <a:ea typeface="Aptos Display" pitchFamily="34" charset="-122"/>
                 <a:cs typeface="Aptos Display" pitchFamily="34" charset="-120"/>
               </a:rPr>
-              <a:t>Expected Artifact or Evidence Continued</a:t>
+              <a:t>Practical Exercise</a:t>
             </a:r>
             <a:endParaRPr lang="en-US" sz="2700" dirty="0"/>
           </a:p>
@@ -4820,32 +7243,164 @@
       </p:sp>
       <p:sp>
         <p:nvSpPr>
-          <p:cNvPr id="7" name="Text 5"/>
-          <p:cNvSpPr/>
-          <p:nvPr/>
-        </p:nvSpPr>
-        <p:spPr>
-          <a:xfrm>
-            <a:off x="822960" y="1325880"/>
-            <a:ext cx="10378440" cy="4800600"/>
-          </a:xfrm>
-          <a:prstGeom prst="rect">
-            <a:avLst/>
-          </a:prstGeom>
-          <a:noFill/>
-          <a:ln/>
-        </p:spPr>
-        <p:txBody>
-          <a:bodyPr wrap="square" lIns="1016" tIns="1016" rIns="1016" bIns="1016" rtlCol="0" anchor="t">
+          <p:cNvPr id="10" name="Text 8"/>
+          <p:cNvSpPr/>
+          <p:nvPr/>
+        </p:nvSpPr>
+        <p:spPr>
+          <a:xfrm>
+            <a:off x="868680" y="1417320"/>
+            <a:ext cx="6675120" cy="4434840"/>
+          </a:xfrm>
+          <a:prstGeom prst="rect">
+            <a:avLst/>
+          </a:prstGeom>
+          <a:noFill/>
+          <a:ln/>
+        </p:spPr>
+        <p:txBody>
+          <a:bodyPr wrap="square" lIns="635" tIns="635" rIns="635" bIns="635" rtlCol="0" anchor="t">
             <a:normAutofit/>
           </a:bodyPr>
           <a:lstStyle/>
           <a:p>
+            <a:r>
+              <a:rPr lang="en-US" sz="1700" dirty="0">
+                <a:solidFill>
+                  <a:srgbClr val="17364A"/>
+                </a:solidFill>
+                <a:latin typeface="Aptos" pitchFamily="34" charset="0"/>
+                <a:ea typeface="Aptos" pitchFamily="34" charset="-122"/>
+                <a:cs typeface="Aptos" pitchFamily="34" charset="-120"/>
+              </a:rPr>
+              <a:t>Create a RAG readiness checklist for one public health knowledge workflow.</a:t>
+            </a:r>
+            <a:endParaRPr lang="en-US" sz="1700" dirty="0"/>
+          </a:p>
+          <a:p>
+            <a:r>
+              <a:rPr lang="en-US" sz="1700" dirty="0">
+                <a:solidFill>
+                  <a:srgbClr val="17364A"/>
+                </a:solidFill>
+                <a:latin typeface="Aptos" pitchFamily="34" charset="0"/>
+                <a:ea typeface="Aptos" pitchFamily="34" charset="-122"/>
+                <a:cs typeface="Aptos" pitchFamily="34" charset="-120"/>
+              </a:rPr>
+              <a:t>Include content inventory, source authority, document owners, update schedule, sensitivity level, access controls, chunking.</a:t>
+            </a:r>
+            <a:endParaRPr lang="en-US" sz="1700" dirty="0"/>
+          </a:p>
+          <a:p>
+            <a:r>
+              <a:rPr lang="en-US" sz="1700" dirty="0">
+                <a:solidFill>
+                  <a:srgbClr val="17364A"/>
+                </a:solidFill>
+                <a:latin typeface="Aptos" pitchFamily="34" charset="0"/>
+                <a:ea typeface="Aptos" pitchFamily="34" charset="-122"/>
+                <a:cs typeface="Aptos" pitchFamily="34" charset="-120"/>
+              </a:rPr>
+              <a:t>The checklist should identify at least three “do not answer” or escalation situations, such as missing guidance,.</a:t>
+            </a:r>
+            <a:endParaRPr lang="en-US" sz="1700" dirty="0"/>
+          </a:p>
+        </p:txBody>
+      </p:sp>
+      <p:sp>
+        <p:nvSpPr>
+          <p:cNvPr id="11" name="Shape 9"/>
+          <p:cNvSpPr/>
+          <p:nvPr/>
+        </p:nvSpPr>
+        <p:spPr>
+          <a:xfrm>
+            <a:off x="7909560" y="1417320"/>
+            <a:ext cx="3154680" cy="1828800"/>
+          </a:xfrm>
+          <a:prstGeom prst="roundRect">
+            <a:avLst>
+              <a:gd name="adj" fmla="val 6000"/>
+            </a:avLst>
+          </a:prstGeom>
+          <a:solidFill>
+            <a:srgbClr val="EEF8ED"/>
+          </a:solidFill>
+          <a:ln w="12700">
+            <a:solidFill>
+              <a:srgbClr val="B9D7E6"/>
+            </a:solidFill>
+            <a:prstDash val="solid"/>
+          </a:ln>
+        </p:spPr>
+      </p:sp>
+      <p:sp>
+        <p:nvSpPr>
+          <p:cNvPr id="12" name="Text 10"/>
+          <p:cNvSpPr/>
+          <p:nvPr/>
+        </p:nvSpPr>
+        <p:spPr>
+          <a:xfrm>
+            <a:off x="8074152" y="1563624"/>
+            <a:ext cx="2825496" cy="201168"/>
+          </a:xfrm>
+          <a:prstGeom prst="rect">
+            <a:avLst/>
+          </a:prstGeom>
+          <a:noFill/>
+          <a:ln/>
+        </p:spPr>
+        <p:txBody>
+          <a:bodyPr wrap="square" lIns="0" tIns="0" rIns="0" bIns="0" rtlCol="0" anchor="ctr"/>
+          <a:lstStyle/>
+          <a:p>
             <a:pPr indent="0" marL="0">
               <a:buNone/>
             </a:pPr>
             <a:r>
-              <a:rPr lang="en-US" sz="1420" dirty="0">
+              <a:rPr lang="en-US" sz="950" b="1" dirty="0">
+                <a:solidFill>
+                  <a:srgbClr val="0068B7"/>
+                </a:solidFill>
+                <a:latin typeface="Aptos" pitchFamily="34" charset="0"/>
+                <a:ea typeface="Aptos" pitchFamily="34" charset="-122"/>
+                <a:cs typeface="Aptos" pitchFamily="34" charset="-120"/>
+              </a:rPr>
+              <a:t>Key idea</a:t>
+            </a:r>
+            <a:endParaRPr lang="en-US" sz="950" dirty="0"/>
+          </a:p>
+        </p:txBody>
+      </p:sp>
+      <p:sp>
+        <p:nvSpPr>
+          <p:cNvPr id="13" name="Text 11"/>
+          <p:cNvSpPr/>
+          <p:nvPr/>
+        </p:nvSpPr>
+        <p:spPr>
+          <a:xfrm>
+            <a:off x="8074152" y="1856232"/>
+            <a:ext cx="2825496" cy="1261872"/>
+          </a:xfrm>
+          <a:prstGeom prst="rect">
+            <a:avLst/>
+          </a:prstGeom>
+          <a:noFill/>
+          <a:ln/>
+        </p:spPr>
+        <p:txBody>
+          <a:bodyPr wrap="square" lIns="0" tIns="0" rIns="0" bIns="0" rtlCol="0" anchor="t">
+            <a:normAutofit/>
+          </a:bodyPr>
+          <a:lstStyle/>
+          <a:p>
+            <a:pPr indent="0" marL="0">
+              <a:buNone/>
+            </a:pPr>
+            <a:r>
+              <a:rPr lang="en-US" sz="1250" dirty="0">
                 <a:solidFill>
                   <a:srgbClr val="17364A"/>
                 </a:solidFill>
@@ -4853,9 +7408,116 @@
                 <a:ea typeface="Aptos" pitchFamily="34" charset="-122"/>
                 <a:cs typeface="Aptos" pitchFamily="34" charset="-120"/>
               </a:rPr>
-              <a:t>Citation and source verification protocol</a:t>
-            </a:r>
-            <a:endParaRPr lang="en-US" sz="1420" dirty="0"/>
+              <a:t>Create a RAG readiness checklist for one public health knowledge workflow.</a:t>
+            </a:r>
+            <a:endParaRPr lang="en-US" sz="1250" dirty="0"/>
+          </a:p>
+        </p:txBody>
+      </p:sp>
+      <p:sp>
+        <p:nvSpPr>
+          <p:cNvPr id="14" name="Shape 12"/>
+          <p:cNvSpPr/>
+          <p:nvPr/>
+        </p:nvSpPr>
+        <p:spPr>
+          <a:xfrm>
+            <a:off x="7909560" y="3520440"/>
+            <a:ext cx="3154680" cy="1737360"/>
+          </a:xfrm>
+          <a:prstGeom prst="roundRect">
+            <a:avLst>
+              <a:gd name="adj" fmla="val 6316"/>
+            </a:avLst>
+          </a:prstGeom>
+          <a:solidFill>
+            <a:srgbClr val="EAF6F8"/>
+          </a:solidFill>
+          <a:ln w="12700">
+            <a:solidFill>
+              <a:srgbClr val="B9D7E6"/>
+            </a:solidFill>
+            <a:prstDash val="solid"/>
+          </a:ln>
+        </p:spPr>
+      </p:sp>
+      <p:sp>
+        <p:nvSpPr>
+          <p:cNvPr id="15" name="Text 13"/>
+          <p:cNvSpPr/>
+          <p:nvPr/>
+        </p:nvSpPr>
+        <p:spPr>
+          <a:xfrm>
+            <a:off x="8074152" y="3666744"/>
+            <a:ext cx="2825496" cy="201168"/>
+          </a:xfrm>
+          <a:prstGeom prst="rect">
+            <a:avLst/>
+          </a:prstGeom>
+          <a:noFill/>
+          <a:ln/>
+        </p:spPr>
+        <p:txBody>
+          <a:bodyPr wrap="square" lIns="0" tIns="0" rIns="0" bIns="0" rtlCol="0" anchor="ctr"/>
+          <a:lstStyle/>
+          <a:p>
+            <a:pPr indent="0" marL="0">
+              <a:buNone/>
+            </a:pPr>
+            <a:r>
+              <a:rPr lang="en-US" sz="950" b="1" dirty="0">
+                <a:solidFill>
+                  <a:srgbClr val="0068B7"/>
+                </a:solidFill>
+                <a:latin typeface="Aptos" pitchFamily="34" charset="0"/>
+                <a:ea typeface="Aptos" pitchFamily="34" charset="-122"/>
+                <a:cs typeface="Aptos" pitchFamily="34" charset="-120"/>
+              </a:rPr>
+              <a:t>Use this for</a:t>
+            </a:r>
+            <a:endParaRPr lang="en-US" sz="950" dirty="0"/>
+          </a:p>
+        </p:txBody>
+      </p:sp>
+      <p:sp>
+        <p:nvSpPr>
+          <p:cNvPr id="16" name="Text 14"/>
+          <p:cNvSpPr/>
+          <p:nvPr/>
+        </p:nvSpPr>
+        <p:spPr>
+          <a:xfrm>
+            <a:off x="8074152" y="3959352"/>
+            <a:ext cx="2825496" cy="1170432"/>
+          </a:xfrm>
+          <a:prstGeom prst="rect">
+            <a:avLst/>
+          </a:prstGeom>
+          <a:noFill/>
+          <a:ln/>
+        </p:spPr>
+        <p:txBody>
+          <a:bodyPr wrap="square" lIns="0" tIns="0" rIns="0" bIns="0" rtlCol="0" anchor="t">
+            <a:normAutofit/>
+          </a:bodyPr>
+          <a:lstStyle/>
+          <a:p>
+            <a:pPr indent="0" marL="0">
+              <a:buNone/>
+            </a:pPr>
+            <a:r>
+              <a:rPr lang="en-US" sz="1250" dirty="0">
+                <a:solidFill>
+                  <a:srgbClr val="17364A"/>
+                </a:solidFill>
+                <a:latin typeface="Aptos" pitchFamily="34" charset="0"/>
+                <a:ea typeface="Aptos" pitchFamily="34" charset="-122"/>
+                <a:cs typeface="Aptos" pitchFamily="34" charset="-120"/>
+              </a:rPr>
+              <a:t>Connect the concept to public health decisions, safeguards, documentation, or implementation work.</a:t>
+            </a:r>
+            <a:endParaRPr lang="en-US" sz="1250" dirty="0"/>
           </a:p>
         </p:txBody>
       </p:sp>
@@ -4918,7 +7580,32 @@
       </p:sp>
       <p:sp>
         <p:nvSpPr>
-          <p:cNvPr id="3" name="Text 1"/>
+          <p:cNvPr id="3" name="Shape 1"/>
+          <p:cNvSpPr/>
+          <p:nvPr/>
+        </p:nvSpPr>
+        <p:spPr>
+          <a:xfrm>
+            <a:off x="0" y="164592"/>
+            <a:ext cx="146304" cy="6693408"/>
+          </a:xfrm>
+          <a:prstGeom prst="rect">
+            <a:avLst/>
+          </a:prstGeom>
+          <a:solidFill>
+            <a:srgbClr val="2F8A28"/>
+          </a:solidFill>
+          <a:ln w="12700">
+            <a:solidFill>
+              <a:srgbClr val="2F8A28"/>
+            </a:solidFill>
+            <a:prstDash val="solid"/>
+          </a:ln>
+        </p:spPr>
+      </p:sp>
+      <p:sp>
+        <p:nvSpPr>
+          <p:cNvPr id="4" name="Text 2"/>
           <p:cNvSpPr/>
           <p:nvPr/>
         </p:nvSpPr>
@@ -4957,7 +7644,7 @@
       </p:sp>
       <p:sp>
         <p:nvSpPr>
-          <p:cNvPr id="4" name="Text 2"/>
+          <p:cNvPr id="5" name="Text 3"/>
           <p:cNvSpPr/>
           <p:nvPr/>
         </p:nvSpPr>
@@ -4996,7 +7683,7 @@
       </p:sp>
       <p:sp>
         <p:nvSpPr>
-          <p:cNvPr id="5" name="Text 3"/>
+          <p:cNvPr id="6" name="Text 4"/>
           <p:cNvSpPr/>
           <p:nvPr/>
         </p:nvSpPr>
@@ -5035,13 +7722,77 @@
       </p:sp>
       <p:sp>
         <p:nvSpPr>
-          <p:cNvPr id="6" name="Text 4"/>
+          <p:cNvPr id="7" name="Shape 5"/>
           <p:cNvSpPr/>
           <p:nvPr/>
         </p:nvSpPr>
         <p:spPr>
           <a:xfrm>
             <a:off x="640080" y="658368"/>
+            <a:ext cx="420624" cy="420624"/>
+          </a:xfrm>
+          <a:prstGeom prst="ellipse">
+            <a:avLst/>
+          </a:prstGeom>
+          <a:solidFill>
+            <a:srgbClr val="0068B7"/>
+          </a:solidFill>
+          <a:ln w="12700">
+            <a:solidFill>
+              <a:srgbClr val="0068B7"/>
+            </a:solidFill>
+            <a:prstDash val="solid"/>
+          </a:ln>
+        </p:spPr>
+      </p:sp>
+      <p:sp>
+        <p:nvSpPr>
+          <p:cNvPr id="8" name="Text 6"/>
+          <p:cNvSpPr/>
+          <p:nvPr/>
+        </p:nvSpPr>
+        <p:spPr>
+          <a:xfrm>
+            <a:off x="640080" y="731520"/>
+            <a:ext cx="420624" cy="164592"/>
+          </a:xfrm>
+          <a:prstGeom prst="rect">
+            <a:avLst/>
+          </a:prstGeom>
+          <a:noFill/>
+          <a:ln/>
+        </p:spPr>
+        <p:txBody>
+          <a:bodyPr wrap="square" lIns="0" tIns="0" rIns="0" bIns="0" rtlCol="0" anchor="ctr"/>
+          <a:lstStyle/>
+          <a:p>
+            <a:pPr algn="ctr" indent="0" marL="0">
+              <a:buNone/>
+            </a:pPr>
+            <a:r>
+              <a:rPr lang="en-US" sz="1100" b="1" dirty="0">
+                <a:solidFill>
+                  <a:srgbClr val="FFFFFF"/>
+                </a:solidFill>
+                <a:latin typeface="Aptos" pitchFamily="34" charset="0"/>
+                <a:ea typeface="Aptos" pitchFamily="34" charset="-122"/>
+                <a:cs typeface="Aptos" pitchFamily="34" charset="-120"/>
+              </a:rPr>
+              <a:t>10</a:t>
+            </a:r>
+            <a:endParaRPr lang="en-US" sz="1100" dirty="0"/>
+          </a:p>
+        </p:txBody>
+      </p:sp>
+      <p:sp>
+        <p:nvSpPr>
+          <p:cNvPr id="9" name="Text 7"/>
+          <p:cNvSpPr/>
+          <p:nvPr/>
+        </p:nvSpPr>
+        <p:spPr>
+          <a:xfrm>
+            <a:off x="640080" y="621792"/>
             <a:ext cx="10881360" cy="566928"/>
           </a:xfrm>
           <a:prstGeom prst="rect">
@@ -5068,7 +7819,7 @@
                 <a:ea typeface="Aptos Display" pitchFamily="34" charset="-122"/>
                 <a:cs typeface="Aptos Display" pitchFamily="34" charset="-120"/>
               </a:rPr>
-              <a:t>Expected Assignment</a:t>
+              <a:t>Expected Artifact or Evidence</a:t>
             </a:r>
             <a:endParaRPr lang="en-US" sz="2700" dirty="0"/>
           </a:p>
@@ -5076,14 +7827,14 @@
       </p:sp>
       <p:sp>
         <p:nvSpPr>
-          <p:cNvPr id="7" name="Text 5"/>
-          <p:cNvSpPr/>
-          <p:nvPr/>
-        </p:nvSpPr>
-        <p:spPr>
-          <a:xfrm>
-            <a:off x="822960" y="1325880"/>
-            <a:ext cx="10378440" cy="4800600"/>
+          <p:cNvPr id="10" name="Text 8"/>
+          <p:cNvSpPr/>
+          <p:nvPr/>
+        </p:nvSpPr>
+        <p:spPr>
+          <a:xfrm>
+            <a:off x="868680" y="1417320"/>
+            <a:ext cx="6675120" cy="4434840"/>
           </a:xfrm>
           <a:prstGeom prst="rect">
             <a:avLst/>
@@ -5098,7 +7849,7 @@
           <a:lstStyle/>
           <a:p>
             <a:r>
-              <a:rPr lang="en-US" sz="1450" dirty="0">
+              <a:rPr lang="en-US" sz="1700" dirty="0">
                 <a:solidFill>
                   <a:srgbClr val="17364A"/>
                 </a:solidFill>
@@ -5108,11 +7859,11 @@
               </a:rPr>
               <a:t>RAG readiness checklist</a:t>
             </a:r>
-            <a:endParaRPr lang="en-US" sz="1450" dirty="0"/>
-          </a:p>
-          <a:p>
-            <a:r>
-              <a:rPr lang="en-US" sz="1450" dirty="0">
+            <a:endParaRPr lang="en-US" sz="1700" dirty="0"/>
+          </a:p>
+          <a:p>
+            <a:r>
+              <a:rPr lang="en-US" sz="1700" dirty="0">
                 <a:solidFill>
                   <a:srgbClr val="17364A"/>
                 </a:solidFill>
@@ -5122,11 +7873,11 @@
               </a:rPr>
               <a:t>Content inventory and ownership table</a:t>
             </a:r>
-            <a:endParaRPr lang="en-US" sz="1450" dirty="0"/>
-          </a:p>
-          <a:p>
-            <a:r>
-              <a:rPr lang="en-US" sz="1450" dirty="0">
+            <a:endParaRPr lang="en-US" sz="1700" dirty="0"/>
+          </a:p>
+          <a:p>
+            <a:r>
+              <a:rPr lang="en-US" sz="1700" dirty="0">
                 <a:solidFill>
                   <a:srgbClr val="17364A"/>
                 </a:solidFill>
@@ -5136,11 +7887,104 @@
               </a:rPr>
               <a:t>Retrieval test question set</a:t>
             </a:r>
-            <a:endParaRPr lang="en-US" sz="1450" dirty="0"/>
-          </a:p>
-          <a:p>
-            <a:r>
-              <a:rPr lang="en-US" sz="1450" dirty="0">
+            <a:endParaRPr lang="en-US" sz="1700" dirty="0"/>
+          </a:p>
+        </p:txBody>
+      </p:sp>
+      <p:sp>
+        <p:nvSpPr>
+          <p:cNvPr id="11" name="Shape 9"/>
+          <p:cNvSpPr/>
+          <p:nvPr/>
+        </p:nvSpPr>
+        <p:spPr>
+          <a:xfrm>
+            <a:off x="7909560" y="1417320"/>
+            <a:ext cx="3154680" cy="1828800"/>
+          </a:xfrm>
+          <a:prstGeom prst="roundRect">
+            <a:avLst>
+              <a:gd name="adj" fmla="val 6000"/>
+            </a:avLst>
+          </a:prstGeom>
+          <a:solidFill>
+            <a:srgbClr val="EEF8ED"/>
+          </a:solidFill>
+          <a:ln w="12700">
+            <a:solidFill>
+              <a:srgbClr val="B9D7E6"/>
+            </a:solidFill>
+            <a:prstDash val="solid"/>
+          </a:ln>
+        </p:spPr>
+      </p:sp>
+      <p:sp>
+        <p:nvSpPr>
+          <p:cNvPr id="12" name="Text 10"/>
+          <p:cNvSpPr/>
+          <p:nvPr/>
+        </p:nvSpPr>
+        <p:spPr>
+          <a:xfrm>
+            <a:off x="8074152" y="1563624"/>
+            <a:ext cx="2825496" cy="201168"/>
+          </a:xfrm>
+          <a:prstGeom prst="rect">
+            <a:avLst/>
+          </a:prstGeom>
+          <a:noFill/>
+          <a:ln/>
+        </p:spPr>
+        <p:txBody>
+          <a:bodyPr wrap="square" lIns="0" tIns="0" rIns="0" bIns="0" rtlCol="0" anchor="ctr"/>
+          <a:lstStyle/>
+          <a:p>
+            <a:pPr indent="0" marL="0">
+              <a:buNone/>
+            </a:pPr>
+            <a:r>
+              <a:rPr lang="en-US" sz="950" b="1" dirty="0">
+                <a:solidFill>
+                  <a:srgbClr val="0068B7"/>
+                </a:solidFill>
+                <a:latin typeface="Aptos" pitchFamily="34" charset="0"/>
+                <a:ea typeface="Aptos" pitchFamily="34" charset="-122"/>
+                <a:cs typeface="Aptos" pitchFamily="34" charset="-120"/>
+              </a:rPr>
+              <a:t>Key idea</a:t>
+            </a:r>
+            <a:endParaRPr lang="en-US" sz="950" dirty="0"/>
+          </a:p>
+        </p:txBody>
+      </p:sp>
+      <p:sp>
+        <p:nvSpPr>
+          <p:cNvPr id="13" name="Text 11"/>
+          <p:cNvSpPr/>
+          <p:nvPr/>
+        </p:nvSpPr>
+        <p:spPr>
+          <a:xfrm>
+            <a:off x="8074152" y="1856232"/>
+            <a:ext cx="2825496" cy="1261872"/>
+          </a:xfrm>
+          <a:prstGeom prst="rect">
+            <a:avLst/>
+          </a:prstGeom>
+          <a:noFill/>
+          <a:ln/>
+        </p:spPr>
+        <p:txBody>
+          <a:bodyPr wrap="square" lIns="0" tIns="0" rIns="0" bIns="0" rtlCol="0" anchor="t">
+            <a:normAutofit/>
+          </a:bodyPr>
+          <a:lstStyle/>
+          <a:p>
+            <a:pPr indent="0" marL="0">
+              <a:buNone/>
+            </a:pPr>
+            <a:r>
+              <a:rPr lang="en-US" sz="1250" dirty="0">
                 <a:solidFill>
                   <a:srgbClr val="17364A"/>
                 </a:solidFill>
@@ -5148,9 +7992,116 @@
                 <a:ea typeface="Aptos" pitchFamily="34" charset="-122"/>
                 <a:cs typeface="Aptos" pitchFamily="34" charset="-120"/>
               </a:rPr>
-              <a:t>Citation and source verification protocol</a:t>
-            </a:r>
-            <a:endParaRPr lang="en-US" sz="1450" dirty="0"/>
+              <a:t>RAG readiness checklist</a:t>
+            </a:r>
+            <a:endParaRPr lang="en-US" sz="1250" dirty="0"/>
+          </a:p>
+        </p:txBody>
+      </p:sp>
+      <p:sp>
+        <p:nvSpPr>
+          <p:cNvPr id="14" name="Shape 12"/>
+          <p:cNvSpPr/>
+          <p:nvPr/>
+        </p:nvSpPr>
+        <p:spPr>
+          <a:xfrm>
+            <a:off x="7909560" y="3520440"/>
+            <a:ext cx="3154680" cy="1737360"/>
+          </a:xfrm>
+          <a:prstGeom prst="roundRect">
+            <a:avLst>
+              <a:gd name="adj" fmla="val 6316"/>
+            </a:avLst>
+          </a:prstGeom>
+          <a:solidFill>
+            <a:srgbClr val="EAF6F8"/>
+          </a:solidFill>
+          <a:ln w="12700">
+            <a:solidFill>
+              <a:srgbClr val="B9D7E6"/>
+            </a:solidFill>
+            <a:prstDash val="solid"/>
+          </a:ln>
+        </p:spPr>
+      </p:sp>
+      <p:sp>
+        <p:nvSpPr>
+          <p:cNvPr id="15" name="Text 13"/>
+          <p:cNvSpPr/>
+          <p:nvPr/>
+        </p:nvSpPr>
+        <p:spPr>
+          <a:xfrm>
+            <a:off x="8074152" y="3666744"/>
+            <a:ext cx="2825496" cy="201168"/>
+          </a:xfrm>
+          <a:prstGeom prst="rect">
+            <a:avLst/>
+          </a:prstGeom>
+          <a:noFill/>
+          <a:ln/>
+        </p:spPr>
+        <p:txBody>
+          <a:bodyPr wrap="square" lIns="0" tIns="0" rIns="0" bIns="0" rtlCol="0" anchor="ctr"/>
+          <a:lstStyle/>
+          <a:p>
+            <a:pPr indent="0" marL="0">
+              <a:buNone/>
+            </a:pPr>
+            <a:r>
+              <a:rPr lang="en-US" sz="950" b="1" dirty="0">
+                <a:solidFill>
+                  <a:srgbClr val="0068B7"/>
+                </a:solidFill>
+                <a:latin typeface="Aptos" pitchFamily="34" charset="0"/>
+                <a:ea typeface="Aptos" pitchFamily="34" charset="-122"/>
+                <a:cs typeface="Aptos" pitchFamily="34" charset="-120"/>
+              </a:rPr>
+              <a:t>Use this for</a:t>
+            </a:r>
+            <a:endParaRPr lang="en-US" sz="950" dirty="0"/>
+          </a:p>
+        </p:txBody>
+      </p:sp>
+      <p:sp>
+        <p:nvSpPr>
+          <p:cNvPr id="16" name="Text 14"/>
+          <p:cNvSpPr/>
+          <p:nvPr/>
+        </p:nvSpPr>
+        <p:spPr>
+          <a:xfrm>
+            <a:off x="8074152" y="3959352"/>
+            <a:ext cx="2825496" cy="1170432"/>
+          </a:xfrm>
+          <a:prstGeom prst="rect">
+            <a:avLst/>
+          </a:prstGeom>
+          <a:noFill/>
+          <a:ln/>
+        </p:spPr>
+        <p:txBody>
+          <a:bodyPr wrap="square" lIns="0" tIns="0" rIns="0" bIns="0" rtlCol="0" anchor="t">
+            <a:normAutofit/>
+          </a:bodyPr>
+          <a:lstStyle/>
+          <a:p>
+            <a:pPr indent="0" marL="0">
+              <a:buNone/>
+            </a:pPr>
+            <a:r>
+              <a:rPr lang="en-US" sz="1250" dirty="0">
+                <a:solidFill>
+                  <a:srgbClr val="17364A"/>
+                </a:solidFill>
+                <a:latin typeface="Aptos" pitchFamily="34" charset="0"/>
+                <a:ea typeface="Aptos" pitchFamily="34" charset="-122"/>
+                <a:cs typeface="Aptos" pitchFamily="34" charset="-120"/>
+              </a:rPr>
+              <a:t>Connect the concept to public health decisions, safeguards, documentation, or implementation work.</a:t>
+            </a:r>
+            <a:endParaRPr lang="en-US" sz="1250" dirty="0"/>
           </a:p>
         </p:txBody>
       </p:sp>
@@ -5213,7 +8164,32 @@
       </p:sp>
       <p:sp>
         <p:nvSpPr>
-          <p:cNvPr id="3" name="Text 1"/>
+          <p:cNvPr id="3" name="Shape 1"/>
+          <p:cNvSpPr/>
+          <p:nvPr/>
+        </p:nvSpPr>
+        <p:spPr>
+          <a:xfrm>
+            <a:off x="0" y="164592"/>
+            <a:ext cx="146304" cy="6693408"/>
+          </a:xfrm>
+          <a:prstGeom prst="rect">
+            <a:avLst/>
+          </a:prstGeom>
+          <a:solidFill>
+            <a:srgbClr val="2F8A28"/>
+          </a:solidFill>
+          <a:ln w="12700">
+            <a:solidFill>
+              <a:srgbClr val="2F8A28"/>
+            </a:solidFill>
+            <a:prstDash val="solid"/>
+          </a:ln>
+        </p:spPr>
+      </p:sp>
+      <p:sp>
+        <p:nvSpPr>
+          <p:cNvPr id="4" name="Text 2"/>
           <p:cNvSpPr/>
           <p:nvPr/>
         </p:nvSpPr>
@@ -5252,7 +8228,7 @@
       </p:sp>
       <p:sp>
         <p:nvSpPr>
-          <p:cNvPr id="4" name="Text 2"/>
+          <p:cNvPr id="5" name="Text 3"/>
           <p:cNvSpPr/>
           <p:nvPr/>
         </p:nvSpPr>
@@ -5291,7 +8267,7 @@
       </p:sp>
       <p:sp>
         <p:nvSpPr>
-          <p:cNvPr id="5" name="Text 3"/>
+          <p:cNvPr id="6" name="Text 4"/>
           <p:cNvSpPr/>
           <p:nvPr/>
         </p:nvSpPr>
@@ -5330,7 +8306,7 @@
       </p:sp>
       <p:sp>
         <p:nvSpPr>
-          <p:cNvPr id="6" name="Text 4"/>
+          <p:cNvPr id="7" name="Text 5"/>
           <p:cNvSpPr/>
           <p:nvPr/>
         </p:nvSpPr>
@@ -5363,7 +8339,7 @@
                 <a:ea typeface="Aptos Display" pitchFamily="34" charset="-122"/>
                 <a:cs typeface="Aptos Display" pitchFamily="34" charset="-120"/>
               </a:rPr>
-              <a:t>Knowledge Check</a:t>
+              <a:t>Expected Artifact or Evidence Continued</a:t>
             </a:r>
             <a:endParaRPr lang="en-US" sz="2700" dirty="0"/>
           </a:p>
@@ -5371,14 +8347,14 @@
       </p:sp>
       <p:sp>
         <p:nvSpPr>
-          <p:cNvPr id="7" name="Text 5"/>
-          <p:cNvSpPr/>
-          <p:nvPr/>
-        </p:nvSpPr>
-        <p:spPr>
-          <a:xfrm>
-            <a:off x="822960" y="1325880"/>
-            <a:ext cx="10378440" cy="4800600"/>
+          <p:cNvPr id="8" name="Text 6"/>
+          <p:cNvSpPr/>
+          <p:nvPr/>
+        </p:nvSpPr>
+        <p:spPr>
+          <a:xfrm>
+            <a:off x="868680" y="1417320"/>
+            <a:ext cx="6675120" cy="4434840"/>
           </a:xfrm>
           <a:prstGeom prst="rect">
             <a:avLst/>
@@ -5393,7 +8369,7 @@
           <a:lstStyle/>
           <a:p>
             <a:r>
-              <a:rPr lang="en-US" sz="1450" dirty="0">
+              <a:rPr lang="en-US" sz="1700" dirty="0">
                 <a:solidFill>
                   <a:srgbClr val="17364A"/>
                 </a:solidFill>
@@ -5401,13 +8377,106 @@
                 <a:ea typeface="Aptos" pitchFamily="34" charset="-122"/>
                 <a:cs typeface="Aptos" pitchFamily="34" charset="-120"/>
               </a:rPr>
-              <a:t>1. What is RAG?</a:t>
-            </a:r>
-            <a:endParaRPr lang="en-US" sz="1450" dirty="0"/>
-          </a:p>
-          <a:p>
-            <a:r>
-              <a:rPr lang="en-US" sz="1450" dirty="0">
+              <a:t>Citation and source verification protocol</a:t>
+            </a:r>
+            <a:endParaRPr lang="en-US" sz="1700" dirty="0"/>
+          </a:p>
+        </p:txBody>
+      </p:sp>
+      <p:sp>
+        <p:nvSpPr>
+          <p:cNvPr id="9" name="Shape 7"/>
+          <p:cNvSpPr/>
+          <p:nvPr/>
+        </p:nvSpPr>
+        <p:spPr>
+          <a:xfrm>
+            <a:off x="7909560" y="1417320"/>
+            <a:ext cx="3154680" cy="1828800"/>
+          </a:xfrm>
+          <a:prstGeom prst="roundRect">
+            <a:avLst>
+              <a:gd name="adj" fmla="val 6000"/>
+            </a:avLst>
+          </a:prstGeom>
+          <a:solidFill>
+            <a:srgbClr val="EEF8ED"/>
+          </a:solidFill>
+          <a:ln w="12700">
+            <a:solidFill>
+              <a:srgbClr val="B9D7E6"/>
+            </a:solidFill>
+            <a:prstDash val="solid"/>
+          </a:ln>
+        </p:spPr>
+      </p:sp>
+      <p:sp>
+        <p:nvSpPr>
+          <p:cNvPr id="10" name="Text 8"/>
+          <p:cNvSpPr/>
+          <p:nvPr/>
+        </p:nvSpPr>
+        <p:spPr>
+          <a:xfrm>
+            <a:off x="8074152" y="1563624"/>
+            <a:ext cx="2825496" cy="201168"/>
+          </a:xfrm>
+          <a:prstGeom prst="rect">
+            <a:avLst/>
+          </a:prstGeom>
+          <a:noFill/>
+          <a:ln/>
+        </p:spPr>
+        <p:txBody>
+          <a:bodyPr wrap="square" lIns="0" tIns="0" rIns="0" bIns="0" rtlCol="0" anchor="ctr"/>
+          <a:lstStyle/>
+          <a:p>
+            <a:pPr indent="0" marL="0">
+              <a:buNone/>
+            </a:pPr>
+            <a:r>
+              <a:rPr lang="en-US" sz="950" b="1" dirty="0">
+                <a:solidFill>
+                  <a:srgbClr val="0068B7"/>
+                </a:solidFill>
+                <a:latin typeface="Aptos" pitchFamily="34" charset="0"/>
+                <a:ea typeface="Aptos" pitchFamily="34" charset="-122"/>
+                <a:cs typeface="Aptos" pitchFamily="34" charset="-120"/>
+              </a:rPr>
+              <a:t>Key idea</a:t>
+            </a:r>
+            <a:endParaRPr lang="en-US" sz="950" dirty="0"/>
+          </a:p>
+        </p:txBody>
+      </p:sp>
+      <p:sp>
+        <p:nvSpPr>
+          <p:cNvPr id="11" name="Text 9"/>
+          <p:cNvSpPr/>
+          <p:nvPr/>
+        </p:nvSpPr>
+        <p:spPr>
+          <a:xfrm>
+            <a:off x="8074152" y="1856232"/>
+            <a:ext cx="2825496" cy="1261872"/>
+          </a:xfrm>
+          <a:prstGeom prst="rect">
+            <a:avLst/>
+          </a:prstGeom>
+          <a:noFill/>
+          <a:ln/>
+        </p:spPr>
+        <p:txBody>
+          <a:bodyPr wrap="square" lIns="0" tIns="0" rIns="0" bIns="0" rtlCol="0" anchor="t">
+            <a:normAutofit/>
+          </a:bodyPr>
+          <a:lstStyle/>
+          <a:p>
+            <a:pPr indent="0" marL="0">
+              <a:buNone/>
+            </a:pPr>
+            <a:r>
+              <a:rPr lang="en-US" sz="1250" dirty="0">
                 <a:solidFill>
                   <a:srgbClr val="17364A"/>
                 </a:solidFill>
@@ -5415,13 +8484,106 @@
                 <a:ea typeface="Aptos" pitchFamily="34" charset="-122"/>
                 <a:cs typeface="Aptos" pitchFamily="34" charset="-120"/>
               </a:rPr>
-              <a:t>2. Why does chunking matter?</a:t>
-            </a:r>
-            <a:endParaRPr lang="en-US" sz="1450" dirty="0"/>
-          </a:p>
-          <a:p>
-            <a:r>
-              <a:rPr lang="en-US" sz="1450" dirty="0">
+              <a:t>Citation and source verification protocol</a:t>
+            </a:r>
+            <a:endParaRPr lang="en-US" sz="1250" dirty="0"/>
+          </a:p>
+        </p:txBody>
+      </p:sp>
+      <p:sp>
+        <p:nvSpPr>
+          <p:cNvPr id="12" name="Shape 10"/>
+          <p:cNvSpPr/>
+          <p:nvPr/>
+        </p:nvSpPr>
+        <p:spPr>
+          <a:xfrm>
+            <a:off x="7909560" y="3520440"/>
+            <a:ext cx="3154680" cy="1737360"/>
+          </a:xfrm>
+          <a:prstGeom prst="roundRect">
+            <a:avLst>
+              <a:gd name="adj" fmla="val 6316"/>
+            </a:avLst>
+          </a:prstGeom>
+          <a:solidFill>
+            <a:srgbClr val="EAF6F8"/>
+          </a:solidFill>
+          <a:ln w="12700">
+            <a:solidFill>
+              <a:srgbClr val="B9D7E6"/>
+            </a:solidFill>
+            <a:prstDash val="solid"/>
+          </a:ln>
+        </p:spPr>
+      </p:sp>
+      <p:sp>
+        <p:nvSpPr>
+          <p:cNvPr id="13" name="Text 11"/>
+          <p:cNvSpPr/>
+          <p:nvPr/>
+        </p:nvSpPr>
+        <p:spPr>
+          <a:xfrm>
+            <a:off x="8074152" y="3666744"/>
+            <a:ext cx="2825496" cy="201168"/>
+          </a:xfrm>
+          <a:prstGeom prst="rect">
+            <a:avLst/>
+          </a:prstGeom>
+          <a:noFill/>
+          <a:ln/>
+        </p:spPr>
+        <p:txBody>
+          <a:bodyPr wrap="square" lIns="0" tIns="0" rIns="0" bIns="0" rtlCol="0" anchor="ctr"/>
+          <a:lstStyle/>
+          <a:p>
+            <a:pPr indent="0" marL="0">
+              <a:buNone/>
+            </a:pPr>
+            <a:r>
+              <a:rPr lang="en-US" sz="950" b="1" dirty="0">
+                <a:solidFill>
+                  <a:srgbClr val="0068B7"/>
+                </a:solidFill>
+                <a:latin typeface="Aptos" pitchFamily="34" charset="0"/>
+                <a:ea typeface="Aptos" pitchFamily="34" charset="-122"/>
+                <a:cs typeface="Aptos" pitchFamily="34" charset="-120"/>
+              </a:rPr>
+              <a:t>Use this for</a:t>
+            </a:r>
+            <a:endParaRPr lang="en-US" sz="950" dirty="0"/>
+          </a:p>
+        </p:txBody>
+      </p:sp>
+      <p:sp>
+        <p:nvSpPr>
+          <p:cNvPr id="14" name="Text 12"/>
+          <p:cNvSpPr/>
+          <p:nvPr/>
+        </p:nvSpPr>
+        <p:spPr>
+          <a:xfrm>
+            <a:off x="8074152" y="3959352"/>
+            <a:ext cx="2825496" cy="1170432"/>
+          </a:xfrm>
+          <a:prstGeom prst="rect">
+            <a:avLst/>
+          </a:prstGeom>
+          <a:noFill/>
+          <a:ln/>
+        </p:spPr>
+        <p:txBody>
+          <a:bodyPr wrap="square" lIns="0" tIns="0" rIns="0" bIns="0" rtlCol="0" anchor="t">
+            <a:normAutofit/>
+          </a:bodyPr>
+          <a:lstStyle/>
+          <a:p>
+            <a:pPr indent="0" marL="0">
+              <a:buNone/>
+            </a:pPr>
+            <a:r>
+              <a:rPr lang="en-US" sz="1250" dirty="0">
                 <a:solidFill>
                   <a:srgbClr val="17364A"/>
                 </a:solidFill>
@@ -5429,37 +8591,9 @@
                 <a:ea typeface="Aptos" pitchFamily="34" charset="-122"/>
                 <a:cs typeface="Aptos" pitchFamily="34" charset="-120"/>
               </a:rPr>
-              <a:t>3. What is a major RAG governance risk?</a:t>
-            </a:r>
-            <a:endParaRPr lang="en-US" sz="1450" dirty="0"/>
-          </a:p>
-          <a:p>
-            <a:r>
-              <a:rPr lang="en-US" sz="1450" dirty="0">
-                <a:solidFill>
-                  <a:srgbClr val="17364A"/>
-                </a:solidFill>
-                <a:latin typeface="Aptos" pitchFamily="34" charset="0"/>
-                <a:ea typeface="Aptos" pitchFamily="34" charset="-122"/>
-                <a:cs typeface="Aptos" pitchFamily="34" charset="-120"/>
-              </a:rPr>
-              <a:t>4. What should a RAG system do when sources are insufficient?</a:t>
-            </a:r>
-            <a:endParaRPr lang="en-US" sz="1450" dirty="0"/>
-          </a:p>
-          <a:p>
-            <a:r>
-              <a:rPr lang="en-US" sz="1450" dirty="0">
-                <a:solidFill>
-                  <a:srgbClr val="17364A"/>
-                </a:solidFill>
-                <a:latin typeface="Aptos" pitchFamily="34" charset="0"/>
-                <a:ea typeface="Aptos" pitchFamily="34" charset="-122"/>
-                <a:cs typeface="Aptos" pitchFamily="34" charset="-120"/>
-              </a:rPr>
-              <a:t>5. What is strong completion evidence for this module?</a:t>
-            </a:r>
-            <a:endParaRPr lang="en-US" sz="1450" dirty="0"/>
+              <a:t>Connect the concept to public health decisions, safeguards, documentation, or implementation work.</a:t>
+            </a:r>
+            <a:endParaRPr lang="en-US" sz="1250" dirty="0"/>
           </a:p>
         </p:txBody>
       </p:sp>
@@ -5522,7 +8656,32 @@
       </p:sp>
       <p:sp>
         <p:nvSpPr>
-          <p:cNvPr id="3" name="Text 1"/>
+          <p:cNvPr id="3" name="Shape 1"/>
+          <p:cNvSpPr/>
+          <p:nvPr/>
+        </p:nvSpPr>
+        <p:spPr>
+          <a:xfrm>
+            <a:off x="0" y="164592"/>
+            <a:ext cx="146304" cy="6693408"/>
+          </a:xfrm>
+          <a:prstGeom prst="rect">
+            <a:avLst/>
+          </a:prstGeom>
+          <a:solidFill>
+            <a:srgbClr val="2F8A28"/>
+          </a:solidFill>
+          <a:ln w="12700">
+            <a:solidFill>
+              <a:srgbClr val="2F8A28"/>
+            </a:solidFill>
+            <a:prstDash val="solid"/>
+          </a:ln>
+        </p:spPr>
+      </p:sp>
+      <p:sp>
+        <p:nvSpPr>
+          <p:cNvPr id="4" name="Text 2"/>
           <p:cNvSpPr/>
           <p:nvPr/>
         </p:nvSpPr>
@@ -5561,7 +8720,7 @@
       </p:sp>
       <p:sp>
         <p:nvSpPr>
-          <p:cNvPr id="4" name="Text 2"/>
+          <p:cNvPr id="5" name="Text 3"/>
           <p:cNvSpPr/>
           <p:nvPr/>
         </p:nvSpPr>
@@ -5600,7 +8759,7 @@
       </p:sp>
       <p:sp>
         <p:nvSpPr>
-          <p:cNvPr id="5" name="Text 3"/>
+          <p:cNvPr id="6" name="Text 4"/>
           <p:cNvSpPr/>
           <p:nvPr/>
         </p:nvSpPr>
@@ -5639,7 +8798,7 @@
       </p:sp>
       <p:sp>
         <p:nvSpPr>
-          <p:cNvPr id="6" name="Text 4"/>
+          <p:cNvPr id="7" name="Text 5"/>
           <p:cNvSpPr/>
           <p:nvPr/>
         </p:nvSpPr>
@@ -5672,7 +8831,7 @@
                 <a:ea typeface="Aptos Display" pitchFamily="34" charset="-122"/>
                 <a:cs typeface="Aptos Display" pitchFamily="34" charset="-120"/>
               </a:rPr>
-              <a:t>Module Context</a:t>
+              <a:t>What this module helps you do</a:t>
             </a:r>
             <a:endParaRPr lang="en-US" sz="2700" dirty="0"/>
           </a:p>
@@ -5680,14 +8839,14 @@
       </p:sp>
       <p:sp>
         <p:nvSpPr>
-          <p:cNvPr id="7" name="Text 5"/>
-          <p:cNvSpPr/>
-          <p:nvPr/>
-        </p:nvSpPr>
-        <p:spPr>
-          <a:xfrm>
-            <a:off x="822960" y="1325880"/>
-            <a:ext cx="10378440" cy="1371600"/>
+          <p:cNvPr id="8" name="Text 6"/>
+          <p:cNvSpPr/>
+          <p:nvPr/>
+        </p:nvSpPr>
+        <p:spPr>
+          <a:xfrm>
+            <a:off x="868680" y="1417320"/>
+            <a:ext cx="6675120" cy="3291840"/>
           </a:xfrm>
           <a:prstGeom prst="rect">
             <a:avLst/>
@@ -5702,7 +8861,7 @@
           <a:lstStyle/>
           <a:p>
             <a:r>
-              <a:rPr lang="en-US" sz="1600" dirty="0">
+              <a:rPr lang="en-US" sz="1700" dirty="0">
                 <a:solidFill>
                   <a:srgbClr val="17364A"/>
                 </a:solidFill>
@@ -5710,13 +8869,13 @@
                 <a:ea typeface="Aptos" pitchFamily="34" charset="-122"/>
                 <a:cs typeface="Aptos" pitchFamily="34" charset="-120"/>
               </a:rPr>
-              <a:t>Level: intermediate/practitioner</a:t>
-            </a:r>
-            <a:endParaRPr lang="en-US" sz="1600" dirty="0"/>
-          </a:p>
-          <a:p>
-            <a:r>
-              <a:rPr lang="en-US" sz="1600" dirty="0">
+              <a:t>Retrieval-augmented generation, often called RAG, combines generative AI with retrieval from a defined set of documents or data sources.</a:t>
+            </a:r>
+            <a:endParaRPr lang="en-US" sz="1700" dirty="0"/>
+          </a:p>
+          <a:p>
+            <a:r>
+              <a:rPr lang="en-US" sz="1700" dirty="0">
                 <a:solidFill>
                   <a:srgbClr val="17364A"/>
                 </a:solidFill>
@@ -5724,13 +8883,13 @@
                 <a:ea typeface="Aptos" pitchFamily="34" charset="-122"/>
                 <a:cs typeface="Aptos" pitchFamily="34" charset="-120"/>
               </a:rPr>
-              <a:t>Primary track: Technical Architecture Track</a:t>
-            </a:r>
-            <a:endParaRPr lang="en-US" sz="1600" dirty="0"/>
-          </a:p>
-          <a:p>
-            <a:r>
-              <a:rPr lang="en-US" sz="1600" dirty="0">
+              <a:t>Instead of relying only on a model’s general training, a RAG system searches approved content and uses retrieved material to generate an answer or.</a:t>
+            </a:r>
+            <a:endParaRPr lang="en-US" sz="1700" dirty="0"/>
+          </a:p>
+          <a:p>
+            <a:r>
+              <a:rPr lang="en-US" sz="1700" dirty="0">
                 <a:solidFill>
                   <a:srgbClr val="17364A"/>
                 </a:solidFill>
@@ -5738,31 +8897,111 @@
                 <a:ea typeface="Aptos" pitchFamily="34" charset="-122"/>
                 <a:cs typeface="Aptos" pitchFamily="34" charset="-120"/>
               </a:rPr>
-              <a:t>Appears in tracks: analytics-modeling</a:t>
-            </a:r>
-            <a:endParaRPr lang="en-US" sz="1600" dirty="0"/>
-          </a:p>
-        </p:txBody>
-      </p:sp>
-      <p:sp>
-        <p:nvSpPr>
-          <p:cNvPr id="8" name="Text 6"/>
-          <p:cNvSpPr/>
-          <p:nvPr/>
-        </p:nvSpPr>
-        <p:spPr>
-          <a:xfrm>
-            <a:off x="822960" y="2743200"/>
-            <a:ext cx="10378440" cy="2834640"/>
-          </a:xfrm>
-          <a:prstGeom prst="rect">
-            <a:avLst/>
-          </a:prstGeom>
-          <a:noFill/>
-          <a:ln/>
-        </p:spPr>
-        <p:txBody>
-          <a:bodyPr wrap="square" lIns="1016" tIns="1016" rIns="1016" bIns="1016" rtlCol="0" anchor="t">
+              <a:t>In public health, RAG may support policy lookup, protocol interpretation, internal help desks, training support, grant review, emergency response,.</a:t>
+            </a:r>
+            <a:endParaRPr lang="en-US" sz="1700" dirty="0"/>
+          </a:p>
+          <a:p>
+            <a:r>
+              <a:rPr lang="en-US" sz="1700" dirty="0">
+                <a:solidFill>
+                  <a:srgbClr val="17364A"/>
+                </a:solidFill>
+                <a:latin typeface="Aptos" pitchFamily="34" charset="0"/>
+                <a:ea typeface="Aptos" pitchFamily="34" charset="-122"/>
+                <a:cs typeface="Aptos" pitchFamily="34" charset="-120"/>
+              </a:rPr>
+              <a:t>RAG can make generative AI more useful and safer when it is designed well.</a:t>
+            </a:r>
+            <a:endParaRPr lang="en-US" sz="1700" dirty="0"/>
+          </a:p>
+        </p:txBody>
+      </p:sp>
+      <p:sp>
+        <p:nvSpPr>
+          <p:cNvPr id="9" name="Shape 7"/>
+          <p:cNvSpPr/>
+          <p:nvPr/>
+        </p:nvSpPr>
+        <p:spPr>
+          <a:xfrm>
+            <a:off x="7909560" y="1417320"/>
+            <a:ext cx="3154680" cy="1920240"/>
+          </a:xfrm>
+          <a:prstGeom prst="roundRect">
+            <a:avLst>
+              <a:gd name="adj" fmla="val 5714"/>
+            </a:avLst>
+          </a:prstGeom>
+          <a:solidFill>
+            <a:srgbClr val="EAF6F8"/>
+          </a:solidFill>
+          <a:ln w="12700">
+            <a:solidFill>
+              <a:srgbClr val="B9D7E6"/>
+            </a:solidFill>
+            <a:prstDash val="solid"/>
+          </a:ln>
+        </p:spPr>
+      </p:sp>
+      <p:sp>
+        <p:nvSpPr>
+          <p:cNvPr id="10" name="Text 8"/>
+          <p:cNvSpPr/>
+          <p:nvPr/>
+        </p:nvSpPr>
+        <p:spPr>
+          <a:xfrm>
+            <a:off x="8074152" y="1563624"/>
+            <a:ext cx="2825496" cy="201168"/>
+          </a:xfrm>
+          <a:prstGeom prst="rect">
+            <a:avLst/>
+          </a:prstGeom>
+          <a:noFill/>
+          <a:ln/>
+        </p:spPr>
+        <p:txBody>
+          <a:bodyPr wrap="square" lIns="0" tIns="0" rIns="0" bIns="0" rtlCol="0" anchor="ctr"/>
+          <a:lstStyle/>
+          <a:p>
+            <a:pPr indent="0" marL="0">
+              <a:buNone/>
+            </a:pPr>
+            <a:r>
+              <a:rPr lang="en-US" sz="950" b="1" dirty="0">
+                <a:solidFill>
+                  <a:srgbClr val="0068B7"/>
+                </a:solidFill>
+                <a:latin typeface="Aptos" pitchFamily="34" charset="0"/>
+                <a:ea typeface="Aptos" pitchFamily="34" charset="-122"/>
+                <a:cs typeface="Aptos" pitchFamily="34" charset="-120"/>
+              </a:rPr>
+              <a:t>Module details</a:t>
+            </a:r>
+            <a:endParaRPr lang="en-US" sz="950" dirty="0"/>
+          </a:p>
+        </p:txBody>
+      </p:sp>
+      <p:sp>
+        <p:nvSpPr>
+          <p:cNvPr id="11" name="Text 9"/>
+          <p:cNvSpPr/>
+          <p:nvPr/>
+        </p:nvSpPr>
+        <p:spPr>
+          <a:xfrm>
+            <a:off x="8074152" y="1856232"/>
+            <a:ext cx="2825496" cy="1353312"/>
+          </a:xfrm>
+          <a:prstGeom prst="rect">
+            <a:avLst/>
+          </a:prstGeom>
+          <a:noFill/>
+          <a:ln/>
+        </p:spPr>
+        <p:txBody>
+          <a:bodyPr wrap="square" lIns="0" tIns="0" rIns="0" bIns="0" rtlCol="0" anchor="t">
             <a:normAutofit/>
           </a:bodyPr>
           <a:lstStyle/>
@@ -5771,7 +9010,7 @@
               <a:buNone/>
             </a:pPr>
             <a:r>
-              <a:rPr lang="en-US" sz="1400" dirty="0">
+              <a:rPr lang="en-US" sz="1250" dirty="0">
                 <a:solidFill>
                   <a:srgbClr val="17364A"/>
                 </a:solidFill>
@@ -5779,9 +9018,150 @@
                 <a:ea typeface="Aptos" pitchFamily="34" charset="-122"/>
                 <a:cs typeface="Aptos" pitchFamily="34" charset="-120"/>
               </a:rPr>
-              <a:t>Retrieval-augmented generation, often called RAG, combines generative AI with retrieval from a defined set of documents or data sources. Instead of relying only on a model’s general training, a RAG system searches approved content and uses retrieved material to generate an answer or summary. In public health, RAG may support policy lookup, protocol interpretation, internal help desks, training support, grant review, emergency response, or program knowledge management. RAG can make generative AI more useful and safer when it is designed well. It can ground responses in agency documents, cite sources, and reduce the risk of unsupported answers. However, RAG does not automatically solve hallucination, privacy, access control, outdated guidance, conflicting documents, or poor retrieval. The system is only as reliable as the content collection, search process, permissions, and review workflow. This module teaches learners the core components of RAG and how to evaluate whether a RAG tool is ready for public health use.</a:t>
-            </a:r>
-            <a:endParaRPr lang="en-US" sz="1400" dirty="0"/>
+              <a:t>Level: intermediate/practitioner</a:t>
+            </a:r>
+            <a:endParaRPr lang="en-US" sz="1250" dirty="0"/>
+          </a:p>
+          <a:p>
+            <a:pPr indent="0" marL="0">
+              <a:buNone/>
+            </a:pPr>
+            <a:r>
+              <a:rPr lang="en-US" sz="1250" dirty="0">
+                <a:solidFill>
+                  <a:srgbClr val="17364A"/>
+                </a:solidFill>
+                <a:latin typeface="Aptos" pitchFamily="34" charset="0"/>
+                <a:ea typeface="Aptos" pitchFamily="34" charset="-122"/>
+                <a:cs typeface="Aptos" pitchFamily="34" charset="-120"/>
+              </a:rPr>
+              <a:t>Primary track: Technical Architecture Track</a:t>
+            </a:r>
+            <a:endParaRPr lang="en-US" sz="1250" dirty="0"/>
+          </a:p>
+          <a:p>
+            <a:pPr indent="0" marL="0">
+              <a:buNone/>
+            </a:pPr>
+            <a:r>
+              <a:rPr lang="en-US" sz="1250" dirty="0">
+                <a:solidFill>
+                  <a:srgbClr val="17364A"/>
+                </a:solidFill>
+                <a:latin typeface="Aptos" pitchFamily="34" charset="0"/>
+                <a:ea typeface="Aptos" pitchFamily="34" charset="-122"/>
+                <a:cs typeface="Aptos" pitchFamily="34" charset="-120"/>
+              </a:rPr>
+              <a:t>Appears in tracks: analytics-modeling</a:t>
+            </a:r>
+            <a:endParaRPr lang="en-US" sz="1250" dirty="0"/>
+          </a:p>
+        </p:txBody>
+      </p:sp>
+      <p:sp>
+        <p:nvSpPr>
+          <p:cNvPr id="12" name="Shape 10"/>
+          <p:cNvSpPr/>
+          <p:nvPr/>
+        </p:nvSpPr>
+        <p:spPr>
+          <a:xfrm>
+            <a:off x="7909560" y="3611880"/>
+            <a:ext cx="3154680" cy="1783080"/>
+          </a:xfrm>
+          <a:prstGeom prst="roundRect">
+            <a:avLst>
+              <a:gd name="adj" fmla="val 6154"/>
+            </a:avLst>
+          </a:prstGeom>
+          <a:solidFill>
+            <a:srgbClr val="EEF8ED"/>
+          </a:solidFill>
+          <a:ln w="12700">
+            <a:solidFill>
+              <a:srgbClr val="B9D7E6"/>
+            </a:solidFill>
+            <a:prstDash val="solid"/>
+          </a:ln>
+        </p:spPr>
+      </p:sp>
+      <p:sp>
+        <p:nvSpPr>
+          <p:cNvPr id="13" name="Text 11"/>
+          <p:cNvSpPr/>
+          <p:nvPr/>
+        </p:nvSpPr>
+        <p:spPr>
+          <a:xfrm>
+            <a:off x="8074152" y="3758184"/>
+            <a:ext cx="2825496" cy="201168"/>
+          </a:xfrm>
+          <a:prstGeom prst="rect">
+            <a:avLst/>
+          </a:prstGeom>
+          <a:noFill/>
+          <a:ln/>
+        </p:spPr>
+        <p:txBody>
+          <a:bodyPr wrap="square" lIns="0" tIns="0" rIns="0" bIns="0" rtlCol="0" anchor="ctr"/>
+          <a:lstStyle/>
+          <a:p>
+            <a:pPr indent="0" marL="0">
+              <a:buNone/>
+            </a:pPr>
+            <a:r>
+              <a:rPr lang="en-US" sz="950" b="1" dirty="0">
+                <a:solidFill>
+                  <a:srgbClr val="0068B7"/>
+                </a:solidFill>
+                <a:latin typeface="Aptos" pitchFamily="34" charset="0"/>
+                <a:ea typeface="Aptos" pitchFamily="34" charset="-122"/>
+                <a:cs typeface="Aptos" pitchFamily="34" charset="-120"/>
+              </a:rPr>
+              <a:t>Learning approach</a:t>
+            </a:r>
+            <a:endParaRPr lang="en-US" sz="950" dirty="0"/>
+          </a:p>
+        </p:txBody>
+      </p:sp>
+      <p:sp>
+        <p:nvSpPr>
+          <p:cNvPr id="14" name="Text 12"/>
+          <p:cNvSpPr/>
+          <p:nvPr/>
+        </p:nvSpPr>
+        <p:spPr>
+          <a:xfrm>
+            <a:off x="8074152" y="4050792"/>
+            <a:ext cx="2825496" cy="1216152"/>
+          </a:xfrm>
+          <a:prstGeom prst="rect">
+            <a:avLst/>
+          </a:prstGeom>
+          <a:noFill/>
+          <a:ln/>
+        </p:spPr>
+        <p:txBody>
+          <a:bodyPr wrap="square" lIns="0" tIns="0" rIns="0" bIns="0" rtlCol="0" anchor="t">
+            <a:normAutofit/>
+          </a:bodyPr>
+          <a:lstStyle/>
+          <a:p>
+            <a:pPr indent="0" marL="0">
+              <a:buNone/>
+            </a:pPr>
+            <a:r>
+              <a:rPr lang="en-US" sz="1250" dirty="0">
+                <a:solidFill>
+                  <a:srgbClr val="17364A"/>
+                </a:solidFill>
+                <a:latin typeface="Aptos" pitchFamily="34" charset="0"/>
+                <a:ea typeface="Aptos" pitchFamily="34" charset="-122"/>
+                <a:cs typeface="Aptos" pitchFamily="34" charset="-120"/>
+              </a:rPr>
+              <a:t>Review the core ideas, complete the practical exercise, check your understanding, and use the related plays and tools to apply the lesson.</a:t>
+            </a:r>
+            <a:endParaRPr lang="en-US" sz="1250" dirty="0"/>
           </a:p>
         </p:txBody>
       </p:sp>
@@ -5844,7 +9224,32 @@
       </p:sp>
       <p:sp>
         <p:nvSpPr>
-          <p:cNvPr id="3" name="Text 1"/>
+          <p:cNvPr id="3" name="Shape 1"/>
+          <p:cNvSpPr/>
+          <p:nvPr/>
+        </p:nvSpPr>
+        <p:spPr>
+          <a:xfrm>
+            <a:off x="0" y="164592"/>
+            <a:ext cx="146304" cy="6693408"/>
+          </a:xfrm>
+          <a:prstGeom prst="rect">
+            <a:avLst/>
+          </a:prstGeom>
+          <a:solidFill>
+            <a:srgbClr val="2F8A28"/>
+          </a:solidFill>
+          <a:ln w="12700">
+            <a:solidFill>
+              <a:srgbClr val="2F8A28"/>
+            </a:solidFill>
+            <a:prstDash val="solid"/>
+          </a:ln>
+        </p:spPr>
+      </p:sp>
+      <p:sp>
+        <p:nvSpPr>
+          <p:cNvPr id="4" name="Text 2"/>
           <p:cNvSpPr/>
           <p:nvPr/>
         </p:nvSpPr>
@@ -5883,7 +9288,7 @@
       </p:sp>
       <p:sp>
         <p:nvSpPr>
-          <p:cNvPr id="4" name="Text 2"/>
+          <p:cNvPr id="5" name="Text 3"/>
           <p:cNvSpPr/>
           <p:nvPr/>
         </p:nvSpPr>
@@ -5922,7 +9327,7 @@
       </p:sp>
       <p:sp>
         <p:nvSpPr>
-          <p:cNvPr id="5" name="Text 3"/>
+          <p:cNvPr id="6" name="Text 4"/>
           <p:cNvSpPr/>
           <p:nvPr/>
         </p:nvSpPr>
@@ -5961,13 +9366,77 @@
       </p:sp>
       <p:sp>
         <p:nvSpPr>
-          <p:cNvPr id="6" name="Text 4"/>
+          <p:cNvPr id="7" name="Shape 5"/>
           <p:cNvSpPr/>
           <p:nvPr/>
         </p:nvSpPr>
         <p:spPr>
           <a:xfrm>
             <a:off x="640080" y="658368"/>
+            <a:ext cx="420624" cy="420624"/>
+          </a:xfrm>
+          <a:prstGeom prst="ellipse">
+            <a:avLst/>
+          </a:prstGeom>
+          <a:solidFill>
+            <a:srgbClr val="0068B7"/>
+          </a:solidFill>
+          <a:ln w="12700">
+            <a:solidFill>
+              <a:srgbClr val="0068B7"/>
+            </a:solidFill>
+            <a:prstDash val="solid"/>
+          </a:ln>
+        </p:spPr>
+      </p:sp>
+      <p:sp>
+        <p:nvSpPr>
+          <p:cNvPr id="8" name="Text 6"/>
+          <p:cNvSpPr/>
+          <p:nvPr/>
+        </p:nvSpPr>
+        <p:spPr>
+          <a:xfrm>
+            <a:off x="640080" y="731520"/>
+            <a:ext cx="420624" cy="164592"/>
+          </a:xfrm>
+          <a:prstGeom prst="rect">
+            <a:avLst/>
+          </a:prstGeom>
+          <a:noFill/>
+          <a:ln/>
+        </p:spPr>
+        <p:txBody>
+          <a:bodyPr wrap="square" lIns="0" tIns="0" rIns="0" bIns="0" rtlCol="0" anchor="ctr"/>
+          <a:lstStyle/>
+          <a:p>
+            <a:pPr algn="ctr" indent="0" marL="0">
+              <a:buNone/>
+            </a:pPr>
+            <a:r>
+              <a:rPr lang="en-US" sz="1100" b="1" dirty="0">
+                <a:solidFill>
+                  <a:srgbClr val="FFFFFF"/>
+                </a:solidFill>
+                <a:latin typeface="Aptos" pitchFamily="34" charset="0"/>
+                <a:ea typeface="Aptos" pitchFamily="34" charset="-122"/>
+                <a:cs typeface="Aptos" pitchFamily="34" charset="-120"/>
+              </a:rPr>
+              <a:t>11</a:t>
+            </a:r>
+            <a:endParaRPr lang="en-US" sz="1100" dirty="0"/>
+          </a:p>
+        </p:txBody>
+      </p:sp>
+      <p:sp>
+        <p:nvSpPr>
+          <p:cNvPr id="9" name="Text 7"/>
+          <p:cNvSpPr/>
+          <p:nvPr/>
+        </p:nvSpPr>
+        <p:spPr>
+          <a:xfrm>
+            <a:off x="640080" y="621792"/>
             <a:ext cx="10881360" cy="566928"/>
           </a:xfrm>
           <a:prstGeom prst="rect">
@@ -5994,7 +9463,7 @@
                 <a:ea typeface="Aptos Display" pitchFamily="34" charset="-122"/>
                 <a:cs typeface="Aptos Display" pitchFamily="34" charset="-120"/>
               </a:rPr>
-              <a:t>References and Resources</a:t>
+              <a:t>Expected Assignment</a:t>
             </a:r>
             <a:endParaRPr lang="en-US" sz="2700" dirty="0"/>
           </a:p>
@@ -6002,14 +9471,14 @@
       </p:sp>
       <p:sp>
         <p:nvSpPr>
-          <p:cNvPr id="7" name="Text 5"/>
-          <p:cNvSpPr/>
-          <p:nvPr/>
-        </p:nvSpPr>
-        <p:spPr>
-          <a:xfrm>
-            <a:off x="822960" y="1325880"/>
-            <a:ext cx="10378440" cy="4800600"/>
+          <p:cNvPr id="10" name="Text 8"/>
+          <p:cNvSpPr/>
+          <p:nvPr/>
+        </p:nvSpPr>
+        <p:spPr>
+          <a:xfrm>
+            <a:off x="868680" y="1417320"/>
+            <a:ext cx="6675120" cy="4434840"/>
           </a:xfrm>
           <a:prstGeom prst="rect">
             <a:avLst/>
@@ -6024,7 +9493,7 @@
           <a:lstStyle/>
           <a:p>
             <a:r>
-              <a:rPr lang="en-US" sz="1450" dirty="0">
+              <a:rPr lang="en-US" sz="1700" dirty="0">
                 <a:solidFill>
                   <a:srgbClr val="17364A"/>
                 </a:solidFill>
@@ -6032,13 +9501,13 @@
                 <a:ea typeface="Aptos" pitchFamily="34" charset="-122"/>
                 <a:cs typeface="Aptos" pitchFamily="34" charset="-120"/>
               </a:rPr>
-              <a:t>NIST AI RMF Generative AI Profile: https://www.nist.gov/publications/artificial-intelligence-risk-management-framework-generative-artificial-intelligence</a:t>
-            </a:r>
-            <a:endParaRPr lang="en-US" sz="1450" dirty="0"/>
-          </a:p>
-          <a:p>
-            <a:r>
-              <a:rPr lang="en-US" sz="1450" dirty="0">
+              <a:t>RAG readiness checklist</a:t>
+            </a:r>
+            <a:endParaRPr lang="en-US" sz="1700" dirty="0"/>
+          </a:p>
+          <a:p>
+            <a:r>
+              <a:rPr lang="en-US" sz="1700" dirty="0">
                 <a:solidFill>
                   <a:srgbClr val="17364A"/>
                 </a:solidFill>
@@ -6046,13 +9515,1209 @@
                 <a:ea typeface="Aptos" pitchFamily="34" charset="-122"/>
                 <a:cs typeface="Aptos" pitchFamily="34" charset="-120"/>
               </a:rPr>
+              <a:t>Content inventory and ownership table</a:t>
+            </a:r>
+            <a:endParaRPr lang="en-US" sz="1700" dirty="0"/>
+          </a:p>
+          <a:p>
+            <a:r>
+              <a:rPr lang="en-US" sz="1700" dirty="0">
+                <a:solidFill>
+                  <a:srgbClr val="17364A"/>
+                </a:solidFill>
+                <a:latin typeface="Aptos" pitchFamily="34" charset="0"/>
+                <a:ea typeface="Aptos" pitchFamily="34" charset="-122"/>
+                <a:cs typeface="Aptos" pitchFamily="34" charset="-120"/>
+              </a:rPr>
+              <a:t>Retrieval test question set</a:t>
+            </a:r>
+            <a:endParaRPr lang="en-US" sz="1700" dirty="0"/>
+          </a:p>
+          <a:p>
+            <a:r>
+              <a:rPr lang="en-US" sz="1700" dirty="0">
+                <a:solidFill>
+                  <a:srgbClr val="17364A"/>
+                </a:solidFill>
+                <a:latin typeface="Aptos" pitchFamily="34" charset="0"/>
+                <a:ea typeface="Aptos" pitchFamily="34" charset="-122"/>
+                <a:cs typeface="Aptos" pitchFamily="34" charset="-120"/>
+              </a:rPr>
+              <a:t>Citation and source verification protocol</a:t>
+            </a:r>
+            <a:endParaRPr lang="en-US" sz="1700" dirty="0"/>
+          </a:p>
+        </p:txBody>
+      </p:sp>
+      <p:sp>
+        <p:nvSpPr>
+          <p:cNvPr id="11" name="Shape 9"/>
+          <p:cNvSpPr/>
+          <p:nvPr/>
+        </p:nvSpPr>
+        <p:spPr>
+          <a:xfrm>
+            <a:off x="7909560" y="1417320"/>
+            <a:ext cx="3154680" cy="1828800"/>
+          </a:xfrm>
+          <a:prstGeom prst="roundRect">
+            <a:avLst>
+              <a:gd name="adj" fmla="val 6000"/>
+            </a:avLst>
+          </a:prstGeom>
+          <a:solidFill>
+            <a:srgbClr val="EEF8ED"/>
+          </a:solidFill>
+          <a:ln w="12700">
+            <a:solidFill>
+              <a:srgbClr val="B9D7E6"/>
+            </a:solidFill>
+            <a:prstDash val="solid"/>
+          </a:ln>
+        </p:spPr>
+      </p:sp>
+      <p:sp>
+        <p:nvSpPr>
+          <p:cNvPr id="12" name="Text 10"/>
+          <p:cNvSpPr/>
+          <p:nvPr/>
+        </p:nvSpPr>
+        <p:spPr>
+          <a:xfrm>
+            <a:off x="8074152" y="1563624"/>
+            <a:ext cx="2825496" cy="201168"/>
+          </a:xfrm>
+          <a:prstGeom prst="rect">
+            <a:avLst/>
+          </a:prstGeom>
+          <a:noFill/>
+          <a:ln/>
+        </p:spPr>
+        <p:txBody>
+          <a:bodyPr wrap="square" lIns="0" tIns="0" rIns="0" bIns="0" rtlCol="0" anchor="ctr"/>
+          <a:lstStyle/>
+          <a:p>
+            <a:pPr indent="0" marL="0">
+              <a:buNone/>
+            </a:pPr>
+            <a:r>
+              <a:rPr lang="en-US" sz="950" b="1" dirty="0">
+                <a:solidFill>
+                  <a:srgbClr val="0068B7"/>
+                </a:solidFill>
+                <a:latin typeface="Aptos" pitchFamily="34" charset="0"/>
+                <a:ea typeface="Aptos" pitchFamily="34" charset="-122"/>
+                <a:cs typeface="Aptos" pitchFamily="34" charset="-120"/>
+              </a:rPr>
+              <a:t>Key idea</a:t>
+            </a:r>
+            <a:endParaRPr lang="en-US" sz="950" dirty="0"/>
+          </a:p>
+        </p:txBody>
+      </p:sp>
+      <p:sp>
+        <p:nvSpPr>
+          <p:cNvPr id="13" name="Text 11"/>
+          <p:cNvSpPr/>
+          <p:nvPr/>
+        </p:nvSpPr>
+        <p:spPr>
+          <a:xfrm>
+            <a:off x="8074152" y="1856232"/>
+            <a:ext cx="2825496" cy="1261872"/>
+          </a:xfrm>
+          <a:prstGeom prst="rect">
+            <a:avLst/>
+          </a:prstGeom>
+          <a:noFill/>
+          <a:ln/>
+        </p:spPr>
+        <p:txBody>
+          <a:bodyPr wrap="square" lIns="0" tIns="0" rIns="0" bIns="0" rtlCol="0" anchor="t">
+            <a:normAutofit/>
+          </a:bodyPr>
+          <a:lstStyle/>
+          <a:p>
+            <a:pPr indent="0" marL="0">
+              <a:buNone/>
+            </a:pPr>
+            <a:r>
+              <a:rPr lang="en-US" sz="1250" dirty="0">
+                <a:solidFill>
+                  <a:srgbClr val="17364A"/>
+                </a:solidFill>
+                <a:latin typeface="Aptos" pitchFamily="34" charset="0"/>
+                <a:ea typeface="Aptos" pitchFamily="34" charset="-122"/>
+                <a:cs typeface="Aptos" pitchFamily="34" charset="-120"/>
+              </a:rPr>
+              <a:t>RAG readiness checklist</a:t>
+            </a:r>
+            <a:endParaRPr lang="en-US" sz="1250" dirty="0"/>
+          </a:p>
+        </p:txBody>
+      </p:sp>
+      <p:sp>
+        <p:nvSpPr>
+          <p:cNvPr id="14" name="Shape 12"/>
+          <p:cNvSpPr/>
+          <p:nvPr/>
+        </p:nvSpPr>
+        <p:spPr>
+          <a:xfrm>
+            <a:off x="7909560" y="3520440"/>
+            <a:ext cx="3154680" cy="1737360"/>
+          </a:xfrm>
+          <a:prstGeom prst="roundRect">
+            <a:avLst>
+              <a:gd name="adj" fmla="val 6316"/>
+            </a:avLst>
+          </a:prstGeom>
+          <a:solidFill>
+            <a:srgbClr val="EAF6F8"/>
+          </a:solidFill>
+          <a:ln w="12700">
+            <a:solidFill>
+              <a:srgbClr val="B9D7E6"/>
+            </a:solidFill>
+            <a:prstDash val="solid"/>
+          </a:ln>
+        </p:spPr>
+      </p:sp>
+      <p:sp>
+        <p:nvSpPr>
+          <p:cNvPr id="15" name="Text 13"/>
+          <p:cNvSpPr/>
+          <p:nvPr/>
+        </p:nvSpPr>
+        <p:spPr>
+          <a:xfrm>
+            <a:off x="8074152" y="3666744"/>
+            <a:ext cx="2825496" cy="201168"/>
+          </a:xfrm>
+          <a:prstGeom prst="rect">
+            <a:avLst/>
+          </a:prstGeom>
+          <a:noFill/>
+          <a:ln/>
+        </p:spPr>
+        <p:txBody>
+          <a:bodyPr wrap="square" lIns="0" tIns="0" rIns="0" bIns="0" rtlCol="0" anchor="ctr"/>
+          <a:lstStyle/>
+          <a:p>
+            <a:pPr indent="0" marL="0">
+              <a:buNone/>
+            </a:pPr>
+            <a:r>
+              <a:rPr lang="en-US" sz="950" b="1" dirty="0">
+                <a:solidFill>
+                  <a:srgbClr val="0068B7"/>
+                </a:solidFill>
+                <a:latin typeface="Aptos" pitchFamily="34" charset="0"/>
+                <a:ea typeface="Aptos" pitchFamily="34" charset="-122"/>
+                <a:cs typeface="Aptos" pitchFamily="34" charset="-120"/>
+              </a:rPr>
+              <a:t>Use this for</a:t>
+            </a:r>
+            <a:endParaRPr lang="en-US" sz="950" dirty="0"/>
+          </a:p>
+        </p:txBody>
+      </p:sp>
+      <p:sp>
+        <p:nvSpPr>
+          <p:cNvPr id="16" name="Text 14"/>
+          <p:cNvSpPr/>
+          <p:nvPr/>
+        </p:nvSpPr>
+        <p:spPr>
+          <a:xfrm>
+            <a:off x="8074152" y="3959352"/>
+            <a:ext cx="2825496" cy="1170432"/>
+          </a:xfrm>
+          <a:prstGeom prst="rect">
+            <a:avLst/>
+          </a:prstGeom>
+          <a:noFill/>
+          <a:ln/>
+        </p:spPr>
+        <p:txBody>
+          <a:bodyPr wrap="square" lIns="0" tIns="0" rIns="0" bIns="0" rtlCol="0" anchor="t">
+            <a:normAutofit/>
+          </a:bodyPr>
+          <a:lstStyle/>
+          <a:p>
+            <a:pPr indent="0" marL="0">
+              <a:buNone/>
+            </a:pPr>
+            <a:r>
+              <a:rPr lang="en-US" sz="1250" dirty="0">
+                <a:solidFill>
+                  <a:srgbClr val="17364A"/>
+                </a:solidFill>
+                <a:latin typeface="Aptos" pitchFamily="34" charset="0"/>
+                <a:ea typeface="Aptos" pitchFamily="34" charset="-122"/>
+                <a:cs typeface="Aptos" pitchFamily="34" charset="-120"/>
+              </a:rPr>
+              <a:t>Connect the concept to public health decisions, safeguards, documentation, or implementation work.</a:t>
+            </a:r>
+            <a:endParaRPr lang="en-US" sz="1250" dirty="0"/>
+          </a:p>
+        </p:txBody>
+      </p:sp>
+    </p:spTree>
+  </p:cSld>
+  <p:clrMapOvr>
+    <a:masterClrMapping/>
+  </p:clrMapOvr>
+</p:sld>
+</file>
+
+<file path=ppt/slides/slide21.xml><?xml version="1.0" encoding="utf-8"?>
+<p:sld xmlns:a="http://schemas.openxmlformats.org/drawingml/2006/main" xmlns:r="http://schemas.openxmlformats.org/officeDocument/2006/relationships" xmlns:p="http://schemas.openxmlformats.org/presentationml/2006/main">
+  <p:cSld name="Slide 21">
+    <p:bg>
+      <p:bgPr>
+        <a:solidFill>
+          <a:srgbClr val="F7FBFD"/>
+        </a:solidFill>
+      </p:bgPr>
+    </p:bg>
+    <p:spTree>
+      <p:nvGrpSpPr>
+        <p:cNvPr id="1" name=""/>
+        <p:cNvGrpSpPr/>
+        <p:nvPr/>
+      </p:nvGrpSpPr>
+      <p:grpSpPr>
+        <a:xfrm>
+          <a:off x="0" y="0"/>
+          <a:ext cx="0" cy="0"/>
+          <a:chOff x="0" y="0"/>
+          <a:chExt cx="0" cy="0"/>
+        </a:xfrm>
+      </p:grpSpPr>
+      <p:sp>
+        <p:nvSpPr>
+          <p:cNvPr id="2" name="Shape 0"/>
+          <p:cNvSpPr/>
+          <p:nvPr/>
+        </p:nvSpPr>
+        <p:spPr>
+          <a:xfrm>
+            <a:off x="0" y="0"/>
+            <a:ext cx="12191695" cy="164592"/>
+          </a:xfrm>
+          <a:prstGeom prst="rect">
+            <a:avLst/>
+          </a:prstGeom>
+          <a:solidFill>
+            <a:srgbClr val="0068B7"/>
+          </a:solidFill>
+          <a:ln w="12700">
+            <a:solidFill>
+              <a:srgbClr val="0068B7"/>
+            </a:solidFill>
+            <a:prstDash val="solid"/>
+          </a:ln>
+        </p:spPr>
+      </p:sp>
+      <p:sp>
+        <p:nvSpPr>
+          <p:cNvPr id="3" name="Shape 1"/>
+          <p:cNvSpPr/>
+          <p:nvPr/>
+        </p:nvSpPr>
+        <p:spPr>
+          <a:xfrm>
+            <a:off x="0" y="164592"/>
+            <a:ext cx="146304" cy="6693408"/>
+          </a:xfrm>
+          <a:prstGeom prst="rect">
+            <a:avLst/>
+          </a:prstGeom>
+          <a:solidFill>
+            <a:srgbClr val="2F8A28"/>
+          </a:solidFill>
+          <a:ln w="12700">
+            <a:solidFill>
+              <a:srgbClr val="2F8A28"/>
+            </a:solidFill>
+            <a:prstDash val="solid"/>
+          </a:ln>
+        </p:spPr>
+      </p:sp>
+      <p:sp>
+        <p:nvSpPr>
+          <p:cNvPr id="4" name="Text 2"/>
+          <p:cNvSpPr/>
+          <p:nvPr/>
+        </p:nvSpPr>
+        <p:spPr>
+          <a:xfrm>
+            <a:off x="502920" y="292608"/>
+            <a:ext cx="10149840" cy="256032"/>
+          </a:xfrm>
+          <a:prstGeom prst="rect">
+            <a:avLst/>
+          </a:prstGeom>
+          <a:noFill/>
+          <a:ln/>
+        </p:spPr>
+        <p:txBody>
+          <a:bodyPr wrap="square" lIns="0" tIns="0" rIns="0" bIns="0" rtlCol="0" anchor="ctr"/>
+          <a:lstStyle/>
+          <a:p>
+            <a:pPr indent="0" marL="0">
+              <a:buNone/>
+            </a:pPr>
+            <a:r>
+              <a:rPr lang="en-US" sz="900" b="1" dirty="0">
+                <a:solidFill>
+                  <a:srgbClr val="5F7181"/>
+                </a:solidFill>
+                <a:latin typeface="Aptos" pitchFamily="34" charset="0"/>
+                <a:ea typeface="Aptos" pitchFamily="34" charset="-122"/>
+                <a:cs typeface="Aptos" pitchFamily="34" charset="-120"/>
+              </a:rPr>
+              <a:t>Retrieval-Augmented Generation for Public Health Knowledge Work</a:t>
+            </a:r>
+            <a:endParaRPr lang="en-US" sz="900" dirty="0"/>
+          </a:p>
+        </p:txBody>
+      </p:sp>
+      <p:sp>
+        <p:nvSpPr>
+          <p:cNvPr id="5" name="Text 3"/>
+          <p:cNvSpPr/>
+          <p:nvPr/>
+        </p:nvSpPr>
+        <p:spPr>
+          <a:xfrm>
+            <a:off x="502920" y="6537960"/>
+            <a:ext cx="7772400" cy="201168"/>
+          </a:xfrm>
+          <a:prstGeom prst="rect">
+            <a:avLst/>
+          </a:prstGeom>
+          <a:noFill/>
+          <a:ln/>
+        </p:spPr>
+        <p:txBody>
+          <a:bodyPr wrap="square" lIns="0" tIns="0" rIns="0" bIns="0" rtlCol="0" anchor="ctr"/>
+          <a:lstStyle/>
+          <a:p>
+            <a:pPr indent="0" marL="0">
+              <a:buNone/>
+            </a:pPr>
+            <a:r>
+              <a:rPr lang="en-US" sz="800" dirty="0">
+                <a:solidFill>
+                  <a:srgbClr val="5F7181"/>
+                </a:solidFill>
+                <a:latin typeface="Aptos" pitchFamily="34" charset="0"/>
+                <a:ea typeface="Aptos" pitchFamily="34" charset="-122"/>
+                <a:cs typeface="Aptos" pitchFamily="34" charset="-120"/>
+              </a:rPr>
+              <a:t>AI Playbook and Toolkit for Public Health Departments</a:t>
+            </a:r>
+            <a:endParaRPr lang="en-US" sz="800" dirty="0"/>
+          </a:p>
+        </p:txBody>
+      </p:sp>
+      <p:sp>
+        <p:nvSpPr>
+          <p:cNvPr id="6" name="Text 4"/>
+          <p:cNvSpPr/>
+          <p:nvPr/>
+        </p:nvSpPr>
+        <p:spPr>
+          <a:xfrm>
+            <a:off x="9966960" y="6537960"/>
+            <a:ext cx="1645920" cy="201168"/>
+          </a:xfrm>
+          <a:prstGeom prst="rect">
+            <a:avLst/>
+          </a:prstGeom>
+          <a:noFill/>
+          <a:ln/>
+        </p:spPr>
+        <p:txBody>
+          <a:bodyPr wrap="square" lIns="0" tIns="0" rIns="0" bIns="0" rtlCol="0" anchor="ctr"/>
+          <a:lstStyle/>
+          <a:p>
+            <a:pPr algn="r" indent="0" marL="0">
+              <a:buNone/>
+            </a:pPr>
+            <a:r>
+              <a:rPr lang="en-US" sz="800" dirty="0">
+                <a:solidFill>
+                  <a:srgbClr val="5F7181"/>
+                </a:solidFill>
+                <a:latin typeface="Aptos" pitchFamily="34" charset="0"/>
+                <a:ea typeface="Aptos" pitchFamily="34" charset="-122"/>
+                <a:cs typeface="Aptos" pitchFamily="34" charset="-120"/>
+              </a:rPr>
+              <a:t>© Paula Soper</a:t>
+            </a:r>
+            <a:endParaRPr lang="en-US" sz="800" dirty="0"/>
+          </a:p>
+        </p:txBody>
+      </p:sp>
+      <p:sp>
+        <p:nvSpPr>
+          <p:cNvPr id="7" name="Shape 5"/>
+          <p:cNvSpPr/>
+          <p:nvPr/>
+        </p:nvSpPr>
+        <p:spPr>
+          <a:xfrm>
+            <a:off x="640080" y="658368"/>
+            <a:ext cx="420624" cy="420624"/>
+          </a:xfrm>
+          <a:prstGeom prst="ellipse">
+            <a:avLst/>
+          </a:prstGeom>
+          <a:solidFill>
+            <a:srgbClr val="0068B7"/>
+          </a:solidFill>
+          <a:ln w="12700">
+            <a:solidFill>
+              <a:srgbClr val="0068B7"/>
+            </a:solidFill>
+            <a:prstDash val="solid"/>
+          </a:ln>
+        </p:spPr>
+      </p:sp>
+      <p:sp>
+        <p:nvSpPr>
+          <p:cNvPr id="8" name="Text 6"/>
+          <p:cNvSpPr/>
+          <p:nvPr/>
+        </p:nvSpPr>
+        <p:spPr>
+          <a:xfrm>
+            <a:off x="640080" y="731520"/>
+            <a:ext cx="420624" cy="164592"/>
+          </a:xfrm>
+          <a:prstGeom prst="rect">
+            <a:avLst/>
+          </a:prstGeom>
+          <a:noFill/>
+          <a:ln/>
+        </p:spPr>
+        <p:txBody>
+          <a:bodyPr wrap="square" lIns="0" tIns="0" rIns="0" bIns="0" rtlCol="0" anchor="ctr"/>
+          <a:lstStyle/>
+          <a:p>
+            <a:pPr algn="ctr" indent="0" marL="0">
+              <a:buNone/>
+            </a:pPr>
+            <a:r>
+              <a:rPr lang="en-US" sz="1100" b="1" dirty="0">
+                <a:solidFill>
+                  <a:srgbClr val="FFFFFF"/>
+                </a:solidFill>
+                <a:latin typeface="Aptos" pitchFamily="34" charset="0"/>
+                <a:ea typeface="Aptos" pitchFamily="34" charset="-122"/>
+                <a:cs typeface="Aptos" pitchFamily="34" charset="-120"/>
+              </a:rPr>
+              <a:t>12</a:t>
+            </a:r>
+            <a:endParaRPr lang="en-US" sz="1100" dirty="0"/>
+          </a:p>
+        </p:txBody>
+      </p:sp>
+      <p:sp>
+        <p:nvSpPr>
+          <p:cNvPr id="9" name="Text 7"/>
+          <p:cNvSpPr/>
+          <p:nvPr/>
+        </p:nvSpPr>
+        <p:spPr>
+          <a:xfrm>
+            <a:off x="640080" y="621792"/>
+            <a:ext cx="10881360" cy="566928"/>
+          </a:xfrm>
+          <a:prstGeom prst="rect">
+            <a:avLst/>
+          </a:prstGeom>
+          <a:noFill/>
+          <a:ln/>
+        </p:spPr>
+        <p:txBody>
+          <a:bodyPr wrap="square" lIns="0" tIns="0" rIns="0" bIns="0" rtlCol="0" anchor="ctr">
+            <a:normAutofit/>
+          </a:bodyPr>
+          <a:lstStyle/>
+          <a:p>
+            <a:pPr indent="0" marL="0">
+              <a:buNone/>
+            </a:pPr>
+            <a:r>
+              <a:rPr lang="en-US" sz="2700" b="1" dirty="0">
+                <a:solidFill>
+                  <a:srgbClr val="003A63"/>
+                </a:solidFill>
+                <a:latin typeface="Aptos Display" pitchFamily="34" charset="0"/>
+                <a:ea typeface="Aptos Display" pitchFamily="34" charset="-122"/>
+                <a:cs typeface="Aptos Display" pitchFamily="34" charset="-120"/>
+              </a:rPr>
+              <a:t>Knowledge Check</a:t>
+            </a:r>
+            <a:endParaRPr lang="en-US" sz="2700" dirty="0"/>
+          </a:p>
+        </p:txBody>
+      </p:sp>
+      <p:sp>
+        <p:nvSpPr>
+          <p:cNvPr id="10" name="Text 8"/>
+          <p:cNvSpPr/>
+          <p:nvPr/>
+        </p:nvSpPr>
+        <p:spPr>
+          <a:xfrm>
+            <a:off x="868680" y="1417320"/>
+            <a:ext cx="6675120" cy="4434840"/>
+          </a:xfrm>
+          <a:prstGeom prst="rect">
+            <a:avLst/>
+          </a:prstGeom>
+          <a:noFill/>
+          <a:ln/>
+        </p:spPr>
+        <p:txBody>
+          <a:bodyPr wrap="square" lIns="635" tIns="635" rIns="635" bIns="635" rtlCol="0" anchor="t">
+            <a:normAutofit/>
+          </a:bodyPr>
+          <a:lstStyle/>
+          <a:p>
+            <a:r>
+              <a:rPr lang="en-US" sz="1700" dirty="0">
+                <a:solidFill>
+                  <a:srgbClr val="17364A"/>
+                </a:solidFill>
+                <a:latin typeface="Aptos" pitchFamily="34" charset="0"/>
+                <a:ea typeface="Aptos" pitchFamily="34" charset="-122"/>
+                <a:cs typeface="Aptos" pitchFamily="34" charset="-120"/>
+              </a:rPr>
+              <a:t>1. What is RAG?</a:t>
+            </a:r>
+            <a:endParaRPr lang="en-US" sz="1700" dirty="0"/>
+          </a:p>
+          <a:p>
+            <a:r>
+              <a:rPr lang="en-US" sz="1700" dirty="0">
+                <a:solidFill>
+                  <a:srgbClr val="17364A"/>
+                </a:solidFill>
+                <a:latin typeface="Aptos" pitchFamily="34" charset="0"/>
+                <a:ea typeface="Aptos" pitchFamily="34" charset="-122"/>
+                <a:cs typeface="Aptos" pitchFamily="34" charset="-120"/>
+              </a:rPr>
+              <a:t>2. Why does chunking matter?</a:t>
+            </a:r>
+            <a:endParaRPr lang="en-US" sz="1700" dirty="0"/>
+          </a:p>
+          <a:p>
+            <a:r>
+              <a:rPr lang="en-US" sz="1700" dirty="0">
+                <a:solidFill>
+                  <a:srgbClr val="17364A"/>
+                </a:solidFill>
+                <a:latin typeface="Aptos" pitchFamily="34" charset="0"/>
+                <a:ea typeface="Aptos" pitchFamily="34" charset="-122"/>
+                <a:cs typeface="Aptos" pitchFamily="34" charset="-120"/>
+              </a:rPr>
+              <a:t>3. What is a major RAG governance risk?</a:t>
+            </a:r>
+            <a:endParaRPr lang="en-US" sz="1700" dirty="0"/>
+          </a:p>
+          <a:p>
+            <a:r>
+              <a:rPr lang="en-US" sz="1700" dirty="0">
+                <a:solidFill>
+                  <a:srgbClr val="17364A"/>
+                </a:solidFill>
+                <a:latin typeface="Aptos" pitchFamily="34" charset="0"/>
+                <a:ea typeface="Aptos" pitchFamily="34" charset="-122"/>
+                <a:cs typeface="Aptos" pitchFamily="34" charset="-120"/>
+              </a:rPr>
+              <a:t>4. What should a RAG system do when sources are insufficient?</a:t>
+            </a:r>
+            <a:endParaRPr lang="en-US" sz="1700" dirty="0"/>
+          </a:p>
+        </p:txBody>
+      </p:sp>
+      <p:sp>
+        <p:nvSpPr>
+          <p:cNvPr id="11" name="Shape 9"/>
+          <p:cNvSpPr/>
+          <p:nvPr/>
+        </p:nvSpPr>
+        <p:spPr>
+          <a:xfrm>
+            <a:off x="7909560" y="1417320"/>
+            <a:ext cx="3154680" cy="1828800"/>
+          </a:xfrm>
+          <a:prstGeom prst="roundRect">
+            <a:avLst>
+              <a:gd name="adj" fmla="val 6000"/>
+            </a:avLst>
+          </a:prstGeom>
+          <a:solidFill>
+            <a:srgbClr val="EEF8ED"/>
+          </a:solidFill>
+          <a:ln w="12700">
+            <a:solidFill>
+              <a:srgbClr val="B9D7E6"/>
+            </a:solidFill>
+            <a:prstDash val="solid"/>
+          </a:ln>
+        </p:spPr>
+      </p:sp>
+      <p:sp>
+        <p:nvSpPr>
+          <p:cNvPr id="12" name="Text 10"/>
+          <p:cNvSpPr/>
+          <p:nvPr/>
+        </p:nvSpPr>
+        <p:spPr>
+          <a:xfrm>
+            <a:off x="8074152" y="1563624"/>
+            <a:ext cx="2825496" cy="201168"/>
+          </a:xfrm>
+          <a:prstGeom prst="rect">
+            <a:avLst/>
+          </a:prstGeom>
+          <a:noFill/>
+          <a:ln/>
+        </p:spPr>
+        <p:txBody>
+          <a:bodyPr wrap="square" lIns="0" tIns="0" rIns="0" bIns="0" rtlCol="0" anchor="ctr"/>
+          <a:lstStyle/>
+          <a:p>
+            <a:pPr indent="0" marL="0">
+              <a:buNone/>
+            </a:pPr>
+            <a:r>
+              <a:rPr lang="en-US" sz="950" b="1" dirty="0">
+                <a:solidFill>
+                  <a:srgbClr val="0068B7"/>
+                </a:solidFill>
+                <a:latin typeface="Aptos" pitchFamily="34" charset="0"/>
+                <a:ea typeface="Aptos" pitchFamily="34" charset="-122"/>
+                <a:cs typeface="Aptos" pitchFamily="34" charset="-120"/>
+              </a:rPr>
+              <a:t>Key idea</a:t>
+            </a:r>
+            <a:endParaRPr lang="en-US" sz="950" dirty="0"/>
+          </a:p>
+        </p:txBody>
+      </p:sp>
+      <p:sp>
+        <p:nvSpPr>
+          <p:cNvPr id="13" name="Text 11"/>
+          <p:cNvSpPr/>
+          <p:nvPr/>
+        </p:nvSpPr>
+        <p:spPr>
+          <a:xfrm>
+            <a:off x="8074152" y="1856232"/>
+            <a:ext cx="2825496" cy="1261872"/>
+          </a:xfrm>
+          <a:prstGeom prst="rect">
+            <a:avLst/>
+          </a:prstGeom>
+          <a:noFill/>
+          <a:ln/>
+        </p:spPr>
+        <p:txBody>
+          <a:bodyPr wrap="square" lIns="0" tIns="0" rIns="0" bIns="0" rtlCol="0" anchor="t">
+            <a:normAutofit/>
+          </a:bodyPr>
+          <a:lstStyle/>
+          <a:p>
+            <a:pPr indent="0" marL="0">
+              <a:buNone/>
+            </a:pPr>
+            <a:r>
+              <a:rPr lang="en-US" sz="1250" dirty="0">
+                <a:solidFill>
+                  <a:srgbClr val="17364A"/>
+                </a:solidFill>
+                <a:latin typeface="Aptos" pitchFamily="34" charset="0"/>
+                <a:ea typeface="Aptos" pitchFamily="34" charset="-122"/>
+                <a:cs typeface="Aptos" pitchFamily="34" charset="-120"/>
+              </a:rPr>
+              <a:t>1. What is RAG?</a:t>
+            </a:r>
+            <a:endParaRPr lang="en-US" sz="1250" dirty="0"/>
+          </a:p>
+        </p:txBody>
+      </p:sp>
+      <p:sp>
+        <p:nvSpPr>
+          <p:cNvPr id="14" name="Shape 12"/>
+          <p:cNvSpPr/>
+          <p:nvPr/>
+        </p:nvSpPr>
+        <p:spPr>
+          <a:xfrm>
+            <a:off x="7909560" y="3520440"/>
+            <a:ext cx="3154680" cy="1737360"/>
+          </a:xfrm>
+          <a:prstGeom prst="roundRect">
+            <a:avLst>
+              <a:gd name="adj" fmla="val 6316"/>
+            </a:avLst>
+          </a:prstGeom>
+          <a:solidFill>
+            <a:srgbClr val="EAF6F8"/>
+          </a:solidFill>
+          <a:ln w="12700">
+            <a:solidFill>
+              <a:srgbClr val="B9D7E6"/>
+            </a:solidFill>
+            <a:prstDash val="solid"/>
+          </a:ln>
+        </p:spPr>
+      </p:sp>
+      <p:sp>
+        <p:nvSpPr>
+          <p:cNvPr id="15" name="Text 13"/>
+          <p:cNvSpPr/>
+          <p:nvPr/>
+        </p:nvSpPr>
+        <p:spPr>
+          <a:xfrm>
+            <a:off x="8074152" y="3666744"/>
+            <a:ext cx="2825496" cy="201168"/>
+          </a:xfrm>
+          <a:prstGeom prst="rect">
+            <a:avLst/>
+          </a:prstGeom>
+          <a:noFill/>
+          <a:ln/>
+        </p:spPr>
+        <p:txBody>
+          <a:bodyPr wrap="square" lIns="0" tIns="0" rIns="0" bIns="0" rtlCol="0" anchor="ctr"/>
+          <a:lstStyle/>
+          <a:p>
+            <a:pPr indent="0" marL="0">
+              <a:buNone/>
+            </a:pPr>
+            <a:r>
+              <a:rPr lang="en-US" sz="950" b="1" dirty="0">
+                <a:solidFill>
+                  <a:srgbClr val="0068B7"/>
+                </a:solidFill>
+                <a:latin typeface="Aptos" pitchFamily="34" charset="0"/>
+                <a:ea typeface="Aptos" pitchFamily="34" charset="-122"/>
+                <a:cs typeface="Aptos" pitchFamily="34" charset="-120"/>
+              </a:rPr>
+              <a:t>Use this for</a:t>
+            </a:r>
+            <a:endParaRPr lang="en-US" sz="950" dirty="0"/>
+          </a:p>
+        </p:txBody>
+      </p:sp>
+      <p:sp>
+        <p:nvSpPr>
+          <p:cNvPr id="16" name="Text 14"/>
+          <p:cNvSpPr/>
+          <p:nvPr/>
+        </p:nvSpPr>
+        <p:spPr>
+          <a:xfrm>
+            <a:off x="8074152" y="3959352"/>
+            <a:ext cx="2825496" cy="1170432"/>
+          </a:xfrm>
+          <a:prstGeom prst="rect">
+            <a:avLst/>
+          </a:prstGeom>
+          <a:noFill/>
+          <a:ln/>
+        </p:spPr>
+        <p:txBody>
+          <a:bodyPr wrap="square" lIns="0" tIns="0" rIns="0" bIns="0" rtlCol="0" anchor="t">
+            <a:normAutofit/>
+          </a:bodyPr>
+          <a:lstStyle/>
+          <a:p>
+            <a:pPr indent="0" marL="0">
+              <a:buNone/>
+            </a:pPr>
+            <a:r>
+              <a:rPr lang="en-US" sz="1250" dirty="0">
+                <a:solidFill>
+                  <a:srgbClr val="17364A"/>
+                </a:solidFill>
+                <a:latin typeface="Aptos" pitchFamily="34" charset="0"/>
+                <a:ea typeface="Aptos" pitchFamily="34" charset="-122"/>
+                <a:cs typeface="Aptos" pitchFamily="34" charset="-120"/>
+              </a:rPr>
+              <a:t>Connect the concept to public health decisions, safeguards, documentation, or implementation work.</a:t>
+            </a:r>
+            <a:endParaRPr lang="en-US" sz="1250" dirty="0"/>
+          </a:p>
+        </p:txBody>
+      </p:sp>
+    </p:spTree>
+  </p:cSld>
+  <p:clrMapOvr>
+    <a:masterClrMapping/>
+  </p:clrMapOvr>
+</p:sld>
+</file>
+
+<file path=ppt/slides/slide22.xml><?xml version="1.0" encoding="utf-8"?>
+<p:sld xmlns:a="http://schemas.openxmlformats.org/drawingml/2006/main" xmlns:r="http://schemas.openxmlformats.org/officeDocument/2006/relationships" xmlns:p="http://schemas.openxmlformats.org/presentationml/2006/main">
+  <p:cSld name="Slide 22">
+    <p:bg>
+      <p:bgPr>
+        <a:solidFill>
+          <a:srgbClr val="F7FBFD"/>
+        </a:solidFill>
+      </p:bgPr>
+    </p:bg>
+    <p:spTree>
+      <p:nvGrpSpPr>
+        <p:cNvPr id="1" name=""/>
+        <p:cNvGrpSpPr/>
+        <p:nvPr/>
+      </p:nvGrpSpPr>
+      <p:grpSpPr>
+        <a:xfrm>
+          <a:off x="0" y="0"/>
+          <a:ext cx="0" cy="0"/>
+          <a:chOff x="0" y="0"/>
+          <a:chExt cx="0" cy="0"/>
+        </a:xfrm>
+      </p:grpSpPr>
+      <p:sp>
+        <p:nvSpPr>
+          <p:cNvPr id="2" name="Shape 0"/>
+          <p:cNvSpPr/>
+          <p:nvPr/>
+        </p:nvSpPr>
+        <p:spPr>
+          <a:xfrm>
+            <a:off x="0" y="0"/>
+            <a:ext cx="12191695" cy="164592"/>
+          </a:xfrm>
+          <a:prstGeom prst="rect">
+            <a:avLst/>
+          </a:prstGeom>
+          <a:solidFill>
+            <a:srgbClr val="0068B7"/>
+          </a:solidFill>
+          <a:ln w="12700">
+            <a:solidFill>
+              <a:srgbClr val="0068B7"/>
+            </a:solidFill>
+            <a:prstDash val="solid"/>
+          </a:ln>
+        </p:spPr>
+      </p:sp>
+      <p:sp>
+        <p:nvSpPr>
+          <p:cNvPr id="3" name="Shape 1"/>
+          <p:cNvSpPr/>
+          <p:nvPr/>
+        </p:nvSpPr>
+        <p:spPr>
+          <a:xfrm>
+            <a:off x="0" y="164592"/>
+            <a:ext cx="146304" cy="6693408"/>
+          </a:xfrm>
+          <a:prstGeom prst="rect">
+            <a:avLst/>
+          </a:prstGeom>
+          <a:solidFill>
+            <a:srgbClr val="2F8A28"/>
+          </a:solidFill>
+          <a:ln w="12700">
+            <a:solidFill>
+              <a:srgbClr val="2F8A28"/>
+            </a:solidFill>
+            <a:prstDash val="solid"/>
+          </a:ln>
+        </p:spPr>
+      </p:sp>
+      <p:sp>
+        <p:nvSpPr>
+          <p:cNvPr id="4" name="Text 2"/>
+          <p:cNvSpPr/>
+          <p:nvPr/>
+        </p:nvSpPr>
+        <p:spPr>
+          <a:xfrm>
+            <a:off x="502920" y="292608"/>
+            <a:ext cx="10149840" cy="256032"/>
+          </a:xfrm>
+          <a:prstGeom prst="rect">
+            <a:avLst/>
+          </a:prstGeom>
+          <a:noFill/>
+          <a:ln/>
+        </p:spPr>
+        <p:txBody>
+          <a:bodyPr wrap="square" lIns="0" tIns="0" rIns="0" bIns="0" rtlCol="0" anchor="ctr"/>
+          <a:lstStyle/>
+          <a:p>
+            <a:pPr indent="0" marL="0">
+              <a:buNone/>
+            </a:pPr>
+            <a:r>
+              <a:rPr lang="en-US" sz="900" b="1" dirty="0">
+                <a:solidFill>
+                  <a:srgbClr val="5F7181"/>
+                </a:solidFill>
+                <a:latin typeface="Aptos" pitchFamily="34" charset="0"/>
+                <a:ea typeface="Aptos" pitchFamily="34" charset="-122"/>
+                <a:cs typeface="Aptos" pitchFamily="34" charset="-120"/>
+              </a:rPr>
+              <a:t>Retrieval-Augmented Generation for Public Health Knowledge Work</a:t>
+            </a:r>
+            <a:endParaRPr lang="en-US" sz="900" dirty="0"/>
+          </a:p>
+        </p:txBody>
+      </p:sp>
+      <p:sp>
+        <p:nvSpPr>
+          <p:cNvPr id="5" name="Text 3"/>
+          <p:cNvSpPr/>
+          <p:nvPr/>
+        </p:nvSpPr>
+        <p:spPr>
+          <a:xfrm>
+            <a:off x="502920" y="6537960"/>
+            <a:ext cx="7772400" cy="201168"/>
+          </a:xfrm>
+          <a:prstGeom prst="rect">
+            <a:avLst/>
+          </a:prstGeom>
+          <a:noFill/>
+          <a:ln/>
+        </p:spPr>
+        <p:txBody>
+          <a:bodyPr wrap="square" lIns="0" tIns="0" rIns="0" bIns="0" rtlCol="0" anchor="ctr"/>
+          <a:lstStyle/>
+          <a:p>
+            <a:pPr indent="0" marL="0">
+              <a:buNone/>
+            </a:pPr>
+            <a:r>
+              <a:rPr lang="en-US" sz="800" dirty="0">
+                <a:solidFill>
+                  <a:srgbClr val="5F7181"/>
+                </a:solidFill>
+                <a:latin typeface="Aptos" pitchFamily="34" charset="0"/>
+                <a:ea typeface="Aptos" pitchFamily="34" charset="-122"/>
+                <a:cs typeface="Aptos" pitchFamily="34" charset="-120"/>
+              </a:rPr>
+              <a:t>AI Playbook and Toolkit for Public Health Departments</a:t>
+            </a:r>
+            <a:endParaRPr lang="en-US" sz="800" dirty="0"/>
+          </a:p>
+        </p:txBody>
+      </p:sp>
+      <p:sp>
+        <p:nvSpPr>
+          <p:cNvPr id="6" name="Text 4"/>
+          <p:cNvSpPr/>
+          <p:nvPr/>
+        </p:nvSpPr>
+        <p:spPr>
+          <a:xfrm>
+            <a:off x="9966960" y="6537960"/>
+            <a:ext cx="1645920" cy="201168"/>
+          </a:xfrm>
+          <a:prstGeom prst="rect">
+            <a:avLst/>
+          </a:prstGeom>
+          <a:noFill/>
+          <a:ln/>
+        </p:spPr>
+        <p:txBody>
+          <a:bodyPr wrap="square" lIns="0" tIns="0" rIns="0" bIns="0" rtlCol="0" anchor="ctr"/>
+          <a:lstStyle/>
+          <a:p>
+            <a:pPr algn="r" indent="0" marL="0">
+              <a:buNone/>
+            </a:pPr>
+            <a:r>
+              <a:rPr lang="en-US" sz="800" dirty="0">
+                <a:solidFill>
+                  <a:srgbClr val="5F7181"/>
+                </a:solidFill>
+                <a:latin typeface="Aptos" pitchFamily="34" charset="0"/>
+                <a:ea typeface="Aptos" pitchFamily="34" charset="-122"/>
+                <a:cs typeface="Aptos" pitchFamily="34" charset="-120"/>
+              </a:rPr>
+              <a:t>© Paula Soper</a:t>
+            </a:r>
+            <a:endParaRPr lang="en-US" sz="800" dirty="0"/>
+          </a:p>
+        </p:txBody>
+      </p:sp>
+      <p:sp>
+        <p:nvSpPr>
+          <p:cNvPr id="7" name="Shape 5"/>
+          <p:cNvSpPr/>
+          <p:nvPr/>
+        </p:nvSpPr>
+        <p:spPr>
+          <a:xfrm>
+            <a:off x="640080" y="658368"/>
+            <a:ext cx="420624" cy="420624"/>
+          </a:xfrm>
+          <a:prstGeom prst="ellipse">
+            <a:avLst/>
+          </a:prstGeom>
+          <a:solidFill>
+            <a:srgbClr val="0068B7"/>
+          </a:solidFill>
+          <a:ln w="12700">
+            <a:solidFill>
+              <a:srgbClr val="0068B7"/>
+            </a:solidFill>
+            <a:prstDash val="solid"/>
+          </a:ln>
+        </p:spPr>
+      </p:sp>
+      <p:sp>
+        <p:nvSpPr>
+          <p:cNvPr id="8" name="Text 6"/>
+          <p:cNvSpPr/>
+          <p:nvPr/>
+        </p:nvSpPr>
+        <p:spPr>
+          <a:xfrm>
+            <a:off x="640080" y="731520"/>
+            <a:ext cx="420624" cy="164592"/>
+          </a:xfrm>
+          <a:prstGeom prst="rect">
+            <a:avLst/>
+          </a:prstGeom>
+          <a:noFill/>
+          <a:ln/>
+        </p:spPr>
+        <p:txBody>
+          <a:bodyPr wrap="square" lIns="0" tIns="0" rIns="0" bIns="0" rtlCol="0" anchor="ctr"/>
+          <a:lstStyle/>
+          <a:p>
+            <a:pPr algn="ctr" indent="0" marL="0">
+              <a:buNone/>
+            </a:pPr>
+            <a:r>
+              <a:rPr lang="en-US" sz="1100" b="1" dirty="0">
+                <a:solidFill>
+                  <a:srgbClr val="FFFFFF"/>
+                </a:solidFill>
+                <a:latin typeface="Aptos" pitchFamily="34" charset="0"/>
+                <a:ea typeface="Aptos" pitchFamily="34" charset="-122"/>
+                <a:cs typeface="Aptos" pitchFamily="34" charset="-120"/>
+              </a:rPr>
+              <a:t>13</a:t>
+            </a:r>
+            <a:endParaRPr lang="en-US" sz="1100" dirty="0"/>
+          </a:p>
+        </p:txBody>
+      </p:sp>
+      <p:sp>
+        <p:nvSpPr>
+          <p:cNvPr id="9" name="Text 7"/>
+          <p:cNvSpPr/>
+          <p:nvPr/>
+        </p:nvSpPr>
+        <p:spPr>
+          <a:xfrm>
+            <a:off x="640080" y="621792"/>
+            <a:ext cx="10881360" cy="566928"/>
+          </a:xfrm>
+          <a:prstGeom prst="rect">
+            <a:avLst/>
+          </a:prstGeom>
+          <a:noFill/>
+          <a:ln/>
+        </p:spPr>
+        <p:txBody>
+          <a:bodyPr wrap="square" lIns="0" tIns="0" rIns="0" bIns="0" rtlCol="0" anchor="ctr">
+            <a:normAutofit/>
+          </a:bodyPr>
+          <a:lstStyle/>
+          <a:p>
+            <a:pPr indent="0" marL="0">
+              <a:buNone/>
+            </a:pPr>
+            <a:r>
+              <a:rPr lang="en-US" sz="2700" b="1" dirty="0">
+                <a:solidFill>
+                  <a:srgbClr val="003A63"/>
+                </a:solidFill>
+                <a:latin typeface="Aptos Display" pitchFamily="34" charset="0"/>
+                <a:ea typeface="Aptos Display" pitchFamily="34" charset="-122"/>
+                <a:cs typeface="Aptos Display" pitchFamily="34" charset="-120"/>
+              </a:rPr>
+              <a:t>References and Resources</a:t>
+            </a:r>
+            <a:endParaRPr lang="en-US" sz="2700" dirty="0"/>
+          </a:p>
+        </p:txBody>
+      </p:sp>
+      <p:sp>
+        <p:nvSpPr>
+          <p:cNvPr id="10" name="Text 8"/>
+          <p:cNvSpPr/>
+          <p:nvPr/>
+        </p:nvSpPr>
+        <p:spPr>
+          <a:xfrm>
+            <a:off x="868680" y="1417320"/>
+            <a:ext cx="6675120" cy="4434840"/>
+          </a:xfrm>
+          <a:prstGeom prst="rect">
+            <a:avLst/>
+          </a:prstGeom>
+          <a:noFill/>
+          <a:ln/>
+        </p:spPr>
+        <p:txBody>
+          <a:bodyPr wrap="square" lIns="635" tIns="635" rIns="635" bIns="635" rtlCol="0" anchor="t">
+            <a:normAutofit/>
+          </a:bodyPr>
+          <a:lstStyle/>
+          <a:p>
+            <a:r>
+              <a:rPr lang="en-US" sz="1700" dirty="0">
+                <a:solidFill>
+                  <a:srgbClr val="17364A"/>
+                </a:solidFill>
+                <a:latin typeface="Aptos" pitchFamily="34" charset="0"/>
+                <a:ea typeface="Aptos" pitchFamily="34" charset="-122"/>
+                <a:cs typeface="Aptos" pitchFamily="34" charset="-120"/>
+              </a:rPr>
+              <a:t>NIST AI RMF Generative AI Profile:.</a:t>
+            </a:r>
+            <a:endParaRPr lang="en-US" sz="1700" dirty="0"/>
+          </a:p>
+          <a:p>
+            <a:r>
+              <a:rPr lang="en-US" sz="1700" dirty="0">
+                <a:solidFill>
+                  <a:srgbClr val="17364A"/>
+                </a:solidFill>
+                <a:latin typeface="Aptos" pitchFamily="34" charset="0"/>
+                <a:ea typeface="Aptos" pitchFamily="34" charset="-122"/>
+                <a:cs typeface="Aptos" pitchFamily="34" charset="-120"/>
+              </a:rPr>
               <a:t>OWASP Top 10 for Large Language Model Applications: https://owasp.org/www-project-top-10-for-large-language-model-applications/</a:t>
             </a:r>
-            <a:endParaRPr lang="en-US" sz="1450" dirty="0"/>
-          </a:p>
-          <a:p>
-            <a:r>
-              <a:rPr lang="en-US" sz="1450" dirty="0">
+            <a:endParaRPr lang="en-US" sz="1700" dirty="0"/>
+          </a:p>
+          <a:p>
+            <a:r>
+              <a:rPr lang="en-US" sz="1700" dirty="0">
                 <a:solidFill>
                   <a:srgbClr val="17364A"/>
                 </a:solidFill>
@@ -6062,11 +10727,11 @@
               </a:rPr>
               <a:t>NIST Artificial Intelligence Risk Management Framework: https://www.nist.gov/itl/ai-risk-management-framework</a:t>
             </a:r>
-            <a:endParaRPr lang="en-US" sz="1450" dirty="0"/>
-          </a:p>
-          <a:p>
-            <a:r>
-              <a:rPr lang="en-US" sz="1450" dirty="0">
+            <a:endParaRPr lang="en-US" sz="1700" dirty="0"/>
+          </a:p>
+          <a:p>
+            <a:r>
+              <a:rPr lang="en-US" sz="1700" dirty="0">
                 <a:solidFill>
                   <a:srgbClr val="17364A"/>
                 </a:solidFill>
@@ -6076,7 +10741,221 @@
               </a:rPr>
               <a:t>ONC USCDI: https://isp.healthit.gov/united-states-core-data-interoperability-uscdi</a:t>
             </a:r>
-            <a:endParaRPr lang="en-US" sz="1450" dirty="0"/>
+            <a:endParaRPr lang="en-US" sz="1700" dirty="0"/>
+          </a:p>
+        </p:txBody>
+      </p:sp>
+      <p:sp>
+        <p:nvSpPr>
+          <p:cNvPr id="11" name="Shape 9"/>
+          <p:cNvSpPr/>
+          <p:nvPr/>
+        </p:nvSpPr>
+        <p:spPr>
+          <a:xfrm>
+            <a:off x="7909560" y="1417320"/>
+            <a:ext cx="3154680" cy="1828800"/>
+          </a:xfrm>
+          <a:prstGeom prst="roundRect">
+            <a:avLst>
+              <a:gd name="adj" fmla="val 6000"/>
+            </a:avLst>
+          </a:prstGeom>
+          <a:solidFill>
+            <a:srgbClr val="EEF8ED"/>
+          </a:solidFill>
+          <a:ln w="12700">
+            <a:solidFill>
+              <a:srgbClr val="B9D7E6"/>
+            </a:solidFill>
+            <a:prstDash val="solid"/>
+          </a:ln>
+        </p:spPr>
+      </p:sp>
+      <p:sp>
+        <p:nvSpPr>
+          <p:cNvPr id="12" name="Text 10"/>
+          <p:cNvSpPr/>
+          <p:nvPr/>
+        </p:nvSpPr>
+        <p:spPr>
+          <a:xfrm>
+            <a:off x="8074152" y="1563624"/>
+            <a:ext cx="2825496" cy="201168"/>
+          </a:xfrm>
+          <a:prstGeom prst="rect">
+            <a:avLst/>
+          </a:prstGeom>
+          <a:noFill/>
+          <a:ln/>
+        </p:spPr>
+        <p:txBody>
+          <a:bodyPr wrap="square" lIns="0" tIns="0" rIns="0" bIns="0" rtlCol="0" anchor="ctr"/>
+          <a:lstStyle/>
+          <a:p>
+            <a:pPr indent="0" marL="0">
+              <a:buNone/>
+            </a:pPr>
+            <a:r>
+              <a:rPr lang="en-US" sz="950" b="1" dirty="0">
+                <a:solidFill>
+                  <a:srgbClr val="0068B7"/>
+                </a:solidFill>
+                <a:latin typeface="Aptos" pitchFamily="34" charset="0"/>
+                <a:ea typeface="Aptos" pitchFamily="34" charset="-122"/>
+                <a:cs typeface="Aptos" pitchFamily="34" charset="-120"/>
+              </a:rPr>
+              <a:t>Key idea</a:t>
+            </a:r>
+            <a:endParaRPr lang="en-US" sz="950" dirty="0"/>
+          </a:p>
+        </p:txBody>
+      </p:sp>
+      <p:sp>
+        <p:nvSpPr>
+          <p:cNvPr id="13" name="Text 11"/>
+          <p:cNvSpPr/>
+          <p:nvPr/>
+        </p:nvSpPr>
+        <p:spPr>
+          <a:xfrm>
+            <a:off x="8074152" y="1856232"/>
+            <a:ext cx="2825496" cy="1261872"/>
+          </a:xfrm>
+          <a:prstGeom prst="rect">
+            <a:avLst/>
+          </a:prstGeom>
+          <a:noFill/>
+          <a:ln/>
+        </p:spPr>
+        <p:txBody>
+          <a:bodyPr wrap="square" lIns="0" tIns="0" rIns="0" bIns="0" rtlCol="0" anchor="t">
+            <a:normAutofit/>
+          </a:bodyPr>
+          <a:lstStyle/>
+          <a:p>
+            <a:pPr indent="0" marL="0">
+              <a:buNone/>
+            </a:pPr>
+            <a:r>
+              <a:rPr lang="en-US" sz="1250" dirty="0">
+                <a:solidFill>
+                  <a:srgbClr val="17364A"/>
+                </a:solidFill>
+                <a:latin typeface="Aptos" pitchFamily="34" charset="0"/>
+                <a:ea typeface="Aptos" pitchFamily="34" charset="-122"/>
+                <a:cs typeface="Aptos" pitchFamily="34" charset="-120"/>
+              </a:rPr>
+              <a:t>NIST AI RMF Generative AI Profile:.</a:t>
+            </a:r>
+            <a:endParaRPr lang="en-US" sz="1250" dirty="0"/>
+          </a:p>
+        </p:txBody>
+      </p:sp>
+      <p:sp>
+        <p:nvSpPr>
+          <p:cNvPr id="14" name="Shape 12"/>
+          <p:cNvSpPr/>
+          <p:nvPr/>
+        </p:nvSpPr>
+        <p:spPr>
+          <a:xfrm>
+            <a:off x="7909560" y="3520440"/>
+            <a:ext cx="3154680" cy="1737360"/>
+          </a:xfrm>
+          <a:prstGeom prst="roundRect">
+            <a:avLst>
+              <a:gd name="adj" fmla="val 6316"/>
+            </a:avLst>
+          </a:prstGeom>
+          <a:solidFill>
+            <a:srgbClr val="EAF6F8"/>
+          </a:solidFill>
+          <a:ln w="12700">
+            <a:solidFill>
+              <a:srgbClr val="B9D7E6"/>
+            </a:solidFill>
+            <a:prstDash val="solid"/>
+          </a:ln>
+        </p:spPr>
+      </p:sp>
+      <p:sp>
+        <p:nvSpPr>
+          <p:cNvPr id="15" name="Text 13"/>
+          <p:cNvSpPr/>
+          <p:nvPr/>
+        </p:nvSpPr>
+        <p:spPr>
+          <a:xfrm>
+            <a:off x="8074152" y="3666744"/>
+            <a:ext cx="2825496" cy="201168"/>
+          </a:xfrm>
+          <a:prstGeom prst="rect">
+            <a:avLst/>
+          </a:prstGeom>
+          <a:noFill/>
+          <a:ln/>
+        </p:spPr>
+        <p:txBody>
+          <a:bodyPr wrap="square" lIns="0" tIns="0" rIns="0" bIns="0" rtlCol="0" anchor="ctr"/>
+          <a:lstStyle/>
+          <a:p>
+            <a:pPr indent="0" marL="0">
+              <a:buNone/>
+            </a:pPr>
+            <a:r>
+              <a:rPr lang="en-US" sz="950" b="1" dirty="0">
+                <a:solidFill>
+                  <a:srgbClr val="0068B7"/>
+                </a:solidFill>
+                <a:latin typeface="Aptos" pitchFamily="34" charset="0"/>
+                <a:ea typeface="Aptos" pitchFamily="34" charset="-122"/>
+                <a:cs typeface="Aptos" pitchFamily="34" charset="-120"/>
+              </a:rPr>
+              <a:t>Use this for</a:t>
+            </a:r>
+            <a:endParaRPr lang="en-US" sz="950" dirty="0"/>
+          </a:p>
+        </p:txBody>
+      </p:sp>
+      <p:sp>
+        <p:nvSpPr>
+          <p:cNvPr id="16" name="Text 14"/>
+          <p:cNvSpPr/>
+          <p:nvPr/>
+        </p:nvSpPr>
+        <p:spPr>
+          <a:xfrm>
+            <a:off x="8074152" y="3959352"/>
+            <a:ext cx="2825496" cy="1170432"/>
+          </a:xfrm>
+          <a:prstGeom prst="rect">
+            <a:avLst/>
+          </a:prstGeom>
+          <a:noFill/>
+          <a:ln/>
+        </p:spPr>
+        <p:txBody>
+          <a:bodyPr wrap="square" lIns="0" tIns="0" rIns="0" bIns="0" rtlCol="0" anchor="t">
+            <a:normAutofit/>
+          </a:bodyPr>
+          <a:lstStyle/>
+          <a:p>
+            <a:pPr indent="0" marL="0">
+              <a:buNone/>
+            </a:pPr>
+            <a:r>
+              <a:rPr lang="en-US" sz="1250" dirty="0">
+                <a:solidFill>
+                  <a:srgbClr val="17364A"/>
+                </a:solidFill>
+                <a:latin typeface="Aptos" pitchFamily="34" charset="0"/>
+                <a:ea typeface="Aptos" pitchFamily="34" charset="-122"/>
+                <a:cs typeface="Aptos" pitchFamily="34" charset="-120"/>
+              </a:rPr>
+              <a:t>Connect the concept to public health decisions, safeguards, documentation, or implementation work.</a:t>
+            </a:r>
+            <a:endParaRPr lang="en-US" sz="1250" dirty="0"/>
           </a:p>
         </p:txBody>
       </p:sp>
@@ -6139,7 +11018,32 @@
       </p:sp>
       <p:sp>
         <p:nvSpPr>
-          <p:cNvPr id="3" name="Text 1"/>
+          <p:cNvPr id="3" name="Shape 1"/>
+          <p:cNvSpPr/>
+          <p:nvPr/>
+        </p:nvSpPr>
+        <p:spPr>
+          <a:xfrm>
+            <a:off x="0" y="164592"/>
+            <a:ext cx="146304" cy="6693408"/>
+          </a:xfrm>
+          <a:prstGeom prst="rect">
+            <a:avLst/>
+          </a:prstGeom>
+          <a:solidFill>
+            <a:srgbClr val="2F8A28"/>
+          </a:solidFill>
+          <a:ln w="12700">
+            <a:solidFill>
+              <a:srgbClr val="2F8A28"/>
+            </a:solidFill>
+            <a:prstDash val="solid"/>
+          </a:ln>
+        </p:spPr>
+      </p:sp>
+      <p:sp>
+        <p:nvSpPr>
+          <p:cNvPr id="4" name="Text 2"/>
           <p:cNvSpPr/>
           <p:nvPr/>
         </p:nvSpPr>
@@ -6178,7 +11082,7 @@
       </p:sp>
       <p:sp>
         <p:nvSpPr>
-          <p:cNvPr id="4" name="Text 2"/>
+          <p:cNvPr id="5" name="Text 3"/>
           <p:cNvSpPr/>
           <p:nvPr/>
         </p:nvSpPr>
@@ -6217,7 +11121,7 @@
       </p:sp>
       <p:sp>
         <p:nvSpPr>
-          <p:cNvPr id="5" name="Text 3"/>
+          <p:cNvPr id="6" name="Text 4"/>
           <p:cNvSpPr/>
           <p:nvPr/>
         </p:nvSpPr>
@@ -6256,7 +11160,7 @@
       </p:sp>
       <p:sp>
         <p:nvSpPr>
-          <p:cNvPr id="6" name="Text 4"/>
+          <p:cNvPr id="7" name="Text 5"/>
           <p:cNvSpPr/>
           <p:nvPr/>
         </p:nvSpPr>
@@ -6289,7 +11193,7 @@
                 <a:ea typeface="Aptos Display" pitchFamily="34" charset="-122"/>
                 <a:cs typeface="Aptos Display" pitchFamily="34" charset="-120"/>
               </a:rPr>
-              <a:t>Learning Objectives</a:t>
+              <a:t>How this module connects to the playbook</a:t>
             </a:r>
             <a:endParaRPr lang="en-US" sz="2700" dirty="0"/>
           </a:p>
@@ -6297,14 +11201,14 @@
       </p:sp>
       <p:sp>
         <p:nvSpPr>
-          <p:cNvPr id="7" name="Text 5"/>
-          <p:cNvSpPr/>
-          <p:nvPr/>
-        </p:nvSpPr>
-        <p:spPr>
-          <a:xfrm>
-            <a:off x="822960" y="1325880"/>
-            <a:ext cx="10378440" cy="4800600"/>
+          <p:cNvPr id="8" name="Text 6"/>
+          <p:cNvSpPr/>
+          <p:nvPr/>
+        </p:nvSpPr>
+        <p:spPr>
+          <a:xfrm>
+            <a:off x="868680" y="1417320"/>
+            <a:ext cx="6903720" cy="4480560"/>
           </a:xfrm>
           <a:prstGeom prst="rect">
             <a:avLst/>
@@ -6319,7 +11223,7 @@
           <a:lstStyle/>
           <a:p>
             <a:r>
-              <a:rPr lang="en-US" sz="1450" dirty="0">
+              <a:rPr lang="en-US" sz="1540" dirty="0">
                 <a:solidFill>
                   <a:srgbClr val="17364A"/>
                 </a:solidFill>
@@ -6327,13 +11231,13 @@
                 <a:ea typeface="Aptos" pitchFamily="34" charset="-122"/>
                 <a:cs typeface="Aptos" pitchFamily="34" charset="-120"/>
               </a:rPr>
-              <a:t>Define retrieval-augmented generation in plain language.</a:t>
-            </a:r>
-            <a:endParaRPr lang="en-US" sz="1450" dirty="0"/>
-          </a:p>
-          <a:p>
-            <a:r>
-              <a:rPr lang="en-US" sz="1450" dirty="0">
+              <a:t>Play 3: Establish AI Governance - This lesson informs Play 3 by helping learners connect the lesson topic to establish ai governance.</a:t>
+            </a:r>
+            <a:endParaRPr lang="en-US" sz="1540" dirty="0"/>
+          </a:p>
+          <a:p>
+            <a:r>
+              <a:rPr lang="en-US" sz="1540" dirty="0">
                 <a:solidFill>
                   <a:srgbClr val="17364A"/>
                 </a:solidFill>
@@ -6341,13 +11245,13 @@
                 <a:ea typeface="Aptos" pitchFamily="34" charset="-122"/>
                 <a:cs typeface="Aptos" pitchFamily="34" charset="-120"/>
               </a:rPr>
-              <a:t>Describe the major components of a RAG system, including document ingestion, chunking, embeddings, vector search, retrieval, generation, and citation.</a:t>
-            </a:r>
-            <a:endParaRPr lang="en-US" sz="1450" dirty="0"/>
-          </a:p>
-          <a:p>
-            <a:r>
-              <a:rPr lang="en-US" sz="1450" dirty="0">
+              <a:t>Play 12: Execute Governance and Oversight - This lesson informs Play 12 by helping learners connect the lesson topic to execute.</a:t>
+            </a:r>
+            <a:endParaRPr lang="en-US" sz="1540" dirty="0"/>
+          </a:p>
+          <a:p>
+            <a:r>
+              <a:rPr lang="en-US" sz="1540" dirty="0">
                 <a:solidFill>
                   <a:srgbClr val="17364A"/>
                 </a:solidFill>
@@ -6355,13 +11259,13 @@
                 <a:ea typeface="Aptos" pitchFamily="34" charset="-122"/>
                 <a:cs typeface="Aptos" pitchFamily="34" charset="-120"/>
               </a:rPr>
-              <a:t>Identify public health use cases where RAG may improve knowledge work.</a:t>
-            </a:r>
-            <a:endParaRPr lang="en-US" sz="1450" dirty="0"/>
-          </a:p>
-          <a:p>
-            <a:r>
-              <a:rPr lang="en-US" sz="1450" dirty="0">
+              <a:t>Play 11: Build and Deploy AI Solutions - This lesson informs Play 11 by helping learners connect the lesson topic to build and deploy.</a:t>
+            </a:r>
+            <a:endParaRPr lang="en-US" sz="1540" dirty="0"/>
+          </a:p>
+          <a:p>
+            <a:r>
+              <a:rPr lang="en-US" sz="1540" dirty="0">
                 <a:solidFill>
                   <a:srgbClr val="17364A"/>
                 </a:solidFill>
@@ -6369,13 +11273,106 @@
                 <a:ea typeface="Aptos" pitchFamily="34" charset="-122"/>
                 <a:cs typeface="Aptos" pitchFamily="34" charset="-120"/>
               </a:rPr>
-              <a:t>Assess risks related to stale content, access control, retrieval quality, hallucination, and source misuse.</a:t>
-            </a:r>
-            <a:endParaRPr lang="en-US" sz="1450" dirty="0"/>
-          </a:p>
-          <a:p>
-            <a:r>
-              <a:rPr lang="en-US" sz="1450" dirty="0">
+              <a:t>Play 1: Vision &amp; Guardrails - This lesson informs Play 1 by helping learners connect the lesson topic to vision &amp; guardrails work in.</a:t>
+            </a:r>
+            <a:endParaRPr lang="en-US" sz="1540" dirty="0"/>
+          </a:p>
+        </p:txBody>
+      </p:sp>
+      <p:sp>
+        <p:nvSpPr>
+          <p:cNvPr id="9" name="Shape 7"/>
+          <p:cNvSpPr/>
+          <p:nvPr/>
+        </p:nvSpPr>
+        <p:spPr>
+          <a:xfrm>
+            <a:off x="8046720" y="1417320"/>
+            <a:ext cx="3063240" cy="2103120"/>
+          </a:xfrm>
+          <a:prstGeom prst="roundRect">
+            <a:avLst>
+              <a:gd name="adj" fmla="val 5217"/>
+            </a:avLst>
+          </a:prstGeom>
+          <a:solidFill>
+            <a:srgbClr val="EEF8ED"/>
+          </a:solidFill>
+          <a:ln w="12700">
+            <a:solidFill>
+              <a:srgbClr val="B9D7E6"/>
+            </a:solidFill>
+            <a:prstDash val="solid"/>
+          </a:ln>
+        </p:spPr>
+      </p:sp>
+      <p:sp>
+        <p:nvSpPr>
+          <p:cNvPr id="10" name="Text 8"/>
+          <p:cNvSpPr/>
+          <p:nvPr/>
+        </p:nvSpPr>
+        <p:spPr>
+          <a:xfrm>
+            <a:off x="8211312" y="1563624"/>
+            <a:ext cx="2734056" cy="201168"/>
+          </a:xfrm>
+          <a:prstGeom prst="rect">
+            <a:avLst/>
+          </a:prstGeom>
+          <a:noFill/>
+          <a:ln/>
+        </p:spPr>
+        <p:txBody>
+          <a:bodyPr wrap="square" lIns="0" tIns="0" rIns="0" bIns="0" rtlCol="0" anchor="ctr"/>
+          <a:lstStyle/>
+          <a:p>
+            <a:pPr indent="0" marL="0">
+              <a:buNone/>
+            </a:pPr>
+            <a:r>
+              <a:rPr lang="en-US" sz="950" b="1" dirty="0">
+                <a:solidFill>
+                  <a:srgbClr val="0068B7"/>
+                </a:solidFill>
+                <a:latin typeface="Aptos" pitchFamily="34" charset="0"/>
+                <a:ea typeface="Aptos" pitchFamily="34" charset="-122"/>
+                <a:cs typeface="Aptos" pitchFamily="34" charset="-120"/>
+              </a:rPr>
+              <a:t>Apply the lesson</a:t>
+            </a:r>
+            <a:endParaRPr lang="en-US" sz="950" dirty="0"/>
+          </a:p>
+        </p:txBody>
+      </p:sp>
+      <p:sp>
+        <p:nvSpPr>
+          <p:cNvPr id="11" name="Text 9"/>
+          <p:cNvSpPr/>
+          <p:nvPr/>
+        </p:nvSpPr>
+        <p:spPr>
+          <a:xfrm>
+            <a:off x="8211312" y="1856232"/>
+            <a:ext cx="2734056" cy="1536192"/>
+          </a:xfrm>
+          <a:prstGeom prst="rect">
+            <a:avLst/>
+          </a:prstGeom>
+          <a:noFill/>
+          <a:ln/>
+        </p:spPr>
+        <p:txBody>
+          <a:bodyPr wrap="square" lIns="0" tIns="0" rIns="0" bIns="0" rtlCol="0" anchor="t">
+            <a:normAutofit/>
+          </a:bodyPr>
+          <a:lstStyle/>
+          <a:p>
+            <a:pPr indent="0" marL="0">
+              <a:buNone/>
+            </a:pPr>
+            <a:r>
+              <a:rPr lang="en-US" sz="1250" dirty="0">
                 <a:solidFill>
                   <a:srgbClr val="17364A"/>
                 </a:solidFill>
@@ -6383,9 +11380,116 @@
                 <a:ea typeface="Aptos" pitchFamily="34" charset="-122"/>
                 <a:cs typeface="Aptos" pitchFamily="34" charset="-120"/>
               </a:rPr>
-              <a:t>Design governance and monitoring requirements for agency RAG systems.</a:t>
-            </a:r>
-            <a:endParaRPr lang="en-US" sz="1450" dirty="0"/>
+              <a:t>Use the related plays to identify decisions, participants, timing, approvals, and documentation needed for responsible implementation.</a:t>
+            </a:r>
+            <a:endParaRPr lang="en-US" sz="1250" dirty="0"/>
+          </a:p>
+        </p:txBody>
+      </p:sp>
+      <p:sp>
+        <p:nvSpPr>
+          <p:cNvPr id="12" name="Shape 10"/>
+          <p:cNvSpPr/>
+          <p:nvPr/>
+        </p:nvSpPr>
+        <p:spPr>
+          <a:xfrm>
+            <a:off x="8046720" y="3794760"/>
+            <a:ext cx="3063240" cy="1508760"/>
+          </a:xfrm>
+          <a:prstGeom prst="roundRect">
+            <a:avLst>
+              <a:gd name="adj" fmla="val 7273"/>
+            </a:avLst>
+          </a:prstGeom>
+          <a:solidFill>
+            <a:srgbClr val="FFF4D9"/>
+          </a:solidFill>
+          <a:ln w="12700">
+            <a:solidFill>
+              <a:srgbClr val="B9D7E6"/>
+            </a:solidFill>
+            <a:prstDash val="solid"/>
+          </a:ln>
+        </p:spPr>
+      </p:sp>
+      <p:sp>
+        <p:nvSpPr>
+          <p:cNvPr id="13" name="Text 11"/>
+          <p:cNvSpPr/>
+          <p:nvPr/>
+        </p:nvSpPr>
+        <p:spPr>
+          <a:xfrm>
+            <a:off x="8211312" y="3941064"/>
+            <a:ext cx="2734056" cy="201168"/>
+          </a:xfrm>
+          <a:prstGeom prst="rect">
+            <a:avLst/>
+          </a:prstGeom>
+          <a:noFill/>
+          <a:ln/>
+        </p:spPr>
+        <p:txBody>
+          <a:bodyPr wrap="square" lIns="0" tIns="0" rIns="0" bIns="0" rtlCol="0" anchor="ctr"/>
+          <a:lstStyle/>
+          <a:p>
+            <a:pPr indent="0" marL="0">
+              <a:buNone/>
+            </a:pPr>
+            <a:r>
+              <a:rPr lang="en-US" sz="950" b="1" dirty="0">
+                <a:solidFill>
+                  <a:srgbClr val="0068B7"/>
+                </a:solidFill>
+                <a:latin typeface="Aptos" pitchFamily="34" charset="0"/>
+                <a:ea typeface="Aptos" pitchFamily="34" charset="-122"/>
+                <a:cs typeface="Aptos" pitchFamily="34" charset="-120"/>
+              </a:rPr>
+              <a:t>Keep in mind</a:t>
+            </a:r>
+            <a:endParaRPr lang="en-US" sz="950" dirty="0"/>
+          </a:p>
+        </p:txBody>
+      </p:sp>
+      <p:sp>
+        <p:nvSpPr>
+          <p:cNvPr id="14" name="Text 12"/>
+          <p:cNvSpPr/>
+          <p:nvPr/>
+        </p:nvSpPr>
+        <p:spPr>
+          <a:xfrm>
+            <a:off x="8211312" y="4233672"/>
+            <a:ext cx="2734056" cy="941832"/>
+          </a:xfrm>
+          <a:prstGeom prst="rect">
+            <a:avLst/>
+          </a:prstGeom>
+          <a:noFill/>
+          <a:ln/>
+        </p:spPr>
+        <p:txBody>
+          <a:bodyPr wrap="square" lIns="0" tIns="0" rIns="0" bIns="0" rtlCol="0" anchor="t">
+            <a:normAutofit/>
+          </a:bodyPr>
+          <a:lstStyle/>
+          <a:p>
+            <a:pPr indent="0" marL="0">
+              <a:buNone/>
+            </a:pPr>
+            <a:r>
+              <a:rPr lang="en-US" sz="1250" dirty="0">
+                <a:solidFill>
+                  <a:srgbClr val="17364A"/>
+                </a:solidFill>
+                <a:latin typeface="Aptos" pitchFamily="34" charset="0"/>
+                <a:ea typeface="Aptos" pitchFamily="34" charset="-122"/>
+                <a:cs typeface="Aptos" pitchFamily="34" charset="-120"/>
+              </a:rPr>
+              <a:t>The playbook connection helps turn training into agency work, not just individual knowledge.</a:t>
+            </a:r>
+            <a:endParaRPr lang="en-US" sz="1250" dirty="0"/>
           </a:p>
         </p:txBody>
       </p:sp>
@@ -6448,7 +11552,32 @@
       </p:sp>
       <p:sp>
         <p:nvSpPr>
-          <p:cNvPr id="3" name="Text 1"/>
+          <p:cNvPr id="3" name="Shape 1"/>
+          <p:cNvSpPr/>
+          <p:nvPr/>
+        </p:nvSpPr>
+        <p:spPr>
+          <a:xfrm>
+            <a:off x="0" y="164592"/>
+            <a:ext cx="146304" cy="6693408"/>
+          </a:xfrm>
+          <a:prstGeom prst="rect">
+            <a:avLst/>
+          </a:prstGeom>
+          <a:solidFill>
+            <a:srgbClr val="2F8A28"/>
+          </a:solidFill>
+          <a:ln w="12700">
+            <a:solidFill>
+              <a:srgbClr val="2F8A28"/>
+            </a:solidFill>
+            <a:prstDash val="solid"/>
+          </a:ln>
+        </p:spPr>
+      </p:sp>
+      <p:sp>
+        <p:nvSpPr>
+          <p:cNvPr id="4" name="Text 2"/>
           <p:cNvSpPr/>
           <p:nvPr/>
         </p:nvSpPr>
@@ -6487,7 +11616,7 @@
       </p:sp>
       <p:sp>
         <p:nvSpPr>
-          <p:cNvPr id="4" name="Text 2"/>
+          <p:cNvPr id="5" name="Text 3"/>
           <p:cNvSpPr/>
           <p:nvPr/>
         </p:nvSpPr>
@@ -6526,7 +11655,7 @@
       </p:sp>
       <p:sp>
         <p:nvSpPr>
-          <p:cNvPr id="5" name="Text 3"/>
+          <p:cNvPr id="6" name="Text 4"/>
           <p:cNvSpPr/>
           <p:nvPr/>
         </p:nvSpPr>
@@ -6565,7 +11694,7 @@
       </p:sp>
       <p:sp>
         <p:nvSpPr>
-          <p:cNvPr id="6" name="Text 4"/>
+          <p:cNvPr id="7" name="Text 5"/>
           <p:cNvSpPr/>
           <p:nvPr/>
         </p:nvSpPr>
@@ -6598,7 +11727,7 @@
                 <a:ea typeface="Aptos Display" pitchFamily="34" charset="-122"/>
                 <a:cs typeface="Aptos Display" pitchFamily="34" charset="-120"/>
               </a:rPr>
-              <a:t>Learning Objectives Continued</a:t>
+              <a:t>Related toolkit resources</a:t>
             </a:r>
             <a:endParaRPr lang="en-US" sz="2700" dirty="0"/>
           </a:p>
@@ -6606,14 +11735,14 @@
       </p:sp>
       <p:sp>
         <p:nvSpPr>
-          <p:cNvPr id="7" name="Text 5"/>
-          <p:cNvSpPr/>
-          <p:nvPr/>
-        </p:nvSpPr>
-        <p:spPr>
-          <a:xfrm>
-            <a:off x="822960" y="1325880"/>
-            <a:ext cx="10378440" cy="4800600"/>
+          <p:cNvPr id="8" name="Text 6"/>
+          <p:cNvSpPr/>
+          <p:nvPr/>
+        </p:nvSpPr>
+        <p:spPr>
+          <a:xfrm>
+            <a:off x="868680" y="1417320"/>
+            <a:ext cx="6903720" cy="4480560"/>
           </a:xfrm>
           <a:prstGeom prst="rect">
             <a:avLst/>
@@ -6628,7 +11757,7 @@
           <a:lstStyle/>
           <a:p>
             <a:r>
-              <a:rPr lang="en-US" sz="1450" dirty="0">
+              <a:rPr lang="en-US" sz="1460" dirty="0">
                 <a:solidFill>
                   <a:srgbClr val="17364A"/>
                 </a:solidFill>
@@ -6636,9 +11765,279 @@
                 <a:ea typeface="Aptos" pitchFamily="34" charset="-122"/>
                 <a:cs typeface="Aptos" pitchFamily="34" charset="-120"/>
               </a:rPr>
-              <a:t>Produce a RAG readiness checklist for a public health knowledge workflow.</a:t>
-            </a:r>
-            <a:endParaRPr lang="en-US" sz="1450" dirty="0"/>
+              <a:t>Tool 16: Incident Response Checklist (Checklist) - Use Incident Response Checklist to translate this lesson into a documented public.</a:t>
+            </a:r>
+            <a:endParaRPr lang="en-US" sz="1460" dirty="0"/>
+          </a:p>
+          <a:p>
+            <a:r>
+              <a:rPr lang="en-US" sz="1460" dirty="0">
+                <a:solidFill>
+                  <a:srgbClr val="17364A"/>
+                </a:solidFill>
+                <a:latin typeface="Aptos" pitchFamily="34" charset="0"/>
+                <a:ea typeface="Aptos" pitchFamily="34" charset="-122"/>
+                <a:cs typeface="Aptos" pitchFamily="34" charset="-120"/>
+              </a:rPr>
+              <a:t>Tool 17: Compliance Audit Checklist (Checklist) - Use Compliance Audit Checklist to translate this lesson into a documented public.</a:t>
+            </a:r>
+            <a:endParaRPr lang="en-US" sz="1460" dirty="0"/>
+          </a:p>
+          <a:p>
+            <a:r>
+              <a:rPr lang="en-US" sz="1460" dirty="0">
+                <a:solidFill>
+                  <a:srgbClr val="17364A"/>
+                </a:solidFill>
+                <a:latin typeface="Aptos" pitchFamily="34" charset="0"/>
+                <a:ea typeface="Aptos" pitchFamily="34" charset="-122"/>
+                <a:cs typeface="Aptos" pitchFamily="34" charset="-120"/>
+              </a:rPr>
+              <a:t>Tool 18: Policy Update &amp; Version Control Log (Log) - Use this tool to complete or strengthen the practical exercise for the module.</a:t>
+            </a:r>
+            <a:endParaRPr lang="en-US" sz="1460" dirty="0"/>
+          </a:p>
+          <a:p>
+            <a:r>
+              <a:rPr lang="en-US" sz="1460" dirty="0">
+                <a:solidFill>
+                  <a:srgbClr val="17364A"/>
+                </a:solidFill>
+                <a:latin typeface="Aptos" pitchFamily="34" charset="0"/>
+                <a:ea typeface="Aptos" pitchFamily="34" charset="-122"/>
+                <a:cs typeface="Aptos" pitchFamily="34" charset="-120"/>
+              </a:rPr>
+              <a:t>Tool 19: Plain-Language AI Public Notice Template (Template) - Use Plain-Language AI Public Notice Template to translate this lesson.</a:t>
+            </a:r>
+            <a:endParaRPr lang="en-US" sz="1460" dirty="0"/>
+          </a:p>
+          <a:p>
+            <a:r>
+              <a:rPr lang="en-US" sz="1460" dirty="0">
+                <a:solidFill>
+                  <a:srgbClr val="17364A"/>
+                </a:solidFill>
+                <a:latin typeface="Aptos" pitchFamily="34" charset="0"/>
+                <a:ea typeface="Aptos" pitchFamily="34" charset="-122"/>
+                <a:cs typeface="Aptos" pitchFamily="34" charset="-120"/>
+              </a:rPr>
+              <a:t>Tool 4: AI Policy Landscape Scan (Worksheet) - Use AI Policy Landscape Scan to translate this lesson into a documented public health.</a:t>
+            </a:r>
+            <a:endParaRPr lang="en-US" sz="1460" dirty="0"/>
+          </a:p>
+        </p:txBody>
+      </p:sp>
+      <p:sp>
+        <p:nvSpPr>
+          <p:cNvPr id="9" name="Shape 7"/>
+          <p:cNvSpPr/>
+          <p:nvPr/>
+        </p:nvSpPr>
+        <p:spPr>
+          <a:xfrm>
+            <a:off x="8046720" y="1417320"/>
+            <a:ext cx="3063240" cy="2103120"/>
+          </a:xfrm>
+          <a:prstGeom prst="roundRect">
+            <a:avLst>
+              <a:gd name="adj" fmla="val 5217"/>
+            </a:avLst>
+          </a:prstGeom>
+          <a:solidFill>
+            <a:srgbClr val="EAF6F8"/>
+          </a:solidFill>
+          <a:ln w="12700">
+            <a:solidFill>
+              <a:srgbClr val="B9D7E6"/>
+            </a:solidFill>
+            <a:prstDash val="solid"/>
+          </a:ln>
+        </p:spPr>
+      </p:sp>
+      <p:sp>
+        <p:nvSpPr>
+          <p:cNvPr id="10" name="Text 8"/>
+          <p:cNvSpPr/>
+          <p:nvPr/>
+        </p:nvSpPr>
+        <p:spPr>
+          <a:xfrm>
+            <a:off x="8211312" y="1563624"/>
+            <a:ext cx="2734056" cy="201168"/>
+          </a:xfrm>
+          <a:prstGeom prst="rect">
+            <a:avLst/>
+          </a:prstGeom>
+          <a:noFill/>
+          <a:ln/>
+        </p:spPr>
+        <p:txBody>
+          <a:bodyPr wrap="square" lIns="0" tIns="0" rIns="0" bIns="0" rtlCol="0" anchor="ctr"/>
+          <a:lstStyle/>
+          <a:p>
+            <a:pPr indent="0" marL="0">
+              <a:buNone/>
+            </a:pPr>
+            <a:r>
+              <a:rPr lang="en-US" sz="950" b="1" dirty="0">
+                <a:solidFill>
+                  <a:srgbClr val="0068B7"/>
+                </a:solidFill>
+                <a:latin typeface="Aptos" pitchFamily="34" charset="0"/>
+                <a:ea typeface="Aptos" pitchFamily="34" charset="-122"/>
+                <a:cs typeface="Aptos" pitchFamily="34" charset="-120"/>
+              </a:rPr>
+              <a:t>Use the tools</a:t>
+            </a:r>
+            <a:endParaRPr lang="en-US" sz="950" dirty="0"/>
+          </a:p>
+        </p:txBody>
+      </p:sp>
+      <p:sp>
+        <p:nvSpPr>
+          <p:cNvPr id="11" name="Text 9"/>
+          <p:cNvSpPr/>
+          <p:nvPr/>
+        </p:nvSpPr>
+        <p:spPr>
+          <a:xfrm>
+            <a:off x="8211312" y="1856232"/>
+            <a:ext cx="2734056" cy="1536192"/>
+          </a:xfrm>
+          <a:prstGeom prst="rect">
+            <a:avLst/>
+          </a:prstGeom>
+          <a:noFill/>
+          <a:ln/>
+        </p:spPr>
+        <p:txBody>
+          <a:bodyPr wrap="square" lIns="0" tIns="0" rIns="0" bIns="0" rtlCol="0" anchor="t">
+            <a:normAutofit/>
+          </a:bodyPr>
+          <a:lstStyle/>
+          <a:p>
+            <a:pPr indent="0" marL="0">
+              <a:buNone/>
+            </a:pPr>
+            <a:r>
+              <a:rPr lang="en-US" sz="1250" dirty="0">
+                <a:solidFill>
+                  <a:srgbClr val="17364A"/>
+                </a:solidFill>
+                <a:latin typeface="Aptos" pitchFamily="34" charset="0"/>
+                <a:ea typeface="Aptos" pitchFamily="34" charset="-122"/>
+                <a:cs typeface="Aptos" pitchFamily="34" charset="-120"/>
+              </a:rPr>
+              <a:t>Use linked tools when your department needs a structured worksheet, template, checklist, review process, or documentation artifact.</a:t>
+            </a:r>
+            <a:endParaRPr lang="en-US" sz="1250" dirty="0"/>
+          </a:p>
+        </p:txBody>
+      </p:sp>
+      <p:sp>
+        <p:nvSpPr>
+          <p:cNvPr id="12" name="Shape 10"/>
+          <p:cNvSpPr/>
+          <p:nvPr/>
+        </p:nvSpPr>
+        <p:spPr>
+          <a:xfrm>
+            <a:off x="8046720" y="3794760"/>
+            <a:ext cx="3063240" cy="1508760"/>
+          </a:xfrm>
+          <a:prstGeom prst="roundRect">
+            <a:avLst>
+              <a:gd name="adj" fmla="val 7273"/>
+            </a:avLst>
+          </a:prstGeom>
+          <a:solidFill>
+            <a:srgbClr val="EEF8ED"/>
+          </a:solidFill>
+          <a:ln w="12700">
+            <a:solidFill>
+              <a:srgbClr val="B9D7E6"/>
+            </a:solidFill>
+            <a:prstDash val="solid"/>
+          </a:ln>
+        </p:spPr>
+      </p:sp>
+      <p:sp>
+        <p:nvSpPr>
+          <p:cNvPr id="13" name="Text 11"/>
+          <p:cNvSpPr/>
+          <p:nvPr/>
+        </p:nvSpPr>
+        <p:spPr>
+          <a:xfrm>
+            <a:off x="8211312" y="3941064"/>
+            <a:ext cx="2734056" cy="201168"/>
+          </a:xfrm>
+          <a:prstGeom prst="rect">
+            <a:avLst/>
+          </a:prstGeom>
+          <a:noFill/>
+          <a:ln/>
+        </p:spPr>
+        <p:txBody>
+          <a:bodyPr wrap="square" lIns="0" tIns="0" rIns="0" bIns="0" rtlCol="0" anchor="ctr"/>
+          <a:lstStyle/>
+          <a:p>
+            <a:pPr indent="0" marL="0">
+              <a:buNone/>
+            </a:pPr>
+            <a:r>
+              <a:rPr lang="en-US" sz="950" b="1" dirty="0">
+                <a:solidFill>
+                  <a:srgbClr val="0068B7"/>
+                </a:solidFill>
+                <a:latin typeface="Aptos" pitchFamily="34" charset="0"/>
+                <a:ea typeface="Aptos" pitchFamily="34" charset="-122"/>
+                <a:cs typeface="Aptos" pitchFamily="34" charset="-120"/>
+              </a:rPr>
+              <a:t>Avoid duplication</a:t>
+            </a:r>
+            <a:endParaRPr lang="en-US" sz="950" dirty="0"/>
+          </a:p>
+        </p:txBody>
+      </p:sp>
+      <p:sp>
+        <p:nvSpPr>
+          <p:cNvPr id="14" name="Text 12"/>
+          <p:cNvSpPr/>
+          <p:nvPr/>
+        </p:nvSpPr>
+        <p:spPr>
+          <a:xfrm>
+            <a:off x="8211312" y="4233672"/>
+            <a:ext cx="2734056" cy="941832"/>
+          </a:xfrm>
+          <a:prstGeom prst="rect">
+            <a:avLst/>
+          </a:prstGeom>
+          <a:noFill/>
+          <a:ln/>
+        </p:spPr>
+        <p:txBody>
+          <a:bodyPr wrap="square" lIns="0" tIns="0" rIns="0" bIns="0" rtlCol="0" anchor="t">
+            <a:normAutofit/>
+          </a:bodyPr>
+          <a:lstStyle/>
+          <a:p>
+            <a:pPr indent="0" marL="0">
+              <a:buNone/>
+            </a:pPr>
+            <a:r>
+              <a:rPr lang="en-US" sz="1250" dirty="0">
+                <a:solidFill>
+                  <a:srgbClr val="17364A"/>
+                </a:solidFill>
+                <a:latin typeface="Aptos" pitchFamily="34" charset="0"/>
+                <a:ea typeface="Aptos" pitchFamily="34" charset="-122"/>
+                <a:cs typeface="Aptos" pitchFamily="34" charset="-120"/>
+              </a:rPr>
+              <a:t>If your department already has a strong equivalent tool, adapt or use the existing process instead of recreating it.</a:t>
+            </a:r>
+            <a:endParaRPr lang="en-US" sz="1250" dirty="0"/>
           </a:p>
         </p:txBody>
       </p:sp>
@@ -6701,7 +12100,32 @@
       </p:sp>
       <p:sp>
         <p:nvSpPr>
-          <p:cNvPr id="3" name="Text 1"/>
+          <p:cNvPr id="3" name="Shape 1"/>
+          <p:cNvSpPr/>
+          <p:nvPr/>
+        </p:nvSpPr>
+        <p:spPr>
+          <a:xfrm>
+            <a:off x="0" y="164592"/>
+            <a:ext cx="146304" cy="6693408"/>
+          </a:xfrm>
+          <a:prstGeom prst="rect">
+            <a:avLst/>
+          </a:prstGeom>
+          <a:solidFill>
+            <a:srgbClr val="2F8A28"/>
+          </a:solidFill>
+          <a:ln w="12700">
+            <a:solidFill>
+              <a:srgbClr val="2F8A28"/>
+            </a:solidFill>
+            <a:prstDash val="solid"/>
+          </a:ln>
+        </p:spPr>
+      </p:sp>
+      <p:sp>
+        <p:nvSpPr>
+          <p:cNvPr id="4" name="Text 2"/>
           <p:cNvSpPr/>
           <p:nvPr/>
         </p:nvSpPr>
@@ -6740,7 +12164,7 @@
       </p:sp>
       <p:sp>
         <p:nvSpPr>
-          <p:cNvPr id="4" name="Text 2"/>
+          <p:cNvPr id="5" name="Text 3"/>
           <p:cNvSpPr/>
           <p:nvPr/>
         </p:nvSpPr>
@@ -6779,7 +12203,7 @@
       </p:sp>
       <p:sp>
         <p:nvSpPr>
-          <p:cNvPr id="5" name="Text 3"/>
+          <p:cNvPr id="6" name="Text 4"/>
           <p:cNvSpPr/>
           <p:nvPr/>
         </p:nvSpPr>
@@ -6818,13 +12242,77 @@
       </p:sp>
       <p:sp>
         <p:nvSpPr>
-          <p:cNvPr id="6" name="Text 4"/>
+          <p:cNvPr id="7" name="Shape 5"/>
           <p:cNvSpPr/>
           <p:nvPr/>
         </p:nvSpPr>
         <p:spPr>
           <a:xfrm>
             <a:off x="640080" y="658368"/>
+            <a:ext cx="420624" cy="420624"/>
+          </a:xfrm>
+          <a:prstGeom prst="ellipse">
+            <a:avLst/>
+          </a:prstGeom>
+          <a:solidFill>
+            <a:srgbClr val="0068B7"/>
+          </a:solidFill>
+          <a:ln w="12700">
+            <a:solidFill>
+              <a:srgbClr val="0068B7"/>
+            </a:solidFill>
+            <a:prstDash val="solid"/>
+          </a:ln>
+        </p:spPr>
+      </p:sp>
+      <p:sp>
+        <p:nvSpPr>
+          <p:cNvPr id="8" name="Text 6"/>
+          <p:cNvSpPr/>
+          <p:nvPr/>
+        </p:nvSpPr>
+        <p:spPr>
+          <a:xfrm>
+            <a:off x="640080" y="731520"/>
+            <a:ext cx="420624" cy="164592"/>
+          </a:xfrm>
+          <a:prstGeom prst="rect">
+            <a:avLst/>
+          </a:prstGeom>
+          <a:noFill/>
+          <a:ln/>
+        </p:spPr>
+        <p:txBody>
+          <a:bodyPr wrap="square" lIns="0" tIns="0" rIns="0" bIns="0" rtlCol="0" anchor="ctr"/>
+          <a:lstStyle/>
+          <a:p>
+            <a:pPr algn="ctr" indent="0" marL="0">
+              <a:buNone/>
+            </a:pPr>
+            <a:r>
+              <a:rPr lang="en-US" sz="1100" b="1" dirty="0">
+                <a:solidFill>
+                  <a:srgbClr val="FFFFFF"/>
+                </a:solidFill>
+                <a:latin typeface="Aptos" pitchFamily="34" charset="0"/>
+                <a:ea typeface="Aptos" pitchFamily="34" charset="-122"/>
+                <a:cs typeface="Aptos" pitchFamily="34" charset="-120"/>
+              </a:rPr>
+              <a:t>1</a:t>
+            </a:r>
+            <a:endParaRPr lang="en-US" sz="1100" dirty="0"/>
+          </a:p>
+        </p:txBody>
+      </p:sp>
+      <p:sp>
+        <p:nvSpPr>
+          <p:cNvPr id="9" name="Text 7"/>
+          <p:cNvSpPr/>
+          <p:nvPr/>
+        </p:nvSpPr>
+        <p:spPr>
+          <a:xfrm>
+            <a:off x="640080" y="621792"/>
             <a:ext cx="10881360" cy="566928"/>
           </a:xfrm>
           <a:prstGeom prst="rect">
@@ -6851,7 +12339,7 @@
                 <a:ea typeface="Aptos Display" pitchFamily="34" charset="-122"/>
                 <a:cs typeface="Aptos Display" pitchFamily="34" charset="-120"/>
               </a:rPr>
-              <a:t>Module Overview</a:t>
+              <a:t>Learning Objectives</a:t>
             </a:r>
             <a:endParaRPr lang="en-US" sz="2700" dirty="0"/>
           </a:p>
@@ -6859,32 +12347,178 @@
       </p:sp>
       <p:sp>
         <p:nvSpPr>
-          <p:cNvPr id="7" name="Text 5"/>
-          <p:cNvSpPr/>
-          <p:nvPr/>
-        </p:nvSpPr>
-        <p:spPr>
-          <a:xfrm>
-            <a:off x="822960" y="1325880"/>
-            <a:ext cx="10378440" cy="4800600"/>
-          </a:xfrm>
-          <a:prstGeom prst="rect">
-            <a:avLst/>
-          </a:prstGeom>
-          <a:noFill/>
-          <a:ln/>
-        </p:spPr>
-        <p:txBody>
-          <a:bodyPr wrap="square" lIns="1016" tIns="1016" rIns="1016" bIns="1016" rtlCol="0" anchor="t">
+          <p:cNvPr id="10" name="Text 8"/>
+          <p:cNvSpPr/>
+          <p:nvPr/>
+        </p:nvSpPr>
+        <p:spPr>
+          <a:xfrm>
+            <a:off x="868680" y="1417320"/>
+            <a:ext cx="6675120" cy="4434840"/>
+          </a:xfrm>
+          <a:prstGeom prst="rect">
+            <a:avLst/>
+          </a:prstGeom>
+          <a:noFill/>
+          <a:ln/>
+        </p:spPr>
+        <p:txBody>
+          <a:bodyPr wrap="square" lIns="635" tIns="635" rIns="635" bIns="635" rtlCol="0" anchor="t">
             <a:normAutofit/>
           </a:bodyPr>
           <a:lstStyle/>
           <a:p>
+            <a:r>
+              <a:rPr lang="en-US" sz="1700" dirty="0">
+                <a:solidFill>
+                  <a:srgbClr val="17364A"/>
+                </a:solidFill>
+                <a:latin typeface="Aptos" pitchFamily="34" charset="0"/>
+                <a:ea typeface="Aptos" pitchFamily="34" charset="-122"/>
+                <a:cs typeface="Aptos" pitchFamily="34" charset="-120"/>
+              </a:rPr>
+              <a:t>Define retrieval-augmented generation in plain language.</a:t>
+            </a:r>
+            <a:endParaRPr lang="en-US" sz="1700" dirty="0"/>
+          </a:p>
+          <a:p>
+            <a:r>
+              <a:rPr lang="en-US" sz="1700" dirty="0">
+                <a:solidFill>
+                  <a:srgbClr val="17364A"/>
+                </a:solidFill>
+                <a:latin typeface="Aptos" pitchFamily="34" charset="0"/>
+                <a:ea typeface="Aptos" pitchFamily="34" charset="-122"/>
+                <a:cs typeface="Aptos" pitchFamily="34" charset="-120"/>
+              </a:rPr>
+              <a:t>Describe the major components of a RAG system, including document ingestion, chunking, embeddings, vector search, retrieval,.</a:t>
+            </a:r>
+            <a:endParaRPr lang="en-US" sz="1700" dirty="0"/>
+          </a:p>
+          <a:p>
+            <a:r>
+              <a:rPr lang="en-US" sz="1700" dirty="0">
+                <a:solidFill>
+                  <a:srgbClr val="17364A"/>
+                </a:solidFill>
+                <a:latin typeface="Aptos" pitchFamily="34" charset="0"/>
+                <a:ea typeface="Aptos" pitchFamily="34" charset="-122"/>
+                <a:cs typeface="Aptos" pitchFamily="34" charset="-120"/>
+              </a:rPr>
+              <a:t>Identify public health use cases where RAG may improve knowledge work.</a:t>
+            </a:r>
+            <a:endParaRPr lang="en-US" sz="1700" dirty="0"/>
+          </a:p>
+          <a:p>
+            <a:r>
+              <a:rPr lang="en-US" sz="1700" dirty="0">
+                <a:solidFill>
+                  <a:srgbClr val="17364A"/>
+                </a:solidFill>
+                <a:latin typeface="Aptos" pitchFamily="34" charset="0"/>
+                <a:ea typeface="Aptos" pitchFamily="34" charset="-122"/>
+                <a:cs typeface="Aptos" pitchFamily="34" charset="-120"/>
+              </a:rPr>
+              <a:t>Assess risks related to stale content, access control, retrieval quality, hallucination, and source misuse.</a:t>
+            </a:r>
+            <a:endParaRPr lang="en-US" sz="1700" dirty="0"/>
+          </a:p>
+        </p:txBody>
+      </p:sp>
+      <p:sp>
+        <p:nvSpPr>
+          <p:cNvPr id="11" name="Shape 9"/>
+          <p:cNvSpPr/>
+          <p:nvPr/>
+        </p:nvSpPr>
+        <p:spPr>
+          <a:xfrm>
+            <a:off x="7909560" y="1417320"/>
+            <a:ext cx="3154680" cy="1828800"/>
+          </a:xfrm>
+          <a:prstGeom prst="roundRect">
+            <a:avLst>
+              <a:gd name="adj" fmla="val 6000"/>
+            </a:avLst>
+          </a:prstGeom>
+          <a:solidFill>
+            <a:srgbClr val="EEF8ED"/>
+          </a:solidFill>
+          <a:ln w="12700">
+            <a:solidFill>
+              <a:srgbClr val="B9D7E6"/>
+            </a:solidFill>
+            <a:prstDash val="solid"/>
+          </a:ln>
+        </p:spPr>
+      </p:sp>
+      <p:sp>
+        <p:nvSpPr>
+          <p:cNvPr id="12" name="Text 10"/>
+          <p:cNvSpPr/>
+          <p:nvPr/>
+        </p:nvSpPr>
+        <p:spPr>
+          <a:xfrm>
+            <a:off x="8074152" y="1563624"/>
+            <a:ext cx="2825496" cy="201168"/>
+          </a:xfrm>
+          <a:prstGeom prst="rect">
+            <a:avLst/>
+          </a:prstGeom>
+          <a:noFill/>
+          <a:ln/>
+        </p:spPr>
+        <p:txBody>
+          <a:bodyPr wrap="square" lIns="0" tIns="0" rIns="0" bIns="0" rtlCol="0" anchor="ctr"/>
+          <a:lstStyle/>
+          <a:p>
             <a:pPr indent="0" marL="0">
               <a:buNone/>
             </a:pPr>
             <a:r>
-              <a:rPr lang="en-US" sz="1420" dirty="0">
+              <a:rPr lang="en-US" sz="950" b="1" dirty="0">
+                <a:solidFill>
+                  <a:srgbClr val="0068B7"/>
+                </a:solidFill>
+                <a:latin typeface="Aptos" pitchFamily="34" charset="0"/>
+                <a:ea typeface="Aptos" pitchFamily="34" charset="-122"/>
+                <a:cs typeface="Aptos" pitchFamily="34" charset="-120"/>
+              </a:rPr>
+              <a:t>Key idea</a:t>
+            </a:r>
+            <a:endParaRPr lang="en-US" sz="950" dirty="0"/>
+          </a:p>
+        </p:txBody>
+      </p:sp>
+      <p:sp>
+        <p:nvSpPr>
+          <p:cNvPr id="13" name="Text 11"/>
+          <p:cNvSpPr/>
+          <p:nvPr/>
+        </p:nvSpPr>
+        <p:spPr>
+          <a:xfrm>
+            <a:off x="8074152" y="1856232"/>
+            <a:ext cx="2825496" cy="1261872"/>
+          </a:xfrm>
+          <a:prstGeom prst="rect">
+            <a:avLst/>
+          </a:prstGeom>
+          <a:noFill/>
+          <a:ln/>
+        </p:spPr>
+        <p:txBody>
+          <a:bodyPr wrap="square" lIns="0" tIns="0" rIns="0" bIns="0" rtlCol="0" anchor="t">
+            <a:normAutofit/>
+          </a:bodyPr>
+          <a:lstStyle/>
+          <a:p>
+            <a:pPr indent="0" marL="0">
+              <a:buNone/>
+            </a:pPr>
+            <a:r>
+              <a:rPr lang="en-US" sz="1250" dirty="0">
                 <a:solidFill>
                   <a:srgbClr val="17364A"/>
                 </a:solidFill>
@@ -6892,9 +12526,116 @@
                 <a:ea typeface="Aptos" pitchFamily="34" charset="-122"/>
                 <a:cs typeface="Aptos" pitchFamily="34" charset="-120"/>
               </a:rPr>
-              <a:t>Retrieval-augmented generation, often called RAG, combines generative AI with retrieval from a defined set of documents or data sources. Instead of relying only on a model’s general training, a RAG system searches approved content and uses retrieved material to generate an answer or summary. In public health, RAG may support policy lookup, protocol interpretation, internal help desks, training support, grant review, emergency response, or program knowledge management. RAG can make generative AI more useful and safer when it is designed well. It can ground responses in agency documents, cite sources, and reduce the risk of unsupported answers. However, RAG does not automatically solve hallucination, privacy, access control, outdated guidance, conflicting documents, or poor retrieval. The system is only as reliable as the content collection, search process, permissions, and review workflow. This module teaches learners the core components of RAG and how to evaluate whether a RAG tool is ready for public health use.</a:t>
-            </a:r>
-            <a:endParaRPr lang="en-US" sz="1420" dirty="0"/>
+              <a:t>Define retrieval-augmented generation in plain language.</a:t>
+            </a:r>
+            <a:endParaRPr lang="en-US" sz="1250" dirty="0"/>
+          </a:p>
+        </p:txBody>
+      </p:sp>
+      <p:sp>
+        <p:nvSpPr>
+          <p:cNvPr id="14" name="Shape 12"/>
+          <p:cNvSpPr/>
+          <p:nvPr/>
+        </p:nvSpPr>
+        <p:spPr>
+          <a:xfrm>
+            <a:off x="7909560" y="3520440"/>
+            <a:ext cx="3154680" cy="1737360"/>
+          </a:xfrm>
+          <a:prstGeom prst="roundRect">
+            <a:avLst>
+              <a:gd name="adj" fmla="val 6316"/>
+            </a:avLst>
+          </a:prstGeom>
+          <a:solidFill>
+            <a:srgbClr val="EAF6F8"/>
+          </a:solidFill>
+          <a:ln w="12700">
+            <a:solidFill>
+              <a:srgbClr val="B9D7E6"/>
+            </a:solidFill>
+            <a:prstDash val="solid"/>
+          </a:ln>
+        </p:spPr>
+      </p:sp>
+      <p:sp>
+        <p:nvSpPr>
+          <p:cNvPr id="15" name="Text 13"/>
+          <p:cNvSpPr/>
+          <p:nvPr/>
+        </p:nvSpPr>
+        <p:spPr>
+          <a:xfrm>
+            <a:off x="8074152" y="3666744"/>
+            <a:ext cx="2825496" cy="201168"/>
+          </a:xfrm>
+          <a:prstGeom prst="rect">
+            <a:avLst/>
+          </a:prstGeom>
+          <a:noFill/>
+          <a:ln/>
+        </p:spPr>
+        <p:txBody>
+          <a:bodyPr wrap="square" lIns="0" tIns="0" rIns="0" bIns="0" rtlCol="0" anchor="ctr"/>
+          <a:lstStyle/>
+          <a:p>
+            <a:pPr indent="0" marL="0">
+              <a:buNone/>
+            </a:pPr>
+            <a:r>
+              <a:rPr lang="en-US" sz="950" b="1" dirty="0">
+                <a:solidFill>
+                  <a:srgbClr val="0068B7"/>
+                </a:solidFill>
+                <a:latin typeface="Aptos" pitchFamily="34" charset="0"/>
+                <a:ea typeface="Aptos" pitchFamily="34" charset="-122"/>
+                <a:cs typeface="Aptos" pitchFamily="34" charset="-120"/>
+              </a:rPr>
+              <a:t>Use this for</a:t>
+            </a:r>
+            <a:endParaRPr lang="en-US" sz="950" dirty="0"/>
+          </a:p>
+        </p:txBody>
+      </p:sp>
+      <p:sp>
+        <p:nvSpPr>
+          <p:cNvPr id="16" name="Text 14"/>
+          <p:cNvSpPr/>
+          <p:nvPr/>
+        </p:nvSpPr>
+        <p:spPr>
+          <a:xfrm>
+            <a:off x="8074152" y="3959352"/>
+            <a:ext cx="2825496" cy="1170432"/>
+          </a:xfrm>
+          <a:prstGeom prst="rect">
+            <a:avLst/>
+          </a:prstGeom>
+          <a:noFill/>
+          <a:ln/>
+        </p:spPr>
+        <p:txBody>
+          <a:bodyPr wrap="square" lIns="0" tIns="0" rIns="0" bIns="0" rtlCol="0" anchor="t">
+            <a:normAutofit/>
+          </a:bodyPr>
+          <a:lstStyle/>
+          <a:p>
+            <a:pPr indent="0" marL="0">
+              <a:buNone/>
+            </a:pPr>
+            <a:r>
+              <a:rPr lang="en-US" sz="1250" dirty="0">
+                <a:solidFill>
+                  <a:srgbClr val="17364A"/>
+                </a:solidFill>
+                <a:latin typeface="Aptos" pitchFamily="34" charset="0"/>
+                <a:ea typeface="Aptos" pitchFamily="34" charset="-122"/>
+                <a:cs typeface="Aptos" pitchFamily="34" charset="-120"/>
+              </a:rPr>
+              <a:t>Connect the concept to public health decisions, safeguards, documentation, or implementation work.</a:t>
+            </a:r>
+            <a:endParaRPr lang="en-US" sz="1250" dirty="0"/>
           </a:p>
         </p:txBody>
       </p:sp>
@@ -6957,7 +12698,32 @@
       </p:sp>
       <p:sp>
         <p:nvSpPr>
-          <p:cNvPr id="3" name="Text 1"/>
+          <p:cNvPr id="3" name="Shape 1"/>
+          <p:cNvSpPr/>
+          <p:nvPr/>
+        </p:nvSpPr>
+        <p:spPr>
+          <a:xfrm>
+            <a:off x="0" y="164592"/>
+            <a:ext cx="146304" cy="6693408"/>
+          </a:xfrm>
+          <a:prstGeom prst="rect">
+            <a:avLst/>
+          </a:prstGeom>
+          <a:solidFill>
+            <a:srgbClr val="2F8A28"/>
+          </a:solidFill>
+          <a:ln w="12700">
+            <a:solidFill>
+              <a:srgbClr val="2F8A28"/>
+            </a:solidFill>
+            <a:prstDash val="solid"/>
+          </a:ln>
+        </p:spPr>
+      </p:sp>
+      <p:sp>
+        <p:nvSpPr>
+          <p:cNvPr id="4" name="Text 2"/>
           <p:cNvSpPr/>
           <p:nvPr/>
         </p:nvSpPr>
@@ -6996,7 +12762,7 @@
       </p:sp>
       <p:sp>
         <p:nvSpPr>
-          <p:cNvPr id="4" name="Text 2"/>
+          <p:cNvPr id="5" name="Text 3"/>
           <p:cNvSpPr/>
           <p:nvPr/>
         </p:nvSpPr>
@@ -7035,7 +12801,7 @@
       </p:sp>
       <p:sp>
         <p:nvSpPr>
-          <p:cNvPr id="5" name="Text 3"/>
+          <p:cNvPr id="6" name="Text 4"/>
           <p:cNvSpPr/>
           <p:nvPr/>
         </p:nvSpPr>
@@ -7074,7 +12840,7 @@
       </p:sp>
       <p:sp>
         <p:nvSpPr>
-          <p:cNvPr id="6" name="Text 4"/>
+          <p:cNvPr id="7" name="Text 5"/>
           <p:cNvSpPr/>
           <p:nvPr/>
         </p:nvSpPr>
@@ -7107,7 +12873,7 @@
                 <a:ea typeface="Aptos Display" pitchFamily="34" charset="-122"/>
                 <a:cs typeface="Aptos Display" pitchFamily="34" charset="-120"/>
               </a:rPr>
-              <a:t>Why This Topic Matters for Public Health AI</a:t>
+              <a:t>Learning Objectives Continued</a:t>
             </a:r>
             <a:endParaRPr lang="en-US" sz="2700" dirty="0"/>
           </a:p>
@@ -7115,32 +12881,136 @@
       </p:sp>
       <p:sp>
         <p:nvSpPr>
-          <p:cNvPr id="7" name="Text 5"/>
-          <p:cNvSpPr/>
-          <p:nvPr/>
-        </p:nvSpPr>
-        <p:spPr>
-          <a:xfrm>
-            <a:off x="822960" y="1325880"/>
-            <a:ext cx="10378440" cy="4800600"/>
-          </a:xfrm>
-          <a:prstGeom prst="rect">
-            <a:avLst/>
-          </a:prstGeom>
-          <a:noFill/>
-          <a:ln/>
-        </p:spPr>
-        <p:txBody>
-          <a:bodyPr wrap="square" lIns="1016" tIns="1016" rIns="1016" bIns="1016" rtlCol="0" anchor="t">
+          <p:cNvPr id="8" name="Text 6"/>
+          <p:cNvSpPr/>
+          <p:nvPr/>
+        </p:nvSpPr>
+        <p:spPr>
+          <a:xfrm>
+            <a:off x="868680" y="1417320"/>
+            <a:ext cx="6675120" cy="4434840"/>
+          </a:xfrm>
+          <a:prstGeom prst="rect">
+            <a:avLst/>
+          </a:prstGeom>
+          <a:noFill/>
+          <a:ln/>
+        </p:spPr>
+        <p:txBody>
+          <a:bodyPr wrap="square" lIns="635" tIns="635" rIns="635" bIns="635" rtlCol="0" anchor="t">
             <a:normAutofit/>
           </a:bodyPr>
           <a:lstStyle/>
           <a:p>
+            <a:r>
+              <a:rPr lang="en-US" sz="1700" dirty="0">
+                <a:solidFill>
+                  <a:srgbClr val="17364A"/>
+                </a:solidFill>
+                <a:latin typeface="Aptos" pitchFamily="34" charset="0"/>
+                <a:ea typeface="Aptos" pitchFamily="34" charset="-122"/>
+                <a:cs typeface="Aptos" pitchFamily="34" charset="-120"/>
+              </a:rPr>
+              <a:t>Produce a RAG readiness checklist for a public health knowledge workflow.</a:t>
+            </a:r>
+            <a:endParaRPr lang="en-US" sz="1700" dirty="0"/>
+          </a:p>
+        </p:txBody>
+      </p:sp>
+      <p:sp>
+        <p:nvSpPr>
+          <p:cNvPr id="9" name="Shape 7"/>
+          <p:cNvSpPr/>
+          <p:nvPr/>
+        </p:nvSpPr>
+        <p:spPr>
+          <a:xfrm>
+            <a:off x="7909560" y="1417320"/>
+            <a:ext cx="3154680" cy="1828800"/>
+          </a:xfrm>
+          <a:prstGeom prst="roundRect">
+            <a:avLst>
+              <a:gd name="adj" fmla="val 6000"/>
+            </a:avLst>
+          </a:prstGeom>
+          <a:solidFill>
+            <a:srgbClr val="EEF8ED"/>
+          </a:solidFill>
+          <a:ln w="12700">
+            <a:solidFill>
+              <a:srgbClr val="B9D7E6"/>
+            </a:solidFill>
+            <a:prstDash val="solid"/>
+          </a:ln>
+        </p:spPr>
+      </p:sp>
+      <p:sp>
+        <p:nvSpPr>
+          <p:cNvPr id="10" name="Text 8"/>
+          <p:cNvSpPr/>
+          <p:nvPr/>
+        </p:nvSpPr>
+        <p:spPr>
+          <a:xfrm>
+            <a:off x="8074152" y="1563624"/>
+            <a:ext cx="2825496" cy="201168"/>
+          </a:xfrm>
+          <a:prstGeom prst="rect">
+            <a:avLst/>
+          </a:prstGeom>
+          <a:noFill/>
+          <a:ln/>
+        </p:spPr>
+        <p:txBody>
+          <a:bodyPr wrap="square" lIns="0" tIns="0" rIns="0" bIns="0" rtlCol="0" anchor="ctr"/>
+          <a:lstStyle/>
+          <a:p>
             <a:pPr indent="0" marL="0">
               <a:buNone/>
             </a:pPr>
             <a:r>
-              <a:rPr lang="en-US" sz="1420" dirty="0">
+              <a:rPr lang="en-US" sz="950" b="1" dirty="0">
+                <a:solidFill>
+                  <a:srgbClr val="0068B7"/>
+                </a:solidFill>
+                <a:latin typeface="Aptos" pitchFamily="34" charset="0"/>
+                <a:ea typeface="Aptos" pitchFamily="34" charset="-122"/>
+                <a:cs typeface="Aptos" pitchFamily="34" charset="-120"/>
+              </a:rPr>
+              <a:t>Key idea</a:t>
+            </a:r>
+            <a:endParaRPr lang="en-US" sz="950" dirty="0"/>
+          </a:p>
+        </p:txBody>
+      </p:sp>
+      <p:sp>
+        <p:nvSpPr>
+          <p:cNvPr id="11" name="Text 9"/>
+          <p:cNvSpPr/>
+          <p:nvPr/>
+        </p:nvSpPr>
+        <p:spPr>
+          <a:xfrm>
+            <a:off x="8074152" y="1856232"/>
+            <a:ext cx="2825496" cy="1261872"/>
+          </a:xfrm>
+          <a:prstGeom prst="rect">
+            <a:avLst/>
+          </a:prstGeom>
+          <a:noFill/>
+          <a:ln/>
+        </p:spPr>
+        <p:txBody>
+          <a:bodyPr wrap="square" lIns="0" tIns="0" rIns="0" bIns="0" rtlCol="0" anchor="t">
+            <a:normAutofit/>
+          </a:bodyPr>
+          <a:lstStyle/>
+          <a:p>
+            <a:pPr indent="0" marL="0">
+              <a:buNone/>
+            </a:pPr>
+            <a:r>
+              <a:rPr lang="en-US" sz="1250" dirty="0">
                 <a:solidFill>
                   <a:srgbClr val="17364A"/>
                 </a:solidFill>
@@ -7148,9 +13018,116 @@
                 <a:ea typeface="Aptos" pitchFamily="34" charset="-122"/>
                 <a:cs typeface="Aptos" pitchFamily="34" charset="-120"/>
               </a:rPr>
-              <a:t>RAG matters because public health agencies manage large collections of guidance, protocols, policies, contracts, plans, reports, forms, FAQs, and training materials. Staff may spend substantial time searching for answers across shared drives, websites, portals, and outdated files. A well-designed RAG system can help users find relevant guidance and produce concise, source-linked answers. The public health value of RAG depends on governance. If a RAG tool includes outdated guidance, draft policies, documents outside a user’s permission level, or conflicting versions, it may generate misleading answers. If it fails to retrieve the most relevant source, the generated answer may be incomplete or wrong. RAG improves the grounding problem only when the content collection and retrieval process are managed carefully. RAG is especially important for responsible AI because it offers a middle path between generic public AI tools and fully custom systems. Agencies can build assistants around approved content, but they must define content ownership, update schedules, access rules, citation requirements, testing, monitoring, and user responsibilities.</a:t>
-            </a:r>
-            <a:endParaRPr lang="en-US" sz="1420" dirty="0"/>
+              <a:t>Produce a RAG readiness checklist for a public health knowledge workflow.</a:t>
+            </a:r>
+            <a:endParaRPr lang="en-US" sz="1250" dirty="0"/>
+          </a:p>
+        </p:txBody>
+      </p:sp>
+      <p:sp>
+        <p:nvSpPr>
+          <p:cNvPr id="12" name="Shape 10"/>
+          <p:cNvSpPr/>
+          <p:nvPr/>
+        </p:nvSpPr>
+        <p:spPr>
+          <a:xfrm>
+            <a:off x="7909560" y="3520440"/>
+            <a:ext cx="3154680" cy="1737360"/>
+          </a:xfrm>
+          <a:prstGeom prst="roundRect">
+            <a:avLst>
+              <a:gd name="adj" fmla="val 6316"/>
+            </a:avLst>
+          </a:prstGeom>
+          <a:solidFill>
+            <a:srgbClr val="EAF6F8"/>
+          </a:solidFill>
+          <a:ln w="12700">
+            <a:solidFill>
+              <a:srgbClr val="B9D7E6"/>
+            </a:solidFill>
+            <a:prstDash val="solid"/>
+          </a:ln>
+        </p:spPr>
+      </p:sp>
+      <p:sp>
+        <p:nvSpPr>
+          <p:cNvPr id="13" name="Text 11"/>
+          <p:cNvSpPr/>
+          <p:nvPr/>
+        </p:nvSpPr>
+        <p:spPr>
+          <a:xfrm>
+            <a:off x="8074152" y="3666744"/>
+            <a:ext cx="2825496" cy="201168"/>
+          </a:xfrm>
+          <a:prstGeom prst="rect">
+            <a:avLst/>
+          </a:prstGeom>
+          <a:noFill/>
+          <a:ln/>
+        </p:spPr>
+        <p:txBody>
+          <a:bodyPr wrap="square" lIns="0" tIns="0" rIns="0" bIns="0" rtlCol="0" anchor="ctr"/>
+          <a:lstStyle/>
+          <a:p>
+            <a:pPr indent="0" marL="0">
+              <a:buNone/>
+            </a:pPr>
+            <a:r>
+              <a:rPr lang="en-US" sz="950" b="1" dirty="0">
+                <a:solidFill>
+                  <a:srgbClr val="0068B7"/>
+                </a:solidFill>
+                <a:latin typeface="Aptos" pitchFamily="34" charset="0"/>
+                <a:ea typeface="Aptos" pitchFamily="34" charset="-122"/>
+                <a:cs typeface="Aptos" pitchFamily="34" charset="-120"/>
+              </a:rPr>
+              <a:t>Use this for</a:t>
+            </a:r>
+            <a:endParaRPr lang="en-US" sz="950" dirty="0"/>
+          </a:p>
+        </p:txBody>
+      </p:sp>
+      <p:sp>
+        <p:nvSpPr>
+          <p:cNvPr id="14" name="Text 12"/>
+          <p:cNvSpPr/>
+          <p:nvPr/>
+        </p:nvSpPr>
+        <p:spPr>
+          <a:xfrm>
+            <a:off x="8074152" y="3959352"/>
+            <a:ext cx="2825496" cy="1170432"/>
+          </a:xfrm>
+          <a:prstGeom prst="rect">
+            <a:avLst/>
+          </a:prstGeom>
+          <a:noFill/>
+          <a:ln/>
+        </p:spPr>
+        <p:txBody>
+          <a:bodyPr wrap="square" lIns="0" tIns="0" rIns="0" bIns="0" rtlCol="0" anchor="t">
+            <a:normAutofit/>
+          </a:bodyPr>
+          <a:lstStyle/>
+          <a:p>
+            <a:pPr indent="0" marL="0">
+              <a:buNone/>
+            </a:pPr>
+            <a:r>
+              <a:rPr lang="en-US" sz="1250" dirty="0">
+                <a:solidFill>
+                  <a:srgbClr val="17364A"/>
+                </a:solidFill>
+                <a:latin typeface="Aptos" pitchFamily="34" charset="0"/>
+                <a:ea typeface="Aptos" pitchFamily="34" charset="-122"/>
+                <a:cs typeface="Aptos" pitchFamily="34" charset="-120"/>
+              </a:rPr>
+              <a:t>Connect the concept to public health decisions, safeguards, documentation, or implementation work.</a:t>
+            </a:r>
+            <a:endParaRPr lang="en-US" sz="1250" dirty="0"/>
           </a:p>
         </p:txBody>
       </p:sp>
@@ -7213,7 +13190,32 @@
       </p:sp>
       <p:sp>
         <p:nvSpPr>
-          <p:cNvPr id="3" name="Text 1"/>
+          <p:cNvPr id="3" name="Shape 1"/>
+          <p:cNvSpPr/>
+          <p:nvPr/>
+        </p:nvSpPr>
+        <p:spPr>
+          <a:xfrm>
+            <a:off x="0" y="164592"/>
+            <a:ext cx="146304" cy="6693408"/>
+          </a:xfrm>
+          <a:prstGeom prst="rect">
+            <a:avLst/>
+          </a:prstGeom>
+          <a:solidFill>
+            <a:srgbClr val="2F8A28"/>
+          </a:solidFill>
+          <a:ln w="12700">
+            <a:solidFill>
+              <a:srgbClr val="2F8A28"/>
+            </a:solidFill>
+            <a:prstDash val="solid"/>
+          </a:ln>
+        </p:spPr>
+      </p:sp>
+      <p:sp>
+        <p:nvSpPr>
+          <p:cNvPr id="4" name="Text 2"/>
           <p:cNvSpPr/>
           <p:nvPr/>
         </p:nvSpPr>
@@ -7252,7 +13254,7 @@
       </p:sp>
       <p:sp>
         <p:nvSpPr>
-          <p:cNvPr id="4" name="Text 2"/>
+          <p:cNvPr id="5" name="Text 3"/>
           <p:cNvSpPr/>
           <p:nvPr/>
         </p:nvSpPr>
@@ -7291,7 +13293,7 @@
       </p:sp>
       <p:sp>
         <p:nvSpPr>
-          <p:cNvPr id="5" name="Text 3"/>
+          <p:cNvPr id="6" name="Text 4"/>
           <p:cNvSpPr/>
           <p:nvPr/>
         </p:nvSpPr>
@@ -7330,13 +13332,77 @@
       </p:sp>
       <p:sp>
         <p:nvSpPr>
-          <p:cNvPr id="6" name="Text 4"/>
+          <p:cNvPr id="7" name="Shape 5"/>
           <p:cNvSpPr/>
           <p:nvPr/>
         </p:nvSpPr>
         <p:spPr>
           <a:xfrm>
             <a:off x="640080" y="658368"/>
+            <a:ext cx="420624" cy="420624"/>
+          </a:xfrm>
+          <a:prstGeom prst="ellipse">
+            <a:avLst/>
+          </a:prstGeom>
+          <a:solidFill>
+            <a:srgbClr val="0068B7"/>
+          </a:solidFill>
+          <a:ln w="12700">
+            <a:solidFill>
+              <a:srgbClr val="0068B7"/>
+            </a:solidFill>
+            <a:prstDash val="solid"/>
+          </a:ln>
+        </p:spPr>
+      </p:sp>
+      <p:sp>
+        <p:nvSpPr>
+          <p:cNvPr id="8" name="Text 6"/>
+          <p:cNvSpPr/>
+          <p:nvPr/>
+        </p:nvSpPr>
+        <p:spPr>
+          <a:xfrm>
+            <a:off x="640080" y="731520"/>
+            <a:ext cx="420624" cy="164592"/>
+          </a:xfrm>
+          <a:prstGeom prst="rect">
+            <a:avLst/>
+          </a:prstGeom>
+          <a:noFill/>
+          <a:ln/>
+        </p:spPr>
+        <p:txBody>
+          <a:bodyPr wrap="square" lIns="0" tIns="0" rIns="0" bIns="0" rtlCol="0" anchor="ctr"/>
+          <a:lstStyle/>
+          <a:p>
+            <a:pPr algn="ctr" indent="0" marL="0">
+              <a:buNone/>
+            </a:pPr>
+            <a:r>
+              <a:rPr lang="en-US" sz="1100" b="1" dirty="0">
+                <a:solidFill>
+                  <a:srgbClr val="FFFFFF"/>
+                </a:solidFill>
+                <a:latin typeface="Aptos" pitchFamily="34" charset="0"/>
+                <a:ea typeface="Aptos" pitchFamily="34" charset="-122"/>
+                <a:cs typeface="Aptos" pitchFamily="34" charset="-120"/>
+              </a:rPr>
+              <a:t>2</a:t>
+            </a:r>
+            <a:endParaRPr lang="en-US" sz="1100" dirty="0"/>
+          </a:p>
+        </p:txBody>
+      </p:sp>
+      <p:sp>
+        <p:nvSpPr>
+          <p:cNvPr id="9" name="Text 7"/>
+          <p:cNvSpPr/>
+          <p:nvPr/>
+        </p:nvSpPr>
+        <p:spPr>
+          <a:xfrm>
+            <a:off x="640080" y="621792"/>
             <a:ext cx="10881360" cy="566928"/>
           </a:xfrm>
           <a:prstGeom prst="rect">
@@ -7363,7 +13429,7 @@
                 <a:ea typeface="Aptos Display" pitchFamily="34" charset="-122"/>
                 <a:cs typeface="Aptos Display" pitchFamily="34" charset="-120"/>
               </a:rPr>
-              <a:t>Public Health Example</a:t>
+              <a:t>Module Overview</a:t>
             </a:r>
             <a:endParaRPr lang="en-US" sz="2700" dirty="0"/>
           </a:p>
@@ -7371,32 +13437,178 @@
       </p:sp>
       <p:sp>
         <p:nvSpPr>
-          <p:cNvPr id="7" name="Text 5"/>
-          <p:cNvSpPr/>
-          <p:nvPr/>
-        </p:nvSpPr>
-        <p:spPr>
-          <a:xfrm>
-            <a:off x="822960" y="1325880"/>
-            <a:ext cx="10378440" cy="4800600"/>
-          </a:xfrm>
-          <a:prstGeom prst="rect">
-            <a:avLst/>
-          </a:prstGeom>
-          <a:noFill/>
-          <a:ln/>
-        </p:spPr>
-        <p:txBody>
-          <a:bodyPr wrap="square" lIns="1016" tIns="1016" rIns="1016" bIns="1016" rtlCol="0" anchor="t">
+          <p:cNvPr id="10" name="Text 8"/>
+          <p:cNvSpPr/>
+          <p:nvPr/>
+        </p:nvSpPr>
+        <p:spPr>
+          <a:xfrm>
+            <a:off x="868680" y="1417320"/>
+            <a:ext cx="6675120" cy="4434840"/>
+          </a:xfrm>
+          <a:prstGeom prst="rect">
+            <a:avLst/>
+          </a:prstGeom>
+          <a:noFill/>
+          <a:ln/>
+        </p:spPr>
+        <p:txBody>
+          <a:bodyPr wrap="square" lIns="635" tIns="635" rIns="635" bIns="635" rtlCol="0" anchor="t">
             <a:normAutofit/>
           </a:bodyPr>
           <a:lstStyle/>
           <a:p>
+            <a:r>
+              <a:rPr lang="en-US" sz="1700" dirty="0">
+                <a:solidFill>
+                  <a:srgbClr val="17364A"/>
+                </a:solidFill>
+                <a:latin typeface="Aptos" pitchFamily="34" charset="0"/>
+                <a:ea typeface="Aptos" pitchFamily="34" charset="-122"/>
+                <a:cs typeface="Aptos" pitchFamily="34" charset="-120"/>
+              </a:rPr>
+              <a:t>Retrieval-augmented generation, often called RAG, combines generative AI with retrieval from a defined set of documents or.</a:t>
+            </a:r>
+            <a:endParaRPr lang="en-US" sz="1700" dirty="0"/>
+          </a:p>
+          <a:p>
+            <a:r>
+              <a:rPr lang="en-US" sz="1700" dirty="0">
+                <a:solidFill>
+                  <a:srgbClr val="17364A"/>
+                </a:solidFill>
+                <a:latin typeface="Aptos" pitchFamily="34" charset="0"/>
+                <a:ea typeface="Aptos" pitchFamily="34" charset="-122"/>
+                <a:cs typeface="Aptos" pitchFamily="34" charset="-120"/>
+              </a:rPr>
+              <a:t>Instead of relying only on a model’s general training, a RAG system searches approved content and uses retrieved material.</a:t>
+            </a:r>
+            <a:endParaRPr lang="en-US" sz="1700" dirty="0"/>
+          </a:p>
+          <a:p>
+            <a:r>
+              <a:rPr lang="en-US" sz="1700" dirty="0">
+                <a:solidFill>
+                  <a:srgbClr val="17364A"/>
+                </a:solidFill>
+                <a:latin typeface="Aptos" pitchFamily="34" charset="0"/>
+                <a:ea typeface="Aptos" pitchFamily="34" charset="-122"/>
+                <a:cs typeface="Aptos" pitchFamily="34" charset="-120"/>
+              </a:rPr>
+              <a:t>In public health, RAG may support policy lookup, protocol interpretation, internal help desks, training support, grant.</a:t>
+            </a:r>
+            <a:endParaRPr lang="en-US" sz="1700" dirty="0"/>
+          </a:p>
+          <a:p>
+            <a:r>
+              <a:rPr lang="en-US" sz="1700" dirty="0">
+                <a:solidFill>
+                  <a:srgbClr val="17364A"/>
+                </a:solidFill>
+                <a:latin typeface="Aptos" pitchFamily="34" charset="0"/>
+                <a:ea typeface="Aptos" pitchFamily="34" charset="-122"/>
+                <a:cs typeface="Aptos" pitchFamily="34" charset="-120"/>
+              </a:rPr>
+              <a:t>RAG can make generative AI more useful and safer when it is designed well.</a:t>
+            </a:r>
+            <a:endParaRPr lang="en-US" sz="1700" dirty="0"/>
+          </a:p>
+        </p:txBody>
+      </p:sp>
+      <p:sp>
+        <p:nvSpPr>
+          <p:cNvPr id="11" name="Shape 9"/>
+          <p:cNvSpPr/>
+          <p:nvPr/>
+        </p:nvSpPr>
+        <p:spPr>
+          <a:xfrm>
+            <a:off x="7909560" y="1417320"/>
+            <a:ext cx="3154680" cy="1828800"/>
+          </a:xfrm>
+          <a:prstGeom prst="roundRect">
+            <a:avLst>
+              <a:gd name="adj" fmla="val 6000"/>
+            </a:avLst>
+          </a:prstGeom>
+          <a:solidFill>
+            <a:srgbClr val="EEF8ED"/>
+          </a:solidFill>
+          <a:ln w="12700">
+            <a:solidFill>
+              <a:srgbClr val="B9D7E6"/>
+            </a:solidFill>
+            <a:prstDash val="solid"/>
+          </a:ln>
+        </p:spPr>
+      </p:sp>
+      <p:sp>
+        <p:nvSpPr>
+          <p:cNvPr id="12" name="Text 10"/>
+          <p:cNvSpPr/>
+          <p:nvPr/>
+        </p:nvSpPr>
+        <p:spPr>
+          <a:xfrm>
+            <a:off x="8074152" y="1563624"/>
+            <a:ext cx="2825496" cy="201168"/>
+          </a:xfrm>
+          <a:prstGeom prst="rect">
+            <a:avLst/>
+          </a:prstGeom>
+          <a:noFill/>
+          <a:ln/>
+        </p:spPr>
+        <p:txBody>
+          <a:bodyPr wrap="square" lIns="0" tIns="0" rIns="0" bIns="0" rtlCol="0" anchor="ctr"/>
+          <a:lstStyle/>
+          <a:p>
             <a:pPr indent="0" marL="0">
               <a:buNone/>
             </a:pPr>
             <a:r>
-              <a:rPr lang="en-US" sz="1420" dirty="0">
+              <a:rPr lang="en-US" sz="950" b="1" dirty="0">
+                <a:solidFill>
+                  <a:srgbClr val="0068B7"/>
+                </a:solidFill>
+                <a:latin typeface="Aptos" pitchFamily="34" charset="0"/>
+                <a:ea typeface="Aptos" pitchFamily="34" charset="-122"/>
+                <a:cs typeface="Aptos" pitchFamily="34" charset="-120"/>
+              </a:rPr>
+              <a:t>Key idea</a:t>
+            </a:r>
+            <a:endParaRPr lang="en-US" sz="950" dirty="0"/>
+          </a:p>
+        </p:txBody>
+      </p:sp>
+      <p:sp>
+        <p:nvSpPr>
+          <p:cNvPr id="13" name="Text 11"/>
+          <p:cNvSpPr/>
+          <p:nvPr/>
+        </p:nvSpPr>
+        <p:spPr>
+          <a:xfrm>
+            <a:off x="8074152" y="1856232"/>
+            <a:ext cx="2825496" cy="1261872"/>
+          </a:xfrm>
+          <a:prstGeom prst="rect">
+            <a:avLst/>
+          </a:prstGeom>
+          <a:noFill/>
+          <a:ln/>
+        </p:spPr>
+        <p:txBody>
+          <a:bodyPr wrap="square" lIns="0" tIns="0" rIns="0" bIns="0" rtlCol="0" anchor="t">
+            <a:normAutofit/>
+          </a:bodyPr>
+          <a:lstStyle/>
+          <a:p>
+            <a:pPr indent="0" marL="0">
+              <a:buNone/>
+            </a:pPr>
+            <a:r>
+              <a:rPr lang="en-US" sz="1250" dirty="0">
                 <a:solidFill>
                   <a:srgbClr val="17364A"/>
                 </a:solidFill>
@@ -7404,9 +13616,116 @@
                 <a:ea typeface="Aptos" pitchFamily="34" charset="-122"/>
                 <a:cs typeface="Aptos" pitchFamily="34" charset="-120"/>
               </a:rPr>
-              <a:t>A state health department may create an internal RAG assistant to help staff find current infectious disease investigation protocols. The assistant could search approved protocols, case definitions, reporting rules, and escalation procedures. When a user asks what steps to take for a suspected condition, the system could summarize relevant guidance and cite the source documents. This workflow requires strong controls. The assistant must include only current approved guidance, respect role-based access, cite sources, and warn users when content is outdated or missing. Staff should verify the cited protocol before acting, especially when the situation is unusual or high risk.</a:t>
-            </a:r>
-            <a:endParaRPr lang="en-US" sz="1420" dirty="0"/>
+              <a:t>Retrieval-augmented generation, often called RAG, combines generative AI with retrieval from a defined set of documents or.</a:t>
+            </a:r>
+            <a:endParaRPr lang="en-US" sz="1250" dirty="0"/>
+          </a:p>
+        </p:txBody>
+      </p:sp>
+      <p:sp>
+        <p:nvSpPr>
+          <p:cNvPr id="14" name="Shape 12"/>
+          <p:cNvSpPr/>
+          <p:nvPr/>
+        </p:nvSpPr>
+        <p:spPr>
+          <a:xfrm>
+            <a:off x="7909560" y="3520440"/>
+            <a:ext cx="3154680" cy="1737360"/>
+          </a:xfrm>
+          <a:prstGeom prst="roundRect">
+            <a:avLst>
+              <a:gd name="adj" fmla="val 6316"/>
+            </a:avLst>
+          </a:prstGeom>
+          <a:solidFill>
+            <a:srgbClr val="EAF6F8"/>
+          </a:solidFill>
+          <a:ln w="12700">
+            <a:solidFill>
+              <a:srgbClr val="B9D7E6"/>
+            </a:solidFill>
+            <a:prstDash val="solid"/>
+          </a:ln>
+        </p:spPr>
+      </p:sp>
+      <p:sp>
+        <p:nvSpPr>
+          <p:cNvPr id="15" name="Text 13"/>
+          <p:cNvSpPr/>
+          <p:nvPr/>
+        </p:nvSpPr>
+        <p:spPr>
+          <a:xfrm>
+            <a:off x="8074152" y="3666744"/>
+            <a:ext cx="2825496" cy="201168"/>
+          </a:xfrm>
+          <a:prstGeom prst="rect">
+            <a:avLst/>
+          </a:prstGeom>
+          <a:noFill/>
+          <a:ln/>
+        </p:spPr>
+        <p:txBody>
+          <a:bodyPr wrap="square" lIns="0" tIns="0" rIns="0" bIns="0" rtlCol="0" anchor="ctr"/>
+          <a:lstStyle/>
+          <a:p>
+            <a:pPr indent="0" marL="0">
+              <a:buNone/>
+            </a:pPr>
+            <a:r>
+              <a:rPr lang="en-US" sz="950" b="1" dirty="0">
+                <a:solidFill>
+                  <a:srgbClr val="0068B7"/>
+                </a:solidFill>
+                <a:latin typeface="Aptos" pitchFamily="34" charset="0"/>
+                <a:ea typeface="Aptos" pitchFamily="34" charset="-122"/>
+                <a:cs typeface="Aptos" pitchFamily="34" charset="-120"/>
+              </a:rPr>
+              <a:t>Use this for</a:t>
+            </a:r>
+            <a:endParaRPr lang="en-US" sz="950" dirty="0"/>
+          </a:p>
+        </p:txBody>
+      </p:sp>
+      <p:sp>
+        <p:nvSpPr>
+          <p:cNvPr id="16" name="Text 14"/>
+          <p:cNvSpPr/>
+          <p:nvPr/>
+        </p:nvSpPr>
+        <p:spPr>
+          <a:xfrm>
+            <a:off x="8074152" y="3959352"/>
+            <a:ext cx="2825496" cy="1170432"/>
+          </a:xfrm>
+          <a:prstGeom prst="rect">
+            <a:avLst/>
+          </a:prstGeom>
+          <a:noFill/>
+          <a:ln/>
+        </p:spPr>
+        <p:txBody>
+          <a:bodyPr wrap="square" lIns="0" tIns="0" rIns="0" bIns="0" rtlCol="0" anchor="t">
+            <a:normAutofit/>
+          </a:bodyPr>
+          <a:lstStyle/>
+          <a:p>
+            <a:pPr indent="0" marL="0">
+              <a:buNone/>
+            </a:pPr>
+            <a:r>
+              <a:rPr lang="en-US" sz="1250" dirty="0">
+                <a:solidFill>
+                  <a:srgbClr val="17364A"/>
+                </a:solidFill>
+                <a:latin typeface="Aptos" pitchFamily="34" charset="0"/>
+                <a:ea typeface="Aptos" pitchFamily="34" charset="-122"/>
+                <a:cs typeface="Aptos" pitchFamily="34" charset="-120"/>
+              </a:rPr>
+              <a:t>Connect the concept to public health decisions, safeguards, documentation, or implementation work.</a:t>
+            </a:r>
+            <a:endParaRPr lang="en-US" sz="1250" dirty="0"/>
           </a:p>
         </p:txBody>
       </p:sp>
@@ -7469,7 +13788,32 @@
       </p:sp>
       <p:sp>
         <p:nvSpPr>
-          <p:cNvPr id="3" name="Text 1"/>
+          <p:cNvPr id="3" name="Shape 1"/>
+          <p:cNvSpPr/>
+          <p:nvPr/>
+        </p:nvSpPr>
+        <p:spPr>
+          <a:xfrm>
+            <a:off x="0" y="164592"/>
+            <a:ext cx="146304" cy="6693408"/>
+          </a:xfrm>
+          <a:prstGeom prst="rect">
+            <a:avLst/>
+          </a:prstGeom>
+          <a:solidFill>
+            <a:srgbClr val="2F8A28"/>
+          </a:solidFill>
+          <a:ln w="12700">
+            <a:solidFill>
+              <a:srgbClr val="2F8A28"/>
+            </a:solidFill>
+            <a:prstDash val="solid"/>
+          </a:ln>
+        </p:spPr>
+      </p:sp>
+      <p:sp>
+        <p:nvSpPr>
+          <p:cNvPr id="4" name="Text 2"/>
           <p:cNvSpPr/>
           <p:nvPr/>
         </p:nvSpPr>
@@ -7508,7 +13852,7 @@
       </p:sp>
       <p:sp>
         <p:nvSpPr>
-          <p:cNvPr id="4" name="Text 2"/>
+          <p:cNvPr id="5" name="Text 3"/>
           <p:cNvSpPr/>
           <p:nvPr/>
         </p:nvSpPr>
@@ -7547,7 +13891,7 @@
       </p:sp>
       <p:sp>
         <p:nvSpPr>
-          <p:cNvPr id="5" name="Text 3"/>
+          <p:cNvPr id="6" name="Text 4"/>
           <p:cNvSpPr/>
           <p:nvPr/>
         </p:nvSpPr>
@@ -7586,13 +13930,77 @@
       </p:sp>
       <p:sp>
         <p:nvSpPr>
-          <p:cNvPr id="6" name="Text 4"/>
+          <p:cNvPr id="7" name="Shape 5"/>
           <p:cNvSpPr/>
           <p:nvPr/>
         </p:nvSpPr>
         <p:spPr>
           <a:xfrm>
             <a:off x="640080" y="658368"/>
+            <a:ext cx="420624" cy="420624"/>
+          </a:xfrm>
+          <a:prstGeom prst="ellipse">
+            <a:avLst/>
+          </a:prstGeom>
+          <a:solidFill>
+            <a:srgbClr val="0068B7"/>
+          </a:solidFill>
+          <a:ln w="12700">
+            <a:solidFill>
+              <a:srgbClr val="0068B7"/>
+            </a:solidFill>
+            <a:prstDash val="solid"/>
+          </a:ln>
+        </p:spPr>
+      </p:sp>
+      <p:sp>
+        <p:nvSpPr>
+          <p:cNvPr id="8" name="Text 6"/>
+          <p:cNvSpPr/>
+          <p:nvPr/>
+        </p:nvSpPr>
+        <p:spPr>
+          <a:xfrm>
+            <a:off x="640080" y="731520"/>
+            <a:ext cx="420624" cy="164592"/>
+          </a:xfrm>
+          <a:prstGeom prst="rect">
+            <a:avLst/>
+          </a:prstGeom>
+          <a:noFill/>
+          <a:ln/>
+        </p:spPr>
+        <p:txBody>
+          <a:bodyPr wrap="square" lIns="0" tIns="0" rIns="0" bIns="0" rtlCol="0" anchor="ctr"/>
+          <a:lstStyle/>
+          <a:p>
+            <a:pPr algn="ctr" indent="0" marL="0">
+              <a:buNone/>
+            </a:pPr>
+            <a:r>
+              <a:rPr lang="en-US" sz="1100" b="1" dirty="0">
+                <a:solidFill>
+                  <a:srgbClr val="FFFFFF"/>
+                </a:solidFill>
+                <a:latin typeface="Aptos" pitchFamily="34" charset="0"/>
+                <a:ea typeface="Aptos" pitchFamily="34" charset="-122"/>
+                <a:cs typeface="Aptos" pitchFamily="34" charset="-120"/>
+              </a:rPr>
+              <a:t>3</a:t>
+            </a:r>
+            <a:endParaRPr lang="en-US" sz="1100" dirty="0"/>
+          </a:p>
+        </p:txBody>
+      </p:sp>
+      <p:sp>
+        <p:nvSpPr>
+          <p:cNvPr id="9" name="Text 7"/>
+          <p:cNvSpPr/>
+          <p:nvPr/>
+        </p:nvSpPr>
+        <p:spPr>
+          <a:xfrm>
+            <a:off x="640080" y="621792"/>
             <a:ext cx="10881360" cy="566928"/>
           </a:xfrm>
           <a:prstGeom prst="rect">
@@ -7619,7 +14027,7 @@
                 <a:ea typeface="Aptos Display" pitchFamily="34" charset="-122"/>
                 <a:cs typeface="Aptos Display" pitchFamily="34" charset="-120"/>
               </a:rPr>
-              <a:t>Technical Deep Dive</a:t>
+              <a:t>Why This Topic Matters for Public Health AI</a:t>
             </a:r>
             <a:endParaRPr lang="en-US" sz="2700" dirty="0"/>
           </a:p>
@@ -7627,32 +14035,178 @@
       </p:sp>
       <p:sp>
         <p:nvSpPr>
-          <p:cNvPr id="7" name="Text 5"/>
-          <p:cNvSpPr/>
-          <p:nvPr/>
-        </p:nvSpPr>
-        <p:spPr>
-          <a:xfrm>
-            <a:off x="822960" y="1325880"/>
-            <a:ext cx="10378440" cy="4800600"/>
-          </a:xfrm>
-          <a:prstGeom prst="rect">
-            <a:avLst/>
-          </a:prstGeom>
-          <a:noFill/>
-          <a:ln/>
-        </p:spPr>
-        <p:txBody>
-          <a:bodyPr wrap="square" lIns="1016" tIns="1016" rIns="1016" bIns="1016" rtlCol="0" anchor="t">
+          <p:cNvPr id="10" name="Text 8"/>
+          <p:cNvSpPr/>
+          <p:nvPr/>
+        </p:nvSpPr>
+        <p:spPr>
+          <a:xfrm>
+            <a:off x="868680" y="1417320"/>
+            <a:ext cx="6675120" cy="4434840"/>
+          </a:xfrm>
+          <a:prstGeom prst="rect">
+            <a:avLst/>
+          </a:prstGeom>
+          <a:noFill/>
+          <a:ln/>
+        </p:spPr>
+        <p:txBody>
+          <a:bodyPr wrap="square" lIns="635" tIns="635" rIns="635" bIns="635" rtlCol="0" anchor="t">
             <a:normAutofit/>
           </a:bodyPr>
           <a:lstStyle/>
           <a:p>
+            <a:r>
+              <a:rPr lang="en-US" sz="1700" dirty="0">
+                <a:solidFill>
+                  <a:srgbClr val="17364A"/>
+                </a:solidFill>
+                <a:latin typeface="Aptos" pitchFamily="34" charset="0"/>
+                <a:ea typeface="Aptos" pitchFamily="34" charset="-122"/>
+                <a:cs typeface="Aptos" pitchFamily="34" charset="-120"/>
+              </a:rPr>
+              <a:t>RAG matters because public health agencies manage large collections of guidance, protocols, policies, contracts, plans,.</a:t>
+            </a:r>
+            <a:endParaRPr lang="en-US" sz="1700" dirty="0"/>
+          </a:p>
+          <a:p>
+            <a:r>
+              <a:rPr lang="en-US" sz="1700" dirty="0">
+                <a:solidFill>
+                  <a:srgbClr val="17364A"/>
+                </a:solidFill>
+                <a:latin typeface="Aptos" pitchFamily="34" charset="0"/>
+                <a:ea typeface="Aptos" pitchFamily="34" charset="-122"/>
+                <a:cs typeface="Aptos" pitchFamily="34" charset="-120"/>
+              </a:rPr>
+              <a:t>Staff may spend substantial time searching for answers across shared drives, websites, portals, and outdated files.</a:t>
+            </a:r>
+            <a:endParaRPr lang="en-US" sz="1700" dirty="0"/>
+          </a:p>
+          <a:p>
+            <a:r>
+              <a:rPr lang="en-US" sz="1700" dirty="0">
+                <a:solidFill>
+                  <a:srgbClr val="17364A"/>
+                </a:solidFill>
+                <a:latin typeface="Aptos" pitchFamily="34" charset="0"/>
+                <a:ea typeface="Aptos" pitchFamily="34" charset="-122"/>
+                <a:cs typeface="Aptos" pitchFamily="34" charset="-120"/>
+              </a:rPr>
+              <a:t>A well-designed RAG system can help users find relevant guidance and produce concise, source-linked answers.</a:t>
+            </a:r>
+            <a:endParaRPr lang="en-US" sz="1700" dirty="0"/>
+          </a:p>
+          <a:p>
+            <a:r>
+              <a:rPr lang="en-US" sz="1700" dirty="0">
+                <a:solidFill>
+                  <a:srgbClr val="17364A"/>
+                </a:solidFill>
+                <a:latin typeface="Aptos" pitchFamily="34" charset="0"/>
+                <a:ea typeface="Aptos" pitchFamily="34" charset="-122"/>
+                <a:cs typeface="Aptos" pitchFamily="34" charset="-120"/>
+              </a:rPr>
+              <a:t>The public health value of RAG depends on governance.</a:t>
+            </a:r>
+            <a:endParaRPr lang="en-US" sz="1700" dirty="0"/>
+          </a:p>
+        </p:txBody>
+      </p:sp>
+      <p:sp>
+        <p:nvSpPr>
+          <p:cNvPr id="11" name="Shape 9"/>
+          <p:cNvSpPr/>
+          <p:nvPr/>
+        </p:nvSpPr>
+        <p:spPr>
+          <a:xfrm>
+            <a:off x="7909560" y="1417320"/>
+            <a:ext cx="3154680" cy="1828800"/>
+          </a:xfrm>
+          <a:prstGeom prst="roundRect">
+            <a:avLst>
+              <a:gd name="adj" fmla="val 6000"/>
+            </a:avLst>
+          </a:prstGeom>
+          <a:solidFill>
+            <a:srgbClr val="EEF8ED"/>
+          </a:solidFill>
+          <a:ln w="12700">
+            <a:solidFill>
+              <a:srgbClr val="B9D7E6"/>
+            </a:solidFill>
+            <a:prstDash val="solid"/>
+          </a:ln>
+        </p:spPr>
+      </p:sp>
+      <p:sp>
+        <p:nvSpPr>
+          <p:cNvPr id="12" name="Text 10"/>
+          <p:cNvSpPr/>
+          <p:nvPr/>
+        </p:nvSpPr>
+        <p:spPr>
+          <a:xfrm>
+            <a:off x="8074152" y="1563624"/>
+            <a:ext cx="2825496" cy="201168"/>
+          </a:xfrm>
+          <a:prstGeom prst="rect">
+            <a:avLst/>
+          </a:prstGeom>
+          <a:noFill/>
+          <a:ln/>
+        </p:spPr>
+        <p:txBody>
+          <a:bodyPr wrap="square" lIns="0" tIns="0" rIns="0" bIns="0" rtlCol="0" anchor="ctr"/>
+          <a:lstStyle/>
+          <a:p>
             <a:pPr indent="0" marL="0">
               <a:buNone/>
             </a:pPr>
             <a:r>
-              <a:rPr lang="en-US" sz="1420" dirty="0">
+              <a:rPr lang="en-US" sz="950" b="1" dirty="0">
+                <a:solidFill>
+                  <a:srgbClr val="0068B7"/>
+                </a:solidFill>
+                <a:latin typeface="Aptos" pitchFamily="34" charset="0"/>
+                <a:ea typeface="Aptos" pitchFamily="34" charset="-122"/>
+                <a:cs typeface="Aptos" pitchFamily="34" charset="-120"/>
+              </a:rPr>
+              <a:t>Key idea</a:t>
+            </a:r>
+            <a:endParaRPr lang="en-US" sz="950" dirty="0"/>
+          </a:p>
+        </p:txBody>
+      </p:sp>
+      <p:sp>
+        <p:nvSpPr>
+          <p:cNvPr id="13" name="Text 11"/>
+          <p:cNvSpPr/>
+          <p:nvPr/>
+        </p:nvSpPr>
+        <p:spPr>
+          <a:xfrm>
+            <a:off x="8074152" y="1856232"/>
+            <a:ext cx="2825496" cy="1261872"/>
+          </a:xfrm>
+          <a:prstGeom prst="rect">
+            <a:avLst/>
+          </a:prstGeom>
+          <a:noFill/>
+          <a:ln/>
+        </p:spPr>
+        <p:txBody>
+          <a:bodyPr wrap="square" lIns="0" tIns="0" rIns="0" bIns="0" rtlCol="0" anchor="t">
+            <a:normAutofit/>
+          </a:bodyPr>
+          <a:lstStyle/>
+          <a:p>
+            <a:pPr indent="0" marL="0">
+              <a:buNone/>
+            </a:pPr>
+            <a:r>
+              <a:rPr lang="en-US" sz="1250" dirty="0">
                 <a:solidFill>
                   <a:srgbClr val="17364A"/>
                 </a:solidFill>
@@ -7660,9 +14214,116 @@
                 <a:ea typeface="Aptos" pitchFamily="34" charset="-122"/>
                 <a:cs typeface="Aptos" pitchFamily="34" charset="-120"/>
               </a:rPr>
-              <a:t>A RAG system begins with content selection. Agencies should decide which documents are authoritative, current, approved for the use case, and appropriate for the intended users. Content inventories should include owner, version, effective date, review date, sensitivity level, and access rules. Without this foundation, retrieval can surface obsolete or unauthorized material. Document processing affects retrieval quality. Files may need to be converted, cleaned, segmented, and indexed. Chunking decisions matter because overly small chunks may omit context while overly large chunks may retrieve irrelevant material. Tables, figures, scanned PDFs, forms, and appendices may require special handling. Public health documents often contain complex context, such as exceptions, legal caveats, and jurisdiction-specific rules. Embeddings and vector search help identify semantically similar content, but retrieval should be tested. Staff should use realistic questions and evaluate whether the system retrieves the best sources. Testing should include synonyms, acronyms, misspellings, role-specific questions, edge cases, and questions that should produce “not found” or escalation responses.</a:t>
-            </a:r>
-            <a:endParaRPr lang="en-US" sz="1420" dirty="0"/>
+              <a:t>RAG matters because public health agencies manage large collections of guidance, protocols, policies, contracts, plans,.</a:t>
+            </a:r>
+            <a:endParaRPr lang="en-US" sz="1250" dirty="0"/>
+          </a:p>
+        </p:txBody>
+      </p:sp>
+      <p:sp>
+        <p:nvSpPr>
+          <p:cNvPr id="14" name="Shape 12"/>
+          <p:cNvSpPr/>
+          <p:nvPr/>
+        </p:nvSpPr>
+        <p:spPr>
+          <a:xfrm>
+            <a:off x="7909560" y="3520440"/>
+            <a:ext cx="3154680" cy="1737360"/>
+          </a:xfrm>
+          <a:prstGeom prst="roundRect">
+            <a:avLst>
+              <a:gd name="adj" fmla="val 6316"/>
+            </a:avLst>
+          </a:prstGeom>
+          <a:solidFill>
+            <a:srgbClr val="EAF6F8"/>
+          </a:solidFill>
+          <a:ln w="12700">
+            <a:solidFill>
+              <a:srgbClr val="B9D7E6"/>
+            </a:solidFill>
+            <a:prstDash val="solid"/>
+          </a:ln>
+        </p:spPr>
+      </p:sp>
+      <p:sp>
+        <p:nvSpPr>
+          <p:cNvPr id="15" name="Text 13"/>
+          <p:cNvSpPr/>
+          <p:nvPr/>
+        </p:nvSpPr>
+        <p:spPr>
+          <a:xfrm>
+            <a:off x="8074152" y="3666744"/>
+            <a:ext cx="2825496" cy="201168"/>
+          </a:xfrm>
+          <a:prstGeom prst="rect">
+            <a:avLst/>
+          </a:prstGeom>
+          <a:noFill/>
+          <a:ln/>
+        </p:spPr>
+        <p:txBody>
+          <a:bodyPr wrap="square" lIns="0" tIns="0" rIns="0" bIns="0" rtlCol="0" anchor="ctr"/>
+          <a:lstStyle/>
+          <a:p>
+            <a:pPr indent="0" marL="0">
+              <a:buNone/>
+            </a:pPr>
+            <a:r>
+              <a:rPr lang="en-US" sz="950" b="1" dirty="0">
+                <a:solidFill>
+                  <a:srgbClr val="0068B7"/>
+                </a:solidFill>
+                <a:latin typeface="Aptos" pitchFamily="34" charset="0"/>
+                <a:ea typeface="Aptos" pitchFamily="34" charset="-122"/>
+                <a:cs typeface="Aptos" pitchFamily="34" charset="-120"/>
+              </a:rPr>
+              <a:t>Use this for</a:t>
+            </a:r>
+            <a:endParaRPr lang="en-US" sz="950" dirty="0"/>
+          </a:p>
+        </p:txBody>
+      </p:sp>
+      <p:sp>
+        <p:nvSpPr>
+          <p:cNvPr id="16" name="Text 14"/>
+          <p:cNvSpPr/>
+          <p:nvPr/>
+        </p:nvSpPr>
+        <p:spPr>
+          <a:xfrm>
+            <a:off x="8074152" y="3959352"/>
+            <a:ext cx="2825496" cy="1170432"/>
+          </a:xfrm>
+          <a:prstGeom prst="rect">
+            <a:avLst/>
+          </a:prstGeom>
+          <a:noFill/>
+          <a:ln/>
+        </p:spPr>
+        <p:txBody>
+          <a:bodyPr wrap="square" lIns="0" tIns="0" rIns="0" bIns="0" rtlCol="0" anchor="t">
+            <a:normAutofit/>
+          </a:bodyPr>
+          <a:lstStyle/>
+          <a:p>
+            <a:pPr indent="0" marL="0">
+              <a:buNone/>
+            </a:pPr>
+            <a:r>
+              <a:rPr lang="en-US" sz="1250" dirty="0">
+                <a:solidFill>
+                  <a:srgbClr val="17364A"/>
+                </a:solidFill>
+                <a:latin typeface="Aptos" pitchFamily="34" charset="0"/>
+                <a:ea typeface="Aptos" pitchFamily="34" charset="-122"/>
+                <a:cs typeface="Aptos" pitchFamily="34" charset="-120"/>
+              </a:rPr>
+              <a:t>Connect the concept to public health decisions, safeguards, documentation, or implementation work.</a:t>
+            </a:r>
+            <a:endParaRPr lang="en-US" sz="1250" dirty="0"/>
           </a:p>
         </p:txBody>
       </p:sp>
@@ -7725,7 +14386,32 @@
       </p:sp>
       <p:sp>
         <p:nvSpPr>
-          <p:cNvPr id="3" name="Text 1"/>
+          <p:cNvPr id="3" name="Shape 1"/>
+          <p:cNvSpPr/>
+          <p:nvPr/>
+        </p:nvSpPr>
+        <p:spPr>
+          <a:xfrm>
+            <a:off x="0" y="164592"/>
+            <a:ext cx="146304" cy="6693408"/>
+          </a:xfrm>
+          <a:prstGeom prst="rect">
+            <a:avLst/>
+          </a:prstGeom>
+          <a:solidFill>
+            <a:srgbClr val="2F8A28"/>
+          </a:solidFill>
+          <a:ln w="12700">
+            <a:solidFill>
+              <a:srgbClr val="2F8A28"/>
+            </a:solidFill>
+            <a:prstDash val="solid"/>
+          </a:ln>
+        </p:spPr>
+      </p:sp>
+      <p:sp>
+        <p:nvSpPr>
+          <p:cNvPr id="4" name="Text 2"/>
           <p:cNvSpPr/>
           <p:nvPr/>
         </p:nvSpPr>
@@ -7764,7 +14450,7 @@
       </p:sp>
       <p:sp>
         <p:nvSpPr>
-          <p:cNvPr id="4" name="Text 2"/>
+          <p:cNvPr id="5" name="Text 3"/>
           <p:cNvSpPr/>
           <p:nvPr/>
         </p:nvSpPr>
@@ -7803,7 +14489,7 @@
       </p:sp>
       <p:sp>
         <p:nvSpPr>
-          <p:cNvPr id="5" name="Text 3"/>
+          <p:cNvPr id="6" name="Text 4"/>
           <p:cNvSpPr/>
           <p:nvPr/>
         </p:nvSpPr>
@@ -7842,13 +14528,77 @@
       </p:sp>
       <p:sp>
         <p:nvSpPr>
-          <p:cNvPr id="6" name="Text 4"/>
+          <p:cNvPr id="7" name="Shape 5"/>
           <p:cNvSpPr/>
           <p:nvPr/>
         </p:nvSpPr>
         <p:spPr>
           <a:xfrm>
             <a:off x="640080" y="658368"/>
+            <a:ext cx="420624" cy="420624"/>
+          </a:xfrm>
+          <a:prstGeom prst="ellipse">
+            <a:avLst/>
+          </a:prstGeom>
+          <a:solidFill>
+            <a:srgbClr val="0068B7"/>
+          </a:solidFill>
+          <a:ln w="12700">
+            <a:solidFill>
+              <a:srgbClr val="0068B7"/>
+            </a:solidFill>
+            <a:prstDash val="solid"/>
+          </a:ln>
+        </p:spPr>
+      </p:sp>
+      <p:sp>
+        <p:nvSpPr>
+          <p:cNvPr id="8" name="Text 6"/>
+          <p:cNvSpPr/>
+          <p:nvPr/>
+        </p:nvSpPr>
+        <p:spPr>
+          <a:xfrm>
+            <a:off x="640080" y="731520"/>
+            <a:ext cx="420624" cy="164592"/>
+          </a:xfrm>
+          <a:prstGeom prst="rect">
+            <a:avLst/>
+          </a:prstGeom>
+          <a:noFill/>
+          <a:ln/>
+        </p:spPr>
+        <p:txBody>
+          <a:bodyPr wrap="square" lIns="0" tIns="0" rIns="0" bIns="0" rtlCol="0" anchor="ctr"/>
+          <a:lstStyle/>
+          <a:p>
+            <a:pPr algn="ctr" indent="0" marL="0">
+              <a:buNone/>
+            </a:pPr>
+            <a:r>
+              <a:rPr lang="en-US" sz="1100" b="1" dirty="0">
+                <a:solidFill>
+                  <a:srgbClr val="FFFFFF"/>
+                </a:solidFill>
+                <a:latin typeface="Aptos" pitchFamily="34" charset="0"/>
+                <a:ea typeface="Aptos" pitchFamily="34" charset="-122"/>
+                <a:cs typeface="Aptos" pitchFamily="34" charset="-120"/>
+              </a:rPr>
+              <a:t>4</a:t>
+            </a:r>
+            <a:endParaRPr lang="en-US" sz="1100" dirty="0"/>
+          </a:p>
+        </p:txBody>
+      </p:sp>
+      <p:sp>
+        <p:nvSpPr>
+          <p:cNvPr id="9" name="Text 7"/>
+          <p:cNvSpPr/>
+          <p:nvPr/>
+        </p:nvSpPr>
+        <p:spPr>
+          <a:xfrm>
+            <a:off x="640080" y="621792"/>
             <a:ext cx="10881360" cy="566928"/>
           </a:xfrm>
           <a:prstGeom prst="rect">
@@ -7875,7 +14625,7 @@
                 <a:ea typeface="Aptos Display" pitchFamily="34" charset="-122"/>
                 <a:cs typeface="Aptos Display" pitchFamily="34" charset="-120"/>
               </a:rPr>
-              <a:t>Technical Deep Dive Continued</a:t>
+              <a:t>Public Health Example</a:t>
             </a:r>
             <a:endParaRPr lang="en-US" sz="2700" dirty="0"/>
           </a:p>
@@ -7883,32 +14633,178 @@
       </p:sp>
       <p:sp>
         <p:nvSpPr>
-          <p:cNvPr id="7" name="Text 5"/>
-          <p:cNvSpPr/>
-          <p:nvPr/>
-        </p:nvSpPr>
-        <p:spPr>
-          <a:xfrm>
-            <a:off x="822960" y="1325880"/>
-            <a:ext cx="10378440" cy="4800600"/>
-          </a:xfrm>
-          <a:prstGeom prst="rect">
-            <a:avLst/>
-          </a:prstGeom>
-          <a:noFill/>
-          <a:ln/>
-        </p:spPr>
-        <p:txBody>
-          <a:bodyPr wrap="square" lIns="1016" tIns="1016" rIns="1016" bIns="1016" rtlCol="0" anchor="t">
+          <p:cNvPr id="10" name="Text 8"/>
+          <p:cNvSpPr/>
+          <p:nvPr/>
+        </p:nvSpPr>
+        <p:spPr>
+          <a:xfrm>
+            <a:off x="868680" y="1417320"/>
+            <a:ext cx="6675120" cy="4434840"/>
+          </a:xfrm>
+          <a:prstGeom prst="rect">
+            <a:avLst/>
+          </a:prstGeom>
+          <a:noFill/>
+          <a:ln/>
+        </p:spPr>
+        <p:txBody>
+          <a:bodyPr wrap="square" lIns="635" tIns="635" rIns="635" bIns="635" rtlCol="0" anchor="t">
             <a:normAutofit/>
           </a:bodyPr>
           <a:lstStyle/>
           <a:p>
+            <a:r>
+              <a:rPr lang="en-US" sz="1700" dirty="0">
+                <a:solidFill>
+                  <a:srgbClr val="17364A"/>
+                </a:solidFill>
+                <a:latin typeface="Aptos" pitchFamily="34" charset="0"/>
+                <a:ea typeface="Aptos" pitchFamily="34" charset="-122"/>
+                <a:cs typeface="Aptos" pitchFamily="34" charset="-120"/>
+              </a:rPr>
+              <a:t>A state health department may create an internal RAG assistant to help staff find current infectious disease investigation.</a:t>
+            </a:r>
+            <a:endParaRPr lang="en-US" sz="1700" dirty="0"/>
+          </a:p>
+          <a:p>
+            <a:r>
+              <a:rPr lang="en-US" sz="1700" dirty="0">
+                <a:solidFill>
+                  <a:srgbClr val="17364A"/>
+                </a:solidFill>
+                <a:latin typeface="Aptos" pitchFamily="34" charset="0"/>
+                <a:ea typeface="Aptos" pitchFamily="34" charset="-122"/>
+                <a:cs typeface="Aptos" pitchFamily="34" charset="-120"/>
+              </a:rPr>
+              <a:t>The assistant could search approved protocols, case definitions, reporting rules, and escalation procedures.</a:t>
+            </a:r>
+            <a:endParaRPr lang="en-US" sz="1700" dirty="0"/>
+          </a:p>
+          <a:p>
+            <a:r>
+              <a:rPr lang="en-US" sz="1700" dirty="0">
+                <a:solidFill>
+                  <a:srgbClr val="17364A"/>
+                </a:solidFill>
+                <a:latin typeface="Aptos" pitchFamily="34" charset="0"/>
+                <a:ea typeface="Aptos" pitchFamily="34" charset="-122"/>
+                <a:cs typeface="Aptos" pitchFamily="34" charset="-120"/>
+              </a:rPr>
+              <a:t>When a user asks what steps to take for a suspected condition, the system could summarize relevant guidance and cite the.</a:t>
+            </a:r>
+            <a:endParaRPr lang="en-US" sz="1700" dirty="0"/>
+          </a:p>
+          <a:p>
+            <a:r>
+              <a:rPr lang="en-US" sz="1700" dirty="0">
+                <a:solidFill>
+                  <a:srgbClr val="17364A"/>
+                </a:solidFill>
+                <a:latin typeface="Aptos" pitchFamily="34" charset="0"/>
+                <a:ea typeface="Aptos" pitchFamily="34" charset="-122"/>
+                <a:cs typeface="Aptos" pitchFamily="34" charset="-120"/>
+              </a:rPr>
+              <a:t>This workflow requires strong controls.</a:t>
+            </a:r>
+            <a:endParaRPr lang="en-US" sz="1700" dirty="0"/>
+          </a:p>
+        </p:txBody>
+      </p:sp>
+      <p:sp>
+        <p:nvSpPr>
+          <p:cNvPr id="11" name="Shape 9"/>
+          <p:cNvSpPr/>
+          <p:nvPr/>
+        </p:nvSpPr>
+        <p:spPr>
+          <a:xfrm>
+            <a:off x="7909560" y="1417320"/>
+            <a:ext cx="3154680" cy="1828800"/>
+          </a:xfrm>
+          <a:prstGeom prst="roundRect">
+            <a:avLst>
+              <a:gd name="adj" fmla="val 6000"/>
+            </a:avLst>
+          </a:prstGeom>
+          <a:solidFill>
+            <a:srgbClr val="EEF8ED"/>
+          </a:solidFill>
+          <a:ln w="12700">
+            <a:solidFill>
+              <a:srgbClr val="B9D7E6"/>
+            </a:solidFill>
+            <a:prstDash val="solid"/>
+          </a:ln>
+        </p:spPr>
+      </p:sp>
+      <p:sp>
+        <p:nvSpPr>
+          <p:cNvPr id="12" name="Text 10"/>
+          <p:cNvSpPr/>
+          <p:nvPr/>
+        </p:nvSpPr>
+        <p:spPr>
+          <a:xfrm>
+            <a:off x="8074152" y="1563624"/>
+            <a:ext cx="2825496" cy="201168"/>
+          </a:xfrm>
+          <a:prstGeom prst="rect">
+            <a:avLst/>
+          </a:prstGeom>
+          <a:noFill/>
+          <a:ln/>
+        </p:spPr>
+        <p:txBody>
+          <a:bodyPr wrap="square" lIns="0" tIns="0" rIns="0" bIns="0" rtlCol="0" anchor="ctr"/>
+          <a:lstStyle/>
+          <a:p>
             <a:pPr indent="0" marL="0">
               <a:buNone/>
             </a:pPr>
             <a:r>
-              <a:rPr lang="en-US" sz="1420" dirty="0">
+              <a:rPr lang="en-US" sz="950" b="1" dirty="0">
+                <a:solidFill>
+                  <a:srgbClr val="0068B7"/>
+                </a:solidFill>
+                <a:latin typeface="Aptos" pitchFamily="34" charset="0"/>
+                <a:ea typeface="Aptos" pitchFamily="34" charset="-122"/>
+                <a:cs typeface="Aptos" pitchFamily="34" charset="-120"/>
+              </a:rPr>
+              <a:t>Key idea</a:t>
+            </a:r>
+            <a:endParaRPr lang="en-US" sz="950" dirty="0"/>
+          </a:p>
+        </p:txBody>
+      </p:sp>
+      <p:sp>
+        <p:nvSpPr>
+          <p:cNvPr id="13" name="Text 11"/>
+          <p:cNvSpPr/>
+          <p:nvPr/>
+        </p:nvSpPr>
+        <p:spPr>
+          <a:xfrm>
+            <a:off x="8074152" y="1856232"/>
+            <a:ext cx="2825496" cy="1261872"/>
+          </a:xfrm>
+          <a:prstGeom prst="rect">
+            <a:avLst/>
+          </a:prstGeom>
+          <a:noFill/>
+          <a:ln/>
+        </p:spPr>
+        <p:txBody>
+          <a:bodyPr wrap="square" lIns="0" tIns="0" rIns="0" bIns="0" rtlCol="0" anchor="t">
+            <a:normAutofit/>
+          </a:bodyPr>
+          <a:lstStyle/>
+          <a:p>
+            <a:pPr indent="0" marL="0">
+              <a:buNone/>
+            </a:pPr>
+            <a:r>
+              <a:rPr lang="en-US" sz="1250" dirty="0">
                 <a:solidFill>
                   <a:srgbClr val="17364A"/>
                 </a:solidFill>
@@ -7916,9 +14812,116 @@
                 <a:ea typeface="Aptos" pitchFamily="34" charset="-122"/>
                 <a:cs typeface="Aptos" pitchFamily="34" charset="-120"/>
               </a:rPr>
-              <a:t>Generation should be constrained by retrieved material. The system should be instructed to answer from sources, cite them, identify uncertainty, and avoid unsupported claims. It should also explain when guidance conflicts or when source material is insufficient. Users should be able to open the cited source and verify key statements. Monitoring should include retrieval failures, unsupported answers, stale content, user feedback, access-control incidents, and frequently asked questions. Content governance should define how documents are added, removed, updated, archived, and re-indexed.</a:t>
-            </a:r>
-            <a:endParaRPr lang="en-US" sz="1420" dirty="0"/>
+              <a:t>A state health department may create an internal RAG assistant to help staff find current infectious disease investigation.</a:t>
+            </a:r>
+            <a:endParaRPr lang="en-US" sz="1250" dirty="0"/>
+          </a:p>
+        </p:txBody>
+      </p:sp>
+      <p:sp>
+        <p:nvSpPr>
+          <p:cNvPr id="14" name="Shape 12"/>
+          <p:cNvSpPr/>
+          <p:nvPr/>
+        </p:nvSpPr>
+        <p:spPr>
+          <a:xfrm>
+            <a:off x="7909560" y="3520440"/>
+            <a:ext cx="3154680" cy="1737360"/>
+          </a:xfrm>
+          <a:prstGeom prst="roundRect">
+            <a:avLst>
+              <a:gd name="adj" fmla="val 6316"/>
+            </a:avLst>
+          </a:prstGeom>
+          <a:solidFill>
+            <a:srgbClr val="EAF6F8"/>
+          </a:solidFill>
+          <a:ln w="12700">
+            <a:solidFill>
+              <a:srgbClr val="B9D7E6"/>
+            </a:solidFill>
+            <a:prstDash val="solid"/>
+          </a:ln>
+        </p:spPr>
+      </p:sp>
+      <p:sp>
+        <p:nvSpPr>
+          <p:cNvPr id="15" name="Text 13"/>
+          <p:cNvSpPr/>
+          <p:nvPr/>
+        </p:nvSpPr>
+        <p:spPr>
+          <a:xfrm>
+            <a:off x="8074152" y="3666744"/>
+            <a:ext cx="2825496" cy="201168"/>
+          </a:xfrm>
+          <a:prstGeom prst="rect">
+            <a:avLst/>
+          </a:prstGeom>
+          <a:noFill/>
+          <a:ln/>
+        </p:spPr>
+        <p:txBody>
+          <a:bodyPr wrap="square" lIns="0" tIns="0" rIns="0" bIns="0" rtlCol="0" anchor="ctr"/>
+          <a:lstStyle/>
+          <a:p>
+            <a:pPr indent="0" marL="0">
+              <a:buNone/>
+            </a:pPr>
+            <a:r>
+              <a:rPr lang="en-US" sz="950" b="1" dirty="0">
+                <a:solidFill>
+                  <a:srgbClr val="0068B7"/>
+                </a:solidFill>
+                <a:latin typeface="Aptos" pitchFamily="34" charset="0"/>
+                <a:ea typeface="Aptos" pitchFamily="34" charset="-122"/>
+                <a:cs typeface="Aptos" pitchFamily="34" charset="-120"/>
+              </a:rPr>
+              <a:t>Use this for</a:t>
+            </a:r>
+            <a:endParaRPr lang="en-US" sz="950" dirty="0"/>
+          </a:p>
+        </p:txBody>
+      </p:sp>
+      <p:sp>
+        <p:nvSpPr>
+          <p:cNvPr id="16" name="Text 14"/>
+          <p:cNvSpPr/>
+          <p:nvPr/>
+        </p:nvSpPr>
+        <p:spPr>
+          <a:xfrm>
+            <a:off x="8074152" y="3959352"/>
+            <a:ext cx="2825496" cy="1170432"/>
+          </a:xfrm>
+          <a:prstGeom prst="rect">
+            <a:avLst/>
+          </a:prstGeom>
+          <a:noFill/>
+          <a:ln/>
+        </p:spPr>
+        <p:txBody>
+          <a:bodyPr wrap="square" lIns="0" tIns="0" rIns="0" bIns="0" rtlCol="0" anchor="t">
+            <a:normAutofit/>
+          </a:bodyPr>
+          <a:lstStyle/>
+          <a:p>
+            <a:pPr indent="0" marL="0">
+              <a:buNone/>
+            </a:pPr>
+            <a:r>
+              <a:rPr lang="en-US" sz="1250" dirty="0">
+                <a:solidFill>
+                  <a:srgbClr val="17364A"/>
+                </a:solidFill>
+                <a:latin typeface="Aptos" pitchFamily="34" charset="0"/>
+                <a:ea typeface="Aptos" pitchFamily="34" charset="-122"/>
+                <a:cs typeface="Aptos" pitchFamily="34" charset="-120"/>
+              </a:rPr>
+              <a:t>Connect the concept to public health decisions, safeguards, documentation, or implementation work.</a:t>
+            </a:r>
+            <a:endParaRPr lang="en-US" sz="1250" dirty="0"/>
           </a:p>
         </p:txBody>
       </p:sp>

--- a/downloads/presentations/modules/lesson-20-retrieval-augmented-generation-for-public-health-knowledge-work.pptx
+++ b/downloads/presentations/modules/lesson-20-retrieval-augmented-generation-for-public-health-knowledge-work.pptx
@@ -2999,6 +2999,45 @@
           </a:p>
         </p:txBody>
       </p:sp>
+      <p:sp>
+        <p:nvSpPr>
+          <p:cNvPr id="8" name="Text 5"/>
+          <p:cNvSpPr/>
+          <p:nvPr/>
+        </p:nvSpPr>
+        <p:spPr>
+          <a:xfrm>
+            <a:off x="11137392" y="6510528"/>
+            <a:ext cx="411480" cy="201168"/>
+          </a:xfrm>
+          <a:prstGeom prst="rect">
+            <a:avLst/>
+          </a:prstGeom>
+          <a:noFill/>
+          <a:ln/>
+        </p:spPr>
+        <p:txBody>
+          <a:bodyPr wrap="square" lIns="0" tIns="0" rIns="0" bIns="0" rtlCol="0" anchor="ctr"/>
+          <a:lstStyle/>
+          <a:p>
+            <a:pPr algn="r" indent="0" marL="0">
+              <a:buNone/>
+            </a:pPr>
+            <a:r>
+              <a:rPr lang="en-US" sz="900" dirty="0">
+                <a:solidFill>
+                  <a:srgbClr val="5F7181"/>
+                </a:solidFill>
+                <a:latin typeface="Aptos" pitchFamily="34" charset="0"/>
+                <a:ea typeface="Aptos" pitchFamily="34" charset="-122"/>
+                <a:cs typeface="Aptos" pitchFamily="34" charset="-120"/>
+              </a:rPr>
+              <a:t>1</a:t>
+            </a:r>
+            <a:endParaRPr lang="en-US" sz="900" dirty="0"/>
+          </a:p>
+        </p:txBody>
+      </p:sp>
     </p:spTree>
   </p:cSld>
   <p:clrMapOvr>
@@ -3192,7 +3231,7 @@
                 <a:ea typeface="Aptos" pitchFamily="34" charset="-122"/>
                 <a:cs typeface="Aptos" pitchFamily="34" charset="-120"/>
               </a:rPr>
-              <a:t>© Paula Soper</a:t>
+              <a:t>Â© Paula Soper</a:t>
             </a:r>
             <a:endParaRPr lang="en-US" sz="800" dirty="0"/>
           </a:p>
@@ -3200,7 +3239,46 @@
       </p:sp>
       <p:sp>
         <p:nvSpPr>
-          <p:cNvPr id="7" name="Shape 5"/>
+          <p:cNvPr id="7" name="Text 5"/>
+          <p:cNvSpPr/>
+          <p:nvPr/>
+        </p:nvSpPr>
+        <p:spPr>
+          <a:xfrm>
+            <a:off x="11137392" y="6510528"/>
+            <a:ext cx="411480" cy="201168"/>
+          </a:xfrm>
+          <a:prstGeom prst="rect">
+            <a:avLst/>
+          </a:prstGeom>
+          <a:noFill/>
+          <a:ln/>
+        </p:spPr>
+        <p:txBody>
+          <a:bodyPr wrap="square" lIns="0" tIns="0" rIns="0" bIns="0" rtlCol="0" anchor="ctr"/>
+          <a:lstStyle/>
+          <a:p>
+            <a:pPr algn="r" indent="0" marL="0">
+              <a:buNone/>
+            </a:pPr>
+            <a:r>
+              <a:rPr lang="en-US" sz="900" dirty="0">
+                <a:solidFill>
+                  <a:srgbClr val="5F7181"/>
+                </a:solidFill>
+                <a:latin typeface="Aptos" pitchFamily="34" charset="0"/>
+                <a:ea typeface="Aptos" pitchFamily="34" charset="-122"/>
+                <a:cs typeface="Aptos" pitchFamily="34" charset="-120"/>
+              </a:rPr>
+              <a:t>10</a:t>
+            </a:r>
+            <a:endParaRPr lang="en-US" sz="900" dirty="0"/>
+          </a:p>
+        </p:txBody>
+      </p:sp>
+      <p:sp>
+        <p:nvSpPr>
+          <p:cNvPr id="8" name="Shape 6"/>
           <p:cNvSpPr/>
           <p:nvPr/>
         </p:nvSpPr>
@@ -3225,7 +3303,7 @@
       </p:sp>
       <p:sp>
         <p:nvSpPr>
-          <p:cNvPr id="8" name="Text 6"/>
+          <p:cNvPr id="9" name="Text 7"/>
           <p:cNvSpPr/>
           <p:nvPr/>
         </p:nvSpPr>
@@ -3264,14 +3342,14 @@
       </p:sp>
       <p:sp>
         <p:nvSpPr>
-          <p:cNvPr id="9" name="Text 7"/>
+          <p:cNvPr id="10" name="Text 8"/>
           <p:cNvSpPr/>
           <p:nvPr/>
         </p:nvSpPr>
         <p:spPr>
           <a:xfrm>
             <a:off x="640080" y="621792"/>
-            <a:ext cx="10881360" cy="566928"/>
+            <a:ext cx="10881360" cy="713232"/>
           </a:xfrm>
           <a:prstGeom prst="rect">
             <a:avLst/>
@@ -3289,7 +3367,7 @@
               <a:buNone/>
             </a:pPr>
             <a:r>
-              <a:rPr lang="en-US" sz="2700" b="1" dirty="0">
+              <a:rPr lang="en-US" sz="3400" b="1" dirty="0">
                 <a:solidFill>
                   <a:srgbClr val="003A63"/>
                 </a:solidFill>
@@ -3299,20 +3377,20 @@
               </a:rPr>
               <a:t>Technical Deep Dive</a:t>
             </a:r>
-            <a:endParaRPr lang="en-US" sz="2700" dirty="0"/>
-          </a:p>
-        </p:txBody>
-      </p:sp>
-      <p:sp>
-        <p:nvSpPr>
-          <p:cNvPr id="10" name="Text 8"/>
-          <p:cNvSpPr/>
-          <p:nvPr/>
-        </p:nvSpPr>
-        <p:spPr>
-          <a:xfrm>
-            <a:off x="868680" y="1417320"/>
-            <a:ext cx="6675120" cy="4434840"/>
+            <a:endParaRPr lang="en-US" sz="3400" dirty="0"/>
+          </a:p>
+        </p:txBody>
+      </p:sp>
+      <p:sp>
+        <p:nvSpPr>
+          <p:cNvPr id="11" name="Text 9"/>
+          <p:cNvSpPr/>
+          <p:nvPr/>
+        </p:nvSpPr>
+        <p:spPr>
+          <a:xfrm>
+            <a:off x="868680" y="1508760"/>
+            <a:ext cx="6537960" cy="4160520"/>
           </a:xfrm>
           <a:prstGeom prst="rect">
             <a:avLst/>
@@ -3327,7 +3405,7 @@
           <a:lstStyle/>
           <a:p>
             <a:r>
-              <a:rPr lang="en-US" sz="1700" dirty="0">
+              <a:rPr lang="en-US" sz="2100" dirty="0">
                 <a:solidFill>
                   <a:srgbClr val="17364A"/>
                 </a:solidFill>
@@ -3337,11 +3415,11 @@
               </a:rPr>
               <a:t>A RAG system begins with content selection.</a:t>
             </a:r>
-            <a:endParaRPr lang="en-US" sz="1700" dirty="0"/>
-          </a:p>
-          <a:p>
-            <a:r>
-              <a:rPr lang="en-US" sz="1700" dirty="0">
+            <a:endParaRPr lang="en-US" sz="2100" dirty="0"/>
+          </a:p>
+          <a:p>
+            <a:r>
+              <a:rPr lang="en-US" sz="2100" dirty="0">
                 <a:solidFill>
                   <a:srgbClr val="17364A"/>
                 </a:solidFill>
@@ -3349,13 +3427,13 @@
                 <a:ea typeface="Aptos" pitchFamily="34" charset="-122"/>
                 <a:cs typeface="Aptos" pitchFamily="34" charset="-120"/>
               </a:rPr>
-              <a:t>Agencies should decide which documents are authoritative, current, approved for the use case, and appropriate for the.</a:t>
-            </a:r>
-            <a:endParaRPr lang="en-US" sz="1700" dirty="0"/>
-          </a:p>
-          <a:p>
-            <a:r>
-              <a:rPr lang="en-US" sz="1700" dirty="0">
+              <a:t>Agencies should decide which documents are authoritative, current, approved for the use case, and.</a:t>
+            </a:r>
+            <a:endParaRPr lang="en-US" sz="2100" dirty="0"/>
+          </a:p>
+          <a:p>
+            <a:r>
+              <a:rPr lang="en-US" sz="2100" dirty="0">
                 <a:solidFill>
                   <a:srgbClr val="17364A"/>
                 </a:solidFill>
@@ -3363,29 +3441,15 @@
                 <a:ea typeface="Aptos" pitchFamily="34" charset="-122"/>
                 <a:cs typeface="Aptos" pitchFamily="34" charset="-120"/>
               </a:rPr>
-              <a:t>Content inventories should include owner, version, effective date, review date, sensitivity level, and access rules.</a:t>
-            </a:r>
-            <a:endParaRPr lang="en-US" sz="1700" dirty="0"/>
-          </a:p>
-          <a:p>
-            <a:r>
-              <a:rPr lang="en-US" sz="1700" dirty="0">
-                <a:solidFill>
-                  <a:srgbClr val="17364A"/>
-                </a:solidFill>
-                <a:latin typeface="Aptos" pitchFamily="34" charset="0"/>
-                <a:ea typeface="Aptos" pitchFamily="34" charset="-122"/>
-                <a:cs typeface="Aptos" pitchFamily="34" charset="-120"/>
-              </a:rPr>
-              <a:t>Without this foundation, retrieval can surface obsolete or unauthorized material.</a:t>
-            </a:r>
-            <a:endParaRPr lang="en-US" sz="1700" dirty="0"/>
-          </a:p>
-        </p:txBody>
-      </p:sp>
-      <p:sp>
-        <p:nvSpPr>
-          <p:cNvPr id="11" name="Shape 9"/>
+              <a:t>Content inventories should include owner, version, effective date, review date, sensitivity level, and.</a:t>
+            </a:r>
+            <a:endParaRPr lang="en-US" sz="2100" dirty="0"/>
+          </a:p>
+        </p:txBody>
+      </p:sp>
+      <p:sp>
+        <p:nvSpPr>
+          <p:cNvPr id="12" name="Shape 10"/>
           <p:cNvSpPr/>
           <p:nvPr/>
         </p:nvSpPr>
@@ -3412,14 +3476,14 @@
       </p:sp>
       <p:sp>
         <p:nvSpPr>
-          <p:cNvPr id="12" name="Text 10"/>
+          <p:cNvPr id="13" name="Text 11"/>
           <p:cNvSpPr/>
           <p:nvPr/>
         </p:nvSpPr>
         <p:spPr>
           <a:xfrm>
             <a:off x="8074152" y="1563624"/>
-            <a:ext cx="2825496" cy="201168"/>
+            <a:ext cx="2825496" cy="256032"/>
           </a:xfrm>
           <a:prstGeom prst="rect">
             <a:avLst/>
@@ -3435,7 +3499,7 @@
               <a:buNone/>
             </a:pPr>
             <a:r>
-              <a:rPr lang="en-US" sz="950" b="1" dirty="0">
+              <a:rPr lang="en-US" sz="1300" b="1" dirty="0">
                 <a:solidFill>
                   <a:srgbClr val="0068B7"/>
                 </a:solidFill>
@@ -3445,20 +3509,20 @@
               </a:rPr>
               <a:t>Key idea</a:t>
             </a:r>
-            <a:endParaRPr lang="en-US" sz="950" dirty="0"/>
-          </a:p>
-        </p:txBody>
-      </p:sp>
-      <p:sp>
-        <p:nvSpPr>
-          <p:cNvPr id="13" name="Text 11"/>
-          <p:cNvSpPr/>
-          <p:nvPr/>
-        </p:nvSpPr>
-        <p:spPr>
-          <a:xfrm>
-            <a:off x="8074152" y="1856232"/>
-            <a:ext cx="2825496" cy="1261872"/>
+            <a:endParaRPr lang="en-US" sz="1300" dirty="0"/>
+          </a:p>
+        </p:txBody>
+      </p:sp>
+      <p:sp>
+        <p:nvSpPr>
+          <p:cNvPr id="14" name="Text 12"/>
+          <p:cNvSpPr/>
+          <p:nvPr/>
+        </p:nvSpPr>
+        <p:spPr>
+          <a:xfrm>
+            <a:off x="8074152" y="1920240"/>
+            <a:ext cx="2825496" cy="1188720"/>
           </a:xfrm>
           <a:prstGeom prst="rect">
             <a:avLst/>
@@ -3476,7 +3540,7 @@
               <a:buNone/>
             </a:pPr>
             <a:r>
-              <a:rPr lang="en-US" sz="1250" dirty="0">
+              <a:rPr lang="en-US" sz="1550" dirty="0">
                 <a:solidFill>
                   <a:srgbClr val="17364A"/>
                 </a:solidFill>
@@ -3486,13 +3550,13 @@
               </a:rPr>
               <a:t>A RAG system begins with content selection.</a:t>
             </a:r>
-            <a:endParaRPr lang="en-US" sz="1250" dirty="0"/>
-          </a:p>
-        </p:txBody>
-      </p:sp>
-      <p:sp>
-        <p:nvSpPr>
-          <p:cNvPr id="14" name="Shape 12"/>
+            <a:endParaRPr lang="en-US" sz="1550" dirty="0"/>
+          </a:p>
+        </p:txBody>
+      </p:sp>
+      <p:sp>
+        <p:nvSpPr>
+          <p:cNvPr id="15" name="Shape 13"/>
           <p:cNvSpPr/>
           <p:nvPr/>
         </p:nvSpPr>
@@ -3519,14 +3583,14 @@
       </p:sp>
       <p:sp>
         <p:nvSpPr>
-          <p:cNvPr id="15" name="Text 13"/>
+          <p:cNvPr id="16" name="Text 14"/>
           <p:cNvSpPr/>
           <p:nvPr/>
         </p:nvSpPr>
         <p:spPr>
           <a:xfrm>
             <a:off x="8074152" y="3666744"/>
-            <a:ext cx="2825496" cy="201168"/>
+            <a:ext cx="2825496" cy="256032"/>
           </a:xfrm>
           <a:prstGeom prst="rect">
             <a:avLst/>
@@ -3542,7 +3606,7 @@
               <a:buNone/>
             </a:pPr>
             <a:r>
-              <a:rPr lang="en-US" sz="950" b="1" dirty="0">
+              <a:rPr lang="en-US" sz="1300" b="1" dirty="0">
                 <a:solidFill>
                   <a:srgbClr val="0068B7"/>
                 </a:solidFill>
@@ -3552,20 +3616,20 @@
               </a:rPr>
               <a:t>Use this for</a:t>
             </a:r>
-            <a:endParaRPr lang="en-US" sz="950" dirty="0"/>
-          </a:p>
-        </p:txBody>
-      </p:sp>
-      <p:sp>
-        <p:nvSpPr>
-          <p:cNvPr id="16" name="Text 14"/>
-          <p:cNvSpPr/>
-          <p:nvPr/>
-        </p:nvSpPr>
-        <p:spPr>
-          <a:xfrm>
-            <a:off x="8074152" y="3959352"/>
-            <a:ext cx="2825496" cy="1170432"/>
+            <a:endParaRPr lang="en-US" sz="1300" dirty="0"/>
+          </a:p>
+        </p:txBody>
+      </p:sp>
+      <p:sp>
+        <p:nvSpPr>
+          <p:cNvPr id="17" name="Text 15"/>
+          <p:cNvSpPr/>
+          <p:nvPr/>
+        </p:nvSpPr>
+        <p:spPr>
+          <a:xfrm>
+            <a:off x="8074152" y="4023360"/>
+            <a:ext cx="2825496" cy="1097280"/>
           </a:xfrm>
           <a:prstGeom prst="rect">
             <a:avLst/>
@@ -3583,7 +3647,7 @@
               <a:buNone/>
             </a:pPr>
             <a:r>
-              <a:rPr lang="en-US" sz="1250" dirty="0">
+              <a:rPr lang="en-US" sz="1550" dirty="0">
                 <a:solidFill>
                   <a:srgbClr val="17364A"/>
                 </a:solidFill>
@@ -3593,7 +3657,7 @@
               </a:rPr>
               <a:t>Connect the concept to public health decisions, safeguards, documentation, or implementation work.</a:t>
             </a:r>
-            <a:endParaRPr lang="en-US" sz="1250" dirty="0"/>
+            <a:endParaRPr lang="en-US" sz="1550" dirty="0"/>
           </a:p>
         </p:txBody>
       </p:sp>
@@ -3790,7 +3854,7 @@
                 <a:ea typeface="Aptos" pitchFamily="34" charset="-122"/>
                 <a:cs typeface="Aptos" pitchFamily="34" charset="-120"/>
               </a:rPr>
-              <a:t>© Paula Soper</a:t>
+              <a:t>Â© Paula Soper</a:t>
             </a:r>
             <a:endParaRPr lang="en-US" sz="800" dirty="0"/>
           </a:p>
@@ -3804,8 +3868,47 @@
         </p:nvSpPr>
         <p:spPr>
           <a:xfrm>
+            <a:off x="11137392" y="6510528"/>
+            <a:ext cx="411480" cy="201168"/>
+          </a:xfrm>
+          <a:prstGeom prst="rect">
+            <a:avLst/>
+          </a:prstGeom>
+          <a:noFill/>
+          <a:ln/>
+        </p:spPr>
+        <p:txBody>
+          <a:bodyPr wrap="square" lIns="0" tIns="0" rIns="0" bIns="0" rtlCol="0" anchor="ctr"/>
+          <a:lstStyle/>
+          <a:p>
+            <a:pPr algn="r" indent="0" marL="0">
+              <a:buNone/>
+            </a:pPr>
+            <a:r>
+              <a:rPr lang="en-US" sz="900" dirty="0">
+                <a:solidFill>
+                  <a:srgbClr val="5F7181"/>
+                </a:solidFill>
+                <a:latin typeface="Aptos" pitchFamily="34" charset="0"/>
+                <a:ea typeface="Aptos" pitchFamily="34" charset="-122"/>
+                <a:cs typeface="Aptos" pitchFamily="34" charset="-120"/>
+              </a:rPr>
+              <a:t>11</a:t>
+            </a:r>
+            <a:endParaRPr lang="en-US" sz="900" dirty="0"/>
+          </a:p>
+        </p:txBody>
+      </p:sp>
+      <p:sp>
+        <p:nvSpPr>
+          <p:cNvPr id="8" name="Text 6"/>
+          <p:cNvSpPr/>
+          <p:nvPr/>
+        </p:nvSpPr>
+        <p:spPr>
+          <a:xfrm>
             <a:off x="640080" y="658368"/>
-            <a:ext cx="10881360" cy="566928"/>
+            <a:ext cx="10881360" cy="713232"/>
           </a:xfrm>
           <a:prstGeom prst="rect">
             <a:avLst/>
@@ -3823,7 +3926,7 @@
               <a:buNone/>
             </a:pPr>
             <a:r>
-              <a:rPr lang="en-US" sz="2700" b="1" dirty="0">
+              <a:rPr lang="en-US" sz="3400" b="1" dirty="0">
                 <a:solidFill>
                   <a:srgbClr val="003A63"/>
                 </a:solidFill>
@@ -3833,20 +3936,20 @@
               </a:rPr>
               <a:t>Technical Deep Dive Continued</a:t>
             </a:r>
-            <a:endParaRPr lang="en-US" sz="2700" dirty="0"/>
-          </a:p>
-        </p:txBody>
-      </p:sp>
-      <p:sp>
-        <p:nvSpPr>
-          <p:cNvPr id="8" name="Text 6"/>
-          <p:cNvSpPr/>
-          <p:nvPr/>
-        </p:nvSpPr>
-        <p:spPr>
-          <a:xfrm>
-            <a:off x="868680" y="1417320"/>
-            <a:ext cx="6675120" cy="4434840"/>
+            <a:endParaRPr lang="en-US" sz="3400" dirty="0"/>
+          </a:p>
+        </p:txBody>
+      </p:sp>
+      <p:sp>
+        <p:nvSpPr>
+          <p:cNvPr id="9" name="Text 7"/>
+          <p:cNvSpPr/>
+          <p:nvPr/>
+        </p:nvSpPr>
+        <p:spPr>
+          <a:xfrm>
+            <a:off x="868680" y="1508760"/>
+            <a:ext cx="6537960" cy="4160520"/>
           </a:xfrm>
           <a:prstGeom prst="rect">
             <a:avLst/>
@@ -3861,7 +3964,7 @@
           <a:lstStyle/>
           <a:p>
             <a:r>
-              <a:rPr lang="en-US" sz="1700" dirty="0">
+              <a:rPr lang="en-US" sz="2100" dirty="0">
                 <a:solidFill>
                   <a:srgbClr val="17364A"/>
                 </a:solidFill>
@@ -3871,11 +3974,11 @@
               </a:rPr>
               <a:t>Generation should be constrained by retrieved material.</a:t>
             </a:r>
-            <a:endParaRPr lang="en-US" sz="1700" dirty="0"/>
-          </a:p>
-          <a:p>
-            <a:r>
-              <a:rPr lang="en-US" sz="1700" dirty="0">
+            <a:endParaRPr lang="en-US" sz="2100" dirty="0"/>
+          </a:p>
+          <a:p>
+            <a:r>
+              <a:rPr lang="en-US" sz="2100" dirty="0">
                 <a:solidFill>
                   <a:srgbClr val="17364A"/>
                 </a:solidFill>
@@ -3883,13 +3986,13 @@
                 <a:ea typeface="Aptos" pitchFamily="34" charset="-122"/>
                 <a:cs typeface="Aptos" pitchFamily="34" charset="-120"/>
               </a:rPr>
-              <a:t>The system should be instructed to answer from sources, cite them, identify uncertainty, and avoid unsupported claims.</a:t>
-            </a:r>
-            <a:endParaRPr lang="en-US" sz="1700" dirty="0"/>
-          </a:p>
-          <a:p>
-            <a:r>
-              <a:rPr lang="en-US" sz="1700" dirty="0">
+              <a:t>The system should be instructed to answer from sources, cite them, identify uncertainty, and avoid.</a:t>
+            </a:r>
+            <a:endParaRPr lang="en-US" sz="2100" dirty="0"/>
+          </a:p>
+          <a:p>
+            <a:r>
+              <a:rPr lang="en-US" sz="2100" dirty="0">
                 <a:solidFill>
                   <a:srgbClr val="17364A"/>
                 </a:solidFill>
@@ -3899,27 +4002,13 @@
               </a:rPr>
               <a:t>It should also explain when guidance conflicts or when source material is insufficient.</a:t>
             </a:r>
-            <a:endParaRPr lang="en-US" sz="1700" dirty="0"/>
-          </a:p>
-          <a:p>
-            <a:r>
-              <a:rPr lang="en-US" sz="1700" dirty="0">
-                <a:solidFill>
-                  <a:srgbClr val="17364A"/>
-                </a:solidFill>
-                <a:latin typeface="Aptos" pitchFamily="34" charset="0"/>
-                <a:ea typeface="Aptos" pitchFamily="34" charset="-122"/>
-                <a:cs typeface="Aptos" pitchFamily="34" charset="-120"/>
-              </a:rPr>
-              <a:t>Users should be able to open the cited source and verify key statements.</a:t>
-            </a:r>
-            <a:endParaRPr lang="en-US" sz="1700" dirty="0"/>
-          </a:p>
-        </p:txBody>
-      </p:sp>
-      <p:sp>
-        <p:nvSpPr>
-          <p:cNvPr id="9" name="Shape 7"/>
+            <a:endParaRPr lang="en-US" sz="2100" dirty="0"/>
+          </a:p>
+        </p:txBody>
+      </p:sp>
+      <p:sp>
+        <p:nvSpPr>
+          <p:cNvPr id="10" name="Shape 8"/>
           <p:cNvSpPr/>
           <p:nvPr/>
         </p:nvSpPr>
@@ -3946,14 +4035,14 @@
       </p:sp>
       <p:sp>
         <p:nvSpPr>
-          <p:cNvPr id="10" name="Text 8"/>
+          <p:cNvPr id="11" name="Text 9"/>
           <p:cNvSpPr/>
           <p:nvPr/>
         </p:nvSpPr>
         <p:spPr>
           <a:xfrm>
             <a:off x="8074152" y="1563624"/>
-            <a:ext cx="2825496" cy="201168"/>
+            <a:ext cx="2825496" cy="256032"/>
           </a:xfrm>
           <a:prstGeom prst="rect">
             <a:avLst/>
@@ -3969,7 +4058,7 @@
               <a:buNone/>
             </a:pPr>
             <a:r>
-              <a:rPr lang="en-US" sz="950" b="1" dirty="0">
+              <a:rPr lang="en-US" sz="1300" b="1" dirty="0">
                 <a:solidFill>
                   <a:srgbClr val="0068B7"/>
                 </a:solidFill>
@@ -3979,20 +4068,20 @@
               </a:rPr>
               <a:t>Key idea</a:t>
             </a:r>
-            <a:endParaRPr lang="en-US" sz="950" dirty="0"/>
-          </a:p>
-        </p:txBody>
-      </p:sp>
-      <p:sp>
-        <p:nvSpPr>
-          <p:cNvPr id="11" name="Text 9"/>
-          <p:cNvSpPr/>
-          <p:nvPr/>
-        </p:nvSpPr>
-        <p:spPr>
-          <a:xfrm>
-            <a:off x="8074152" y="1856232"/>
-            <a:ext cx="2825496" cy="1261872"/>
+            <a:endParaRPr lang="en-US" sz="1300" dirty="0"/>
+          </a:p>
+        </p:txBody>
+      </p:sp>
+      <p:sp>
+        <p:nvSpPr>
+          <p:cNvPr id="12" name="Text 10"/>
+          <p:cNvSpPr/>
+          <p:nvPr/>
+        </p:nvSpPr>
+        <p:spPr>
+          <a:xfrm>
+            <a:off x="8074152" y="1920240"/>
+            <a:ext cx="2825496" cy="1188720"/>
           </a:xfrm>
           <a:prstGeom prst="rect">
             <a:avLst/>
@@ -4010,7 +4099,7 @@
               <a:buNone/>
             </a:pPr>
             <a:r>
-              <a:rPr lang="en-US" sz="1250" dirty="0">
+              <a:rPr lang="en-US" sz="1550" dirty="0">
                 <a:solidFill>
                   <a:srgbClr val="17364A"/>
                 </a:solidFill>
@@ -4020,13 +4109,13 @@
               </a:rPr>
               <a:t>Generation should be constrained by retrieved material.</a:t>
             </a:r>
-            <a:endParaRPr lang="en-US" sz="1250" dirty="0"/>
-          </a:p>
-        </p:txBody>
-      </p:sp>
-      <p:sp>
-        <p:nvSpPr>
-          <p:cNvPr id="12" name="Shape 10"/>
+            <a:endParaRPr lang="en-US" sz="1550" dirty="0"/>
+          </a:p>
+        </p:txBody>
+      </p:sp>
+      <p:sp>
+        <p:nvSpPr>
+          <p:cNvPr id="13" name="Shape 11"/>
           <p:cNvSpPr/>
           <p:nvPr/>
         </p:nvSpPr>
@@ -4053,14 +4142,14 @@
       </p:sp>
       <p:sp>
         <p:nvSpPr>
-          <p:cNvPr id="13" name="Text 11"/>
+          <p:cNvPr id="14" name="Text 12"/>
           <p:cNvSpPr/>
           <p:nvPr/>
         </p:nvSpPr>
         <p:spPr>
           <a:xfrm>
             <a:off x="8074152" y="3666744"/>
-            <a:ext cx="2825496" cy="201168"/>
+            <a:ext cx="2825496" cy="256032"/>
           </a:xfrm>
           <a:prstGeom prst="rect">
             <a:avLst/>
@@ -4076,7 +4165,7 @@
               <a:buNone/>
             </a:pPr>
             <a:r>
-              <a:rPr lang="en-US" sz="950" b="1" dirty="0">
+              <a:rPr lang="en-US" sz="1300" b="1" dirty="0">
                 <a:solidFill>
                   <a:srgbClr val="0068B7"/>
                 </a:solidFill>
@@ -4086,20 +4175,20 @@
               </a:rPr>
               <a:t>Use this for</a:t>
             </a:r>
-            <a:endParaRPr lang="en-US" sz="950" dirty="0"/>
-          </a:p>
-        </p:txBody>
-      </p:sp>
-      <p:sp>
-        <p:nvSpPr>
-          <p:cNvPr id="14" name="Text 12"/>
-          <p:cNvSpPr/>
-          <p:nvPr/>
-        </p:nvSpPr>
-        <p:spPr>
-          <a:xfrm>
-            <a:off x="8074152" y="3959352"/>
-            <a:ext cx="2825496" cy="1170432"/>
+            <a:endParaRPr lang="en-US" sz="1300" dirty="0"/>
+          </a:p>
+        </p:txBody>
+      </p:sp>
+      <p:sp>
+        <p:nvSpPr>
+          <p:cNvPr id="15" name="Text 13"/>
+          <p:cNvSpPr/>
+          <p:nvPr/>
+        </p:nvSpPr>
+        <p:spPr>
+          <a:xfrm>
+            <a:off x="8074152" y="4023360"/>
+            <a:ext cx="2825496" cy="1097280"/>
           </a:xfrm>
           <a:prstGeom prst="rect">
             <a:avLst/>
@@ -4117,7 +4206,7 @@
               <a:buNone/>
             </a:pPr>
             <a:r>
-              <a:rPr lang="en-US" sz="1250" dirty="0">
+              <a:rPr lang="en-US" sz="1550" dirty="0">
                 <a:solidFill>
                   <a:srgbClr val="17364A"/>
                 </a:solidFill>
@@ -4127,7 +4216,7 @@
               </a:rPr>
               <a:t>Connect the concept to public health decisions, safeguards, documentation, or implementation work.</a:t>
             </a:r>
-            <a:endParaRPr lang="en-US" sz="1250" dirty="0"/>
+            <a:endParaRPr lang="en-US" sz="1550" dirty="0"/>
           </a:p>
         </p:txBody>
       </p:sp>
@@ -4324,7 +4413,7 @@
                 <a:ea typeface="Aptos" pitchFamily="34" charset="-122"/>
                 <a:cs typeface="Aptos" pitchFamily="34" charset="-120"/>
               </a:rPr>
-              <a:t>© Paula Soper</a:t>
+              <a:t>Â© Paula Soper</a:t>
             </a:r>
             <a:endParaRPr lang="en-US" sz="800" dirty="0"/>
           </a:p>
@@ -4332,7 +4421,46 @@
       </p:sp>
       <p:sp>
         <p:nvSpPr>
-          <p:cNvPr id="7" name="Shape 5"/>
+          <p:cNvPr id="7" name="Text 5"/>
+          <p:cNvSpPr/>
+          <p:nvPr/>
+        </p:nvSpPr>
+        <p:spPr>
+          <a:xfrm>
+            <a:off x="11137392" y="6510528"/>
+            <a:ext cx="411480" cy="201168"/>
+          </a:xfrm>
+          <a:prstGeom prst="rect">
+            <a:avLst/>
+          </a:prstGeom>
+          <a:noFill/>
+          <a:ln/>
+        </p:spPr>
+        <p:txBody>
+          <a:bodyPr wrap="square" lIns="0" tIns="0" rIns="0" bIns="0" rtlCol="0" anchor="ctr"/>
+          <a:lstStyle/>
+          <a:p>
+            <a:pPr algn="r" indent="0" marL="0">
+              <a:buNone/>
+            </a:pPr>
+            <a:r>
+              <a:rPr lang="en-US" sz="900" dirty="0">
+                <a:solidFill>
+                  <a:srgbClr val="5F7181"/>
+                </a:solidFill>
+                <a:latin typeface="Aptos" pitchFamily="34" charset="0"/>
+                <a:ea typeface="Aptos" pitchFamily="34" charset="-122"/>
+                <a:cs typeface="Aptos" pitchFamily="34" charset="-120"/>
+              </a:rPr>
+              <a:t>12</a:t>
+            </a:r>
+            <a:endParaRPr lang="en-US" sz="900" dirty="0"/>
+          </a:p>
+        </p:txBody>
+      </p:sp>
+      <p:sp>
+        <p:nvSpPr>
+          <p:cNvPr id="8" name="Shape 6"/>
           <p:cNvSpPr/>
           <p:nvPr/>
         </p:nvSpPr>
@@ -4357,7 +4485,7 @@
       </p:sp>
       <p:sp>
         <p:nvSpPr>
-          <p:cNvPr id="8" name="Text 6"/>
+          <p:cNvPr id="9" name="Text 7"/>
           <p:cNvSpPr/>
           <p:nvPr/>
         </p:nvSpPr>
@@ -4396,14 +4524,14 @@
       </p:sp>
       <p:sp>
         <p:nvSpPr>
-          <p:cNvPr id="9" name="Text 7"/>
+          <p:cNvPr id="10" name="Text 8"/>
           <p:cNvSpPr/>
           <p:nvPr/>
         </p:nvSpPr>
         <p:spPr>
           <a:xfrm>
             <a:off x="640080" y="621792"/>
-            <a:ext cx="10881360" cy="566928"/>
+            <a:ext cx="10881360" cy="713232"/>
           </a:xfrm>
           <a:prstGeom prst="rect">
             <a:avLst/>
@@ -4421,7 +4549,7 @@
               <a:buNone/>
             </a:pPr>
             <a:r>
-              <a:rPr lang="en-US" sz="2700" b="1" dirty="0">
+              <a:rPr lang="en-US" sz="3400" b="1" dirty="0">
                 <a:solidFill>
                   <a:srgbClr val="003A63"/>
                 </a:solidFill>
@@ -4431,20 +4559,20 @@
               </a:rPr>
               <a:t>Risks, Failure Modes, and Guardrails</a:t>
             </a:r>
-            <a:endParaRPr lang="en-US" sz="2700" dirty="0"/>
-          </a:p>
-        </p:txBody>
-      </p:sp>
-      <p:sp>
-        <p:nvSpPr>
-          <p:cNvPr id="10" name="Text 8"/>
-          <p:cNvSpPr/>
-          <p:nvPr/>
-        </p:nvSpPr>
-        <p:spPr>
-          <a:xfrm>
-            <a:off x="868680" y="1417320"/>
-            <a:ext cx="6675120" cy="4434840"/>
+            <a:endParaRPr lang="en-US" sz="3400" dirty="0"/>
+          </a:p>
+        </p:txBody>
+      </p:sp>
+      <p:sp>
+        <p:nvSpPr>
+          <p:cNvPr id="11" name="Text 9"/>
+          <p:cNvSpPr/>
+          <p:nvPr/>
+        </p:nvSpPr>
+        <p:spPr>
+          <a:xfrm>
+            <a:off x="868680" y="1508760"/>
+            <a:ext cx="6537960" cy="4160520"/>
           </a:xfrm>
           <a:prstGeom prst="rect">
             <a:avLst/>
@@ -4459,7 +4587,7 @@
           <a:lstStyle/>
           <a:p>
             <a:r>
-              <a:rPr lang="en-US" sz="1700" dirty="0">
+              <a:rPr lang="en-US" sz="2100" dirty="0">
                 <a:solidFill>
                   <a:srgbClr val="17364A"/>
                 </a:solidFill>
@@ -4469,11 +4597,11 @@
               </a:rPr>
               <a:t>Stale or conflicting content.</a:t>
             </a:r>
-            <a:endParaRPr lang="en-US" sz="1700" dirty="0"/>
-          </a:p>
-          <a:p>
-            <a:r>
-              <a:rPr lang="en-US" sz="1700" dirty="0">
+            <a:endParaRPr lang="en-US" sz="2100" dirty="0"/>
+          </a:p>
+          <a:p>
+            <a:r>
+              <a:rPr lang="en-US" sz="2100" dirty="0">
                 <a:solidFill>
                   <a:srgbClr val="17364A"/>
                 </a:solidFill>
@@ -4483,11 +4611,11 @@
               </a:rPr>
               <a:t>Outdated or inconsistent documents can produce wrong answers.</a:t>
             </a:r>
-            <a:endParaRPr lang="en-US" sz="1700" dirty="0"/>
-          </a:p>
-          <a:p>
-            <a:r>
-              <a:rPr lang="en-US" sz="1700" dirty="0">
+            <a:endParaRPr lang="en-US" sz="2100" dirty="0"/>
+          </a:p>
+          <a:p>
+            <a:r>
+              <a:rPr lang="en-US" sz="2100" dirty="0">
                 <a:solidFill>
                   <a:srgbClr val="17364A"/>
                 </a:solidFill>
@@ -4497,27 +4625,13 @@
               </a:rPr>
               <a:t>Guardrails include content ownership, version control, review dates, and archival rules.</a:t>
             </a:r>
-            <a:endParaRPr lang="en-US" sz="1700" dirty="0"/>
-          </a:p>
-          <a:p>
-            <a:r>
-              <a:rPr lang="en-US" sz="1700" dirty="0">
-                <a:solidFill>
-                  <a:srgbClr val="17364A"/>
-                </a:solidFill>
-                <a:latin typeface="Aptos" pitchFamily="34" charset="0"/>
-                <a:ea typeface="Aptos" pitchFamily="34" charset="-122"/>
-                <a:cs typeface="Aptos" pitchFamily="34" charset="-120"/>
-              </a:rPr>
-              <a:t>Permission leakage.</a:t>
-            </a:r>
-            <a:endParaRPr lang="en-US" sz="1700" dirty="0"/>
-          </a:p>
-        </p:txBody>
-      </p:sp>
-      <p:sp>
-        <p:nvSpPr>
-          <p:cNvPr id="11" name="Shape 9"/>
+            <a:endParaRPr lang="en-US" sz="2100" dirty="0"/>
+          </a:p>
+        </p:txBody>
+      </p:sp>
+      <p:sp>
+        <p:nvSpPr>
+          <p:cNvPr id="12" name="Shape 10"/>
           <p:cNvSpPr/>
           <p:nvPr/>
         </p:nvSpPr>
@@ -4544,14 +4658,14 @@
       </p:sp>
       <p:sp>
         <p:nvSpPr>
-          <p:cNvPr id="12" name="Text 10"/>
+          <p:cNvPr id="13" name="Text 11"/>
           <p:cNvSpPr/>
           <p:nvPr/>
         </p:nvSpPr>
         <p:spPr>
           <a:xfrm>
             <a:off x="8074152" y="1563624"/>
-            <a:ext cx="2825496" cy="201168"/>
+            <a:ext cx="2825496" cy="256032"/>
           </a:xfrm>
           <a:prstGeom prst="rect">
             <a:avLst/>
@@ -4567,7 +4681,7 @@
               <a:buNone/>
             </a:pPr>
             <a:r>
-              <a:rPr lang="en-US" sz="950" b="1" dirty="0">
+              <a:rPr lang="en-US" sz="1300" b="1" dirty="0">
                 <a:solidFill>
                   <a:srgbClr val="0068B7"/>
                 </a:solidFill>
@@ -4577,20 +4691,20 @@
               </a:rPr>
               <a:t>Key idea</a:t>
             </a:r>
-            <a:endParaRPr lang="en-US" sz="950" dirty="0"/>
-          </a:p>
-        </p:txBody>
-      </p:sp>
-      <p:sp>
-        <p:nvSpPr>
-          <p:cNvPr id="13" name="Text 11"/>
-          <p:cNvSpPr/>
-          <p:nvPr/>
-        </p:nvSpPr>
-        <p:spPr>
-          <a:xfrm>
-            <a:off x="8074152" y="1856232"/>
-            <a:ext cx="2825496" cy="1261872"/>
+            <a:endParaRPr lang="en-US" sz="1300" dirty="0"/>
+          </a:p>
+        </p:txBody>
+      </p:sp>
+      <p:sp>
+        <p:nvSpPr>
+          <p:cNvPr id="14" name="Text 12"/>
+          <p:cNvSpPr/>
+          <p:nvPr/>
+        </p:nvSpPr>
+        <p:spPr>
+          <a:xfrm>
+            <a:off x="8074152" y="1920240"/>
+            <a:ext cx="2825496" cy="1188720"/>
           </a:xfrm>
           <a:prstGeom prst="rect">
             <a:avLst/>
@@ -4608,7 +4722,7 @@
               <a:buNone/>
             </a:pPr>
             <a:r>
-              <a:rPr lang="en-US" sz="1250" dirty="0">
+              <a:rPr lang="en-US" sz="1550" dirty="0">
                 <a:solidFill>
                   <a:srgbClr val="17364A"/>
                 </a:solidFill>
@@ -4618,13 +4732,13 @@
               </a:rPr>
               <a:t>Stale or conflicting content.</a:t>
             </a:r>
-            <a:endParaRPr lang="en-US" sz="1250" dirty="0"/>
-          </a:p>
-        </p:txBody>
-      </p:sp>
-      <p:sp>
-        <p:nvSpPr>
-          <p:cNvPr id="14" name="Shape 12"/>
+            <a:endParaRPr lang="en-US" sz="1550" dirty="0"/>
+          </a:p>
+        </p:txBody>
+      </p:sp>
+      <p:sp>
+        <p:nvSpPr>
+          <p:cNvPr id="15" name="Shape 13"/>
           <p:cNvSpPr/>
           <p:nvPr/>
         </p:nvSpPr>
@@ -4651,14 +4765,14 @@
       </p:sp>
       <p:sp>
         <p:nvSpPr>
-          <p:cNvPr id="15" name="Text 13"/>
+          <p:cNvPr id="16" name="Text 14"/>
           <p:cNvSpPr/>
           <p:nvPr/>
         </p:nvSpPr>
         <p:spPr>
           <a:xfrm>
             <a:off x="8074152" y="3666744"/>
-            <a:ext cx="2825496" cy="201168"/>
+            <a:ext cx="2825496" cy="256032"/>
           </a:xfrm>
           <a:prstGeom prst="rect">
             <a:avLst/>
@@ -4674,7 +4788,7 @@
               <a:buNone/>
             </a:pPr>
             <a:r>
-              <a:rPr lang="en-US" sz="950" b="1" dirty="0">
+              <a:rPr lang="en-US" sz="1300" b="1" dirty="0">
                 <a:solidFill>
                   <a:srgbClr val="0068B7"/>
                 </a:solidFill>
@@ -4684,20 +4798,20 @@
               </a:rPr>
               <a:t>Use this for</a:t>
             </a:r>
-            <a:endParaRPr lang="en-US" sz="950" dirty="0"/>
-          </a:p>
-        </p:txBody>
-      </p:sp>
-      <p:sp>
-        <p:nvSpPr>
-          <p:cNvPr id="16" name="Text 14"/>
-          <p:cNvSpPr/>
-          <p:nvPr/>
-        </p:nvSpPr>
-        <p:spPr>
-          <a:xfrm>
-            <a:off x="8074152" y="3959352"/>
-            <a:ext cx="2825496" cy="1170432"/>
+            <a:endParaRPr lang="en-US" sz="1300" dirty="0"/>
+          </a:p>
+        </p:txBody>
+      </p:sp>
+      <p:sp>
+        <p:nvSpPr>
+          <p:cNvPr id="17" name="Text 15"/>
+          <p:cNvSpPr/>
+          <p:nvPr/>
+        </p:nvSpPr>
+        <p:spPr>
+          <a:xfrm>
+            <a:off x="8074152" y="4023360"/>
+            <a:ext cx="2825496" cy="1097280"/>
           </a:xfrm>
           <a:prstGeom prst="rect">
             <a:avLst/>
@@ -4715,7 +4829,7 @@
               <a:buNone/>
             </a:pPr>
             <a:r>
-              <a:rPr lang="en-US" sz="1250" dirty="0">
+              <a:rPr lang="en-US" sz="1550" dirty="0">
                 <a:solidFill>
                   <a:srgbClr val="17364A"/>
                 </a:solidFill>
@@ -4725,7 +4839,7 @@
               </a:rPr>
               <a:t>Connect the concept to public health decisions, safeguards, documentation, or implementation work.</a:t>
             </a:r>
-            <a:endParaRPr lang="en-US" sz="1250" dirty="0"/>
+            <a:endParaRPr lang="en-US" sz="1550" dirty="0"/>
           </a:p>
         </p:txBody>
       </p:sp>
@@ -4922,7 +5036,7 @@
                 <a:ea typeface="Aptos" pitchFamily="34" charset="-122"/>
                 <a:cs typeface="Aptos" pitchFamily="34" charset="-120"/>
               </a:rPr>
-              <a:t>© Paula Soper</a:t>
+              <a:t>Â© Paula Soper</a:t>
             </a:r>
             <a:endParaRPr lang="en-US" sz="800" dirty="0"/>
           </a:p>
@@ -4936,8 +5050,47 @@
         </p:nvSpPr>
         <p:spPr>
           <a:xfrm>
+            <a:off x="11137392" y="6510528"/>
+            <a:ext cx="411480" cy="201168"/>
+          </a:xfrm>
+          <a:prstGeom prst="rect">
+            <a:avLst/>
+          </a:prstGeom>
+          <a:noFill/>
+          <a:ln/>
+        </p:spPr>
+        <p:txBody>
+          <a:bodyPr wrap="square" lIns="0" tIns="0" rIns="0" bIns="0" rtlCol="0" anchor="ctr"/>
+          <a:lstStyle/>
+          <a:p>
+            <a:pPr algn="r" indent="0" marL="0">
+              <a:buNone/>
+            </a:pPr>
+            <a:r>
+              <a:rPr lang="en-US" sz="900" dirty="0">
+                <a:solidFill>
+                  <a:srgbClr val="5F7181"/>
+                </a:solidFill>
+                <a:latin typeface="Aptos" pitchFamily="34" charset="0"/>
+                <a:ea typeface="Aptos" pitchFamily="34" charset="-122"/>
+                <a:cs typeface="Aptos" pitchFamily="34" charset="-120"/>
+              </a:rPr>
+              <a:t>13</a:t>
+            </a:r>
+            <a:endParaRPr lang="en-US" sz="900" dirty="0"/>
+          </a:p>
+        </p:txBody>
+      </p:sp>
+      <p:sp>
+        <p:nvSpPr>
+          <p:cNvPr id="8" name="Text 6"/>
+          <p:cNvSpPr/>
+          <p:nvPr/>
+        </p:nvSpPr>
+        <p:spPr>
+          <a:xfrm>
             <a:off x="640080" y="658368"/>
-            <a:ext cx="10881360" cy="566928"/>
+            <a:ext cx="10881360" cy="713232"/>
           </a:xfrm>
           <a:prstGeom prst="rect">
             <a:avLst/>
@@ -4955,7 +5108,7 @@
               <a:buNone/>
             </a:pPr>
             <a:r>
-              <a:rPr lang="en-US" sz="2700" b="1" dirty="0">
+              <a:rPr lang="en-US" sz="3400" b="1" dirty="0">
                 <a:solidFill>
                   <a:srgbClr val="003A63"/>
                 </a:solidFill>
@@ -4965,20 +5118,20 @@
               </a:rPr>
               <a:t>Risks, Failure Modes, and Guardrails Continued</a:t>
             </a:r>
-            <a:endParaRPr lang="en-US" sz="2700" dirty="0"/>
-          </a:p>
-        </p:txBody>
-      </p:sp>
-      <p:sp>
-        <p:nvSpPr>
-          <p:cNvPr id="8" name="Text 6"/>
-          <p:cNvSpPr/>
-          <p:nvPr/>
-        </p:nvSpPr>
-        <p:spPr>
-          <a:xfrm>
-            <a:off x="868680" y="1417320"/>
-            <a:ext cx="6675120" cy="4434840"/>
+            <a:endParaRPr lang="en-US" sz="3400" dirty="0"/>
+          </a:p>
+        </p:txBody>
+      </p:sp>
+      <p:sp>
+        <p:nvSpPr>
+          <p:cNvPr id="9" name="Text 7"/>
+          <p:cNvSpPr/>
+          <p:nvPr/>
+        </p:nvSpPr>
+        <p:spPr>
+          <a:xfrm>
+            <a:off x="868680" y="1508760"/>
+            <a:ext cx="6537960" cy="4160520"/>
           </a:xfrm>
           <a:prstGeom prst="rect">
             <a:avLst/>
@@ -4993,7 +5146,7 @@
           <a:lstStyle/>
           <a:p>
             <a:r>
-              <a:rPr lang="en-US" sz="1700" dirty="0">
+              <a:rPr lang="en-US" sz="2100" dirty="0">
                 <a:solidFill>
                   <a:srgbClr val="17364A"/>
                 </a:solidFill>
@@ -5003,11 +5156,11 @@
               </a:rPr>
               <a:t>Unsupported generation.</a:t>
             </a:r>
-            <a:endParaRPr lang="en-US" sz="1700" dirty="0"/>
-          </a:p>
-          <a:p>
-            <a:r>
-              <a:rPr lang="en-US" sz="1700" dirty="0">
+            <a:endParaRPr lang="en-US" sz="2100" dirty="0"/>
+          </a:p>
+          <a:p>
+            <a:r>
+              <a:rPr lang="en-US" sz="2100" dirty="0">
                 <a:solidFill>
                   <a:srgbClr val="17364A"/>
                 </a:solidFill>
@@ -5017,11 +5170,11 @@
               </a:rPr>
               <a:t>The model may add claims beyond retrieved sources.</a:t>
             </a:r>
-            <a:endParaRPr lang="en-US" sz="1700" dirty="0"/>
-          </a:p>
-          <a:p>
-            <a:r>
-              <a:rPr lang="en-US" sz="1700" dirty="0">
+            <a:endParaRPr lang="en-US" sz="2100" dirty="0"/>
+          </a:p>
+          <a:p>
+            <a:r>
+              <a:rPr lang="en-US" sz="2100" dirty="0">
                 <a:solidFill>
                   <a:srgbClr val="17364A"/>
                 </a:solidFill>
@@ -5031,13 +5184,13 @@
               </a:rPr>
               <a:t>Guardrails include source-only instructions, citation requirements, and reviewer verification.</a:t>
             </a:r>
-            <a:endParaRPr lang="en-US" sz="1700" dirty="0"/>
-          </a:p>
-        </p:txBody>
-      </p:sp>
-      <p:sp>
-        <p:nvSpPr>
-          <p:cNvPr id="9" name="Shape 7"/>
+            <a:endParaRPr lang="en-US" sz="2100" dirty="0"/>
+          </a:p>
+        </p:txBody>
+      </p:sp>
+      <p:sp>
+        <p:nvSpPr>
+          <p:cNvPr id="10" name="Shape 8"/>
           <p:cNvSpPr/>
           <p:nvPr/>
         </p:nvSpPr>
@@ -5064,14 +5217,14 @@
       </p:sp>
       <p:sp>
         <p:nvSpPr>
-          <p:cNvPr id="10" name="Text 8"/>
+          <p:cNvPr id="11" name="Text 9"/>
           <p:cNvSpPr/>
           <p:nvPr/>
         </p:nvSpPr>
         <p:spPr>
           <a:xfrm>
             <a:off x="8074152" y="1563624"/>
-            <a:ext cx="2825496" cy="201168"/>
+            <a:ext cx="2825496" cy="256032"/>
           </a:xfrm>
           <a:prstGeom prst="rect">
             <a:avLst/>
@@ -5087,7 +5240,7 @@
               <a:buNone/>
             </a:pPr>
             <a:r>
-              <a:rPr lang="en-US" sz="950" b="1" dirty="0">
+              <a:rPr lang="en-US" sz="1300" b="1" dirty="0">
                 <a:solidFill>
                   <a:srgbClr val="0068B7"/>
                 </a:solidFill>
@@ -5097,20 +5250,20 @@
               </a:rPr>
               <a:t>Key idea</a:t>
             </a:r>
-            <a:endParaRPr lang="en-US" sz="950" dirty="0"/>
-          </a:p>
-        </p:txBody>
-      </p:sp>
-      <p:sp>
-        <p:nvSpPr>
-          <p:cNvPr id="11" name="Text 9"/>
-          <p:cNvSpPr/>
-          <p:nvPr/>
-        </p:nvSpPr>
-        <p:spPr>
-          <a:xfrm>
-            <a:off x="8074152" y="1856232"/>
-            <a:ext cx="2825496" cy="1261872"/>
+            <a:endParaRPr lang="en-US" sz="1300" dirty="0"/>
+          </a:p>
+        </p:txBody>
+      </p:sp>
+      <p:sp>
+        <p:nvSpPr>
+          <p:cNvPr id="12" name="Text 10"/>
+          <p:cNvSpPr/>
+          <p:nvPr/>
+        </p:nvSpPr>
+        <p:spPr>
+          <a:xfrm>
+            <a:off x="8074152" y="1920240"/>
+            <a:ext cx="2825496" cy="1188720"/>
           </a:xfrm>
           <a:prstGeom prst="rect">
             <a:avLst/>
@@ -5128,7 +5281,7 @@
               <a:buNone/>
             </a:pPr>
             <a:r>
-              <a:rPr lang="en-US" sz="1250" dirty="0">
+              <a:rPr lang="en-US" sz="1550" dirty="0">
                 <a:solidFill>
                   <a:srgbClr val="17364A"/>
                 </a:solidFill>
@@ -5138,13 +5291,13 @@
               </a:rPr>
               <a:t>Unsupported generation.</a:t>
             </a:r>
-            <a:endParaRPr lang="en-US" sz="1250" dirty="0"/>
-          </a:p>
-        </p:txBody>
-      </p:sp>
-      <p:sp>
-        <p:nvSpPr>
-          <p:cNvPr id="12" name="Shape 10"/>
+            <a:endParaRPr lang="en-US" sz="1550" dirty="0"/>
+          </a:p>
+        </p:txBody>
+      </p:sp>
+      <p:sp>
+        <p:nvSpPr>
+          <p:cNvPr id="13" name="Shape 11"/>
           <p:cNvSpPr/>
           <p:nvPr/>
         </p:nvSpPr>
@@ -5171,14 +5324,14 @@
       </p:sp>
       <p:sp>
         <p:nvSpPr>
-          <p:cNvPr id="13" name="Text 11"/>
+          <p:cNvPr id="14" name="Text 12"/>
           <p:cNvSpPr/>
           <p:nvPr/>
         </p:nvSpPr>
         <p:spPr>
           <a:xfrm>
             <a:off x="8074152" y="3666744"/>
-            <a:ext cx="2825496" cy="201168"/>
+            <a:ext cx="2825496" cy="256032"/>
           </a:xfrm>
           <a:prstGeom prst="rect">
             <a:avLst/>
@@ -5194,7 +5347,7 @@
               <a:buNone/>
             </a:pPr>
             <a:r>
-              <a:rPr lang="en-US" sz="950" b="1" dirty="0">
+              <a:rPr lang="en-US" sz="1300" b="1" dirty="0">
                 <a:solidFill>
                   <a:srgbClr val="0068B7"/>
                 </a:solidFill>
@@ -5204,20 +5357,20 @@
               </a:rPr>
               <a:t>Use this for</a:t>
             </a:r>
-            <a:endParaRPr lang="en-US" sz="950" dirty="0"/>
-          </a:p>
-        </p:txBody>
-      </p:sp>
-      <p:sp>
-        <p:nvSpPr>
-          <p:cNvPr id="14" name="Text 12"/>
-          <p:cNvSpPr/>
-          <p:nvPr/>
-        </p:nvSpPr>
-        <p:spPr>
-          <a:xfrm>
-            <a:off x="8074152" y="3959352"/>
-            <a:ext cx="2825496" cy="1170432"/>
+            <a:endParaRPr lang="en-US" sz="1300" dirty="0"/>
+          </a:p>
+        </p:txBody>
+      </p:sp>
+      <p:sp>
+        <p:nvSpPr>
+          <p:cNvPr id="15" name="Text 13"/>
+          <p:cNvSpPr/>
+          <p:nvPr/>
+        </p:nvSpPr>
+        <p:spPr>
+          <a:xfrm>
+            <a:off x="8074152" y="4023360"/>
+            <a:ext cx="2825496" cy="1097280"/>
           </a:xfrm>
           <a:prstGeom prst="rect">
             <a:avLst/>
@@ -5235,7 +5388,7 @@
               <a:buNone/>
             </a:pPr>
             <a:r>
-              <a:rPr lang="en-US" sz="1250" dirty="0">
+              <a:rPr lang="en-US" sz="1550" dirty="0">
                 <a:solidFill>
                   <a:srgbClr val="17364A"/>
                 </a:solidFill>
@@ -5245,7 +5398,7 @@
               </a:rPr>
               <a:t>Connect the concept to public health decisions, safeguards, documentation, or implementation work.</a:t>
             </a:r>
-            <a:endParaRPr lang="en-US" sz="1250" dirty="0"/>
+            <a:endParaRPr lang="en-US" sz="1550" dirty="0"/>
           </a:p>
         </p:txBody>
       </p:sp>
@@ -5442,7 +5595,7 @@
                 <a:ea typeface="Aptos" pitchFamily="34" charset="-122"/>
                 <a:cs typeface="Aptos" pitchFamily="34" charset="-120"/>
               </a:rPr>
-              <a:t>© Paula Soper</a:t>
+              <a:t>Â© Paula Soper</a:t>
             </a:r>
             <a:endParaRPr lang="en-US" sz="800" dirty="0"/>
           </a:p>
@@ -5450,7 +5603,46 @@
       </p:sp>
       <p:sp>
         <p:nvSpPr>
-          <p:cNvPr id="7" name="Shape 5"/>
+          <p:cNvPr id="7" name="Text 5"/>
+          <p:cNvSpPr/>
+          <p:nvPr/>
+        </p:nvSpPr>
+        <p:spPr>
+          <a:xfrm>
+            <a:off x="11137392" y="6510528"/>
+            <a:ext cx="411480" cy="201168"/>
+          </a:xfrm>
+          <a:prstGeom prst="rect">
+            <a:avLst/>
+          </a:prstGeom>
+          <a:noFill/>
+          <a:ln/>
+        </p:spPr>
+        <p:txBody>
+          <a:bodyPr wrap="square" lIns="0" tIns="0" rIns="0" bIns="0" rtlCol="0" anchor="ctr"/>
+          <a:lstStyle/>
+          <a:p>
+            <a:pPr algn="r" indent="0" marL="0">
+              <a:buNone/>
+            </a:pPr>
+            <a:r>
+              <a:rPr lang="en-US" sz="900" dirty="0">
+                <a:solidFill>
+                  <a:srgbClr val="5F7181"/>
+                </a:solidFill>
+                <a:latin typeface="Aptos" pitchFamily="34" charset="0"/>
+                <a:ea typeface="Aptos" pitchFamily="34" charset="-122"/>
+                <a:cs typeface="Aptos" pitchFamily="34" charset="-120"/>
+              </a:rPr>
+              <a:t>14</a:t>
+            </a:r>
+            <a:endParaRPr lang="en-US" sz="900" dirty="0"/>
+          </a:p>
+        </p:txBody>
+      </p:sp>
+      <p:sp>
+        <p:nvSpPr>
+          <p:cNvPr id="8" name="Shape 6"/>
           <p:cNvSpPr/>
           <p:nvPr/>
         </p:nvSpPr>
@@ -5475,7 +5667,7 @@
       </p:sp>
       <p:sp>
         <p:nvSpPr>
-          <p:cNvPr id="8" name="Text 6"/>
+          <p:cNvPr id="9" name="Text 7"/>
           <p:cNvSpPr/>
           <p:nvPr/>
         </p:nvSpPr>
@@ -5514,14 +5706,14 @@
       </p:sp>
       <p:sp>
         <p:nvSpPr>
-          <p:cNvPr id="9" name="Text 7"/>
+          <p:cNvPr id="10" name="Text 8"/>
           <p:cNvSpPr/>
           <p:nvPr/>
         </p:nvSpPr>
         <p:spPr>
           <a:xfrm>
             <a:off x="640080" y="621792"/>
-            <a:ext cx="10881360" cy="566928"/>
+            <a:ext cx="10881360" cy="713232"/>
           </a:xfrm>
           <a:prstGeom prst="rect">
             <a:avLst/>
@@ -5539,7 +5731,7 @@
               <a:buNone/>
             </a:pPr>
             <a:r>
-              <a:rPr lang="en-US" sz="2700" b="1" dirty="0">
+              <a:rPr lang="en-US" sz="3400" b="1" dirty="0">
                 <a:solidFill>
                   <a:srgbClr val="003A63"/>
                 </a:solidFill>
@@ -5549,20 +5741,20 @@
               </a:rPr>
               <a:t>Application to AI-Supported Workflows</a:t>
             </a:r>
-            <a:endParaRPr lang="en-US" sz="2700" dirty="0"/>
-          </a:p>
-        </p:txBody>
-      </p:sp>
-      <p:sp>
-        <p:nvSpPr>
-          <p:cNvPr id="10" name="Text 8"/>
-          <p:cNvSpPr/>
-          <p:nvPr/>
-        </p:nvSpPr>
-        <p:spPr>
-          <a:xfrm>
-            <a:off x="868680" y="1417320"/>
-            <a:ext cx="6675120" cy="4434840"/>
+            <a:endParaRPr lang="en-US" sz="3400" dirty="0"/>
+          </a:p>
+        </p:txBody>
+      </p:sp>
+      <p:sp>
+        <p:nvSpPr>
+          <p:cNvPr id="11" name="Text 9"/>
+          <p:cNvSpPr/>
+          <p:nvPr/>
+        </p:nvSpPr>
+        <p:spPr>
+          <a:xfrm>
+            <a:off x="868680" y="1508760"/>
+            <a:ext cx="6537960" cy="4160520"/>
           </a:xfrm>
           <a:prstGeom prst="rect">
             <a:avLst/>
@@ -5577,7 +5769,7 @@
           <a:lstStyle/>
           <a:p>
             <a:r>
-              <a:rPr lang="en-US" sz="1700" dirty="0">
+              <a:rPr lang="en-US" sz="2100" dirty="0">
                 <a:solidFill>
                   <a:srgbClr val="17364A"/>
                 </a:solidFill>
@@ -5587,11 +5779,11 @@
               </a:rPr>
               <a:t>RAG supports generative AI by grounding outputs in defined sources.</a:t>
             </a:r>
-            <a:endParaRPr lang="en-US" sz="1700" dirty="0"/>
-          </a:p>
-          <a:p>
-            <a:r>
-              <a:rPr lang="en-US" sz="1700" dirty="0">
+            <a:endParaRPr lang="en-US" sz="2100" dirty="0"/>
+          </a:p>
+          <a:p>
+            <a:r>
+              <a:rPr lang="en-US" sz="2100" dirty="0">
                 <a:solidFill>
                   <a:srgbClr val="17364A"/>
                 </a:solidFill>
@@ -5599,13 +5791,13 @@
                 <a:ea typeface="Aptos" pitchFamily="34" charset="-122"/>
                 <a:cs typeface="Aptos" pitchFamily="34" charset="-120"/>
               </a:rPr>
-              <a:t>It may be used in chat assistants, training tools, policy support, emergency operations, procurement review, and program.</a:t>
-            </a:r>
-            <a:endParaRPr lang="en-US" sz="1700" dirty="0"/>
-          </a:p>
-          <a:p>
-            <a:r>
-              <a:rPr lang="en-US" sz="1700" dirty="0">
+              <a:t>It may be used in chat assistants, training tools, policy support, emergency operations, procurement.</a:t>
+            </a:r>
+            <a:endParaRPr lang="en-US" sz="2100" dirty="0"/>
+          </a:p>
+          <a:p>
+            <a:r>
+              <a:rPr lang="en-US" sz="2100" dirty="0">
                 <a:solidFill>
                   <a:srgbClr val="17364A"/>
                 </a:solidFill>
@@ -5613,29 +5805,15 @@
                 <a:ea typeface="Aptos" pitchFamily="34" charset="-122"/>
                 <a:cs typeface="Aptos" pitchFamily="34" charset="-120"/>
               </a:rPr>
-              <a:t>It can also support agentic workflows by giving agents access to approved guidance, but actions based on retrieved content.</a:t>
-            </a:r>
-            <a:endParaRPr lang="en-US" sz="1700" dirty="0"/>
-          </a:p>
-          <a:p>
-            <a:r>
-              <a:rPr lang="en-US" sz="1700" dirty="0">
-                <a:solidFill>
-                  <a:srgbClr val="17364A"/>
-                </a:solidFill>
-                <a:latin typeface="Aptos" pitchFamily="34" charset="0"/>
-                <a:ea typeface="Aptos" pitchFamily="34" charset="-122"/>
-                <a:cs typeface="Aptos" pitchFamily="34" charset="-120"/>
-              </a:rPr>
-              <a:t>Public health RAG systems should be built around trust.</a:t>
-            </a:r>
-            <a:endParaRPr lang="en-US" sz="1700" dirty="0"/>
-          </a:p>
-        </p:txBody>
-      </p:sp>
-      <p:sp>
-        <p:nvSpPr>
-          <p:cNvPr id="11" name="Shape 9"/>
+              <a:t>It can also support agentic workflows by giving agents access to approved guidance, but actions based.</a:t>
+            </a:r>
+            <a:endParaRPr lang="en-US" sz="2100" dirty="0"/>
+          </a:p>
+        </p:txBody>
+      </p:sp>
+      <p:sp>
+        <p:nvSpPr>
+          <p:cNvPr id="12" name="Shape 10"/>
           <p:cNvSpPr/>
           <p:nvPr/>
         </p:nvSpPr>
@@ -5662,14 +5840,14 @@
       </p:sp>
       <p:sp>
         <p:nvSpPr>
-          <p:cNvPr id="12" name="Text 10"/>
+          <p:cNvPr id="13" name="Text 11"/>
           <p:cNvSpPr/>
           <p:nvPr/>
         </p:nvSpPr>
         <p:spPr>
           <a:xfrm>
             <a:off x="8074152" y="1563624"/>
-            <a:ext cx="2825496" cy="201168"/>
+            <a:ext cx="2825496" cy="256032"/>
           </a:xfrm>
           <a:prstGeom prst="rect">
             <a:avLst/>
@@ -5685,7 +5863,7 @@
               <a:buNone/>
             </a:pPr>
             <a:r>
-              <a:rPr lang="en-US" sz="950" b="1" dirty="0">
+              <a:rPr lang="en-US" sz="1300" b="1" dirty="0">
                 <a:solidFill>
                   <a:srgbClr val="0068B7"/>
                 </a:solidFill>
@@ -5695,20 +5873,20 @@
               </a:rPr>
               <a:t>Key idea</a:t>
             </a:r>
-            <a:endParaRPr lang="en-US" sz="950" dirty="0"/>
-          </a:p>
-        </p:txBody>
-      </p:sp>
-      <p:sp>
-        <p:nvSpPr>
-          <p:cNvPr id="13" name="Text 11"/>
-          <p:cNvSpPr/>
-          <p:nvPr/>
-        </p:nvSpPr>
-        <p:spPr>
-          <a:xfrm>
-            <a:off x="8074152" y="1856232"/>
-            <a:ext cx="2825496" cy="1261872"/>
+            <a:endParaRPr lang="en-US" sz="1300" dirty="0"/>
+          </a:p>
+        </p:txBody>
+      </p:sp>
+      <p:sp>
+        <p:nvSpPr>
+          <p:cNvPr id="14" name="Text 12"/>
+          <p:cNvSpPr/>
+          <p:nvPr/>
+        </p:nvSpPr>
+        <p:spPr>
+          <a:xfrm>
+            <a:off x="8074152" y="1920240"/>
+            <a:ext cx="2825496" cy="1188720"/>
           </a:xfrm>
           <a:prstGeom prst="rect">
             <a:avLst/>
@@ -5726,7 +5904,7 @@
               <a:buNone/>
             </a:pPr>
             <a:r>
-              <a:rPr lang="en-US" sz="1250" dirty="0">
+              <a:rPr lang="en-US" sz="1550" dirty="0">
                 <a:solidFill>
                   <a:srgbClr val="17364A"/>
                 </a:solidFill>
@@ -5736,13 +5914,13 @@
               </a:rPr>
               <a:t>RAG supports generative AI by grounding outputs in defined sources.</a:t>
             </a:r>
-            <a:endParaRPr lang="en-US" sz="1250" dirty="0"/>
-          </a:p>
-        </p:txBody>
-      </p:sp>
-      <p:sp>
-        <p:nvSpPr>
-          <p:cNvPr id="14" name="Shape 12"/>
+            <a:endParaRPr lang="en-US" sz="1550" dirty="0"/>
+          </a:p>
+        </p:txBody>
+      </p:sp>
+      <p:sp>
+        <p:nvSpPr>
+          <p:cNvPr id="15" name="Shape 13"/>
           <p:cNvSpPr/>
           <p:nvPr/>
         </p:nvSpPr>
@@ -5769,14 +5947,14 @@
       </p:sp>
       <p:sp>
         <p:nvSpPr>
-          <p:cNvPr id="15" name="Text 13"/>
+          <p:cNvPr id="16" name="Text 14"/>
           <p:cNvSpPr/>
           <p:nvPr/>
         </p:nvSpPr>
         <p:spPr>
           <a:xfrm>
             <a:off x="8074152" y="3666744"/>
-            <a:ext cx="2825496" cy="201168"/>
+            <a:ext cx="2825496" cy="256032"/>
           </a:xfrm>
           <a:prstGeom prst="rect">
             <a:avLst/>
@@ -5792,7 +5970,7 @@
               <a:buNone/>
             </a:pPr>
             <a:r>
-              <a:rPr lang="en-US" sz="950" b="1" dirty="0">
+              <a:rPr lang="en-US" sz="1300" b="1" dirty="0">
                 <a:solidFill>
                   <a:srgbClr val="0068B7"/>
                 </a:solidFill>
@@ -5802,20 +5980,20 @@
               </a:rPr>
               <a:t>Use this for</a:t>
             </a:r>
-            <a:endParaRPr lang="en-US" sz="950" dirty="0"/>
-          </a:p>
-        </p:txBody>
-      </p:sp>
-      <p:sp>
-        <p:nvSpPr>
-          <p:cNvPr id="16" name="Text 14"/>
-          <p:cNvSpPr/>
-          <p:nvPr/>
-        </p:nvSpPr>
-        <p:spPr>
-          <a:xfrm>
-            <a:off x="8074152" y="3959352"/>
-            <a:ext cx="2825496" cy="1170432"/>
+            <a:endParaRPr lang="en-US" sz="1300" dirty="0"/>
+          </a:p>
+        </p:txBody>
+      </p:sp>
+      <p:sp>
+        <p:nvSpPr>
+          <p:cNvPr id="17" name="Text 15"/>
+          <p:cNvSpPr/>
+          <p:nvPr/>
+        </p:nvSpPr>
+        <p:spPr>
+          <a:xfrm>
+            <a:off x="8074152" y="4023360"/>
+            <a:ext cx="2825496" cy="1097280"/>
           </a:xfrm>
           <a:prstGeom prst="rect">
             <a:avLst/>
@@ -5833,7 +6011,7 @@
               <a:buNone/>
             </a:pPr>
             <a:r>
-              <a:rPr lang="en-US" sz="1250" dirty="0">
+              <a:rPr lang="en-US" sz="1550" dirty="0">
                 <a:solidFill>
                   <a:srgbClr val="17364A"/>
                 </a:solidFill>
@@ -5843,7 +6021,7 @@
               </a:rPr>
               <a:t>Connect the concept to public health decisions, safeguards, documentation, or implementation work.</a:t>
             </a:r>
-            <a:endParaRPr lang="en-US" sz="1250" dirty="0"/>
+            <a:endParaRPr lang="en-US" sz="1550" dirty="0"/>
           </a:p>
         </p:txBody>
       </p:sp>
@@ -6040,7 +6218,7 @@
                 <a:ea typeface="Aptos" pitchFamily="34" charset="-122"/>
                 <a:cs typeface="Aptos" pitchFamily="34" charset="-120"/>
               </a:rPr>
-              <a:t>© Paula Soper</a:t>
+              <a:t>Â© Paula Soper</a:t>
             </a:r>
             <a:endParaRPr lang="en-US" sz="800" dirty="0"/>
           </a:p>
@@ -6048,7 +6226,46 @@
       </p:sp>
       <p:sp>
         <p:nvSpPr>
-          <p:cNvPr id="7" name="Shape 5"/>
+          <p:cNvPr id="7" name="Text 5"/>
+          <p:cNvSpPr/>
+          <p:nvPr/>
+        </p:nvSpPr>
+        <p:spPr>
+          <a:xfrm>
+            <a:off x="11137392" y="6510528"/>
+            <a:ext cx="411480" cy="201168"/>
+          </a:xfrm>
+          <a:prstGeom prst="rect">
+            <a:avLst/>
+          </a:prstGeom>
+          <a:noFill/>
+          <a:ln/>
+        </p:spPr>
+        <p:txBody>
+          <a:bodyPr wrap="square" lIns="0" tIns="0" rIns="0" bIns="0" rtlCol="0" anchor="ctr"/>
+          <a:lstStyle/>
+          <a:p>
+            <a:pPr algn="r" indent="0" marL="0">
+              <a:buNone/>
+            </a:pPr>
+            <a:r>
+              <a:rPr lang="en-US" sz="900" dirty="0">
+                <a:solidFill>
+                  <a:srgbClr val="5F7181"/>
+                </a:solidFill>
+                <a:latin typeface="Aptos" pitchFamily="34" charset="0"/>
+                <a:ea typeface="Aptos" pitchFamily="34" charset="-122"/>
+                <a:cs typeface="Aptos" pitchFamily="34" charset="-120"/>
+              </a:rPr>
+              <a:t>15</a:t>
+            </a:r>
+            <a:endParaRPr lang="en-US" sz="900" dirty="0"/>
+          </a:p>
+        </p:txBody>
+      </p:sp>
+      <p:sp>
+        <p:nvSpPr>
+          <p:cNvPr id="8" name="Shape 6"/>
           <p:cNvSpPr/>
           <p:nvPr/>
         </p:nvSpPr>
@@ -6073,7 +6290,7 @@
       </p:sp>
       <p:sp>
         <p:nvSpPr>
-          <p:cNvPr id="8" name="Text 6"/>
+          <p:cNvPr id="9" name="Text 7"/>
           <p:cNvSpPr/>
           <p:nvPr/>
         </p:nvSpPr>
@@ -6112,14 +6329,14 @@
       </p:sp>
       <p:sp>
         <p:nvSpPr>
-          <p:cNvPr id="9" name="Text 7"/>
+          <p:cNvPr id="10" name="Text 8"/>
           <p:cNvSpPr/>
           <p:nvPr/>
         </p:nvSpPr>
         <p:spPr>
           <a:xfrm>
             <a:off x="640080" y="621792"/>
-            <a:ext cx="10881360" cy="566928"/>
+            <a:ext cx="10881360" cy="713232"/>
           </a:xfrm>
           <a:prstGeom prst="rect">
             <a:avLst/>
@@ -6137,7 +6354,7 @@
               <a:buNone/>
             </a:pPr>
             <a:r>
-              <a:rPr lang="en-US" sz="2700" b="1" dirty="0">
+              <a:rPr lang="en-US" sz="3400" b="1" dirty="0">
                 <a:solidFill>
                   <a:srgbClr val="003A63"/>
                 </a:solidFill>
@@ -6147,20 +6364,20 @@
               </a:rPr>
               <a:t>Reflection Questions</a:t>
             </a:r>
-            <a:endParaRPr lang="en-US" sz="2700" dirty="0"/>
-          </a:p>
-        </p:txBody>
-      </p:sp>
-      <p:sp>
-        <p:nvSpPr>
-          <p:cNvPr id="10" name="Text 8"/>
-          <p:cNvSpPr/>
-          <p:nvPr/>
-        </p:nvSpPr>
-        <p:spPr>
-          <a:xfrm>
-            <a:off x="868680" y="1417320"/>
-            <a:ext cx="6675120" cy="4434840"/>
+            <a:endParaRPr lang="en-US" sz="3400" dirty="0"/>
+          </a:p>
+        </p:txBody>
+      </p:sp>
+      <p:sp>
+        <p:nvSpPr>
+          <p:cNvPr id="11" name="Text 9"/>
+          <p:cNvSpPr/>
+          <p:nvPr/>
+        </p:nvSpPr>
+        <p:spPr>
+          <a:xfrm>
+            <a:off x="868680" y="1508760"/>
+            <a:ext cx="6537960" cy="4160520"/>
           </a:xfrm>
           <a:prstGeom prst="rect">
             <a:avLst/>
@@ -6175,7 +6392,7 @@
           <a:lstStyle/>
           <a:p>
             <a:r>
-              <a:rPr lang="en-US" sz="1700" dirty="0">
+              <a:rPr lang="en-US" sz="2100" dirty="0">
                 <a:solidFill>
                   <a:srgbClr val="17364A"/>
                 </a:solidFill>
@@ -6185,11 +6402,11 @@
               </a:rPr>
               <a:t>What content collection would the RAG system use?</a:t>
             </a:r>
-            <a:endParaRPr lang="en-US" sz="1700" dirty="0"/>
-          </a:p>
-          <a:p>
-            <a:r>
-              <a:rPr lang="en-US" sz="1700" dirty="0">
+            <a:endParaRPr lang="en-US" sz="2100" dirty="0"/>
+          </a:p>
+          <a:p>
+            <a:r>
+              <a:rPr lang="en-US" sz="2100" dirty="0">
                 <a:solidFill>
                   <a:srgbClr val="17364A"/>
                 </a:solidFill>
@@ -6199,11 +6416,11 @@
               </a:rPr>
               <a:t>Who owns and updates each source document?</a:t>
             </a:r>
-            <a:endParaRPr lang="en-US" sz="1700" dirty="0"/>
-          </a:p>
-          <a:p>
-            <a:r>
-              <a:rPr lang="en-US" sz="1700" dirty="0">
+            <a:endParaRPr lang="en-US" sz="2100" dirty="0"/>
+          </a:p>
+          <a:p>
+            <a:r>
+              <a:rPr lang="en-US" sz="2100" dirty="0">
                 <a:solidFill>
                   <a:srgbClr val="17364A"/>
                 </a:solidFill>
@@ -6213,13 +6430,13 @@
               </a:rPr>
               <a:t>How will access permissions be enforced?</a:t>
             </a:r>
-            <a:endParaRPr lang="en-US" sz="1700" dirty="0"/>
-          </a:p>
-        </p:txBody>
-      </p:sp>
-      <p:sp>
-        <p:nvSpPr>
-          <p:cNvPr id="11" name="Shape 9"/>
+            <a:endParaRPr lang="en-US" sz="2100" dirty="0"/>
+          </a:p>
+        </p:txBody>
+      </p:sp>
+      <p:sp>
+        <p:nvSpPr>
+          <p:cNvPr id="12" name="Shape 10"/>
           <p:cNvSpPr/>
           <p:nvPr/>
         </p:nvSpPr>
@@ -6246,14 +6463,14 @@
       </p:sp>
       <p:sp>
         <p:nvSpPr>
-          <p:cNvPr id="12" name="Text 10"/>
+          <p:cNvPr id="13" name="Text 11"/>
           <p:cNvSpPr/>
           <p:nvPr/>
         </p:nvSpPr>
         <p:spPr>
           <a:xfrm>
             <a:off x="8074152" y="1563624"/>
-            <a:ext cx="2825496" cy="201168"/>
+            <a:ext cx="2825496" cy="256032"/>
           </a:xfrm>
           <a:prstGeom prst="rect">
             <a:avLst/>
@@ -6269,7 +6486,7 @@
               <a:buNone/>
             </a:pPr>
             <a:r>
-              <a:rPr lang="en-US" sz="950" b="1" dirty="0">
+              <a:rPr lang="en-US" sz="1300" b="1" dirty="0">
                 <a:solidFill>
                   <a:srgbClr val="0068B7"/>
                 </a:solidFill>
@@ -6279,20 +6496,20 @@
               </a:rPr>
               <a:t>Key idea</a:t>
             </a:r>
-            <a:endParaRPr lang="en-US" sz="950" dirty="0"/>
-          </a:p>
-        </p:txBody>
-      </p:sp>
-      <p:sp>
-        <p:nvSpPr>
-          <p:cNvPr id="13" name="Text 11"/>
-          <p:cNvSpPr/>
-          <p:nvPr/>
-        </p:nvSpPr>
-        <p:spPr>
-          <a:xfrm>
-            <a:off x="8074152" y="1856232"/>
-            <a:ext cx="2825496" cy="1261872"/>
+            <a:endParaRPr lang="en-US" sz="1300" dirty="0"/>
+          </a:p>
+        </p:txBody>
+      </p:sp>
+      <p:sp>
+        <p:nvSpPr>
+          <p:cNvPr id="14" name="Text 12"/>
+          <p:cNvSpPr/>
+          <p:nvPr/>
+        </p:nvSpPr>
+        <p:spPr>
+          <a:xfrm>
+            <a:off x="8074152" y="1920240"/>
+            <a:ext cx="2825496" cy="1188720"/>
           </a:xfrm>
           <a:prstGeom prst="rect">
             <a:avLst/>
@@ -6310,7 +6527,7 @@
               <a:buNone/>
             </a:pPr>
             <a:r>
-              <a:rPr lang="en-US" sz="1250" dirty="0">
+              <a:rPr lang="en-US" sz="1550" dirty="0">
                 <a:solidFill>
                   <a:srgbClr val="17364A"/>
                 </a:solidFill>
@@ -6320,13 +6537,13 @@
               </a:rPr>
               <a:t>What content collection would the RAG system use?</a:t>
             </a:r>
-            <a:endParaRPr lang="en-US" sz="1250" dirty="0"/>
-          </a:p>
-        </p:txBody>
-      </p:sp>
-      <p:sp>
-        <p:nvSpPr>
-          <p:cNvPr id="14" name="Shape 12"/>
+            <a:endParaRPr lang="en-US" sz="1550" dirty="0"/>
+          </a:p>
+        </p:txBody>
+      </p:sp>
+      <p:sp>
+        <p:nvSpPr>
+          <p:cNvPr id="15" name="Shape 13"/>
           <p:cNvSpPr/>
           <p:nvPr/>
         </p:nvSpPr>
@@ -6353,14 +6570,14 @@
       </p:sp>
       <p:sp>
         <p:nvSpPr>
-          <p:cNvPr id="15" name="Text 13"/>
+          <p:cNvPr id="16" name="Text 14"/>
           <p:cNvSpPr/>
           <p:nvPr/>
         </p:nvSpPr>
         <p:spPr>
           <a:xfrm>
             <a:off x="8074152" y="3666744"/>
-            <a:ext cx="2825496" cy="201168"/>
+            <a:ext cx="2825496" cy="256032"/>
           </a:xfrm>
           <a:prstGeom prst="rect">
             <a:avLst/>
@@ -6376,7 +6593,7 @@
               <a:buNone/>
             </a:pPr>
             <a:r>
-              <a:rPr lang="en-US" sz="950" b="1" dirty="0">
+              <a:rPr lang="en-US" sz="1300" b="1" dirty="0">
                 <a:solidFill>
                   <a:srgbClr val="0068B7"/>
                 </a:solidFill>
@@ -6386,20 +6603,20 @@
               </a:rPr>
               <a:t>Use this for</a:t>
             </a:r>
-            <a:endParaRPr lang="en-US" sz="950" dirty="0"/>
-          </a:p>
-        </p:txBody>
-      </p:sp>
-      <p:sp>
-        <p:nvSpPr>
-          <p:cNvPr id="16" name="Text 14"/>
-          <p:cNvSpPr/>
-          <p:nvPr/>
-        </p:nvSpPr>
-        <p:spPr>
-          <a:xfrm>
-            <a:off x="8074152" y="3959352"/>
-            <a:ext cx="2825496" cy="1170432"/>
+            <a:endParaRPr lang="en-US" sz="1300" dirty="0"/>
+          </a:p>
+        </p:txBody>
+      </p:sp>
+      <p:sp>
+        <p:nvSpPr>
+          <p:cNvPr id="17" name="Text 15"/>
+          <p:cNvSpPr/>
+          <p:nvPr/>
+        </p:nvSpPr>
+        <p:spPr>
+          <a:xfrm>
+            <a:off x="8074152" y="4023360"/>
+            <a:ext cx="2825496" cy="1097280"/>
           </a:xfrm>
           <a:prstGeom prst="rect">
             <a:avLst/>
@@ -6417,7 +6634,7 @@
               <a:buNone/>
             </a:pPr>
             <a:r>
-              <a:rPr lang="en-US" sz="1250" dirty="0">
+              <a:rPr lang="en-US" sz="1550" dirty="0">
                 <a:solidFill>
                   <a:srgbClr val="17364A"/>
                 </a:solidFill>
@@ -6427,7 +6644,7 @@
               </a:rPr>
               <a:t>Connect the concept to public health decisions, safeguards, documentation, or implementation work.</a:t>
             </a:r>
-            <a:endParaRPr lang="en-US" sz="1250" dirty="0"/>
+            <a:endParaRPr lang="en-US" sz="1550" dirty="0"/>
           </a:p>
         </p:txBody>
       </p:sp>
@@ -6624,7 +6841,7 @@
                 <a:ea typeface="Aptos" pitchFamily="34" charset="-122"/>
                 <a:cs typeface="Aptos" pitchFamily="34" charset="-120"/>
               </a:rPr>
-              <a:t>© Paula Soper</a:t>
+              <a:t>Â© Paula Soper</a:t>
             </a:r>
             <a:endParaRPr lang="en-US" sz="800" dirty="0"/>
           </a:p>
@@ -6638,8 +6855,47 @@
         </p:nvSpPr>
         <p:spPr>
           <a:xfrm>
+            <a:off x="11137392" y="6510528"/>
+            <a:ext cx="411480" cy="201168"/>
+          </a:xfrm>
+          <a:prstGeom prst="rect">
+            <a:avLst/>
+          </a:prstGeom>
+          <a:noFill/>
+          <a:ln/>
+        </p:spPr>
+        <p:txBody>
+          <a:bodyPr wrap="square" lIns="0" tIns="0" rIns="0" bIns="0" rtlCol="0" anchor="ctr"/>
+          <a:lstStyle/>
+          <a:p>
+            <a:pPr algn="r" indent="0" marL="0">
+              <a:buNone/>
+            </a:pPr>
+            <a:r>
+              <a:rPr lang="en-US" sz="900" dirty="0">
+                <a:solidFill>
+                  <a:srgbClr val="5F7181"/>
+                </a:solidFill>
+                <a:latin typeface="Aptos" pitchFamily="34" charset="0"/>
+                <a:ea typeface="Aptos" pitchFamily="34" charset="-122"/>
+                <a:cs typeface="Aptos" pitchFamily="34" charset="-120"/>
+              </a:rPr>
+              <a:t>16</a:t>
+            </a:r>
+            <a:endParaRPr lang="en-US" sz="900" dirty="0"/>
+          </a:p>
+        </p:txBody>
+      </p:sp>
+      <p:sp>
+        <p:nvSpPr>
+          <p:cNvPr id="8" name="Text 6"/>
+          <p:cNvSpPr/>
+          <p:nvPr/>
+        </p:nvSpPr>
+        <p:spPr>
+          <a:xfrm>
             <a:off x="640080" y="658368"/>
-            <a:ext cx="10881360" cy="566928"/>
+            <a:ext cx="10881360" cy="713232"/>
           </a:xfrm>
           <a:prstGeom prst="rect">
             <a:avLst/>
@@ -6657,7 +6913,7 @@
               <a:buNone/>
             </a:pPr>
             <a:r>
-              <a:rPr lang="en-US" sz="2700" b="1" dirty="0">
+              <a:rPr lang="en-US" sz="3400" b="1" dirty="0">
                 <a:solidFill>
                   <a:srgbClr val="003A63"/>
                 </a:solidFill>
@@ -6667,20 +6923,20 @@
               </a:rPr>
               <a:t>Reflection Questions Continued</a:t>
             </a:r>
-            <a:endParaRPr lang="en-US" sz="2700" dirty="0"/>
-          </a:p>
-        </p:txBody>
-      </p:sp>
-      <p:sp>
-        <p:nvSpPr>
-          <p:cNvPr id="8" name="Text 6"/>
-          <p:cNvSpPr/>
-          <p:nvPr/>
-        </p:nvSpPr>
-        <p:spPr>
-          <a:xfrm>
-            <a:off x="868680" y="1417320"/>
-            <a:ext cx="6675120" cy="4434840"/>
+            <a:endParaRPr lang="en-US" sz="3400" dirty="0"/>
+          </a:p>
+        </p:txBody>
+      </p:sp>
+      <p:sp>
+        <p:nvSpPr>
+          <p:cNvPr id="9" name="Text 7"/>
+          <p:cNvSpPr/>
+          <p:nvPr/>
+        </p:nvSpPr>
+        <p:spPr>
+          <a:xfrm>
+            <a:off x="868680" y="1508760"/>
+            <a:ext cx="6537960" cy="4160520"/>
           </a:xfrm>
           <a:prstGeom prst="rect">
             <a:avLst/>
@@ -6695,7 +6951,7 @@
           <a:lstStyle/>
           <a:p>
             <a:r>
-              <a:rPr lang="en-US" sz="1700" dirty="0">
+              <a:rPr lang="en-US" sz="2100" dirty="0">
                 <a:solidFill>
                   <a:srgbClr val="17364A"/>
                 </a:solidFill>
@@ -6705,11 +6961,11 @@
               </a:rPr>
               <a:t>How will retrieval quality and citation accuracy be tested?</a:t>
             </a:r>
-            <a:endParaRPr lang="en-US" sz="1700" dirty="0"/>
-          </a:p>
-          <a:p>
-            <a:r>
-              <a:rPr lang="en-US" sz="1700" dirty="0">
+            <a:endParaRPr lang="en-US" sz="2100" dirty="0"/>
+          </a:p>
+          <a:p>
+            <a:r>
+              <a:rPr lang="en-US" sz="2100" dirty="0">
                 <a:solidFill>
                   <a:srgbClr val="17364A"/>
                 </a:solidFill>
@@ -6719,13 +6975,13 @@
               </a:rPr>
               <a:t>What should the system do when sources are missing, outdated, or conflicting?</a:t>
             </a:r>
-            <a:endParaRPr lang="en-US" sz="1700" dirty="0"/>
-          </a:p>
-        </p:txBody>
-      </p:sp>
-      <p:sp>
-        <p:nvSpPr>
-          <p:cNvPr id="9" name="Shape 7"/>
+            <a:endParaRPr lang="en-US" sz="2100" dirty="0"/>
+          </a:p>
+        </p:txBody>
+      </p:sp>
+      <p:sp>
+        <p:nvSpPr>
+          <p:cNvPr id="10" name="Shape 8"/>
           <p:cNvSpPr/>
           <p:nvPr/>
         </p:nvSpPr>
@@ -6752,14 +7008,14 @@
       </p:sp>
       <p:sp>
         <p:nvSpPr>
-          <p:cNvPr id="10" name="Text 8"/>
+          <p:cNvPr id="11" name="Text 9"/>
           <p:cNvSpPr/>
           <p:nvPr/>
         </p:nvSpPr>
         <p:spPr>
           <a:xfrm>
             <a:off x="8074152" y="1563624"/>
-            <a:ext cx="2825496" cy="201168"/>
+            <a:ext cx="2825496" cy="256032"/>
           </a:xfrm>
           <a:prstGeom prst="rect">
             <a:avLst/>
@@ -6775,7 +7031,7 @@
               <a:buNone/>
             </a:pPr>
             <a:r>
-              <a:rPr lang="en-US" sz="950" b="1" dirty="0">
+              <a:rPr lang="en-US" sz="1300" b="1" dirty="0">
                 <a:solidFill>
                   <a:srgbClr val="0068B7"/>
                 </a:solidFill>
@@ -6785,20 +7041,20 @@
               </a:rPr>
               <a:t>Key idea</a:t>
             </a:r>
-            <a:endParaRPr lang="en-US" sz="950" dirty="0"/>
-          </a:p>
-        </p:txBody>
-      </p:sp>
-      <p:sp>
-        <p:nvSpPr>
-          <p:cNvPr id="11" name="Text 9"/>
-          <p:cNvSpPr/>
-          <p:nvPr/>
-        </p:nvSpPr>
-        <p:spPr>
-          <a:xfrm>
-            <a:off x="8074152" y="1856232"/>
-            <a:ext cx="2825496" cy="1261872"/>
+            <a:endParaRPr lang="en-US" sz="1300" dirty="0"/>
+          </a:p>
+        </p:txBody>
+      </p:sp>
+      <p:sp>
+        <p:nvSpPr>
+          <p:cNvPr id="12" name="Text 10"/>
+          <p:cNvSpPr/>
+          <p:nvPr/>
+        </p:nvSpPr>
+        <p:spPr>
+          <a:xfrm>
+            <a:off x="8074152" y="1920240"/>
+            <a:ext cx="2825496" cy="1188720"/>
           </a:xfrm>
           <a:prstGeom prst="rect">
             <a:avLst/>
@@ -6816,7 +7072,7 @@
               <a:buNone/>
             </a:pPr>
             <a:r>
-              <a:rPr lang="en-US" sz="1250" dirty="0">
+              <a:rPr lang="en-US" sz="1550" dirty="0">
                 <a:solidFill>
                   <a:srgbClr val="17364A"/>
                 </a:solidFill>
@@ -6826,13 +7082,13 @@
               </a:rPr>
               <a:t>How will retrieval quality and citation accuracy be tested?</a:t>
             </a:r>
-            <a:endParaRPr lang="en-US" sz="1250" dirty="0"/>
-          </a:p>
-        </p:txBody>
-      </p:sp>
-      <p:sp>
-        <p:nvSpPr>
-          <p:cNvPr id="12" name="Shape 10"/>
+            <a:endParaRPr lang="en-US" sz="1550" dirty="0"/>
+          </a:p>
+        </p:txBody>
+      </p:sp>
+      <p:sp>
+        <p:nvSpPr>
+          <p:cNvPr id="13" name="Shape 11"/>
           <p:cNvSpPr/>
           <p:nvPr/>
         </p:nvSpPr>
@@ -6859,14 +7115,14 @@
       </p:sp>
       <p:sp>
         <p:nvSpPr>
-          <p:cNvPr id="13" name="Text 11"/>
+          <p:cNvPr id="14" name="Text 12"/>
           <p:cNvSpPr/>
           <p:nvPr/>
         </p:nvSpPr>
         <p:spPr>
           <a:xfrm>
             <a:off x="8074152" y="3666744"/>
-            <a:ext cx="2825496" cy="201168"/>
+            <a:ext cx="2825496" cy="256032"/>
           </a:xfrm>
           <a:prstGeom prst="rect">
             <a:avLst/>
@@ -6882,7 +7138,7 @@
               <a:buNone/>
             </a:pPr>
             <a:r>
-              <a:rPr lang="en-US" sz="950" b="1" dirty="0">
+              <a:rPr lang="en-US" sz="1300" b="1" dirty="0">
                 <a:solidFill>
                   <a:srgbClr val="0068B7"/>
                 </a:solidFill>
@@ -6892,20 +7148,20 @@
               </a:rPr>
               <a:t>Use this for</a:t>
             </a:r>
-            <a:endParaRPr lang="en-US" sz="950" dirty="0"/>
-          </a:p>
-        </p:txBody>
-      </p:sp>
-      <p:sp>
-        <p:nvSpPr>
-          <p:cNvPr id="14" name="Text 12"/>
-          <p:cNvSpPr/>
-          <p:nvPr/>
-        </p:nvSpPr>
-        <p:spPr>
-          <a:xfrm>
-            <a:off x="8074152" y="3959352"/>
-            <a:ext cx="2825496" cy="1170432"/>
+            <a:endParaRPr lang="en-US" sz="1300" dirty="0"/>
+          </a:p>
+        </p:txBody>
+      </p:sp>
+      <p:sp>
+        <p:nvSpPr>
+          <p:cNvPr id="15" name="Text 13"/>
+          <p:cNvSpPr/>
+          <p:nvPr/>
+        </p:nvSpPr>
+        <p:spPr>
+          <a:xfrm>
+            <a:off x="8074152" y="4023360"/>
+            <a:ext cx="2825496" cy="1097280"/>
           </a:xfrm>
           <a:prstGeom prst="rect">
             <a:avLst/>
@@ -6923,7 +7179,7 @@
               <a:buNone/>
             </a:pPr>
             <a:r>
-              <a:rPr lang="en-US" sz="1250" dirty="0">
+              <a:rPr lang="en-US" sz="1550" dirty="0">
                 <a:solidFill>
                   <a:srgbClr val="17364A"/>
                 </a:solidFill>
@@ -6933,7 +7189,7 @@
               </a:rPr>
               <a:t>Connect the concept to public health decisions, safeguards, documentation, or implementation work.</a:t>
             </a:r>
-            <a:endParaRPr lang="en-US" sz="1250" dirty="0"/>
+            <a:endParaRPr lang="en-US" sz="1550" dirty="0"/>
           </a:p>
         </p:txBody>
       </p:sp>
@@ -7130,7 +7386,7 @@
                 <a:ea typeface="Aptos" pitchFamily="34" charset="-122"/>
                 <a:cs typeface="Aptos" pitchFamily="34" charset="-120"/>
               </a:rPr>
-              <a:t>© Paula Soper</a:t>
+              <a:t>Â© Paula Soper</a:t>
             </a:r>
             <a:endParaRPr lang="en-US" sz="800" dirty="0"/>
           </a:p>
@@ -7138,7 +7394,46 @@
       </p:sp>
       <p:sp>
         <p:nvSpPr>
-          <p:cNvPr id="7" name="Shape 5"/>
+          <p:cNvPr id="7" name="Text 5"/>
+          <p:cNvSpPr/>
+          <p:nvPr/>
+        </p:nvSpPr>
+        <p:spPr>
+          <a:xfrm>
+            <a:off x="11137392" y="6510528"/>
+            <a:ext cx="411480" cy="201168"/>
+          </a:xfrm>
+          <a:prstGeom prst="rect">
+            <a:avLst/>
+          </a:prstGeom>
+          <a:noFill/>
+          <a:ln/>
+        </p:spPr>
+        <p:txBody>
+          <a:bodyPr wrap="square" lIns="0" tIns="0" rIns="0" bIns="0" rtlCol="0" anchor="ctr"/>
+          <a:lstStyle/>
+          <a:p>
+            <a:pPr algn="r" indent="0" marL="0">
+              <a:buNone/>
+            </a:pPr>
+            <a:r>
+              <a:rPr lang="en-US" sz="900" dirty="0">
+                <a:solidFill>
+                  <a:srgbClr val="5F7181"/>
+                </a:solidFill>
+                <a:latin typeface="Aptos" pitchFamily="34" charset="0"/>
+                <a:ea typeface="Aptos" pitchFamily="34" charset="-122"/>
+                <a:cs typeface="Aptos" pitchFamily="34" charset="-120"/>
+              </a:rPr>
+              <a:t>17</a:t>
+            </a:r>
+            <a:endParaRPr lang="en-US" sz="900" dirty="0"/>
+          </a:p>
+        </p:txBody>
+      </p:sp>
+      <p:sp>
+        <p:nvSpPr>
+          <p:cNvPr id="8" name="Shape 6"/>
           <p:cNvSpPr/>
           <p:nvPr/>
         </p:nvSpPr>
@@ -7163,7 +7458,7 @@
       </p:sp>
       <p:sp>
         <p:nvSpPr>
-          <p:cNvPr id="8" name="Text 6"/>
+          <p:cNvPr id="9" name="Text 7"/>
           <p:cNvSpPr/>
           <p:nvPr/>
         </p:nvSpPr>
@@ -7202,14 +7497,14 @@
       </p:sp>
       <p:sp>
         <p:nvSpPr>
-          <p:cNvPr id="9" name="Text 7"/>
+          <p:cNvPr id="10" name="Text 8"/>
           <p:cNvSpPr/>
           <p:nvPr/>
         </p:nvSpPr>
         <p:spPr>
           <a:xfrm>
             <a:off x="640080" y="621792"/>
-            <a:ext cx="10881360" cy="566928"/>
+            <a:ext cx="10881360" cy="713232"/>
           </a:xfrm>
           <a:prstGeom prst="rect">
             <a:avLst/>
@@ -7227,7 +7522,7 @@
               <a:buNone/>
             </a:pPr>
             <a:r>
-              <a:rPr lang="en-US" sz="2700" b="1" dirty="0">
+              <a:rPr lang="en-US" sz="3400" b="1" dirty="0">
                 <a:solidFill>
                   <a:srgbClr val="003A63"/>
                 </a:solidFill>
@@ -7237,20 +7532,20 @@
               </a:rPr>
               <a:t>Practical Exercise</a:t>
             </a:r>
-            <a:endParaRPr lang="en-US" sz="2700" dirty="0"/>
-          </a:p>
-        </p:txBody>
-      </p:sp>
-      <p:sp>
-        <p:nvSpPr>
-          <p:cNvPr id="10" name="Text 8"/>
-          <p:cNvSpPr/>
-          <p:nvPr/>
-        </p:nvSpPr>
-        <p:spPr>
-          <a:xfrm>
-            <a:off x="868680" y="1417320"/>
-            <a:ext cx="6675120" cy="4434840"/>
+            <a:endParaRPr lang="en-US" sz="3400" dirty="0"/>
+          </a:p>
+        </p:txBody>
+      </p:sp>
+      <p:sp>
+        <p:nvSpPr>
+          <p:cNvPr id="11" name="Text 9"/>
+          <p:cNvSpPr/>
+          <p:nvPr/>
+        </p:nvSpPr>
+        <p:spPr>
+          <a:xfrm>
+            <a:off x="868680" y="1508760"/>
+            <a:ext cx="6537960" cy="4160520"/>
           </a:xfrm>
           <a:prstGeom prst="rect">
             <a:avLst/>
@@ -7265,7 +7560,7 @@
           <a:lstStyle/>
           <a:p>
             <a:r>
-              <a:rPr lang="en-US" sz="1700" dirty="0">
+              <a:rPr lang="en-US" sz="2100" dirty="0">
                 <a:solidFill>
                   <a:srgbClr val="17364A"/>
                 </a:solidFill>
@@ -7275,11 +7570,11 @@
               </a:rPr>
               <a:t>Create a RAG readiness checklist for one public health knowledge workflow.</a:t>
             </a:r>
-            <a:endParaRPr lang="en-US" sz="1700" dirty="0"/>
-          </a:p>
-          <a:p>
-            <a:r>
-              <a:rPr lang="en-US" sz="1700" dirty="0">
+            <a:endParaRPr lang="en-US" sz="2100" dirty="0"/>
+          </a:p>
+          <a:p>
+            <a:r>
+              <a:rPr lang="en-US" sz="2100" dirty="0">
                 <a:solidFill>
                   <a:srgbClr val="17364A"/>
                 </a:solidFill>
@@ -7287,13 +7582,13 @@
                 <a:ea typeface="Aptos" pitchFamily="34" charset="-122"/>
                 <a:cs typeface="Aptos" pitchFamily="34" charset="-120"/>
               </a:rPr>
-              <a:t>Include content inventory, source authority, document owners, update schedule, sensitivity level, access controls, chunking.</a:t>
-            </a:r>
-            <a:endParaRPr lang="en-US" sz="1700" dirty="0"/>
-          </a:p>
-          <a:p>
-            <a:r>
-              <a:rPr lang="en-US" sz="1700" dirty="0">
+              <a:t>Include content inventory, source authority, document owners, update schedule, sensitivity level,.</a:t>
+            </a:r>
+            <a:endParaRPr lang="en-US" sz="2100" dirty="0"/>
+          </a:p>
+          <a:p>
+            <a:r>
+              <a:rPr lang="en-US" sz="2100" dirty="0">
                 <a:solidFill>
                   <a:srgbClr val="17364A"/>
                 </a:solidFill>
@@ -7301,15 +7596,15 @@
                 <a:ea typeface="Aptos" pitchFamily="34" charset="-122"/>
                 <a:cs typeface="Aptos" pitchFamily="34" charset="-120"/>
               </a:rPr>
-              <a:t>The checklist should identify at least three “do not answer” or escalation situations, such as missing guidance,.</a:t>
-            </a:r>
-            <a:endParaRPr lang="en-US" sz="1700" dirty="0"/>
-          </a:p>
-        </p:txBody>
-      </p:sp>
-      <p:sp>
-        <p:nvSpPr>
-          <p:cNvPr id="11" name="Shape 9"/>
+              <a:t>The checklist should identify at least three “do not answer” or escalation situations, such as missing.</a:t>
+            </a:r>
+            <a:endParaRPr lang="en-US" sz="2100" dirty="0"/>
+          </a:p>
+        </p:txBody>
+      </p:sp>
+      <p:sp>
+        <p:nvSpPr>
+          <p:cNvPr id="12" name="Shape 10"/>
           <p:cNvSpPr/>
           <p:nvPr/>
         </p:nvSpPr>
@@ -7336,14 +7631,14 @@
       </p:sp>
       <p:sp>
         <p:nvSpPr>
-          <p:cNvPr id="12" name="Text 10"/>
+          <p:cNvPr id="13" name="Text 11"/>
           <p:cNvSpPr/>
           <p:nvPr/>
         </p:nvSpPr>
         <p:spPr>
           <a:xfrm>
             <a:off x="8074152" y="1563624"/>
-            <a:ext cx="2825496" cy="201168"/>
+            <a:ext cx="2825496" cy="256032"/>
           </a:xfrm>
           <a:prstGeom prst="rect">
             <a:avLst/>
@@ -7359,7 +7654,7 @@
               <a:buNone/>
             </a:pPr>
             <a:r>
-              <a:rPr lang="en-US" sz="950" b="1" dirty="0">
+              <a:rPr lang="en-US" sz="1300" b="1" dirty="0">
                 <a:solidFill>
                   <a:srgbClr val="0068B7"/>
                 </a:solidFill>
@@ -7369,20 +7664,20 @@
               </a:rPr>
               <a:t>Key idea</a:t>
             </a:r>
-            <a:endParaRPr lang="en-US" sz="950" dirty="0"/>
-          </a:p>
-        </p:txBody>
-      </p:sp>
-      <p:sp>
-        <p:nvSpPr>
-          <p:cNvPr id="13" name="Text 11"/>
-          <p:cNvSpPr/>
-          <p:nvPr/>
-        </p:nvSpPr>
-        <p:spPr>
-          <a:xfrm>
-            <a:off x="8074152" y="1856232"/>
-            <a:ext cx="2825496" cy="1261872"/>
+            <a:endParaRPr lang="en-US" sz="1300" dirty="0"/>
+          </a:p>
+        </p:txBody>
+      </p:sp>
+      <p:sp>
+        <p:nvSpPr>
+          <p:cNvPr id="14" name="Text 12"/>
+          <p:cNvSpPr/>
+          <p:nvPr/>
+        </p:nvSpPr>
+        <p:spPr>
+          <a:xfrm>
+            <a:off x="8074152" y="1920240"/>
+            <a:ext cx="2825496" cy="1188720"/>
           </a:xfrm>
           <a:prstGeom prst="rect">
             <a:avLst/>
@@ -7400,7 +7695,7 @@
               <a:buNone/>
             </a:pPr>
             <a:r>
-              <a:rPr lang="en-US" sz="1250" dirty="0">
+              <a:rPr lang="en-US" sz="1550" dirty="0">
                 <a:solidFill>
                   <a:srgbClr val="17364A"/>
                 </a:solidFill>
@@ -7410,13 +7705,13 @@
               </a:rPr>
               <a:t>Create a RAG readiness checklist for one public health knowledge workflow.</a:t>
             </a:r>
-            <a:endParaRPr lang="en-US" sz="1250" dirty="0"/>
-          </a:p>
-        </p:txBody>
-      </p:sp>
-      <p:sp>
-        <p:nvSpPr>
-          <p:cNvPr id="14" name="Shape 12"/>
+            <a:endParaRPr lang="en-US" sz="1550" dirty="0"/>
+          </a:p>
+        </p:txBody>
+      </p:sp>
+      <p:sp>
+        <p:nvSpPr>
+          <p:cNvPr id="15" name="Shape 13"/>
           <p:cNvSpPr/>
           <p:nvPr/>
         </p:nvSpPr>
@@ -7443,14 +7738,14 @@
       </p:sp>
       <p:sp>
         <p:nvSpPr>
-          <p:cNvPr id="15" name="Text 13"/>
+          <p:cNvPr id="16" name="Text 14"/>
           <p:cNvSpPr/>
           <p:nvPr/>
         </p:nvSpPr>
         <p:spPr>
           <a:xfrm>
             <a:off x="8074152" y="3666744"/>
-            <a:ext cx="2825496" cy="201168"/>
+            <a:ext cx="2825496" cy="256032"/>
           </a:xfrm>
           <a:prstGeom prst="rect">
             <a:avLst/>
@@ -7466,7 +7761,7 @@
               <a:buNone/>
             </a:pPr>
             <a:r>
-              <a:rPr lang="en-US" sz="950" b="1" dirty="0">
+              <a:rPr lang="en-US" sz="1300" b="1" dirty="0">
                 <a:solidFill>
                   <a:srgbClr val="0068B7"/>
                 </a:solidFill>
@@ -7476,20 +7771,20 @@
               </a:rPr>
               <a:t>Use this for</a:t>
             </a:r>
-            <a:endParaRPr lang="en-US" sz="950" dirty="0"/>
-          </a:p>
-        </p:txBody>
-      </p:sp>
-      <p:sp>
-        <p:nvSpPr>
-          <p:cNvPr id="16" name="Text 14"/>
-          <p:cNvSpPr/>
-          <p:nvPr/>
-        </p:nvSpPr>
-        <p:spPr>
-          <a:xfrm>
-            <a:off x="8074152" y="3959352"/>
-            <a:ext cx="2825496" cy="1170432"/>
+            <a:endParaRPr lang="en-US" sz="1300" dirty="0"/>
+          </a:p>
+        </p:txBody>
+      </p:sp>
+      <p:sp>
+        <p:nvSpPr>
+          <p:cNvPr id="17" name="Text 15"/>
+          <p:cNvSpPr/>
+          <p:nvPr/>
+        </p:nvSpPr>
+        <p:spPr>
+          <a:xfrm>
+            <a:off x="8074152" y="4023360"/>
+            <a:ext cx="2825496" cy="1097280"/>
           </a:xfrm>
           <a:prstGeom prst="rect">
             <a:avLst/>
@@ -7507,7 +7802,7 @@
               <a:buNone/>
             </a:pPr>
             <a:r>
-              <a:rPr lang="en-US" sz="1250" dirty="0">
+              <a:rPr lang="en-US" sz="1550" dirty="0">
                 <a:solidFill>
                   <a:srgbClr val="17364A"/>
                 </a:solidFill>
@@ -7517,7 +7812,7 @@
               </a:rPr>
               <a:t>Connect the concept to public health decisions, safeguards, documentation, or implementation work.</a:t>
             </a:r>
-            <a:endParaRPr lang="en-US" sz="1250" dirty="0"/>
+            <a:endParaRPr lang="en-US" sz="1550" dirty="0"/>
           </a:p>
         </p:txBody>
       </p:sp>
@@ -7714,7 +8009,7 @@
                 <a:ea typeface="Aptos" pitchFamily="34" charset="-122"/>
                 <a:cs typeface="Aptos" pitchFamily="34" charset="-120"/>
               </a:rPr>
-              <a:t>© Paula Soper</a:t>
+              <a:t>Â© Paula Soper</a:t>
             </a:r>
             <a:endParaRPr lang="en-US" sz="800" dirty="0"/>
           </a:p>
@@ -7722,7 +8017,46 @@
       </p:sp>
       <p:sp>
         <p:nvSpPr>
-          <p:cNvPr id="7" name="Shape 5"/>
+          <p:cNvPr id="7" name="Text 5"/>
+          <p:cNvSpPr/>
+          <p:nvPr/>
+        </p:nvSpPr>
+        <p:spPr>
+          <a:xfrm>
+            <a:off x="11137392" y="6510528"/>
+            <a:ext cx="411480" cy="201168"/>
+          </a:xfrm>
+          <a:prstGeom prst="rect">
+            <a:avLst/>
+          </a:prstGeom>
+          <a:noFill/>
+          <a:ln/>
+        </p:spPr>
+        <p:txBody>
+          <a:bodyPr wrap="square" lIns="0" tIns="0" rIns="0" bIns="0" rtlCol="0" anchor="ctr"/>
+          <a:lstStyle/>
+          <a:p>
+            <a:pPr algn="r" indent="0" marL="0">
+              <a:buNone/>
+            </a:pPr>
+            <a:r>
+              <a:rPr lang="en-US" sz="900" dirty="0">
+                <a:solidFill>
+                  <a:srgbClr val="5F7181"/>
+                </a:solidFill>
+                <a:latin typeface="Aptos" pitchFamily="34" charset="0"/>
+                <a:ea typeface="Aptos" pitchFamily="34" charset="-122"/>
+                <a:cs typeface="Aptos" pitchFamily="34" charset="-120"/>
+              </a:rPr>
+              <a:t>18</a:t>
+            </a:r>
+            <a:endParaRPr lang="en-US" sz="900" dirty="0"/>
+          </a:p>
+        </p:txBody>
+      </p:sp>
+      <p:sp>
+        <p:nvSpPr>
+          <p:cNvPr id="8" name="Shape 6"/>
           <p:cNvSpPr/>
           <p:nvPr/>
         </p:nvSpPr>
@@ -7747,7 +8081,7 @@
       </p:sp>
       <p:sp>
         <p:nvSpPr>
-          <p:cNvPr id="8" name="Text 6"/>
+          <p:cNvPr id="9" name="Text 7"/>
           <p:cNvSpPr/>
           <p:nvPr/>
         </p:nvSpPr>
@@ -7786,14 +8120,14 @@
       </p:sp>
       <p:sp>
         <p:nvSpPr>
-          <p:cNvPr id="9" name="Text 7"/>
+          <p:cNvPr id="10" name="Text 8"/>
           <p:cNvSpPr/>
           <p:nvPr/>
         </p:nvSpPr>
         <p:spPr>
           <a:xfrm>
             <a:off x="640080" y="621792"/>
-            <a:ext cx="10881360" cy="566928"/>
+            <a:ext cx="10881360" cy="713232"/>
           </a:xfrm>
           <a:prstGeom prst="rect">
             <a:avLst/>
@@ -7811,7 +8145,7 @@
               <a:buNone/>
             </a:pPr>
             <a:r>
-              <a:rPr lang="en-US" sz="2700" b="1" dirty="0">
+              <a:rPr lang="en-US" sz="3400" b="1" dirty="0">
                 <a:solidFill>
                   <a:srgbClr val="003A63"/>
                 </a:solidFill>
@@ -7821,20 +8155,20 @@
               </a:rPr>
               <a:t>Expected Artifact or Evidence</a:t>
             </a:r>
-            <a:endParaRPr lang="en-US" sz="2700" dirty="0"/>
-          </a:p>
-        </p:txBody>
-      </p:sp>
-      <p:sp>
-        <p:nvSpPr>
-          <p:cNvPr id="10" name="Text 8"/>
-          <p:cNvSpPr/>
-          <p:nvPr/>
-        </p:nvSpPr>
-        <p:spPr>
-          <a:xfrm>
-            <a:off x="868680" y="1417320"/>
-            <a:ext cx="6675120" cy="4434840"/>
+            <a:endParaRPr lang="en-US" sz="3400" dirty="0"/>
+          </a:p>
+        </p:txBody>
+      </p:sp>
+      <p:sp>
+        <p:nvSpPr>
+          <p:cNvPr id="11" name="Text 9"/>
+          <p:cNvSpPr/>
+          <p:nvPr/>
+        </p:nvSpPr>
+        <p:spPr>
+          <a:xfrm>
+            <a:off x="868680" y="1508760"/>
+            <a:ext cx="6537960" cy="4160520"/>
           </a:xfrm>
           <a:prstGeom prst="rect">
             <a:avLst/>
@@ -7849,7 +8183,7 @@
           <a:lstStyle/>
           <a:p>
             <a:r>
-              <a:rPr lang="en-US" sz="1700" dirty="0">
+              <a:rPr lang="en-US" sz="2100" dirty="0">
                 <a:solidFill>
                   <a:srgbClr val="17364A"/>
                 </a:solidFill>
@@ -7859,11 +8193,11 @@
               </a:rPr>
               <a:t>RAG readiness checklist</a:t>
             </a:r>
-            <a:endParaRPr lang="en-US" sz="1700" dirty="0"/>
-          </a:p>
-          <a:p>
-            <a:r>
-              <a:rPr lang="en-US" sz="1700" dirty="0">
+            <a:endParaRPr lang="en-US" sz="2100" dirty="0"/>
+          </a:p>
+          <a:p>
+            <a:r>
+              <a:rPr lang="en-US" sz="2100" dirty="0">
                 <a:solidFill>
                   <a:srgbClr val="17364A"/>
                 </a:solidFill>
@@ -7873,11 +8207,11 @@
               </a:rPr>
               <a:t>Content inventory and ownership table</a:t>
             </a:r>
-            <a:endParaRPr lang="en-US" sz="1700" dirty="0"/>
-          </a:p>
-          <a:p>
-            <a:r>
-              <a:rPr lang="en-US" sz="1700" dirty="0">
+            <a:endParaRPr lang="en-US" sz="2100" dirty="0"/>
+          </a:p>
+          <a:p>
+            <a:r>
+              <a:rPr lang="en-US" sz="2100" dirty="0">
                 <a:solidFill>
                   <a:srgbClr val="17364A"/>
                 </a:solidFill>
@@ -7887,13 +8221,13 @@
               </a:rPr>
               <a:t>Retrieval test question set</a:t>
             </a:r>
-            <a:endParaRPr lang="en-US" sz="1700" dirty="0"/>
-          </a:p>
-        </p:txBody>
-      </p:sp>
-      <p:sp>
-        <p:nvSpPr>
-          <p:cNvPr id="11" name="Shape 9"/>
+            <a:endParaRPr lang="en-US" sz="2100" dirty="0"/>
+          </a:p>
+        </p:txBody>
+      </p:sp>
+      <p:sp>
+        <p:nvSpPr>
+          <p:cNvPr id="12" name="Shape 10"/>
           <p:cNvSpPr/>
           <p:nvPr/>
         </p:nvSpPr>
@@ -7920,14 +8254,14 @@
       </p:sp>
       <p:sp>
         <p:nvSpPr>
-          <p:cNvPr id="12" name="Text 10"/>
+          <p:cNvPr id="13" name="Text 11"/>
           <p:cNvSpPr/>
           <p:nvPr/>
         </p:nvSpPr>
         <p:spPr>
           <a:xfrm>
             <a:off x="8074152" y="1563624"/>
-            <a:ext cx="2825496" cy="201168"/>
+            <a:ext cx="2825496" cy="256032"/>
           </a:xfrm>
           <a:prstGeom prst="rect">
             <a:avLst/>
@@ -7943,7 +8277,7 @@
               <a:buNone/>
             </a:pPr>
             <a:r>
-              <a:rPr lang="en-US" sz="950" b="1" dirty="0">
+              <a:rPr lang="en-US" sz="1300" b="1" dirty="0">
                 <a:solidFill>
                   <a:srgbClr val="0068B7"/>
                 </a:solidFill>
@@ -7953,20 +8287,20 @@
               </a:rPr>
               <a:t>Key idea</a:t>
             </a:r>
-            <a:endParaRPr lang="en-US" sz="950" dirty="0"/>
-          </a:p>
-        </p:txBody>
-      </p:sp>
-      <p:sp>
-        <p:nvSpPr>
-          <p:cNvPr id="13" name="Text 11"/>
-          <p:cNvSpPr/>
-          <p:nvPr/>
-        </p:nvSpPr>
-        <p:spPr>
-          <a:xfrm>
-            <a:off x="8074152" y="1856232"/>
-            <a:ext cx="2825496" cy="1261872"/>
+            <a:endParaRPr lang="en-US" sz="1300" dirty="0"/>
+          </a:p>
+        </p:txBody>
+      </p:sp>
+      <p:sp>
+        <p:nvSpPr>
+          <p:cNvPr id="14" name="Text 12"/>
+          <p:cNvSpPr/>
+          <p:nvPr/>
+        </p:nvSpPr>
+        <p:spPr>
+          <a:xfrm>
+            <a:off x="8074152" y="1920240"/>
+            <a:ext cx="2825496" cy="1188720"/>
           </a:xfrm>
           <a:prstGeom prst="rect">
             <a:avLst/>
@@ -7984,7 +8318,7 @@
               <a:buNone/>
             </a:pPr>
             <a:r>
-              <a:rPr lang="en-US" sz="1250" dirty="0">
+              <a:rPr lang="en-US" sz="1550" dirty="0">
                 <a:solidFill>
                   <a:srgbClr val="17364A"/>
                 </a:solidFill>
@@ -7994,13 +8328,13 @@
               </a:rPr>
               <a:t>RAG readiness checklist</a:t>
             </a:r>
-            <a:endParaRPr lang="en-US" sz="1250" dirty="0"/>
-          </a:p>
-        </p:txBody>
-      </p:sp>
-      <p:sp>
-        <p:nvSpPr>
-          <p:cNvPr id="14" name="Shape 12"/>
+            <a:endParaRPr lang="en-US" sz="1550" dirty="0"/>
+          </a:p>
+        </p:txBody>
+      </p:sp>
+      <p:sp>
+        <p:nvSpPr>
+          <p:cNvPr id="15" name="Shape 13"/>
           <p:cNvSpPr/>
           <p:nvPr/>
         </p:nvSpPr>
@@ -8027,14 +8361,14 @@
       </p:sp>
       <p:sp>
         <p:nvSpPr>
-          <p:cNvPr id="15" name="Text 13"/>
+          <p:cNvPr id="16" name="Text 14"/>
           <p:cNvSpPr/>
           <p:nvPr/>
         </p:nvSpPr>
         <p:spPr>
           <a:xfrm>
             <a:off x="8074152" y="3666744"/>
-            <a:ext cx="2825496" cy="201168"/>
+            <a:ext cx="2825496" cy="256032"/>
           </a:xfrm>
           <a:prstGeom prst="rect">
             <a:avLst/>
@@ -8050,7 +8384,7 @@
               <a:buNone/>
             </a:pPr>
             <a:r>
-              <a:rPr lang="en-US" sz="950" b="1" dirty="0">
+              <a:rPr lang="en-US" sz="1300" b="1" dirty="0">
                 <a:solidFill>
                   <a:srgbClr val="0068B7"/>
                 </a:solidFill>
@@ -8060,20 +8394,20 @@
               </a:rPr>
               <a:t>Use this for</a:t>
             </a:r>
-            <a:endParaRPr lang="en-US" sz="950" dirty="0"/>
-          </a:p>
-        </p:txBody>
-      </p:sp>
-      <p:sp>
-        <p:nvSpPr>
-          <p:cNvPr id="16" name="Text 14"/>
-          <p:cNvSpPr/>
-          <p:nvPr/>
-        </p:nvSpPr>
-        <p:spPr>
-          <a:xfrm>
-            <a:off x="8074152" y="3959352"/>
-            <a:ext cx="2825496" cy="1170432"/>
+            <a:endParaRPr lang="en-US" sz="1300" dirty="0"/>
+          </a:p>
+        </p:txBody>
+      </p:sp>
+      <p:sp>
+        <p:nvSpPr>
+          <p:cNvPr id="17" name="Text 15"/>
+          <p:cNvSpPr/>
+          <p:nvPr/>
+        </p:nvSpPr>
+        <p:spPr>
+          <a:xfrm>
+            <a:off x="8074152" y="4023360"/>
+            <a:ext cx="2825496" cy="1097280"/>
           </a:xfrm>
           <a:prstGeom prst="rect">
             <a:avLst/>
@@ -8091,7 +8425,7 @@
               <a:buNone/>
             </a:pPr>
             <a:r>
-              <a:rPr lang="en-US" sz="1250" dirty="0">
+              <a:rPr lang="en-US" sz="1550" dirty="0">
                 <a:solidFill>
                   <a:srgbClr val="17364A"/>
                 </a:solidFill>
@@ -8101,7 +8435,7 @@
               </a:rPr>
               <a:t>Connect the concept to public health decisions, safeguards, documentation, or implementation work.</a:t>
             </a:r>
-            <a:endParaRPr lang="en-US" sz="1250" dirty="0"/>
+            <a:endParaRPr lang="en-US" sz="1550" dirty="0"/>
           </a:p>
         </p:txBody>
       </p:sp>
@@ -8298,7 +8632,7 @@
                 <a:ea typeface="Aptos" pitchFamily="34" charset="-122"/>
                 <a:cs typeface="Aptos" pitchFamily="34" charset="-120"/>
               </a:rPr>
-              <a:t>© Paula Soper</a:t>
+              <a:t>Â© Paula Soper</a:t>
             </a:r>
             <a:endParaRPr lang="en-US" sz="800" dirty="0"/>
           </a:p>
@@ -8312,8 +8646,47 @@
         </p:nvSpPr>
         <p:spPr>
           <a:xfrm>
+            <a:off x="11137392" y="6510528"/>
+            <a:ext cx="411480" cy="201168"/>
+          </a:xfrm>
+          <a:prstGeom prst="rect">
+            <a:avLst/>
+          </a:prstGeom>
+          <a:noFill/>
+          <a:ln/>
+        </p:spPr>
+        <p:txBody>
+          <a:bodyPr wrap="square" lIns="0" tIns="0" rIns="0" bIns="0" rtlCol="0" anchor="ctr"/>
+          <a:lstStyle/>
+          <a:p>
+            <a:pPr algn="r" indent="0" marL="0">
+              <a:buNone/>
+            </a:pPr>
+            <a:r>
+              <a:rPr lang="en-US" sz="900" dirty="0">
+                <a:solidFill>
+                  <a:srgbClr val="5F7181"/>
+                </a:solidFill>
+                <a:latin typeface="Aptos" pitchFamily="34" charset="0"/>
+                <a:ea typeface="Aptos" pitchFamily="34" charset="-122"/>
+                <a:cs typeface="Aptos" pitchFamily="34" charset="-120"/>
+              </a:rPr>
+              <a:t>19</a:t>
+            </a:r>
+            <a:endParaRPr lang="en-US" sz="900" dirty="0"/>
+          </a:p>
+        </p:txBody>
+      </p:sp>
+      <p:sp>
+        <p:nvSpPr>
+          <p:cNvPr id="8" name="Text 6"/>
+          <p:cNvSpPr/>
+          <p:nvPr/>
+        </p:nvSpPr>
+        <p:spPr>
+          <a:xfrm>
             <a:off x="640080" y="658368"/>
-            <a:ext cx="10881360" cy="566928"/>
+            <a:ext cx="10881360" cy="713232"/>
           </a:xfrm>
           <a:prstGeom prst="rect">
             <a:avLst/>
@@ -8331,7 +8704,7 @@
               <a:buNone/>
             </a:pPr>
             <a:r>
-              <a:rPr lang="en-US" sz="2700" b="1" dirty="0">
+              <a:rPr lang="en-US" sz="3400" b="1" dirty="0">
                 <a:solidFill>
                   <a:srgbClr val="003A63"/>
                 </a:solidFill>
@@ -8341,20 +8714,20 @@
               </a:rPr>
               <a:t>Expected Artifact or Evidence Continued</a:t>
             </a:r>
-            <a:endParaRPr lang="en-US" sz="2700" dirty="0"/>
-          </a:p>
-        </p:txBody>
-      </p:sp>
-      <p:sp>
-        <p:nvSpPr>
-          <p:cNvPr id="8" name="Text 6"/>
-          <p:cNvSpPr/>
-          <p:nvPr/>
-        </p:nvSpPr>
-        <p:spPr>
-          <a:xfrm>
-            <a:off x="868680" y="1417320"/>
-            <a:ext cx="6675120" cy="4434840"/>
+            <a:endParaRPr lang="en-US" sz="3400" dirty="0"/>
+          </a:p>
+        </p:txBody>
+      </p:sp>
+      <p:sp>
+        <p:nvSpPr>
+          <p:cNvPr id="9" name="Text 7"/>
+          <p:cNvSpPr/>
+          <p:nvPr/>
+        </p:nvSpPr>
+        <p:spPr>
+          <a:xfrm>
+            <a:off x="868680" y="1508760"/>
+            <a:ext cx="6537960" cy="4160520"/>
           </a:xfrm>
           <a:prstGeom prst="rect">
             <a:avLst/>
@@ -8369,7 +8742,7 @@
           <a:lstStyle/>
           <a:p>
             <a:r>
-              <a:rPr lang="en-US" sz="1700" dirty="0">
+              <a:rPr lang="en-US" sz="2100" dirty="0">
                 <a:solidFill>
                   <a:srgbClr val="17364A"/>
                 </a:solidFill>
@@ -8379,13 +8752,13 @@
               </a:rPr>
               <a:t>Citation and source verification protocol</a:t>
             </a:r>
-            <a:endParaRPr lang="en-US" sz="1700" dirty="0"/>
-          </a:p>
-        </p:txBody>
-      </p:sp>
-      <p:sp>
-        <p:nvSpPr>
-          <p:cNvPr id="9" name="Shape 7"/>
+            <a:endParaRPr lang="en-US" sz="2100" dirty="0"/>
+          </a:p>
+        </p:txBody>
+      </p:sp>
+      <p:sp>
+        <p:nvSpPr>
+          <p:cNvPr id="10" name="Shape 8"/>
           <p:cNvSpPr/>
           <p:nvPr/>
         </p:nvSpPr>
@@ -8412,14 +8785,14 @@
       </p:sp>
       <p:sp>
         <p:nvSpPr>
-          <p:cNvPr id="10" name="Text 8"/>
+          <p:cNvPr id="11" name="Text 9"/>
           <p:cNvSpPr/>
           <p:nvPr/>
         </p:nvSpPr>
         <p:spPr>
           <a:xfrm>
             <a:off x="8074152" y="1563624"/>
-            <a:ext cx="2825496" cy="201168"/>
+            <a:ext cx="2825496" cy="256032"/>
           </a:xfrm>
           <a:prstGeom prst="rect">
             <a:avLst/>
@@ -8435,7 +8808,7 @@
               <a:buNone/>
             </a:pPr>
             <a:r>
-              <a:rPr lang="en-US" sz="950" b="1" dirty="0">
+              <a:rPr lang="en-US" sz="1300" b="1" dirty="0">
                 <a:solidFill>
                   <a:srgbClr val="0068B7"/>
                 </a:solidFill>
@@ -8445,20 +8818,20 @@
               </a:rPr>
               <a:t>Key idea</a:t>
             </a:r>
-            <a:endParaRPr lang="en-US" sz="950" dirty="0"/>
-          </a:p>
-        </p:txBody>
-      </p:sp>
-      <p:sp>
-        <p:nvSpPr>
-          <p:cNvPr id="11" name="Text 9"/>
-          <p:cNvSpPr/>
-          <p:nvPr/>
-        </p:nvSpPr>
-        <p:spPr>
-          <a:xfrm>
-            <a:off x="8074152" y="1856232"/>
-            <a:ext cx="2825496" cy="1261872"/>
+            <a:endParaRPr lang="en-US" sz="1300" dirty="0"/>
+          </a:p>
+        </p:txBody>
+      </p:sp>
+      <p:sp>
+        <p:nvSpPr>
+          <p:cNvPr id="12" name="Text 10"/>
+          <p:cNvSpPr/>
+          <p:nvPr/>
+        </p:nvSpPr>
+        <p:spPr>
+          <a:xfrm>
+            <a:off x="8074152" y="1920240"/>
+            <a:ext cx="2825496" cy="1188720"/>
           </a:xfrm>
           <a:prstGeom prst="rect">
             <a:avLst/>
@@ -8476,7 +8849,7 @@
               <a:buNone/>
             </a:pPr>
             <a:r>
-              <a:rPr lang="en-US" sz="1250" dirty="0">
+              <a:rPr lang="en-US" sz="1550" dirty="0">
                 <a:solidFill>
                   <a:srgbClr val="17364A"/>
                 </a:solidFill>
@@ -8486,13 +8859,13 @@
               </a:rPr>
               <a:t>Citation and source verification protocol</a:t>
             </a:r>
-            <a:endParaRPr lang="en-US" sz="1250" dirty="0"/>
-          </a:p>
-        </p:txBody>
-      </p:sp>
-      <p:sp>
-        <p:nvSpPr>
-          <p:cNvPr id="12" name="Shape 10"/>
+            <a:endParaRPr lang="en-US" sz="1550" dirty="0"/>
+          </a:p>
+        </p:txBody>
+      </p:sp>
+      <p:sp>
+        <p:nvSpPr>
+          <p:cNvPr id="13" name="Shape 11"/>
           <p:cNvSpPr/>
           <p:nvPr/>
         </p:nvSpPr>
@@ -8519,14 +8892,14 @@
       </p:sp>
       <p:sp>
         <p:nvSpPr>
-          <p:cNvPr id="13" name="Text 11"/>
+          <p:cNvPr id="14" name="Text 12"/>
           <p:cNvSpPr/>
           <p:nvPr/>
         </p:nvSpPr>
         <p:spPr>
           <a:xfrm>
             <a:off x="8074152" y="3666744"/>
-            <a:ext cx="2825496" cy="201168"/>
+            <a:ext cx="2825496" cy="256032"/>
           </a:xfrm>
           <a:prstGeom prst="rect">
             <a:avLst/>
@@ -8542,7 +8915,7 @@
               <a:buNone/>
             </a:pPr>
             <a:r>
-              <a:rPr lang="en-US" sz="950" b="1" dirty="0">
+              <a:rPr lang="en-US" sz="1300" b="1" dirty="0">
                 <a:solidFill>
                   <a:srgbClr val="0068B7"/>
                 </a:solidFill>
@@ -8552,20 +8925,20 @@
               </a:rPr>
               <a:t>Use this for</a:t>
             </a:r>
-            <a:endParaRPr lang="en-US" sz="950" dirty="0"/>
-          </a:p>
-        </p:txBody>
-      </p:sp>
-      <p:sp>
-        <p:nvSpPr>
-          <p:cNvPr id="14" name="Text 12"/>
-          <p:cNvSpPr/>
-          <p:nvPr/>
-        </p:nvSpPr>
-        <p:spPr>
-          <a:xfrm>
-            <a:off x="8074152" y="3959352"/>
-            <a:ext cx="2825496" cy="1170432"/>
+            <a:endParaRPr lang="en-US" sz="1300" dirty="0"/>
+          </a:p>
+        </p:txBody>
+      </p:sp>
+      <p:sp>
+        <p:nvSpPr>
+          <p:cNvPr id="15" name="Text 13"/>
+          <p:cNvSpPr/>
+          <p:nvPr/>
+        </p:nvSpPr>
+        <p:spPr>
+          <a:xfrm>
+            <a:off x="8074152" y="4023360"/>
+            <a:ext cx="2825496" cy="1097280"/>
           </a:xfrm>
           <a:prstGeom prst="rect">
             <a:avLst/>
@@ -8583,7 +8956,7 @@
               <a:buNone/>
             </a:pPr>
             <a:r>
-              <a:rPr lang="en-US" sz="1250" dirty="0">
+              <a:rPr lang="en-US" sz="1550" dirty="0">
                 <a:solidFill>
                   <a:srgbClr val="17364A"/>
                 </a:solidFill>
@@ -8593,7 +8966,7 @@
               </a:rPr>
               <a:t>Connect the concept to public health decisions, safeguards, documentation, or implementation work.</a:t>
             </a:r>
-            <a:endParaRPr lang="en-US" sz="1250" dirty="0"/>
+            <a:endParaRPr lang="en-US" sz="1550" dirty="0"/>
           </a:p>
         </p:txBody>
       </p:sp>
@@ -8790,7 +9163,7 @@
                 <a:ea typeface="Aptos" pitchFamily="34" charset="-122"/>
                 <a:cs typeface="Aptos" pitchFamily="34" charset="-120"/>
               </a:rPr>
-              <a:t>© Paula Soper</a:t>
+              <a:t>Â© Paula Soper</a:t>
             </a:r>
             <a:endParaRPr lang="en-US" sz="800" dirty="0"/>
           </a:p>
@@ -8804,8 +9177,47 @@
         </p:nvSpPr>
         <p:spPr>
           <a:xfrm>
+            <a:off x="11137392" y="6510528"/>
+            <a:ext cx="411480" cy="201168"/>
+          </a:xfrm>
+          <a:prstGeom prst="rect">
+            <a:avLst/>
+          </a:prstGeom>
+          <a:noFill/>
+          <a:ln/>
+        </p:spPr>
+        <p:txBody>
+          <a:bodyPr wrap="square" lIns="0" tIns="0" rIns="0" bIns="0" rtlCol="0" anchor="ctr"/>
+          <a:lstStyle/>
+          <a:p>
+            <a:pPr algn="r" indent="0" marL="0">
+              <a:buNone/>
+            </a:pPr>
+            <a:r>
+              <a:rPr lang="en-US" sz="900" dirty="0">
+                <a:solidFill>
+                  <a:srgbClr val="5F7181"/>
+                </a:solidFill>
+                <a:latin typeface="Aptos" pitchFamily="34" charset="0"/>
+                <a:ea typeface="Aptos" pitchFamily="34" charset="-122"/>
+                <a:cs typeface="Aptos" pitchFamily="34" charset="-120"/>
+              </a:rPr>
+              <a:t>2</a:t>
+            </a:r>
+            <a:endParaRPr lang="en-US" sz="900" dirty="0"/>
+          </a:p>
+        </p:txBody>
+      </p:sp>
+      <p:sp>
+        <p:nvSpPr>
+          <p:cNvPr id="8" name="Text 6"/>
+          <p:cNvSpPr/>
+          <p:nvPr/>
+        </p:nvSpPr>
+        <p:spPr>
+          <a:xfrm>
             <a:off x="640080" y="658368"/>
-            <a:ext cx="10881360" cy="566928"/>
+            <a:ext cx="10881360" cy="713232"/>
           </a:xfrm>
           <a:prstGeom prst="rect">
             <a:avLst/>
@@ -8823,7 +9235,7 @@
               <a:buNone/>
             </a:pPr>
             <a:r>
-              <a:rPr lang="en-US" sz="2700" b="1" dirty="0">
+              <a:rPr lang="en-US" sz="3400" b="1" dirty="0">
                 <a:solidFill>
                   <a:srgbClr val="003A63"/>
                 </a:solidFill>
@@ -8833,20 +9245,20 @@
               </a:rPr>
               <a:t>What this module helps you do</a:t>
             </a:r>
-            <a:endParaRPr lang="en-US" sz="2700" dirty="0"/>
-          </a:p>
-        </p:txBody>
-      </p:sp>
-      <p:sp>
-        <p:nvSpPr>
-          <p:cNvPr id="8" name="Text 6"/>
-          <p:cNvSpPr/>
-          <p:nvPr/>
-        </p:nvSpPr>
-        <p:spPr>
-          <a:xfrm>
-            <a:off x="868680" y="1417320"/>
-            <a:ext cx="6675120" cy="3291840"/>
+            <a:endParaRPr lang="en-US" sz="3400" dirty="0"/>
+          </a:p>
+        </p:txBody>
+      </p:sp>
+      <p:sp>
+        <p:nvSpPr>
+          <p:cNvPr id="9" name="Text 7"/>
+          <p:cNvSpPr/>
+          <p:nvPr/>
+        </p:nvSpPr>
+        <p:spPr>
+          <a:xfrm>
+            <a:off x="868680" y="1508760"/>
+            <a:ext cx="6446520" cy="2926080"/>
           </a:xfrm>
           <a:prstGeom prst="rect">
             <a:avLst/>
@@ -8861,7 +9273,7 @@
           <a:lstStyle/>
           <a:p>
             <a:r>
-              <a:rPr lang="en-US" sz="1700" dirty="0">
+              <a:rPr lang="en-US" sz="2100" dirty="0">
                 <a:solidFill>
                   <a:srgbClr val="17364A"/>
                 </a:solidFill>
@@ -8869,13 +9281,13 @@
                 <a:ea typeface="Aptos" pitchFamily="34" charset="-122"/>
                 <a:cs typeface="Aptos" pitchFamily="34" charset="-120"/>
               </a:rPr>
-              <a:t>Retrieval-augmented generation, often called RAG, combines generative AI with retrieval from a defined set of documents or data sources.</a:t>
-            </a:r>
-            <a:endParaRPr lang="en-US" sz="1700" dirty="0"/>
-          </a:p>
-          <a:p>
-            <a:r>
-              <a:rPr lang="en-US" sz="1700" dirty="0">
+              <a:t>Retrieval-augmented generation, often called RAG, combines generative AI with retrieval from a defined set of.</a:t>
+            </a:r>
+            <a:endParaRPr lang="en-US" sz="2100" dirty="0"/>
+          </a:p>
+          <a:p>
+            <a:r>
+              <a:rPr lang="en-US" sz="2100" dirty="0">
                 <a:solidFill>
                   <a:srgbClr val="17364A"/>
                 </a:solidFill>
@@ -8883,13 +9295,13 @@
                 <a:ea typeface="Aptos" pitchFamily="34" charset="-122"/>
                 <a:cs typeface="Aptos" pitchFamily="34" charset="-120"/>
               </a:rPr>
-              <a:t>Instead of relying only on a model’s general training, a RAG system searches approved content and uses retrieved material to generate an answer or.</a:t>
-            </a:r>
-            <a:endParaRPr lang="en-US" sz="1700" dirty="0"/>
-          </a:p>
-          <a:p>
-            <a:r>
-              <a:rPr lang="en-US" sz="1700" dirty="0">
+              <a:t>Instead of relying only on a model’s general training, a RAG system searches approved content and uses retrieved.</a:t>
+            </a:r>
+            <a:endParaRPr lang="en-US" sz="2100" dirty="0"/>
+          </a:p>
+          <a:p>
+            <a:r>
+              <a:rPr lang="en-US" sz="2100" dirty="0">
                 <a:solidFill>
                   <a:srgbClr val="17364A"/>
                 </a:solidFill>
@@ -8897,29 +9309,15 @@
                 <a:ea typeface="Aptos" pitchFamily="34" charset="-122"/>
                 <a:cs typeface="Aptos" pitchFamily="34" charset="-120"/>
               </a:rPr>
-              <a:t>In public health, RAG may support policy lookup, protocol interpretation, internal help desks, training support, grant review, emergency response,.</a:t>
-            </a:r>
-            <a:endParaRPr lang="en-US" sz="1700" dirty="0"/>
-          </a:p>
-          <a:p>
-            <a:r>
-              <a:rPr lang="en-US" sz="1700" dirty="0">
-                <a:solidFill>
-                  <a:srgbClr val="17364A"/>
-                </a:solidFill>
-                <a:latin typeface="Aptos" pitchFamily="34" charset="0"/>
-                <a:ea typeface="Aptos" pitchFamily="34" charset="-122"/>
-                <a:cs typeface="Aptos" pitchFamily="34" charset="-120"/>
-              </a:rPr>
-              <a:t>RAG can make generative AI more useful and safer when it is designed well.</a:t>
-            </a:r>
-            <a:endParaRPr lang="en-US" sz="1700" dirty="0"/>
-          </a:p>
-        </p:txBody>
-      </p:sp>
-      <p:sp>
-        <p:nvSpPr>
-          <p:cNvPr id="9" name="Shape 7"/>
+              <a:t>In public health, RAG may support policy lookup, protocol interpretation, internal help desks, training support,.</a:t>
+            </a:r>
+            <a:endParaRPr lang="en-US" sz="2100" dirty="0"/>
+          </a:p>
+        </p:txBody>
+      </p:sp>
+      <p:sp>
+        <p:nvSpPr>
+          <p:cNvPr id="10" name="Shape 8"/>
           <p:cNvSpPr/>
           <p:nvPr/>
         </p:nvSpPr>
@@ -8946,14 +9344,14 @@
       </p:sp>
       <p:sp>
         <p:nvSpPr>
-          <p:cNvPr id="10" name="Text 8"/>
+          <p:cNvPr id="11" name="Text 9"/>
           <p:cNvSpPr/>
           <p:nvPr/>
         </p:nvSpPr>
         <p:spPr>
           <a:xfrm>
             <a:off x="8074152" y="1563624"/>
-            <a:ext cx="2825496" cy="201168"/>
+            <a:ext cx="2825496" cy="256032"/>
           </a:xfrm>
           <a:prstGeom prst="rect">
             <a:avLst/>
@@ -8969,7 +9367,7 @@
               <a:buNone/>
             </a:pPr>
             <a:r>
-              <a:rPr lang="en-US" sz="950" b="1" dirty="0">
+              <a:rPr lang="en-US" sz="1300" b="1" dirty="0">
                 <a:solidFill>
                   <a:srgbClr val="0068B7"/>
                 </a:solidFill>
@@ -8979,20 +9377,20 @@
               </a:rPr>
               <a:t>Module details</a:t>
             </a:r>
-            <a:endParaRPr lang="en-US" sz="950" dirty="0"/>
-          </a:p>
-        </p:txBody>
-      </p:sp>
-      <p:sp>
-        <p:nvSpPr>
-          <p:cNvPr id="11" name="Text 9"/>
-          <p:cNvSpPr/>
-          <p:nvPr/>
-        </p:nvSpPr>
-        <p:spPr>
-          <a:xfrm>
-            <a:off x="8074152" y="1856232"/>
-            <a:ext cx="2825496" cy="1353312"/>
+            <a:endParaRPr lang="en-US" sz="1300" dirty="0"/>
+          </a:p>
+        </p:txBody>
+      </p:sp>
+      <p:sp>
+        <p:nvSpPr>
+          <p:cNvPr id="12" name="Text 10"/>
+          <p:cNvSpPr/>
+          <p:nvPr/>
+        </p:nvSpPr>
+        <p:spPr>
+          <a:xfrm>
+            <a:off x="8074152" y="1920240"/>
+            <a:ext cx="2825496" cy="1280160"/>
           </a:xfrm>
           <a:prstGeom prst="rect">
             <a:avLst/>
@@ -9010,7 +9408,7 @@
               <a:buNone/>
             </a:pPr>
             <a:r>
-              <a:rPr lang="en-US" sz="1250" dirty="0">
+              <a:rPr lang="en-US" sz="1550" dirty="0">
                 <a:solidFill>
                   <a:srgbClr val="17364A"/>
                 </a:solidFill>
@@ -9020,14 +9418,14 @@
               </a:rPr>
               <a:t>Level: intermediate/practitioner</a:t>
             </a:r>
-            <a:endParaRPr lang="en-US" sz="1250" dirty="0"/>
+            <a:endParaRPr lang="en-US" sz="1550" dirty="0"/>
           </a:p>
           <a:p>
             <a:pPr indent="0" marL="0">
               <a:buNone/>
             </a:pPr>
             <a:r>
-              <a:rPr lang="en-US" sz="1250" dirty="0">
+              <a:rPr lang="en-US" sz="1550" dirty="0">
                 <a:solidFill>
                   <a:srgbClr val="17364A"/>
                 </a:solidFill>
@@ -9037,14 +9435,14 @@
               </a:rPr>
               <a:t>Primary track: Technical Architecture Track</a:t>
             </a:r>
-            <a:endParaRPr lang="en-US" sz="1250" dirty="0"/>
+            <a:endParaRPr lang="en-US" sz="1550" dirty="0"/>
           </a:p>
           <a:p>
             <a:pPr indent="0" marL="0">
               <a:buNone/>
             </a:pPr>
             <a:r>
-              <a:rPr lang="en-US" sz="1250" dirty="0">
+              <a:rPr lang="en-US" sz="1550" dirty="0">
                 <a:solidFill>
                   <a:srgbClr val="17364A"/>
                 </a:solidFill>
@@ -9054,32 +9452,32 @@
               </a:rPr>
               <a:t>Appears in tracks: analytics-modeling</a:t>
             </a:r>
-            <a:endParaRPr lang="en-US" sz="1250" dirty="0"/>
-          </a:p>
-        </p:txBody>
-      </p:sp>
-      <p:sp>
-        <p:nvSpPr>
-          <p:cNvPr id="12" name="Shape 10"/>
-          <p:cNvSpPr/>
-          <p:nvPr/>
-        </p:nvSpPr>
-        <p:spPr>
-          <a:xfrm>
-            <a:off x="7909560" y="3611880"/>
-            <a:ext cx="3154680" cy="1783080"/>
+            <a:endParaRPr lang="en-US" sz="1550" dirty="0"/>
+          </a:p>
+        </p:txBody>
+      </p:sp>
+      <p:sp>
+        <p:nvSpPr>
+          <p:cNvPr id="13" name="Shape 11"/>
+          <p:cNvSpPr/>
+          <p:nvPr/>
+        </p:nvSpPr>
+        <p:spPr>
+          <a:xfrm>
+            <a:off x="7635240" y="3730752"/>
+            <a:ext cx="1033272" cy="749808"/>
           </a:xfrm>
           <a:prstGeom prst="roundRect">
             <a:avLst>
-              <a:gd name="adj" fmla="val 6154"/>
+              <a:gd name="adj" fmla="val 14634"/>
             </a:avLst>
           </a:prstGeom>
           <a:solidFill>
-            <a:srgbClr val="EEF8ED"/>
+            <a:srgbClr val="0068B7"/>
           </a:solidFill>
           <a:ln w="12700">
             <a:solidFill>
-              <a:srgbClr val="B9D7E6"/>
+              <a:srgbClr val="0068B7"/>
             </a:solidFill>
             <a:prstDash val="solid"/>
           </a:ln>
@@ -9087,81 +9485,256 @@
       </p:sp>
       <p:sp>
         <p:nvSpPr>
-          <p:cNvPr id="13" name="Text 11"/>
-          <p:cNvSpPr/>
-          <p:nvPr/>
-        </p:nvSpPr>
-        <p:spPr>
-          <a:xfrm>
-            <a:off x="8074152" y="3758184"/>
-            <a:ext cx="2825496" cy="201168"/>
-          </a:xfrm>
-          <a:prstGeom prst="rect">
-            <a:avLst/>
-          </a:prstGeom>
-          <a:noFill/>
-          <a:ln/>
-        </p:spPr>
-        <p:txBody>
-          <a:bodyPr wrap="square" lIns="0" tIns="0" rIns="0" bIns="0" rtlCol="0" anchor="ctr"/>
-          <a:lstStyle/>
-          <a:p>
-            <a:pPr indent="0" marL="0">
-              <a:buNone/>
-            </a:pPr>
-            <a:r>
-              <a:rPr lang="en-US" sz="950" b="1" dirty="0">
-                <a:solidFill>
-                  <a:srgbClr val="0068B7"/>
-                </a:solidFill>
-                <a:latin typeface="Aptos" pitchFamily="34" charset="0"/>
-                <a:ea typeface="Aptos" pitchFamily="34" charset="-122"/>
-                <a:cs typeface="Aptos" pitchFamily="34" charset="-120"/>
-              </a:rPr>
-              <a:t>Learning approach</a:t>
-            </a:r>
-            <a:endParaRPr lang="en-US" sz="950" dirty="0"/>
-          </a:p>
-        </p:txBody>
-      </p:sp>
-      <p:sp>
-        <p:nvSpPr>
           <p:cNvPr id="14" name="Text 12"/>
           <p:cNvSpPr/>
           <p:nvPr/>
         </p:nvSpPr>
         <p:spPr>
           <a:xfrm>
-            <a:off x="8074152" y="4050792"/>
-            <a:ext cx="2825496" cy="1216152"/>
-          </a:xfrm>
-          <a:prstGeom prst="rect">
-            <a:avLst/>
-          </a:prstGeom>
-          <a:noFill/>
-          <a:ln/>
-        </p:spPr>
-        <p:txBody>
-          <a:bodyPr wrap="square" lIns="0" tIns="0" rIns="0" bIns="0" rtlCol="0" anchor="t">
+            <a:off x="7708392" y="3922776"/>
+            <a:ext cx="886968" cy="310896"/>
+          </a:xfrm>
+          <a:prstGeom prst="rect">
+            <a:avLst/>
+          </a:prstGeom>
+          <a:noFill/>
+          <a:ln/>
+        </p:spPr>
+        <p:txBody>
+          <a:bodyPr wrap="square" lIns="0" tIns="0" rIns="0" bIns="0" rtlCol="0" anchor="ctr">
             <a:normAutofit/>
           </a:bodyPr>
           <a:lstStyle/>
           <a:p>
-            <a:pPr indent="0" marL="0">
-              <a:buNone/>
-            </a:pPr>
-            <a:r>
-              <a:rPr lang="en-US" sz="1250" dirty="0">
-                <a:solidFill>
-                  <a:srgbClr val="17364A"/>
-                </a:solidFill>
-                <a:latin typeface="Aptos" pitchFamily="34" charset="0"/>
-                <a:ea typeface="Aptos" pitchFamily="34" charset="-122"/>
-                <a:cs typeface="Aptos" pitchFamily="34" charset="-120"/>
-              </a:rPr>
-              <a:t>Review the core ideas, complete the practical exercise, check your understanding, and use the related plays and tools to apply the lesson.</a:t>
-            </a:r>
-            <a:endParaRPr lang="en-US" sz="1250" dirty="0"/>
+            <a:pPr algn="ctr" indent="0" marL="0">
+              <a:buNone/>
+            </a:pPr>
+            <a:r>
+              <a:rPr lang="en-US" sz="1500" b="1" dirty="0">
+                <a:solidFill>
+                  <a:srgbClr val="FFFFFF"/>
+                </a:solidFill>
+                <a:latin typeface="Aptos" pitchFamily="34" charset="0"/>
+                <a:ea typeface="Aptos" pitchFamily="34" charset="-122"/>
+                <a:cs typeface="Aptos" pitchFamily="34" charset="-120"/>
+              </a:rPr>
+              <a:t>Learn</a:t>
+            </a:r>
+            <a:endParaRPr lang="en-US" sz="1500" dirty="0"/>
+          </a:p>
+        </p:txBody>
+      </p:sp>
+      <p:sp>
+        <p:nvSpPr>
+          <p:cNvPr id="15" name="Text 13"/>
+          <p:cNvSpPr/>
+          <p:nvPr/>
+        </p:nvSpPr>
+        <p:spPr>
+          <a:xfrm>
+            <a:off x="8695944" y="3941064"/>
+            <a:ext cx="201168" cy="256032"/>
+          </a:xfrm>
+          <a:prstGeom prst="rect">
+            <a:avLst/>
+          </a:prstGeom>
+          <a:noFill/>
+          <a:ln/>
+        </p:spPr>
+        <p:txBody>
+          <a:bodyPr wrap="square" lIns="0" tIns="0" rIns="0" bIns="0" rtlCol="0" anchor="ctr"/>
+          <a:lstStyle/>
+          <a:p>
+            <a:pPr algn="ctr" indent="0" marL="0">
+              <a:buNone/>
+            </a:pPr>
+            <a:r>
+              <a:rPr lang="en-US" sz="1800" b="1" dirty="0">
+                <a:solidFill>
+                  <a:srgbClr val="0068B7"/>
+                </a:solidFill>
+                <a:latin typeface="Aptos" pitchFamily="34" charset="0"/>
+                <a:ea typeface="Aptos" pitchFamily="34" charset="-122"/>
+                <a:cs typeface="Aptos" pitchFamily="34" charset="-120"/>
+              </a:rPr>
+              <a:t>â†’</a:t>
+            </a:r>
+            <a:endParaRPr lang="en-US" sz="1800" dirty="0"/>
+          </a:p>
+        </p:txBody>
+      </p:sp>
+      <p:sp>
+        <p:nvSpPr>
+          <p:cNvPr id="16" name="Shape 14"/>
+          <p:cNvSpPr/>
+          <p:nvPr/>
+        </p:nvSpPr>
+        <p:spPr>
+          <a:xfrm>
+            <a:off x="8924544" y="3730752"/>
+            <a:ext cx="1033272" cy="749808"/>
+          </a:xfrm>
+          <a:prstGeom prst="roundRect">
+            <a:avLst>
+              <a:gd name="adj" fmla="val 14634"/>
+            </a:avLst>
+          </a:prstGeom>
+          <a:solidFill>
+            <a:srgbClr val="2F8A28"/>
+          </a:solidFill>
+          <a:ln w="12700">
+            <a:solidFill>
+              <a:srgbClr val="2F8A28"/>
+            </a:solidFill>
+            <a:prstDash val="solid"/>
+          </a:ln>
+        </p:spPr>
+      </p:sp>
+      <p:sp>
+        <p:nvSpPr>
+          <p:cNvPr id="17" name="Text 15"/>
+          <p:cNvSpPr/>
+          <p:nvPr/>
+        </p:nvSpPr>
+        <p:spPr>
+          <a:xfrm>
+            <a:off x="8997696" y="3922776"/>
+            <a:ext cx="886968" cy="310896"/>
+          </a:xfrm>
+          <a:prstGeom prst="rect">
+            <a:avLst/>
+          </a:prstGeom>
+          <a:noFill/>
+          <a:ln/>
+        </p:spPr>
+        <p:txBody>
+          <a:bodyPr wrap="square" lIns="0" tIns="0" rIns="0" bIns="0" rtlCol="0" anchor="ctr">
+            <a:normAutofit/>
+          </a:bodyPr>
+          <a:lstStyle/>
+          <a:p>
+            <a:pPr algn="ctr" indent="0" marL="0">
+              <a:buNone/>
+            </a:pPr>
+            <a:r>
+              <a:rPr lang="en-US" sz="1500" b="1" dirty="0">
+                <a:solidFill>
+                  <a:srgbClr val="FFFFFF"/>
+                </a:solidFill>
+                <a:latin typeface="Aptos" pitchFamily="34" charset="0"/>
+                <a:ea typeface="Aptos" pitchFamily="34" charset="-122"/>
+                <a:cs typeface="Aptos" pitchFamily="34" charset="-120"/>
+              </a:rPr>
+              <a:t>Apply</a:t>
+            </a:r>
+            <a:endParaRPr lang="en-US" sz="1500" dirty="0"/>
+          </a:p>
+        </p:txBody>
+      </p:sp>
+      <p:sp>
+        <p:nvSpPr>
+          <p:cNvPr id="18" name="Text 16"/>
+          <p:cNvSpPr/>
+          <p:nvPr/>
+        </p:nvSpPr>
+        <p:spPr>
+          <a:xfrm>
+            <a:off x="9985248" y="3941064"/>
+            <a:ext cx="201168" cy="256032"/>
+          </a:xfrm>
+          <a:prstGeom prst="rect">
+            <a:avLst/>
+          </a:prstGeom>
+          <a:noFill/>
+          <a:ln/>
+        </p:spPr>
+        <p:txBody>
+          <a:bodyPr wrap="square" lIns="0" tIns="0" rIns="0" bIns="0" rtlCol="0" anchor="ctr"/>
+          <a:lstStyle/>
+          <a:p>
+            <a:pPr algn="ctr" indent="0" marL="0">
+              <a:buNone/>
+            </a:pPr>
+            <a:r>
+              <a:rPr lang="en-US" sz="1800" b="1" dirty="0">
+                <a:solidFill>
+                  <a:srgbClr val="0068B7"/>
+                </a:solidFill>
+                <a:latin typeface="Aptos" pitchFamily="34" charset="0"/>
+                <a:ea typeface="Aptos" pitchFamily="34" charset="-122"/>
+                <a:cs typeface="Aptos" pitchFamily="34" charset="-120"/>
+              </a:rPr>
+              <a:t>â†’</a:t>
+            </a:r>
+            <a:endParaRPr lang="en-US" sz="1800" dirty="0"/>
+          </a:p>
+        </p:txBody>
+      </p:sp>
+      <p:sp>
+        <p:nvSpPr>
+          <p:cNvPr id="19" name="Shape 17"/>
+          <p:cNvSpPr/>
+          <p:nvPr/>
+        </p:nvSpPr>
+        <p:spPr>
+          <a:xfrm>
+            <a:off x="10213848" y="3730752"/>
+            <a:ext cx="1033272" cy="749808"/>
+          </a:xfrm>
+          <a:prstGeom prst="roundRect">
+            <a:avLst>
+              <a:gd name="adj" fmla="val 14634"/>
+            </a:avLst>
+          </a:prstGeom>
+          <a:solidFill>
+            <a:srgbClr val="6A4CA3"/>
+          </a:solidFill>
+          <a:ln w="12700">
+            <a:solidFill>
+              <a:srgbClr val="6A4CA3"/>
+            </a:solidFill>
+            <a:prstDash val="solid"/>
+          </a:ln>
+        </p:spPr>
+      </p:sp>
+      <p:sp>
+        <p:nvSpPr>
+          <p:cNvPr id="20" name="Text 18"/>
+          <p:cNvSpPr/>
+          <p:nvPr/>
+        </p:nvSpPr>
+        <p:spPr>
+          <a:xfrm>
+            <a:off x="10287000" y="3922776"/>
+            <a:ext cx="886968" cy="310896"/>
+          </a:xfrm>
+          <a:prstGeom prst="rect">
+            <a:avLst/>
+          </a:prstGeom>
+          <a:noFill/>
+          <a:ln/>
+        </p:spPr>
+        <p:txBody>
+          <a:bodyPr wrap="square" lIns="0" tIns="0" rIns="0" bIns="0" rtlCol="0" anchor="ctr">
+            <a:normAutofit/>
+          </a:bodyPr>
+          <a:lstStyle/>
+          <a:p>
+            <a:pPr algn="ctr" indent="0" marL="0">
+              <a:buNone/>
+            </a:pPr>
+            <a:r>
+              <a:rPr lang="en-US" sz="1500" b="1" dirty="0">
+                <a:solidFill>
+                  <a:srgbClr val="FFFFFF"/>
+                </a:solidFill>
+                <a:latin typeface="Aptos" pitchFamily="34" charset="0"/>
+                <a:ea typeface="Aptos" pitchFamily="34" charset="-122"/>
+                <a:cs typeface="Aptos" pitchFamily="34" charset="-120"/>
+              </a:rPr>
+              <a:t>Document</a:t>
+            </a:r>
+            <a:endParaRPr lang="en-US" sz="1500" dirty="0"/>
           </a:p>
         </p:txBody>
       </p:sp>
@@ -9358,7 +9931,7 @@
                 <a:ea typeface="Aptos" pitchFamily="34" charset="-122"/>
                 <a:cs typeface="Aptos" pitchFamily="34" charset="-120"/>
               </a:rPr>
-              <a:t>© Paula Soper</a:t>
+              <a:t>Â© Paula Soper</a:t>
             </a:r>
             <a:endParaRPr lang="en-US" sz="800" dirty="0"/>
           </a:p>
@@ -9366,7 +9939,46 @@
       </p:sp>
       <p:sp>
         <p:nvSpPr>
-          <p:cNvPr id="7" name="Shape 5"/>
+          <p:cNvPr id="7" name="Text 5"/>
+          <p:cNvSpPr/>
+          <p:nvPr/>
+        </p:nvSpPr>
+        <p:spPr>
+          <a:xfrm>
+            <a:off x="11137392" y="6510528"/>
+            <a:ext cx="411480" cy="201168"/>
+          </a:xfrm>
+          <a:prstGeom prst="rect">
+            <a:avLst/>
+          </a:prstGeom>
+          <a:noFill/>
+          <a:ln/>
+        </p:spPr>
+        <p:txBody>
+          <a:bodyPr wrap="square" lIns="0" tIns="0" rIns="0" bIns="0" rtlCol="0" anchor="ctr"/>
+          <a:lstStyle/>
+          <a:p>
+            <a:pPr algn="r" indent="0" marL="0">
+              <a:buNone/>
+            </a:pPr>
+            <a:r>
+              <a:rPr lang="en-US" sz="900" dirty="0">
+                <a:solidFill>
+                  <a:srgbClr val="5F7181"/>
+                </a:solidFill>
+                <a:latin typeface="Aptos" pitchFamily="34" charset="0"/>
+                <a:ea typeface="Aptos" pitchFamily="34" charset="-122"/>
+                <a:cs typeface="Aptos" pitchFamily="34" charset="-120"/>
+              </a:rPr>
+              <a:t>20</a:t>
+            </a:r>
+            <a:endParaRPr lang="en-US" sz="900" dirty="0"/>
+          </a:p>
+        </p:txBody>
+      </p:sp>
+      <p:sp>
+        <p:nvSpPr>
+          <p:cNvPr id="8" name="Shape 6"/>
           <p:cNvSpPr/>
           <p:nvPr/>
         </p:nvSpPr>
@@ -9391,7 +10003,7 @@
       </p:sp>
       <p:sp>
         <p:nvSpPr>
-          <p:cNvPr id="8" name="Text 6"/>
+          <p:cNvPr id="9" name="Text 7"/>
           <p:cNvSpPr/>
           <p:nvPr/>
         </p:nvSpPr>
@@ -9430,14 +10042,14 @@
       </p:sp>
       <p:sp>
         <p:nvSpPr>
-          <p:cNvPr id="9" name="Text 7"/>
+          <p:cNvPr id="10" name="Text 8"/>
           <p:cNvSpPr/>
           <p:nvPr/>
         </p:nvSpPr>
         <p:spPr>
           <a:xfrm>
             <a:off x="640080" y="621792"/>
-            <a:ext cx="10881360" cy="566928"/>
+            <a:ext cx="10881360" cy="713232"/>
           </a:xfrm>
           <a:prstGeom prst="rect">
             <a:avLst/>
@@ -9455,7 +10067,7 @@
               <a:buNone/>
             </a:pPr>
             <a:r>
-              <a:rPr lang="en-US" sz="2700" b="1" dirty="0">
+              <a:rPr lang="en-US" sz="3400" b="1" dirty="0">
                 <a:solidFill>
                   <a:srgbClr val="003A63"/>
                 </a:solidFill>
@@ -9465,20 +10077,20 @@
               </a:rPr>
               <a:t>Expected Assignment</a:t>
             </a:r>
-            <a:endParaRPr lang="en-US" sz="2700" dirty="0"/>
-          </a:p>
-        </p:txBody>
-      </p:sp>
-      <p:sp>
-        <p:nvSpPr>
-          <p:cNvPr id="10" name="Text 8"/>
-          <p:cNvSpPr/>
-          <p:nvPr/>
-        </p:nvSpPr>
-        <p:spPr>
-          <a:xfrm>
-            <a:off x="868680" y="1417320"/>
-            <a:ext cx="6675120" cy="4434840"/>
+            <a:endParaRPr lang="en-US" sz="3400" dirty="0"/>
+          </a:p>
+        </p:txBody>
+      </p:sp>
+      <p:sp>
+        <p:nvSpPr>
+          <p:cNvPr id="11" name="Text 9"/>
+          <p:cNvSpPr/>
+          <p:nvPr/>
+        </p:nvSpPr>
+        <p:spPr>
+          <a:xfrm>
+            <a:off x="868680" y="1508760"/>
+            <a:ext cx="6537960" cy="4160520"/>
           </a:xfrm>
           <a:prstGeom prst="rect">
             <a:avLst/>
@@ -9493,7 +10105,7 @@
           <a:lstStyle/>
           <a:p>
             <a:r>
-              <a:rPr lang="en-US" sz="1700" dirty="0">
+              <a:rPr lang="en-US" sz="2100" dirty="0">
                 <a:solidFill>
                   <a:srgbClr val="17364A"/>
                 </a:solidFill>
@@ -9503,11 +10115,11 @@
               </a:rPr>
               <a:t>RAG readiness checklist</a:t>
             </a:r>
-            <a:endParaRPr lang="en-US" sz="1700" dirty="0"/>
-          </a:p>
-          <a:p>
-            <a:r>
-              <a:rPr lang="en-US" sz="1700" dirty="0">
+            <a:endParaRPr lang="en-US" sz="2100" dirty="0"/>
+          </a:p>
+          <a:p>
+            <a:r>
+              <a:rPr lang="en-US" sz="2100" dirty="0">
                 <a:solidFill>
                   <a:srgbClr val="17364A"/>
                 </a:solidFill>
@@ -9517,11 +10129,11 @@
               </a:rPr>
               <a:t>Content inventory and ownership table</a:t>
             </a:r>
-            <a:endParaRPr lang="en-US" sz="1700" dirty="0"/>
-          </a:p>
-          <a:p>
-            <a:r>
-              <a:rPr lang="en-US" sz="1700" dirty="0">
+            <a:endParaRPr lang="en-US" sz="2100" dirty="0"/>
+          </a:p>
+          <a:p>
+            <a:r>
+              <a:rPr lang="en-US" sz="2100" dirty="0">
                 <a:solidFill>
                   <a:srgbClr val="17364A"/>
                 </a:solidFill>
@@ -9531,27 +10143,13 @@
               </a:rPr>
               <a:t>Retrieval test question set</a:t>
             </a:r>
-            <a:endParaRPr lang="en-US" sz="1700" dirty="0"/>
-          </a:p>
-          <a:p>
-            <a:r>
-              <a:rPr lang="en-US" sz="1700" dirty="0">
-                <a:solidFill>
-                  <a:srgbClr val="17364A"/>
-                </a:solidFill>
-                <a:latin typeface="Aptos" pitchFamily="34" charset="0"/>
-                <a:ea typeface="Aptos" pitchFamily="34" charset="-122"/>
-                <a:cs typeface="Aptos" pitchFamily="34" charset="-120"/>
-              </a:rPr>
-              <a:t>Citation and source verification protocol</a:t>
-            </a:r>
-            <a:endParaRPr lang="en-US" sz="1700" dirty="0"/>
-          </a:p>
-        </p:txBody>
-      </p:sp>
-      <p:sp>
-        <p:nvSpPr>
-          <p:cNvPr id="11" name="Shape 9"/>
+            <a:endParaRPr lang="en-US" sz="2100" dirty="0"/>
+          </a:p>
+        </p:txBody>
+      </p:sp>
+      <p:sp>
+        <p:nvSpPr>
+          <p:cNvPr id="12" name="Shape 10"/>
           <p:cNvSpPr/>
           <p:nvPr/>
         </p:nvSpPr>
@@ -9578,14 +10176,14 @@
       </p:sp>
       <p:sp>
         <p:nvSpPr>
-          <p:cNvPr id="12" name="Text 10"/>
+          <p:cNvPr id="13" name="Text 11"/>
           <p:cNvSpPr/>
           <p:nvPr/>
         </p:nvSpPr>
         <p:spPr>
           <a:xfrm>
             <a:off x="8074152" y="1563624"/>
-            <a:ext cx="2825496" cy="201168"/>
+            <a:ext cx="2825496" cy="256032"/>
           </a:xfrm>
           <a:prstGeom prst="rect">
             <a:avLst/>
@@ -9601,7 +10199,7 @@
               <a:buNone/>
             </a:pPr>
             <a:r>
-              <a:rPr lang="en-US" sz="950" b="1" dirty="0">
+              <a:rPr lang="en-US" sz="1300" b="1" dirty="0">
                 <a:solidFill>
                   <a:srgbClr val="0068B7"/>
                 </a:solidFill>
@@ -9611,20 +10209,20 @@
               </a:rPr>
               <a:t>Key idea</a:t>
             </a:r>
-            <a:endParaRPr lang="en-US" sz="950" dirty="0"/>
-          </a:p>
-        </p:txBody>
-      </p:sp>
-      <p:sp>
-        <p:nvSpPr>
-          <p:cNvPr id="13" name="Text 11"/>
-          <p:cNvSpPr/>
-          <p:nvPr/>
-        </p:nvSpPr>
-        <p:spPr>
-          <a:xfrm>
-            <a:off x="8074152" y="1856232"/>
-            <a:ext cx="2825496" cy="1261872"/>
+            <a:endParaRPr lang="en-US" sz="1300" dirty="0"/>
+          </a:p>
+        </p:txBody>
+      </p:sp>
+      <p:sp>
+        <p:nvSpPr>
+          <p:cNvPr id="14" name="Text 12"/>
+          <p:cNvSpPr/>
+          <p:nvPr/>
+        </p:nvSpPr>
+        <p:spPr>
+          <a:xfrm>
+            <a:off x="8074152" y="1920240"/>
+            <a:ext cx="2825496" cy="1188720"/>
           </a:xfrm>
           <a:prstGeom prst="rect">
             <a:avLst/>
@@ -9642,7 +10240,7 @@
               <a:buNone/>
             </a:pPr>
             <a:r>
-              <a:rPr lang="en-US" sz="1250" dirty="0">
+              <a:rPr lang="en-US" sz="1550" dirty="0">
                 <a:solidFill>
                   <a:srgbClr val="17364A"/>
                 </a:solidFill>
@@ -9652,13 +10250,13 @@
               </a:rPr>
               <a:t>RAG readiness checklist</a:t>
             </a:r>
-            <a:endParaRPr lang="en-US" sz="1250" dirty="0"/>
-          </a:p>
-        </p:txBody>
-      </p:sp>
-      <p:sp>
-        <p:nvSpPr>
-          <p:cNvPr id="14" name="Shape 12"/>
+            <a:endParaRPr lang="en-US" sz="1550" dirty="0"/>
+          </a:p>
+        </p:txBody>
+      </p:sp>
+      <p:sp>
+        <p:nvSpPr>
+          <p:cNvPr id="15" name="Shape 13"/>
           <p:cNvSpPr/>
           <p:nvPr/>
         </p:nvSpPr>
@@ -9685,14 +10283,14 @@
       </p:sp>
       <p:sp>
         <p:nvSpPr>
-          <p:cNvPr id="15" name="Text 13"/>
+          <p:cNvPr id="16" name="Text 14"/>
           <p:cNvSpPr/>
           <p:nvPr/>
         </p:nvSpPr>
         <p:spPr>
           <a:xfrm>
             <a:off x="8074152" y="3666744"/>
-            <a:ext cx="2825496" cy="201168"/>
+            <a:ext cx="2825496" cy="256032"/>
           </a:xfrm>
           <a:prstGeom prst="rect">
             <a:avLst/>
@@ -9708,7 +10306,7 @@
               <a:buNone/>
             </a:pPr>
             <a:r>
-              <a:rPr lang="en-US" sz="950" b="1" dirty="0">
+              <a:rPr lang="en-US" sz="1300" b="1" dirty="0">
                 <a:solidFill>
                   <a:srgbClr val="0068B7"/>
                 </a:solidFill>
@@ -9718,20 +10316,20 @@
               </a:rPr>
               <a:t>Use this for</a:t>
             </a:r>
-            <a:endParaRPr lang="en-US" sz="950" dirty="0"/>
-          </a:p>
-        </p:txBody>
-      </p:sp>
-      <p:sp>
-        <p:nvSpPr>
-          <p:cNvPr id="16" name="Text 14"/>
-          <p:cNvSpPr/>
-          <p:nvPr/>
-        </p:nvSpPr>
-        <p:spPr>
-          <a:xfrm>
-            <a:off x="8074152" y="3959352"/>
-            <a:ext cx="2825496" cy="1170432"/>
+            <a:endParaRPr lang="en-US" sz="1300" dirty="0"/>
+          </a:p>
+        </p:txBody>
+      </p:sp>
+      <p:sp>
+        <p:nvSpPr>
+          <p:cNvPr id="17" name="Text 15"/>
+          <p:cNvSpPr/>
+          <p:nvPr/>
+        </p:nvSpPr>
+        <p:spPr>
+          <a:xfrm>
+            <a:off x="8074152" y="4023360"/>
+            <a:ext cx="2825496" cy="1097280"/>
           </a:xfrm>
           <a:prstGeom prst="rect">
             <a:avLst/>
@@ -9749,7 +10347,7 @@
               <a:buNone/>
             </a:pPr>
             <a:r>
-              <a:rPr lang="en-US" sz="1250" dirty="0">
+              <a:rPr lang="en-US" sz="1550" dirty="0">
                 <a:solidFill>
                   <a:srgbClr val="17364A"/>
                 </a:solidFill>
@@ -9759,7 +10357,7 @@
               </a:rPr>
               <a:t>Connect the concept to public health decisions, safeguards, documentation, or implementation work.</a:t>
             </a:r>
-            <a:endParaRPr lang="en-US" sz="1250" dirty="0"/>
+            <a:endParaRPr lang="en-US" sz="1550" dirty="0"/>
           </a:p>
         </p:txBody>
       </p:sp>
@@ -9956,7 +10554,7 @@
                 <a:ea typeface="Aptos" pitchFamily="34" charset="-122"/>
                 <a:cs typeface="Aptos" pitchFamily="34" charset="-120"/>
               </a:rPr>
-              <a:t>© Paula Soper</a:t>
+              <a:t>Â© Paula Soper</a:t>
             </a:r>
             <a:endParaRPr lang="en-US" sz="800" dirty="0"/>
           </a:p>
@@ -9964,7 +10562,46 @@
       </p:sp>
       <p:sp>
         <p:nvSpPr>
-          <p:cNvPr id="7" name="Shape 5"/>
+          <p:cNvPr id="7" name="Text 5"/>
+          <p:cNvSpPr/>
+          <p:nvPr/>
+        </p:nvSpPr>
+        <p:spPr>
+          <a:xfrm>
+            <a:off x="11137392" y="6510528"/>
+            <a:ext cx="411480" cy="201168"/>
+          </a:xfrm>
+          <a:prstGeom prst="rect">
+            <a:avLst/>
+          </a:prstGeom>
+          <a:noFill/>
+          <a:ln/>
+        </p:spPr>
+        <p:txBody>
+          <a:bodyPr wrap="square" lIns="0" tIns="0" rIns="0" bIns="0" rtlCol="0" anchor="ctr"/>
+          <a:lstStyle/>
+          <a:p>
+            <a:pPr algn="r" indent="0" marL="0">
+              <a:buNone/>
+            </a:pPr>
+            <a:r>
+              <a:rPr lang="en-US" sz="900" dirty="0">
+                <a:solidFill>
+                  <a:srgbClr val="5F7181"/>
+                </a:solidFill>
+                <a:latin typeface="Aptos" pitchFamily="34" charset="0"/>
+                <a:ea typeface="Aptos" pitchFamily="34" charset="-122"/>
+                <a:cs typeface="Aptos" pitchFamily="34" charset="-120"/>
+              </a:rPr>
+              <a:t>21</a:t>
+            </a:r>
+            <a:endParaRPr lang="en-US" sz="900" dirty="0"/>
+          </a:p>
+        </p:txBody>
+      </p:sp>
+      <p:sp>
+        <p:nvSpPr>
+          <p:cNvPr id="8" name="Shape 6"/>
           <p:cNvSpPr/>
           <p:nvPr/>
         </p:nvSpPr>
@@ -9989,7 +10626,7 @@
       </p:sp>
       <p:sp>
         <p:nvSpPr>
-          <p:cNvPr id="8" name="Text 6"/>
+          <p:cNvPr id="9" name="Text 7"/>
           <p:cNvSpPr/>
           <p:nvPr/>
         </p:nvSpPr>
@@ -10028,14 +10665,14 @@
       </p:sp>
       <p:sp>
         <p:nvSpPr>
-          <p:cNvPr id="9" name="Text 7"/>
+          <p:cNvPr id="10" name="Text 8"/>
           <p:cNvSpPr/>
           <p:nvPr/>
         </p:nvSpPr>
         <p:spPr>
           <a:xfrm>
             <a:off x="640080" y="621792"/>
-            <a:ext cx="10881360" cy="566928"/>
+            <a:ext cx="10881360" cy="713232"/>
           </a:xfrm>
           <a:prstGeom prst="rect">
             <a:avLst/>
@@ -10053,7 +10690,7 @@
               <a:buNone/>
             </a:pPr>
             <a:r>
-              <a:rPr lang="en-US" sz="2700" b="1" dirty="0">
+              <a:rPr lang="en-US" sz="3400" b="1" dirty="0">
                 <a:solidFill>
                   <a:srgbClr val="003A63"/>
                 </a:solidFill>
@@ -10063,20 +10700,20 @@
               </a:rPr>
               <a:t>Knowledge Check</a:t>
             </a:r>
-            <a:endParaRPr lang="en-US" sz="2700" dirty="0"/>
-          </a:p>
-        </p:txBody>
-      </p:sp>
-      <p:sp>
-        <p:nvSpPr>
-          <p:cNvPr id="10" name="Text 8"/>
-          <p:cNvSpPr/>
-          <p:nvPr/>
-        </p:nvSpPr>
-        <p:spPr>
-          <a:xfrm>
-            <a:off x="868680" y="1417320"/>
-            <a:ext cx="6675120" cy="4434840"/>
+            <a:endParaRPr lang="en-US" sz="3400" dirty="0"/>
+          </a:p>
+        </p:txBody>
+      </p:sp>
+      <p:sp>
+        <p:nvSpPr>
+          <p:cNvPr id="11" name="Text 9"/>
+          <p:cNvSpPr/>
+          <p:nvPr/>
+        </p:nvSpPr>
+        <p:spPr>
+          <a:xfrm>
+            <a:off x="868680" y="1508760"/>
+            <a:ext cx="6537960" cy="4160520"/>
           </a:xfrm>
           <a:prstGeom prst="rect">
             <a:avLst/>
@@ -10091,7 +10728,7 @@
           <a:lstStyle/>
           <a:p>
             <a:r>
-              <a:rPr lang="en-US" sz="1700" dirty="0">
+              <a:rPr lang="en-US" sz="2100" dirty="0">
                 <a:solidFill>
                   <a:srgbClr val="17364A"/>
                 </a:solidFill>
@@ -10101,11 +10738,11 @@
               </a:rPr>
               <a:t>1. What is RAG?</a:t>
             </a:r>
-            <a:endParaRPr lang="en-US" sz="1700" dirty="0"/>
-          </a:p>
-          <a:p>
-            <a:r>
-              <a:rPr lang="en-US" sz="1700" dirty="0">
+            <a:endParaRPr lang="en-US" sz="2100" dirty="0"/>
+          </a:p>
+          <a:p>
+            <a:r>
+              <a:rPr lang="en-US" sz="2100" dirty="0">
                 <a:solidFill>
                   <a:srgbClr val="17364A"/>
                 </a:solidFill>
@@ -10115,11 +10752,11 @@
               </a:rPr>
               <a:t>2. Why does chunking matter?</a:t>
             </a:r>
-            <a:endParaRPr lang="en-US" sz="1700" dirty="0"/>
-          </a:p>
-          <a:p>
-            <a:r>
-              <a:rPr lang="en-US" sz="1700" dirty="0">
+            <a:endParaRPr lang="en-US" sz="2100" dirty="0"/>
+          </a:p>
+          <a:p>
+            <a:r>
+              <a:rPr lang="en-US" sz="2100" dirty="0">
                 <a:solidFill>
                   <a:srgbClr val="17364A"/>
                 </a:solidFill>
@@ -10129,27 +10766,13 @@
               </a:rPr>
               <a:t>3. What is a major RAG governance risk?</a:t>
             </a:r>
-            <a:endParaRPr lang="en-US" sz="1700" dirty="0"/>
-          </a:p>
-          <a:p>
-            <a:r>
-              <a:rPr lang="en-US" sz="1700" dirty="0">
-                <a:solidFill>
-                  <a:srgbClr val="17364A"/>
-                </a:solidFill>
-                <a:latin typeface="Aptos" pitchFamily="34" charset="0"/>
-                <a:ea typeface="Aptos" pitchFamily="34" charset="-122"/>
-                <a:cs typeface="Aptos" pitchFamily="34" charset="-120"/>
-              </a:rPr>
-              <a:t>4. What should a RAG system do when sources are insufficient?</a:t>
-            </a:r>
-            <a:endParaRPr lang="en-US" sz="1700" dirty="0"/>
-          </a:p>
-        </p:txBody>
-      </p:sp>
-      <p:sp>
-        <p:nvSpPr>
-          <p:cNvPr id="11" name="Shape 9"/>
+            <a:endParaRPr lang="en-US" sz="2100" dirty="0"/>
+          </a:p>
+        </p:txBody>
+      </p:sp>
+      <p:sp>
+        <p:nvSpPr>
+          <p:cNvPr id="12" name="Shape 10"/>
           <p:cNvSpPr/>
           <p:nvPr/>
         </p:nvSpPr>
@@ -10176,14 +10799,14 @@
       </p:sp>
       <p:sp>
         <p:nvSpPr>
-          <p:cNvPr id="12" name="Text 10"/>
+          <p:cNvPr id="13" name="Text 11"/>
           <p:cNvSpPr/>
           <p:nvPr/>
         </p:nvSpPr>
         <p:spPr>
           <a:xfrm>
             <a:off x="8074152" y="1563624"/>
-            <a:ext cx="2825496" cy="201168"/>
+            <a:ext cx="2825496" cy="256032"/>
           </a:xfrm>
           <a:prstGeom prst="rect">
             <a:avLst/>
@@ -10199,7 +10822,7 @@
               <a:buNone/>
             </a:pPr>
             <a:r>
-              <a:rPr lang="en-US" sz="950" b="1" dirty="0">
+              <a:rPr lang="en-US" sz="1300" b="1" dirty="0">
                 <a:solidFill>
                   <a:srgbClr val="0068B7"/>
                 </a:solidFill>
@@ -10209,20 +10832,20 @@
               </a:rPr>
               <a:t>Key idea</a:t>
             </a:r>
-            <a:endParaRPr lang="en-US" sz="950" dirty="0"/>
-          </a:p>
-        </p:txBody>
-      </p:sp>
-      <p:sp>
-        <p:nvSpPr>
-          <p:cNvPr id="13" name="Text 11"/>
-          <p:cNvSpPr/>
-          <p:nvPr/>
-        </p:nvSpPr>
-        <p:spPr>
-          <a:xfrm>
-            <a:off x="8074152" y="1856232"/>
-            <a:ext cx="2825496" cy="1261872"/>
+            <a:endParaRPr lang="en-US" sz="1300" dirty="0"/>
+          </a:p>
+        </p:txBody>
+      </p:sp>
+      <p:sp>
+        <p:nvSpPr>
+          <p:cNvPr id="14" name="Text 12"/>
+          <p:cNvSpPr/>
+          <p:nvPr/>
+        </p:nvSpPr>
+        <p:spPr>
+          <a:xfrm>
+            <a:off x="8074152" y="1920240"/>
+            <a:ext cx="2825496" cy="1188720"/>
           </a:xfrm>
           <a:prstGeom prst="rect">
             <a:avLst/>
@@ -10240,7 +10863,7 @@
               <a:buNone/>
             </a:pPr>
             <a:r>
-              <a:rPr lang="en-US" sz="1250" dirty="0">
+              <a:rPr lang="en-US" sz="1550" dirty="0">
                 <a:solidFill>
                   <a:srgbClr val="17364A"/>
                 </a:solidFill>
@@ -10250,13 +10873,13 @@
               </a:rPr>
               <a:t>1. What is RAG?</a:t>
             </a:r>
-            <a:endParaRPr lang="en-US" sz="1250" dirty="0"/>
-          </a:p>
-        </p:txBody>
-      </p:sp>
-      <p:sp>
-        <p:nvSpPr>
-          <p:cNvPr id="14" name="Shape 12"/>
+            <a:endParaRPr lang="en-US" sz="1550" dirty="0"/>
+          </a:p>
+        </p:txBody>
+      </p:sp>
+      <p:sp>
+        <p:nvSpPr>
+          <p:cNvPr id="15" name="Shape 13"/>
           <p:cNvSpPr/>
           <p:nvPr/>
         </p:nvSpPr>
@@ -10283,14 +10906,14 @@
       </p:sp>
       <p:sp>
         <p:nvSpPr>
-          <p:cNvPr id="15" name="Text 13"/>
+          <p:cNvPr id="16" name="Text 14"/>
           <p:cNvSpPr/>
           <p:nvPr/>
         </p:nvSpPr>
         <p:spPr>
           <a:xfrm>
             <a:off x="8074152" y="3666744"/>
-            <a:ext cx="2825496" cy="201168"/>
+            <a:ext cx="2825496" cy="256032"/>
           </a:xfrm>
           <a:prstGeom prst="rect">
             <a:avLst/>
@@ -10306,7 +10929,7 @@
               <a:buNone/>
             </a:pPr>
             <a:r>
-              <a:rPr lang="en-US" sz="950" b="1" dirty="0">
+              <a:rPr lang="en-US" sz="1300" b="1" dirty="0">
                 <a:solidFill>
                   <a:srgbClr val="0068B7"/>
                 </a:solidFill>
@@ -10316,20 +10939,20 @@
               </a:rPr>
               <a:t>Use this for</a:t>
             </a:r>
-            <a:endParaRPr lang="en-US" sz="950" dirty="0"/>
-          </a:p>
-        </p:txBody>
-      </p:sp>
-      <p:sp>
-        <p:nvSpPr>
-          <p:cNvPr id="16" name="Text 14"/>
-          <p:cNvSpPr/>
-          <p:nvPr/>
-        </p:nvSpPr>
-        <p:spPr>
-          <a:xfrm>
-            <a:off x="8074152" y="3959352"/>
-            <a:ext cx="2825496" cy="1170432"/>
+            <a:endParaRPr lang="en-US" sz="1300" dirty="0"/>
+          </a:p>
+        </p:txBody>
+      </p:sp>
+      <p:sp>
+        <p:nvSpPr>
+          <p:cNvPr id="17" name="Text 15"/>
+          <p:cNvSpPr/>
+          <p:nvPr/>
+        </p:nvSpPr>
+        <p:spPr>
+          <a:xfrm>
+            <a:off x="8074152" y="4023360"/>
+            <a:ext cx="2825496" cy="1097280"/>
           </a:xfrm>
           <a:prstGeom prst="rect">
             <a:avLst/>
@@ -10347,7 +10970,7 @@
               <a:buNone/>
             </a:pPr>
             <a:r>
-              <a:rPr lang="en-US" sz="1250" dirty="0">
+              <a:rPr lang="en-US" sz="1550" dirty="0">
                 <a:solidFill>
                   <a:srgbClr val="17364A"/>
                 </a:solidFill>
@@ -10357,7 +10980,7 @@
               </a:rPr>
               <a:t>Connect the concept to public health decisions, safeguards, documentation, or implementation work.</a:t>
             </a:r>
-            <a:endParaRPr lang="en-US" sz="1250" dirty="0"/>
+            <a:endParaRPr lang="en-US" sz="1550" dirty="0"/>
           </a:p>
         </p:txBody>
       </p:sp>
@@ -10554,7 +11177,7 @@
                 <a:ea typeface="Aptos" pitchFamily="34" charset="-122"/>
                 <a:cs typeface="Aptos" pitchFamily="34" charset="-120"/>
               </a:rPr>
-              <a:t>© Paula Soper</a:t>
+              <a:t>Â© Paula Soper</a:t>
             </a:r>
             <a:endParaRPr lang="en-US" sz="800" dirty="0"/>
           </a:p>
@@ -10562,7 +11185,46 @@
       </p:sp>
       <p:sp>
         <p:nvSpPr>
-          <p:cNvPr id="7" name="Shape 5"/>
+          <p:cNvPr id="7" name="Text 5"/>
+          <p:cNvSpPr/>
+          <p:nvPr/>
+        </p:nvSpPr>
+        <p:spPr>
+          <a:xfrm>
+            <a:off x="11137392" y="6510528"/>
+            <a:ext cx="411480" cy="201168"/>
+          </a:xfrm>
+          <a:prstGeom prst="rect">
+            <a:avLst/>
+          </a:prstGeom>
+          <a:noFill/>
+          <a:ln/>
+        </p:spPr>
+        <p:txBody>
+          <a:bodyPr wrap="square" lIns="0" tIns="0" rIns="0" bIns="0" rtlCol="0" anchor="ctr"/>
+          <a:lstStyle/>
+          <a:p>
+            <a:pPr algn="r" indent="0" marL="0">
+              <a:buNone/>
+            </a:pPr>
+            <a:r>
+              <a:rPr lang="en-US" sz="900" dirty="0">
+                <a:solidFill>
+                  <a:srgbClr val="5F7181"/>
+                </a:solidFill>
+                <a:latin typeface="Aptos" pitchFamily="34" charset="0"/>
+                <a:ea typeface="Aptos" pitchFamily="34" charset="-122"/>
+                <a:cs typeface="Aptos" pitchFamily="34" charset="-120"/>
+              </a:rPr>
+              <a:t>22</a:t>
+            </a:r>
+            <a:endParaRPr lang="en-US" sz="900" dirty="0"/>
+          </a:p>
+        </p:txBody>
+      </p:sp>
+      <p:sp>
+        <p:nvSpPr>
+          <p:cNvPr id="8" name="Shape 6"/>
           <p:cNvSpPr/>
           <p:nvPr/>
         </p:nvSpPr>
@@ -10587,7 +11249,7 @@
       </p:sp>
       <p:sp>
         <p:nvSpPr>
-          <p:cNvPr id="8" name="Text 6"/>
+          <p:cNvPr id="9" name="Text 7"/>
           <p:cNvSpPr/>
           <p:nvPr/>
         </p:nvSpPr>
@@ -10626,14 +11288,14 @@
       </p:sp>
       <p:sp>
         <p:nvSpPr>
-          <p:cNvPr id="9" name="Text 7"/>
+          <p:cNvPr id="10" name="Text 8"/>
           <p:cNvSpPr/>
           <p:nvPr/>
         </p:nvSpPr>
         <p:spPr>
           <a:xfrm>
             <a:off x="640080" y="621792"/>
-            <a:ext cx="10881360" cy="566928"/>
+            <a:ext cx="10881360" cy="713232"/>
           </a:xfrm>
           <a:prstGeom prst="rect">
             <a:avLst/>
@@ -10651,7 +11313,7 @@
               <a:buNone/>
             </a:pPr>
             <a:r>
-              <a:rPr lang="en-US" sz="2700" b="1" dirty="0">
+              <a:rPr lang="en-US" sz="3400" b="1" dirty="0">
                 <a:solidFill>
                   <a:srgbClr val="003A63"/>
                 </a:solidFill>
@@ -10661,20 +11323,20 @@
               </a:rPr>
               <a:t>References and Resources</a:t>
             </a:r>
-            <a:endParaRPr lang="en-US" sz="2700" dirty="0"/>
-          </a:p>
-        </p:txBody>
-      </p:sp>
-      <p:sp>
-        <p:nvSpPr>
-          <p:cNvPr id="10" name="Text 8"/>
-          <p:cNvSpPr/>
-          <p:nvPr/>
-        </p:nvSpPr>
-        <p:spPr>
-          <a:xfrm>
-            <a:off x="868680" y="1417320"/>
-            <a:ext cx="6675120" cy="4434840"/>
+            <a:endParaRPr lang="en-US" sz="3400" dirty="0"/>
+          </a:p>
+        </p:txBody>
+      </p:sp>
+      <p:sp>
+        <p:nvSpPr>
+          <p:cNvPr id="11" name="Text 9"/>
+          <p:cNvSpPr/>
+          <p:nvPr/>
+        </p:nvSpPr>
+        <p:spPr>
+          <a:xfrm>
+            <a:off x="868680" y="1508760"/>
+            <a:ext cx="6537960" cy="4160520"/>
           </a:xfrm>
           <a:prstGeom prst="rect">
             <a:avLst/>
@@ -10689,7 +11351,7 @@
           <a:lstStyle/>
           <a:p>
             <a:r>
-              <a:rPr lang="en-US" sz="1700" dirty="0">
+              <a:rPr lang="en-US" sz="2100" dirty="0">
                 <a:solidFill>
                   <a:srgbClr val="17364A"/>
                 </a:solidFill>
@@ -10699,11 +11361,11 @@
               </a:rPr>
               <a:t>NIST AI RMF Generative AI Profile:.</a:t>
             </a:r>
-            <a:endParaRPr lang="en-US" sz="1700" dirty="0"/>
-          </a:p>
-          <a:p>
-            <a:r>
-              <a:rPr lang="en-US" sz="1700" dirty="0">
+            <a:endParaRPr lang="en-US" sz="2100" dirty="0"/>
+          </a:p>
+          <a:p>
+            <a:r>
+              <a:rPr lang="en-US" sz="2100" dirty="0">
                 <a:solidFill>
                   <a:srgbClr val="17364A"/>
                 </a:solidFill>
@@ -10711,13 +11373,13 @@
                 <a:ea typeface="Aptos" pitchFamily="34" charset="-122"/>
                 <a:cs typeface="Aptos" pitchFamily="34" charset="-120"/>
               </a:rPr>
-              <a:t>OWASP Top 10 for Large Language Model Applications: https://owasp.org/www-project-top-10-for-large-language-model-applications/</a:t>
-            </a:r>
-            <a:endParaRPr lang="en-US" sz="1700" dirty="0"/>
-          </a:p>
-          <a:p>
-            <a:r>
-              <a:rPr lang="en-US" sz="1700" dirty="0">
+              <a:t>OWASP Top 10 for Large Language Model Applications:.</a:t>
+            </a:r>
+            <a:endParaRPr lang="en-US" sz="2100" dirty="0"/>
+          </a:p>
+          <a:p>
+            <a:r>
+              <a:rPr lang="en-US" sz="2100" dirty="0">
                 <a:solidFill>
                   <a:srgbClr val="17364A"/>
                 </a:solidFill>
@@ -10725,29 +11387,15 @@
                 <a:ea typeface="Aptos" pitchFamily="34" charset="-122"/>
                 <a:cs typeface="Aptos" pitchFamily="34" charset="-120"/>
               </a:rPr>
-              <a:t>NIST Artificial Intelligence Risk Management Framework: https://www.nist.gov/itl/ai-risk-management-framework</a:t>
-            </a:r>
-            <a:endParaRPr lang="en-US" sz="1700" dirty="0"/>
-          </a:p>
-          <a:p>
-            <a:r>
-              <a:rPr lang="en-US" sz="1700" dirty="0">
-                <a:solidFill>
-                  <a:srgbClr val="17364A"/>
-                </a:solidFill>
-                <a:latin typeface="Aptos" pitchFamily="34" charset="0"/>
-                <a:ea typeface="Aptos" pitchFamily="34" charset="-122"/>
-                <a:cs typeface="Aptos" pitchFamily="34" charset="-120"/>
-              </a:rPr>
-              <a:t>ONC USCDI: https://isp.healthit.gov/united-states-core-data-interoperability-uscdi</a:t>
-            </a:r>
-            <a:endParaRPr lang="en-US" sz="1700" dirty="0"/>
-          </a:p>
-        </p:txBody>
-      </p:sp>
-      <p:sp>
-        <p:nvSpPr>
-          <p:cNvPr id="11" name="Shape 9"/>
+              <a:t>NIST Artificial Intelligence Risk Management Framework:.</a:t>
+            </a:r>
+            <a:endParaRPr lang="en-US" sz="2100" dirty="0"/>
+          </a:p>
+        </p:txBody>
+      </p:sp>
+      <p:sp>
+        <p:nvSpPr>
+          <p:cNvPr id="12" name="Shape 10"/>
           <p:cNvSpPr/>
           <p:nvPr/>
         </p:nvSpPr>
@@ -10774,14 +11422,14 @@
       </p:sp>
       <p:sp>
         <p:nvSpPr>
-          <p:cNvPr id="12" name="Text 10"/>
+          <p:cNvPr id="13" name="Text 11"/>
           <p:cNvSpPr/>
           <p:nvPr/>
         </p:nvSpPr>
         <p:spPr>
           <a:xfrm>
             <a:off x="8074152" y="1563624"/>
-            <a:ext cx="2825496" cy="201168"/>
+            <a:ext cx="2825496" cy="256032"/>
           </a:xfrm>
           <a:prstGeom prst="rect">
             <a:avLst/>
@@ -10797,7 +11445,7 @@
               <a:buNone/>
             </a:pPr>
             <a:r>
-              <a:rPr lang="en-US" sz="950" b="1" dirty="0">
+              <a:rPr lang="en-US" sz="1300" b="1" dirty="0">
                 <a:solidFill>
                   <a:srgbClr val="0068B7"/>
                 </a:solidFill>
@@ -10807,20 +11455,20 @@
               </a:rPr>
               <a:t>Key idea</a:t>
             </a:r>
-            <a:endParaRPr lang="en-US" sz="950" dirty="0"/>
-          </a:p>
-        </p:txBody>
-      </p:sp>
-      <p:sp>
-        <p:nvSpPr>
-          <p:cNvPr id="13" name="Text 11"/>
-          <p:cNvSpPr/>
-          <p:nvPr/>
-        </p:nvSpPr>
-        <p:spPr>
-          <a:xfrm>
-            <a:off x="8074152" y="1856232"/>
-            <a:ext cx="2825496" cy="1261872"/>
+            <a:endParaRPr lang="en-US" sz="1300" dirty="0"/>
+          </a:p>
+        </p:txBody>
+      </p:sp>
+      <p:sp>
+        <p:nvSpPr>
+          <p:cNvPr id="14" name="Text 12"/>
+          <p:cNvSpPr/>
+          <p:nvPr/>
+        </p:nvSpPr>
+        <p:spPr>
+          <a:xfrm>
+            <a:off x="8074152" y="1920240"/>
+            <a:ext cx="2825496" cy="1188720"/>
           </a:xfrm>
           <a:prstGeom prst="rect">
             <a:avLst/>
@@ -10838,7 +11486,7 @@
               <a:buNone/>
             </a:pPr>
             <a:r>
-              <a:rPr lang="en-US" sz="1250" dirty="0">
+              <a:rPr lang="en-US" sz="1550" dirty="0">
                 <a:solidFill>
                   <a:srgbClr val="17364A"/>
                 </a:solidFill>
@@ -10848,13 +11496,13 @@
               </a:rPr>
               <a:t>NIST AI RMF Generative AI Profile:.</a:t>
             </a:r>
-            <a:endParaRPr lang="en-US" sz="1250" dirty="0"/>
-          </a:p>
-        </p:txBody>
-      </p:sp>
-      <p:sp>
-        <p:nvSpPr>
-          <p:cNvPr id="14" name="Shape 12"/>
+            <a:endParaRPr lang="en-US" sz="1550" dirty="0"/>
+          </a:p>
+        </p:txBody>
+      </p:sp>
+      <p:sp>
+        <p:nvSpPr>
+          <p:cNvPr id="15" name="Shape 13"/>
           <p:cNvSpPr/>
           <p:nvPr/>
         </p:nvSpPr>
@@ -10881,14 +11529,14 @@
       </p:sp>
       <p:sp>
         <p:nvSpPr>
-          <p:cNvPr id="15" name="Text 13"/>
+          <p:cNvPr id="16" name="Text 14"/>
           <p:cNvSpPr/>
           <p:nvPr/>
         </p:nvSpPr>
         <p:spPr>
           <a:xfrm>
             <a:off x="8074152" y="3666744"/>
-            <a:ext cx="2825496" cy="201168"/>
+            <a:ext cx="2825496" cy="256032"/>
           </a:xfrm>
           <a:prstGeom prst="rect">
             <a:avLst/>
@@ -10904,7 +11552,7 @@
               <a:buNone/>
             </a:pPr>
             <a:r>
-              <a:rPr lang="en-US" sz="950" b="1" dirty="0">
+              <a:rPr lang="en-US" sz="1300" b="1" dirty="0">
                 <a:solidFill>
                   <a:srgbClr val="0068B7"/>
                 </a:solidFill>
@@ -10914,20 +11562,20 @@
               </a:rPr>
               <a:t>Use this for</a:t>
             </a:r>
-            <a:endParaRPr lang="en-US" sz="950" dirty="0"/>
-          </a:p>
-        </p:txBody>
-      </p:sp>
-      <p:sp>
-        <p:nvSpPr>
-          <p:cNvPr id="16" name="Text 14"/>
-          <p:cNvSpPr/>
-          <p:nvPr/>
-        </p:nvSpPr>
-        <p:spPr>
-          <a:xfrm>
-            <a:off x="8074152" y="3959352"/>
-            <a:ext cx="2825496" cy="1170432"/>
+            <a:endParaRPr lang="en-US" sz="1300" dirty="0"/>
+          </a:p>
+        </p:txBody>
+      </p:sp>
+      <p:sp>
+        <p:nvSpPr>
+          <p:cNvPr id="17" name="Text 15"/>
+          <p:cNvSpPr/>
+          <p:nvPr/>
+        </p:nvSpPr>
+        <p:spPr>
+          <a:xfrm>
+            <a:off x="8074152" y="4023360"/>
+            <a:ext cx="2825496" cy="1097280"/>
           </a:xfrm>
           <a:prstGeom prst="rect">
             <a:avLst/>
@@ -10945,7 +11593,7 @@
               <a:buNone/>
             </a:pPr>
             <a:r>
-              <a:rPr lang="en-US" sz="1250" dirty="0">
+              <a:rPr lang="en-US" sz="1550" dirty="0">
                 <a:solidFill>
                   <a:srgbClr val="17364A"/>
                 </a:solidFill>
@@ -10955,7 +11603,7 @@
               </a:rPr>
               <a:t>Connect the concept to public health decisions, safeguards, documentation, or implementation work.</a:t>
             </a:r>
-            <a:endParaRPr lang="en-US" sz="1250" dirty="0"/>
+            <a:endParaRPr lang="en-US" sz="1550" dirty="0"/>
           </a:p>
         </p:txBody>
       </p:sp>
@@ -11152,7 +11800,7 @@
                 <a:ea typeface="Aptos" pitchFamily="34" charset="-122"/>
                 <a:cs typeface="Aptos" pitchFamily="34" charset="-120"/>
               </a:rPr>
-              <a:t>© Paula Soper</a:t>
+              <a:t>Â© Paula Soper</a:t>
             </a:r>
             <a:endParaRPr lang="en-US" sz="800" dirty="0"/>
           </a:p>
@@ -11166,8 +11814,47 @@
         </p:nvSpPr>
         <p:spPr>
           <a:xfrm>
+            <a:off x="11137392" y="6510528"/>
+            <a:ext cx="411480" cy="201168"/>
+          </a:xfrm>
+          <a:prstGeom prst="rect">
+            <a:avLst/>
+          </a:prstGeom>
+          <a:noFill/>
+          <a:ln/>
+        </p:spPr>
+        <p:txBody>
+          <a:bodyPr wrap="square" lIns="0" tIns="0" rIns="0" bIns="0" rtlCol="0" anchor="ctr"/>
+          <a:lstStyle/>
+          <a:p>
+            <a:pPr algn="r" indent="0" marL="0">
+              <a:buNone/>
+            </a:pPr>
+            <a:r>
+              <a:rPr lang="en-US" sz="900" dirty="0">
+                <a:solidFill>
+                  <a:srgbClr val="5F7181"/>
+                </a:solidFill>
+                <a:latin typeface="Aptos" pitchFamily="34" charset="0"/>
+                <a:ea typeface="Aptos" pitchFamily="34" charset="-122"/>
+                <a:cs typeface="Aptos" pitchFamily="34" charset="-120"/>
+              </a:rPr>
+              <a:t>3</a:t>
+            </a:r>
+            <a:endParaRPr lang="en-US" sz="900" dirty="0"/>
+          </a:p>
+        </p:txBody>
+      </p:sp>
+      <p:sp>
+        <p:nvSpPr>
+          <p:cNvPr id="8" name="Text 6"/>
+          <p:cNvSpPr/>
+          <p:nvPr/>
+        </p:nvSpPr>
+        <p:spPr>
+          <a:xfrm>
             <a:off x="640080" y="658368"/>
-            <a:ext cx="10881360" cy="566928"/>
+            <a:ext cx="10881360" cy="713232"/>
           </a:xfrm>
           <a:prstGeom prst="rect">
             <a:avLst/>
@@ -11185,7 +11872,7 @@
               <a:buNone/>
             </a:pPr>
             <a:r>
-              <a:rPr lang="en-US" sz="2700" b="1" dirty="0">
+              <a:rPr lang="en-US" sz="3400" b="1" dirty="0">
                 <a:solidFill>
                   <a:srgbClr val="003A63"/>
                 </a:solidFill>
@@ -11195,20 +11882,20 @@
               </a:rPr>
               <a:t>How this module connects to the playbook</a:t>
             </a:r>
-            <a:endParaRPr lang="en-US" sz="2700" dirty="0"/>
-          </a:p>
-        </p:txBody>
-      </p:sp>
-      <p:sp>
-        <p:nvSpPr>
-          <p:cNvPr id="8" name="Text 6"/>
-          <p:cNvSpPr/>
-          <p:nvPr/>
-        </p:nvSpPr>
-        <p:spPr>
-          <a:xfrm>
-            <a:off x="868680" y="1417320"/>
-            <a:ext cx="6903720" cy="4480560"/>
+            <a:endParaRPr lang="en-US" sz="3400" dirty="0"/>
+          </a:p>
+        </p:txBody>
+      </p:sp>
+      <p:sp>
+        <p:nvSpPr>
+          <p:cNvPr id="9" name="Text 7"/>
+          <p:cNvSpPr/>
+          <p:nvPr/>
+        </p:nvSpPr>
+        <p:spPr>
+          <a:xfrm>
+            <a:off x="868680" y="1508760"/>
+            <a:ext cx="6812280" cy="3977640"/>
           </a:xfrm>
           <a:prstGeom prst="rect">
             <a:avLst/>
@@ -11223,7 +11910,7 @@
           <a:lstStyle/>
           <a:p>
             <a:r>
-              <a:rPr lang="en-US" sz="1540" dirty="0">
+              <a:rPr lang="en-US" sz="1900" dirty="0">
                 <a:solidFill>
                   <a:srgbClr val="17364A"/>
                 </a:solidFill>
@@ -11231,13 +11918,13 @@
                 <a:ea typeface="Aptos" pitchFamily="34" charset="-122"/>
                 <a:cs typeface="Aptos" pitchFamily="34" charset="-120"/>
               </a:rPr>
-              <a:t>Play 3: Establish AI Governance - This lesson informs Play 3 by helping learners connect the lesson topic to establish ai governance.</a:t>
-            </a:r>
-            <a:endParaRPr lang="en-US" sz="1540" dirty="0"/>
-          </a:p>
-          <a:p>
-            <a:r>
-              <a:rPr lang="en-US" sz="1540" dirty="0">
+              <a:t>Play 3: Establish AI Governance - This lesson informs Play 3 by helping learners connect the lesson topic to.</a:t>
+            </a:r>
+            <a:endParaRPr lang="en-US" sz="1900" dirty="0"/>
+          </a:p>
+          <a:p>
+            <a:r>
+              <a:rPr lang="en-US" sz="1900" dirty="0">
                 <a:solidFill>
                   <a:srgbClr val="17364A"/>
                 </a:solidFill>
@@ -11245,13 +11932,13 @@
                 <a:ea typeface="Aptos" pitchFamily="34" charset="-122"/>
                 <a:cs typeface="Aptos" pitchFamily="34" charset="-120"/>
               </a:rPr>
-              <a:t>Play 12: Execute Governance and Oversight - This lesson informs Play 12 by helping learners connect the lesson topic to execute.</a:t>
-            </a:r>
-            <a:endParaRPr lang="en-US" sz="1540" dirty="0"/>
-          </a:p>
-          <a:p>
-            <a:r>
-              <a:rPr lang="en-US" sz="1540" dirty="0">
+              <a:t>Play 12: Execute Governance and Oversight - This lesson informs Play 12 by helping learners connect the.</a:t>
+            </a:r>
+            <a:endParaRPr lang="en-US" sz="1900" dirty="0"/>
+          </a:p>
+          <a:p>
+            <a:r>
+              <a:rPr lang="en-US" sz="1900" dirty="0">
                 <a:solidFill>
                   <a:srgbClr val="17364A"/>
                 </a:solidFill>
@@ -11259,13 +11946,13 @@
                 <a:ea typeface="Aptos" pitchFamily="34" charset="-122"/>
                 <a:cs typeface="Aptos" pitchFamily="34" charset="-120"/>
               </a:rPr>
-              <a:t>Play 11: Build and Deploy AI Solutions - This lesson informs Play 11 by helping learners connect the lesson topic to build and deploy.</a:t>
-            </a:r>
-            <a:endParaRPr lang="en-US" sz="1540" dirty="0"/>
-          </a:p>
-          <a:p>
-            <a:r>
-              <a:rPr lang="en-US" sz="1540" dirty="0">
+              <a:t>Play 11: Build and Deploy AI Solutions - This lesson informs Play 11 by helping learners connect the lesson.</a:t>
+            </a:r>
+            <a:endParaRPr lang="en-US" sz="1900" dirty="0"/>
+          </a:p>
+          <a:p>
+            <a:r>
+              <a:rPr lang="en-US" sz="1900" dirty="0">
                 <a:solidFill>
                   <a:srgbClr val="17364A"/>
                 </a:solidFill>
@@ -11273,15 +11960,15 @@
                 <a:ea typeface="Aptos" pitchFamily="34" charset="-122"/>
                 <a:cs typeface="Aptos" pitchFamily="34" charset="-120"/>
               </a:rPr>
-              <a:t>Play 1: Vision &amp; Guardrails - This lesson informs Play 1 by helping learners connect the lesson topic to vision &amp; guardrails work in.</a:t>
-            </a:r>
-            <a:endParaRPr lang="en-US" sz="1540" dirty="0"/>
-          </a:p>
-        </p:txBody>
-      </p:sp>
-      <p:sp>
-        <p:nvSpPr>
-          <p:cNvPr id="9" name="Shape 7"/>
+              <a:t>Play 1: Vision &amp; Guardrails - This lesson informs Play 1 by helping learners connect the lesson topic to.</a:t>
+            </a:r>
+            <a:endParaRPr lang="en-US" sz="1900" dirty="0"/>
+          </a:p>
+        </p:txBody>
+      </p:sp>
+      <p:sp>
+        <p:nvSpPr>
+          <p:cNvPr id="10" name="Shape 8"/>
           <p:cNvSpPr/>
           <p:nvPr/>
         </p:nvSpPr>
@@ -11308,14 +11995,14 @@
       </p:sp>
       <p:sp>
         <p:nvSpPr>
-          <p:cNvPr id="10" name="Text 8"/>
+          <p:cNvPr id="11" name="Text 9"/>
           <p:cNvSpPr/>
           <p:nvPr/>
         </p:nvSpPr>
         <p:spPr>
           <a:xfrm>
             <a:off x="8211312" y="1563624"/>
-            <a:ext cx="2734056" cy="201168"/>
+            <a:ext cx="2734056" cy="256032"/>
           </a:xfrm>
           <a:prstGeom prst="rect">
             <a:avLst/>
@@ -11331,7 +12018,7 @@
               <a:buNone/>
             </a:pPr>
             <a:r>
-              <a:rPr lang="en-US" sz="950" b="1" dirty="0">
+              <a:rPr lang="en-US" sz="1300" b="1" dirty="0">
                 <a:solidFill>
                   <a:srgbClr val="0068B7"/>
                 </a:solidFill>
@@ -11341,20 +12028,20 @@
               </a:rPr>
               <a:t>Apply the lesson</a:t>
             </a:r>
-            <a:endParaRPr lang="en-US" sz="950" dirty="0"/>
-          </a:p>
-        </p:txBody>
-      </p:sp>
-      <p:sp>
-        <p:nvSpPr>
-          <p:cNvPr id="11" name="Text 9"/>
-          <p:cNvSpPr/>
-          <p:nvPr/>
-        </p:nvSpPr>
-        <p:spPr>
-          <a:xfrm>
-            <a:off x="8211312" y="1856232"/>
-            <a:ext cx="2734056" cy="1536192"/>
+            <a:endParaRPr lang="en-US" sz="1300" dirty="0"/>
+          </a:p>
+        </p:txBody>
+      </p:sp>
+      <p:sp>
+        <p:nvSpPr>
+          <p:cNvPr id="12" name="Text 10"/>
+          <p:cNvSpPr/>
+          <p:nvPr/>
+        </p:nvSpPr>
+        <p:spPr>
+          <a:xfrm>
+            <a:off x="8211312" y="1920240"/>
+            <a:ext cx="2734056" cy="1463040"/>
           </a:xfrm>
           <a:prstGeom prst="rect">
             <a:avLst/>
@@ -11372,7 +12059,7 @@
               <a:buNone/>
             </a:pPr>
             <a:r>
-              <a:rPr lang="en-US" sz="1250" dirty="0">
+              <a:rPr lang="en-US" sz="1550" dirty="0">
                 <a:solidFill>
                   <a:srgbClr val="17364A"/>
                 </a:solidFill>
@@ -11382,32 +12069,32 @@
               </a:rPr>
               <a:t>Use the related plays to identify decisions, participants, timing, approvals, and documentation needed for responsible implementation.</a:t>
             </a:r>
-            <a:endParaRPr lang="en-US" sz="1250" dirty="0"/>
-          </a:p>
-        </p:txBody>
-      </p:sp>
-      <p:sp>
-        <p:nvSpPr>
-          <p:cNvPr id="12" name="Shape 10"/>
-          <p:cNvSpPr/>
-          <p:nvPr/>
-        </p:nvSpPr>
-        <p:spPr>
-          <a:xfrm>
-            <a:off x="8046720" y="3794760"/>
-            <a:ext cx="3063240" cy="1508760"/>
+            <a:endParaRPr lang="en-US" sz="1550" dirty="0"/>
+          </a:p>
+        </p:txBody>
+      </p:sp>
+      <p:sp>
+        <p:nvSpPr>
+          <p:cNvPr id="13" name="Shape 11"/>
+          <p:cNvSpPr/>
+          <p:nvPr/>
+        </p:nvSpPr>
+        <p:spPr>
+          <a:xfrm>
+            <a:off x="7818120" y="3977640"/>
+            <a:ext cx="972312" cy="749808"/>
           </a:xfrm>
           <a:prstGeom prst="roundRect">
             <a:avLst>
-              <a:gd name="adj" fmla="val 7273"/>
+              <a:gd name="adj" fmla="val 14634"/>
             </a:avLst>
           </a:prstGeom>
           <a:solidFill>
-            <a:srgbClr val="FFF4D9"/>
+            <a:srgbClr val="0068B7"/>
           </a:solidFill>
           <a:ln w="12700">
             <a:solidFill>
-              <a:srgbClr val="B9D7E6"/>
+              <a:srgbClr val="0068B7"/>
             </a:solidFill>
             <a:prstDash val="solid"/>
           </a:ln>
@@ -11415,81 +12102,256 @@
       </p:sp>
       <p:sp>
         <p:nvSpPr>
-          <p:cNvPr id="13" name="Text 11"/>
-          <p:cNvSpPr/>
-          <p:nvPr/>
-        </p:nvSpPr>
-        <p:spPr>
-          <a:xfrm>
-            <a:off x="8211312" y="3941064"/>
-            <a:ext cx="2734056" cy="201168"/>
-          </a:xfrm>
-          <a:prstGeom prst="rect">
-            <a:avLst/>
-          </a:prstGeom>
-          <a:noFill/>
-          <a:ln/>
-        </p:spPr>
-        <p:txBody>
-          <a:bodyPr wrap="square" lIns="0" tIns="0" rIns="0" bIns="0" rtlCol="0" anchor="ctr"/>
-          <a:lstStyle/>
-          <a:p>
-            <a:pPr indent="0" marL="0">
-              <a:buNone/>
-            </a:pPr>
-            <a:r>
-              <a:rPr lang="en-US" sz="950" b="1" dirty="0">
-                <a:solidFill>
-                  <a:srgbClr val="0068B7"/>
-                </a:solidFill>
-                <a:latin typeface="Aptos" pitchFamily="34" charset="0"/>
-                <a:ea typeface="Aptos" pitchFamily="34" charset="-122"/>
-                <a:cs typeface="Aptos" pitchFamily="34" charset="-120"/>
-              </a:rPr>
-              <a:t>Keep in mind</a:t>
-            </a:r>
-            <a:endParaRPr lang="en-US" sz="950" dirty="0"/>
-          </a:p>
-        </p:txBody>
-      </p:sp>
-      <p:sp>
-        <p:nvSpPr>
           <p:cNvPr id="14" name="Text 12"/>
           <p:cNvSpPr/>
           <p:nvPr/>
         </p:nvSpPr>
         <p:spPr>
           <a:xfrm>
-            <a:off x="8211312" y="4233672"/>
-            <a:ext cx="2734056" cy="941832"/>
-          </a:xfrm>
-          <a:prstGeom prst="rect">
-            <a:avLst/>
-          </a:prstGeom>
-          <a:noFill/>
-          <a:ln/>
-        </p:spPr>
-        <p:txBody>
-          <a:bodyPr wrap="square" lIns="0" tIns="0" rIns="0" bIns="0" rtlCol="0" anchor="t">
+            <a:off x="7891272" y="4169664"/>
+            <a:ext cx="826008" cy="310896"/>
+          </a:xfrm>
+          <a:prstGeom prst="rect">
+            <a:avLst/>
+          </a:prstGeom>
+          <a:noFill/>
+          <a:ln/>
+        </p:spPr>
+        <p:txBody>
+          <a:bodyPr wrap="square" lIns="0" tIns="0" rIns="0" bIns="0" rtlCol="0" anchor="ctr">
             <a:normAutofit/>
           </a:bodyPr>
           <a:lstStyle/>
           <a:p>
-            <a:pPr indent="0" marL="0">
-              <a:buNone/>
-            </a:pPr>
-            <a:r>
-              <a:rPr lang="en-US" sz="1250" dirty="0">
-                <a:solidFill>
-                  <a:srgbClr val="17364A"/>
-                </a:solidFill>
-                <a:latin typeface="Aptos" pitchFamily="34" charset="0"/>
-                <a:ea typeface="Aptos" pitchFamily="34" charset="-122"/>
-                <a:cs typeface="Aptos" pitchFamily="34" charset="-120"/>
-              </a:rPr>
-              <a:t>The playbook connection helps turn training into agency work, not just individual knowledge.</a:t>
-            </a:r>
-            <a:endParaRPr lang="en-US" sz="1250" dirty="0"/>
+            <a:pPr algn="ctr" indent="0" marL="0">
+              <a:buNone/>
+            </a:pPr>
+            <a:r>
+              <a:rPr lang="en-US" sz="1500" b="1" dirty="0">
+                <a:solidFill>
+                  <a:srgbClr val="FFFFFF"/>
+                </a:solidFill>
+                <a:latin typeface="Aptos" pitchFamily="34" charset="0"/>
+                <a:ea typeface="Aptos" pitchFamily="34" charset="-122"/>
+                <a:cs typeface="Aptos" pitchFamily="34" charset="-120"/>
+              </a:rPr>
+              <a:t>Lesson</a:t>
+            </a:r>
+            <a:endParaRPr lang="en-US" sz="1500" dirty="0"/>
+          </a:p>
+        </p:txBody>
+      </p:sp>
+      <p:sp>
+        <p:nvSpPr>
+          <p:cNvPr id="15" name="Text 13"/>
+          <p:cNvSpPr/>
+          <p:nvPr/>
+        </p:nvSpPr>
+        <p:spPr>
+          <a:xfrm>
+            <a:off x="8817864" y="4187952"/>
+            <a:ext cx="201168" cy="256032"/>
+          </a:xfrm>
+          <a:prstGeom prst="rect">
+            <a:avLst/>
+          </a:prstGeom>
+          <a:noFill/>
+          <a:ln/>
+        </p:spPr>
+        <p:txBody>
+          <a:bodyPr wrap="square" lIns="0" tIns="0" rIns="0" bIns="0" rtlCol="0" anchor="ctr"/>
+          <a:lstStyle/>
+          <a:p>
+            <a:pPr algn="ctr" indent="0" marL="0">
+              <a:buNone/>
+            </a:pPr>
+            <a:r>
+              <a:rPr lang="en-US" sz="1800" b="1" dirty="0">
+                <a:solidFill>
+                  <a:srgbClr val="0068B7"/>
+                </a:solidFill>
+                <a:latin typeface="Aptos" pitchFamily="34" charset="0"/>
+                <a:ea typeface="Aptos" pitchFamily="34" charset="-122"/>
+                <a:cs typeface="Aptos" pitchFamily="34" charset="-120"/>
+              </a:rPr>
+              <a:t>â†’</a:t>
+            </a:r>
+            <a:endParaRPr lang="en-US" sz="1800" dirty="0"/>
+          </a:p>
+        </p:txBody>
+      </p:sp>
+      <p:sp>
+        <p:nvSpPr>
+          <p:cNvPr id="16" name="Shape 14"/>
+          <p:cNvSpPr/>
+          <p:nvPr/>
+        </p:nvSpPr>
+        <p:spPr>
+          <a:xfrm>
+            <a:off x="9046464" y="3977640"/>
+            <a:ext cx="972312" cy="749808"/>
+          </a:xfrm>
+          <a:prstGeom prst="roundRect">
+            <a:avLst>
+              <a:gd name="adj" fmla="val 14634"/>
+            </a:avLst>
+          </a:prstGeom>
+          <a:solidFill>
+            <a:srgbClr val="2F8A28"/>
+          </a:solidFill>
+          <a:ln w="12700">
+            <a:solidFill>
+              <a:srgbClr val="2F8A28"/>
+            </a:solidFill>
+            <a:prstDash val="solid"/>
+          </a:ln>
+        </p:spPr>
+      </p:sp>
+      <p:sp>
+        <p:nvSpPr>
+          <p:cNvPr id="17" name="Text 15"/>
+          <p:cNvSpPr/>
+          <p:nvPr/>
+        </p:nvSpPr>
+        <p:spPr>
+          <a:xfrm>
+            <a:off x="9119616" y="4169664"/>
+            <a:ext cx="826008" cy="310896"/>
+          </a:xfrm>
+          <a:prstGeom prst="rect">
+            <a:avLst/>
+          </a:prstGeom>
+          <a:noFill/>
+          <a:ln/>
+        </p:spPr>
+        <p:txBody>
+          <a:bodyPr wrap="square" lIns="0" tIns="0" rIns="0" bIns="0" rtlCol="0" anchor="ctr">
+            <a:normAutofit/>
+          </a:bodyPr>
+          <a:lstStyle/>
+          <a:p>
+            <a:pPr algn="ctr" indent="0" marL="0">
+              <a:buNone/>
+            </a:pPr>
+            <a:r>
+              <a:rPr lang="en-US" sz="1500" b="1" dirty="0">
+                <a:solidFill>
+                  <a:srgbClr val="FFFFFF"/>
+                </a:solidFill>
+                <a:latin typeface="Aptos" pitchFamily="34" charset="0"/>
+                <a:ea typeface="Aptos" pitchFamily="34" charset="-122"/>
+                <a:cs typeface="Aptos" pitchFamily="34" charset="-120"/>
+              </a:rPr>
+              <a:t>Plays</a:t>
+            </a:r>
+            <a:endParaRPr lang="en-US" sz="1500" dirty="0"/>
+          </a:p>
+        </p:txBody>
+      </p:sp>
+      <p:sp>
+        <p:nvSpPr>
+          <p:cNvPr id="18" name="Text 16"/>
+          <p:cNvSpPr/>
+          <p:nvPr/>
+        </p:nvSpPr>
+        <p:spPr>
+          <a:xfrm>
+            <a:off x="10046208" y="4187952"/>
+            <a:ext cx="201168" cy="256032"/>
+          </a:xfrm>
+          <a:prstGeom prst="rect">
+            <a:avLst/>
+          </a:prstGeom>
+          <a:noFill/>
+          <a:ln/>
+        </p:spPr>
+        <p:txBody>
+          <a:bodyPr wrap="square" lIns="0" tIns="0" rIns="0" bIns="0" rtlCol="0" anchor="ctr"/>
+          <a:lstStyle/>
+          <a:p>
+            <a:pPr algn="ctr" indent="0" marL="0">
+              <a:buNone/>
+            </a:pPr>
+            <a:r>
+              <a:rPr lang="en-US" sz="1800" b="1" dirty="0">
+                <a:solidFill>
+                  <a:srgbClr val="0068B7"/>
+                </a:solidFill>
+                <a:latin typeface="Aptos" pitchFamily="34" charset="0"/>
+                <a:ea typeface="Aptos" pitchFamily="34" charset="-122"/>
+                <a:cs typeface="Aptos" pitchFamily="34" charset="-120"/>
+              </a:rPr>
+              <a:t>â†’</a:t>
+            </a:r>
+            <a:endParaRPr lang="en-US" sz="1800" dirty="0"/>
+          </a:p>
+        </p:txBody>
+      </p:sp>
+      <p:sp>
+        <p:nvSpPr>
+          <p:cNvPr id="19" name="Shape 17"/>
+          <p:cNvSpPr/>
+          <p:nvPr/>
+        </p:nvSpPr>
+        <p:spPr>
+          <a:xfrm>
+            <a:off x="10274808" y="3977640"/>
+            <a:ext cx="972312" cy="749808"/>
+          </a:xfrm>
+          <a:prstGeom prst="roundRect">
+            <a:avLst>
+              <a:gd name="adj" fmla="val 14634"/>
+            </a:avLst>
+          </a:prstGeom>
+          <a:solidFill>
+            <a:srgbClr val="6A4CA3"/>
+          </a:solidFill>
+          <a:ln w="12700">
+            <a:solidFill>
+              <a:srgbClr val="6A4CA3"/>
+            </a:solidFill>
+            <a:prstDash val="solid"/>
+          </a:ln>
+        </p:spPr>
+      </p:sp>
+      <p:sp>
+        <p:nvSpPr>
+          <p:cNvPr id="20" name="Text 18"/>
+          <p:cNvSpPr/>
+          <p:nvPr/>
+        </p:nvSpPr>
+        <p:spPr>
+          <a:xfrm>
+            <a:off x="10347960" y="4169664"/>
+            <a:ext cx="826008" cy="310896"/>
+          </a:xfrm>
+          <a:prstGeom prst="rect">
+            <a:avLst/>
+          </a:prstGeom>
+          <a:noFill/>
+          <a:ln/>
+        </p:spPr>
+        <p:txBody>
+          <a:bodyPr wrap="square" lIns="0" tIns="0" rIns="0" bIns="0" rtlCol="0" anchor="ctr">
+            <a:normAutofit/>
+          </a:bodyPr>
+          <a:lstStyle/>
+          <a:p>
+            <a:pPr algn="ctr" indent="0" marL="0">
+              <a:buNone/>
+            </a:pPr>
+            <a:r>
+              <a:rPr lang="en-US" sz="1500" b="1" dirty="0">
+                <a:solidFill>
+                  <a:srgbClr val="FFFFFF"/>
+                </a:solidFill>
+                <a:latin typeface="Aptos" pitchFamily="34" charset="0"/>
+                <a:ea typeface="Aptos" pitchFamily="34" charset="-122"/>
+                <a:cs typeface="Aptos" pitchFamily="34" charset="-120"/>
+              </a:rPr>
+              <a:t>Action</a:t>
+            </a:r>
+            <a:endParaRPr lang="en-US" sz="1500" dirty="0"/>
           </a:p>
         </p:txBody>
       </p:sp>
@@ -11686,7 +12548,7 @@
                 <a:ea typeface="Aptos" pitchFamily="34" charset="-122"/>
                 <a:cs typeface="Aptos" pitchFamily="34" charset="-120"/>
               </a:rPr>
-              <a:t>© Paula Soper</a:t>
+              <a:t>Â© Paula Soper</a:t>
             </a:r>
             <a:endParaRPr lang="en-US" sz="800" dirty="0"/>
           </a:p>
@@ -11700,8 +12562,47 @@
         </p:nvSpPr>
         <p:spPr>
           <a:xfrm>
+            <a:off x="11137392" y="6510528"/>
+            <a:ext cx="411480" cy="201168"/>
+          </a:xfrm>
+          <a:prstGeom prst="rect">
+            <a:avLst/>
+          </a:prstGeom>
+          <a:noFill/>
+          <a:ln/>
+        </p:spPr>
+        <p:txBody>
+          <a:bodyPr wrap="square" lIns="0" tIns="0" rIns="0" bIns="0" rtlCol="0" anchor="ctr"/>
+          <a:lstStyle/>
+          <a:p>
+            <a:pPr algn="r" indent="0" marL="0">
+              <a:buNone/>
+            </a:pPr>
+            <a:r>
+              <a:rPr lang="en-US" sz="900" dirty="0">
+                <a:solidFill>
+                  <a:srgbClr val="5F7181"/>
+                </a:solidFill>
+                <a:latin typeface="Aptos" pitchFamily="34" charset="0"/>
+                <a:ea typeface="Aptos" pitchFamily="34" charset="-122"/>
+                <a:cs typeface="Aptos" pitchFamily="34" charset="-120"/>
+              </a:rPr>
+              <a:t>4</a:t>
+            </a:r>
+            <a:endParaRPr lang="en-US" sz="900" dirty="0"/>
+          </a:p>
+        </p:txBody>
+      </p:sp>
+      <p:sp>
+        <p:nvSpPr>
+          <p:cNvPr id="8" name="Text 6"/>
+          <p:cNvSpPr/>
+          <p:nvPr/>
+        </p:nvSpPr>
+        <p:spPr>
+          <a:xfrm>
             <a:off x="640080" y="658368"/>
-            <a:ext cx="10881360" cy="566928"/>
+            <a:ext cx="10881360" cy="713232"/>
           </a:xfrm>
           <a:prstGeom prst="rect">
             <a:avLst/>
@@ -11719,7 +12620,7 @@
               <a:buNone/>
             </a:pPr>
             <a:r>
-              <a:rPr lang="en-US" sz="2700" b="1" dirty="0">
+              <a:rPr lang="en-US" sz="3400" b="1" dirty="0">
                 <a:solidFill>
                   <a:srgbClr val="003A63"/>
                 </a:solidFill>
@@ -11729,20 +12630,20 @@
               </a:rPr>
               <a:t>Related toolkit resources</a:t>
             </a:r>
-            <a:endParaRPr lang="en-US" sz="2700" dirty="0"/>
-          </a:p>
-        </p:txBody>
-      </p:sp>
-      <p:sp>
-        <p:nvSpPr>
-          <p:cNvPr id="8" name="Text 6"/>
-          <p:cNvSpPr/>
-          <p:nvPr/>
-        </p:nvSpPr>
-        <p:spPr>
-          <a:xfrm>
-            <a:off x="868680" y="1417320"/>
-            <a:ext cx="6903720" cy="4480560"/>
+            <a:endParaRPr lang="en-US" sz="3400" dirty="0"/>
+          </a:p>
+        </p:txBody>
+      </p:sp>
+      <p:sp>
+        <p:nvSpPr>
+          <p:cNvPr id="9" name="Text 7"/>
+          <p:cNvSpPr/>
+          <p:nvPr/>
+        </p:nvSpPr>
+        <p:spPr>
+          <a:xfrm>
+            <a:off x="868680" y="1508760"/>
+            <a:ext cx="6812280" cy="3977640"/>
           </a:xfrm>
           <a:prstGeom prst="rect">
             <a:avLst/>
@@ -11757,7 +12658,7 @@
           <a:lstStyle/>
           <a:p>
             <a:r>
-              <a:rPr lang="en-US" sz="1460" dirty="0">
+              <a:rPr lang="en-US" sz="1850" dirty="0">
                 <a:solidFill>
                   <a:srgbClr val="17364A"/>
                 </a:solidFill>
@@ -11765,13 +12666,13 @@
                 <a:ea typeface="Aptos" pitchFamily="34" charset="-122"/>
                 <a:cs typeface="Aptos" pitchFamily="34" charset="-120"/>
               </a:rPr>
-              <a:t>Tool 16: Incident Response Checklist (Checklist) - Use Incident Response Checklist to translate this lesson into a documented public.</a:t>
-            </a:r>
-            <a:endParaRPr lang="en-US" sz="1460" dirty="0"/>
-          </a:p>
-          <a:p>
-            <a:r>
-              <a:rPr lang="en-US" sz="1460" dirty="0">
+              <a:t>Tool 16: Incident Response Checklist (Checklist) - Use Incident Response Checklist to translate this lesson.</a:t>
+            </a:r>
+            <a:endParaRPr lang="en-US" sz="1850" dirty="0"/>
+          </a:p>
+          <a:p>
+            <a:r>
+              <a:rPr lang="en-US" sz="1850" dirty="0">
                 <a:solidFill>
                   <a:srgbClr val="17364A"/>
                 </a:solidFill>
@@ -11779,13 +12680,13 @@
                 <a:ea typeface="Aptos" pitchFamily="34" charset="-122"/>
                 <a:cs typeface="Aptos" pitchFamily="34" charset="-120"/>
               </a:rPr>
-              <a:t>Tool 17: Compliance Audit Checklist (Checklist) - Use Compliance Audit Checklist to translate this lesson into a documented public.</a:t>
-            </a:r>
-            <a:endParaRPr lang="en-US" sz="1460" dirty="0"/>
-          </a:p>
-          <a:p>
-            <a:r>
-              <a:rPr lang="en-US" sz="1460" dirty="0">
+              <a:t>Tool 17: Compliance Audit Checklist (Checklist) - Use Compliance Audit Checklist to translate this lesson.</a:t>
+            </a:r>
+            <a:endParaRPr lang="en-US" sz="1850" dirty="0"/>
+          </a:p>
+          <a:p>
+            <a:r>
+              <a:rPr lang="en-US" sz="1850" dirty="0">
                 <a:solidFill>
                   <a:srgbClr val="17364A"/>
                 </a:solidFill>
@@ -11793,13 +12694,13 @@
                 <a:ea typeface="Aptos" pitchFamily="34" charset="-122"/>
                 <a:cs typeface="Aptos" pitchFamily="34" charset="-120"/>
               </a:rPr>
-              <a:t>Tool 18: Policy Update &amp; Version Control Log (Log) - Use this tool to complete or strengthen the practical exercise for the module.</a:t>
-            </a:r>
-            <a:endParaRPr lang="en-US" sz="1460" dirty="0"/>
-          </a:p>
-          <a:p>
-            <a:r>
-              <a:rPr lang="en-US" sz="1460" dirty="0">
+              <a:t>Tool 18: Policy Update &amp; Version Control Log (Log) - Use this tool to complete or strengthen the practical.</a:t>
+            </a:r>
+            <a:endParaRPr lang="en-US" sz="1850" dirty="0"/>
+          </a:p>
+          <a:p>
+            <a:r>
+              <a:rPr lang="en-US" sz="1850" dirty="0">
                 <a:solidFill>
                   <a:srgbClr val="17364A"/>
                 </a:solidFill>
@@ -11807,29 +12708,15 @@
                 <a:ea typeface="Aptos" pitchFamily="34" charset="-122"/>
                 <a:cs typeface="Aptos" pitchFamily="34" charset="-120"/>
               </a:rPr>
-              <a:t>Tool 19: Plain-Language AI Public Notice Template (Template) - Use Plain-Language AI Public Notice Template to translate this lesson.</a:t>
-            </a:r>
-            <a:endParaRPr lang="en-US" sz="1460" dirty="0"/>
-          </a:p>
-          <a:p>
-            <a:r>
-              <a:rPr lang="en-US" sz="1460" dirty="0">
-                <a:solidFill>
-                  <a:srgbClr val="17364A"/>
-                </a:solidFill>
-                <a:latin typeface="Aptos" pitchFamily="34" charset="0"/>
-                <a:ea typeface="Aptos" pitchFamily="34" charset="-122"/>
-                <a:cs typeface="Aptos" pitchFamily="34" charset="-120"/>
-              </a:rPr>
-              <a:t>Tool 4: AI Policy Landscape Scan (Worksheet) - Use AI Policy Landscape Scan to translate this lesson into a documented public health.</a:t>
-            </a:r>
-            <a:endParaRPr lang="en-US" sz="1460" dirty="0"/>
-          </a:p>
-        </p:txBody>
-      </p:sp>
-      <p:sp>
-        <p:nvSpPr>
-          <p:cNvPr id="9" name="Shape 7"/>
+              <a:t>Tool 19: Plain-Language AI Public Notice Template (Template) - Use Plain-Language AI Public Notice Template.</a:t>
+            </a:r>
+            <a:endParaRPr lang="en-US" sz="1850" dirty="0"/>
+          </a:p>
+        </p:txBody>
+      </p:sp>
+      <p:sp>
+        <p:nvSpPr>
+          <p:cNvPr id="10" name="Shape 8"/>
           <p:cNvSpPr/>
           <p:nvPr/>
         </p:nvSpPr>
@@ -11856,14 +12743,14 @@
       </p:sp>
       <p:sp>
         <p:nvSpPr>
-          <p:cNvPr id="10" name="Text 8"/>
+          <p:cNvPr id="11" name="Text 9"/>
           <p:cNvSpPr/>
           <p:nvPr/>
         </p:nvSpPr>
         <p:spPr>
           <a:xfrm>
             <a:off x="8211312" y="1563624"/>
-            <a:ext cx="2734056" cy="201168"/>
+            <a:ext cx="2734056" cy="256032"/>
           </a:xfrm>
           <a:prstGeom prst="rect">
             <a:avLst/>
@@ -11879,7 +12766,7 @@
               <a:buNone/>
             </a:pPr>
             <a:r>
-              <a:rPr lang="en-US" sz="950" b="1" dirty="0">
+              <a:rPr lang="en-US" sz="1300" b="1" dirty="0">
                 <a:solidFill>
                   <a:srgbClr val="0068B7"/>
                 </a:solidFill>
@@ -11889,20 +12776,20 @@
               </a:rPr>
               <a:t>Use the tools</a:t>
             </a:r>
-            <a:endParaRPr lang="en-US" sz="950" dirty="0"/>
-          </a:p>
-        </p:txBody>
-      </p:sp>
-      <p:sp>
-        <p:nvSpPr>
-          <p:cNvPr id="11" name="Text 9"/>
-          <p:cNvSpPr/>
-          <p:nvPr/>
-        </p:nvSpPr>
-        <p:spPr>
-          <a:xfrm>
-            <a:off x="8211312" y="1856232"/>
-            <a:ext cx="2734056" cy="1536192"/>
+            <a:endParaRPr lang="en-US" sz="1300" dirty="0"/>
+          </a:p>
+        </p:txBody>
+      </p:sp>
+      <p:sp>
+        <p:nvSpPr>
+          <p:cNvPr id="12" name="Text 10"/>
+          <p:cNvSpPr/>
+          <p:nvPr/>
+        </p:nvSpPr>
+        <p:spPr>
+          <a:xfrm>
+            <a:off x="8211312" y="1920240"/>
+            <a:ext cx="2734056" cy="1463040"/>
           </a:xfrm>
           <a:prstGeom prst="rect">
             <a:avLst/>
@@ -11920,7 +12807,7 @@
               <a:buNone/>
             </a:pPr>
             <a:r>
-              <a:rPr lang="en-US" sz="1250" dirty="0">
+              <a:rPr lang="en-US" sz="1550" dirty="0">
                 <a:solidFill>
                   <a:srgbClr val="17364A"/>
                 </a:solidFill>
@@ -11930,32 +12817,32 @@
               </a:rPr>
               <a:t>Use linked tools when your department needs a structured worksheet, template, checklist, review process, or documentation artifact.</a:t>
             </a:r>
-            <a:endParaRPr lang="en-US" sz="1250" dirty="0"/>
-          </a:p>
-        </p:txBody>
-      </p:sp>
-      <p:sp>
-        <p:nvSpPr>
-          <p:cNvPr id="12" name="Shape 10"/>
-          <p:cNvSpPr/>
-          <p:nvPr/>
-        </p:nvSpPr>
-        <p:spPr>
-          <a:xfrm>
-            <a:off x="8046720" y="3794760"/>
-            <a:ext cx="3063240" cy="1508760"/>
+            <a:endParaRPr lang="en-US" sz="1550" dirty="0"/>
+          </a:p>
+        </p:txBody>
+      </p:sp>
+      <p:sp>
+        <p:nvSpPr>
+          <p:cNvPr id="13" name="Shape 11"/>
+          <p:cNvSpPr/>
+          <p:nvPr/>
+        </p:nvSpPr>
+        <p:spPr>
+          <a:xfrm>
+            <a:off x="7818120" y="3977640"/>
+            <a:ext cx="972312" cy="749808"/>
           </a:xfrm>
           <a:prstGeom prst="roundRect">
             <a:avLst>
-              <a:gd name="adj" fmla="val 7273"/>
+              <a:gd name="adj" fmla="val 14634"/>
             </a:avLst>
           </a:prstGeom>
           <a:solidFill>
-            <a:srgbClr val="EEF8ED"/>
+            <a:srgbClr val="0068B7"/>
           </a:solidFill>
           <a:ln w="12700">
             <a:solidFill>
-              <a:srgbClr val="B9D7E6"/>
+              <a:srgbClr val="0068B7"/>
             </a:solidFill>
             <a:prstDash val="solid"/>
           </a:ln>
@@ -11963,81 +12850,256 @@
       </p:sp>
       <p:sp>
         <p:nvSpPr>
-          <p:cNvPr id="13" name="Text 11"/>
-          <p:cNvSpPr/>
-          <p:nvPr/>
-        </p:nvSpPr>
-        <p:spPr>
-          <a:xfrm>
-            <a:off x="8211312" y="3941064"/>
-            <a:ext cx="2734056" cy="201168"/>
-          </a:xfrm>
-          <a:prstGeom prst="rect">
-            <a:avLst/>
-          </a:prstGeom>
-          <a:noFill/>
-          <a:ln/>
-        </p:spPr>
-        <p:txBody>
-          <a:bodyPr wrap="square" lIns="0" tIns="0" rIns="0" bIns="0" rtlCol="0" anchor="ctr"/>
-          <a:lstStyle/>
-          <a:p>
-            <a:pPr indent="0" marL="0">
-              <a:buNone/>
-            </a:pPr>
-            <a:r>
-              <a:rPr lang="en-US" sz="950" b="1" dirty="0">
-                <a:solidFill>
-                  <a:srgbClr val="0068B7"/>
-                </a:solidFill>
-                <a:latin typeface="Aptos" pitchFamily="34" charset="0"/>
-                <a:ea typeface="Aptos" pitchFamily="34" charset="-122"/>
-                <a:cs typeface="Aptos" pitchFamily="34" charset="-120"/>
-              </a:rPr>
-              <a:t>Avoid duplication</a:t>
-            </a:r>
-            <a:endParaRPr lang="en-US" sz="950" dirty="0"/>
-          </a:p>
-        </p:txBody>
-      </p:sp>
-      <p:sp>
-        <p:nvSpPr>
           <p:cNvPr id="14" name="Text 12"/>
           <p:cNvSpPr/>
           <p:nvPr/>
         </p:nvSpPr>
         <p:spPr>
           <a:xfrm>
-            <a:off x="8211312" y="4233672"/>
-            <a:ext cx="2734056" cy="941832"/>
-          </a:xfrm>
-          <a:prstGeom prst="rect">
-            <a:avLst/>
-          </a:prstGeom>
-          <a:noFill/>
-          <a:ln/>
-        </p:spPr>
-        <p:txBody>
-          <a:bodyPr wrap="square" lIns="0" tIns="0" rIns="0" bIns="0" rtlCol="0" anchor="t">
+            <a:off x="7891272" y="4169664"/>
+            <a:ext cx="826008" cy="310896"/>
+          </a:xfrm>
+          <a:prstGeom prst="rect">
+            <a:avLst/>
+          </a:prstGeom>
+          <a:noFill/>
+          <a:ln/>
+        </p:spPr>
+        <p:txBody>
+          <a:bodyPr wrap="square" lIns="0" tIns="0" rIns="0" bIns="0" rtlCol="0" anchor="ctr">
             <a:normAutofit/>
           </a:bodyPr>
           <a:lstStyle/>
           <a:p>
-            <a:pPr indent="0" marL="0">
-              <a:buNone/>
-            </a:pPr>
-            <a:r>
-              <a:rPr lang="en-US" sz="1250" dirty="0">
-                <a:solidFill>
-                  <a:srgbClr val="17364A"/>
-                </a:solidFill>
-                <a:latin typeface="Aptos" pitchFamily="34" charset="0"/>
-                <a:ea typeface="Aptos" pitchFamily="34" charset="-122"/>
-                <a:cs typeface="Aptos" pitchFamily="34" charset="-120"/>
-              </a:rPr>
-              <a:t>If your department already has a strong equivalent tool, adapt or use the existing process instead of recreating it.</a:t>
-            </a:r>
-            <a:endParaRPr lang="en-US" sz="1250" dirty="0"/>
+            <a:pPr algn="ctr" indent="0" marL="0">
+              <a:buNone/>
+            </a:pPr>
+            <a:r>
+              <a:rPr lang="en-US" sz="1500" b="1" dirty="0">
+                <a:solidFill>
+                  <a:srgbClr val="FFFFFF"/>
+                </a:solidFill>
+                <a:latin typeface="Aptos" pitchFamily="34" charset="0"/>
+                <a:ea typeface="Aptos" pitchFamily="34" charset="-122"/>
+                <a:cs typeface="Aptos" pitchFamily="34" charset="-120"/>
+              </a:rPr>
+              <a:t>Concept</a:t>
+            </a:r>
+            <a:endParaRPr lang="en-US" sz="1500" dirty="0"/>
+          </a:p>
+        </p:txBody>
+      </p:sp>
+      <p:sp>
+        <p:nvSpPr>
+          <p:cNvPr id="15" name="Text 13"/>
+          <p:cNvSpPr/>
+          <p:nvPr/>
+        </p:nvSpPr>
+        <p:spPr>
+          <a:xfrm>
+            <a:off x="8817864" y="4187952"/>
+            <a:ext cx="201168" cy="256032"/>
+          </a:xfrm>
+          <a:prstGeom prst="rect">
+            <a:avLst/>
+          </a:prstGeom>
+          <a:noFill/>
+          <a:ln/>
+        </p:spPr>
+        <p:txBody>
+          <a:bodyPr wrap="square" lIns="0" tIns="0" rIns="0" bIns="0" rtlCol="0" anchor="ctr"/>
+          <a:lstStyle/>
+          <a:p>
+            <a:pPr algn="ctr" indent="0" marL="0">
+              <a:buNone/>
+            </a:pPr>
+            <a:r>
+              <a:rPr lang="en-US" sz="1800" b="1" dirty="0">
+                <a:solidFill>
+                  <a:srgbClr val="0068B7"/>
+                </a:solidFill>
+                <a:latin typeface="Aptos" pitchFamily="34" charset="0"/>
+                <a:ea typeface="Aptos" pitchFamily="34" charset="-122"/>
+                <a:cs typeface="Aptos" pitchFamily="34" charset="-120"/>
+              </a:rPr>
+              <a:t>â†’</a:t>
+            </a:r>
+            <a:endParaRPr lang="en-US" sz="1800" dirty="0"/>
+          </a:p>
+        </p:txBody>
+      </p:sp>
+      <p:sp>
+        <p:nvSpPr>
+          <p:cNvPr id="16" name="Shape 14"/>
+          <p:cNvSpPr/>
+          <p:nvPr/>
+        </p:nvSpPr>
+        <p:spPr>
+          <a:xfrm>
+            <a:off x="9046464" y="3977640"/>
+            <a:ext cx="972312" cy="749808"/>
+          </a:xfrm>
+          <a:prstGeom prst="roundRect">
+            <a:avLst>
+              <a:gd name="adj" fmla="val 14634"/>
+            </a:avLst>
+          </a:prstGeom>
+          <a:solidFill>
+            <a:srgbClr val="2F8A28"/>
+          </a:solidFill>
+          <a:ln w="12700">
+            <a:solidFill>
+              <a:srgbClr val="2F8A28"/>
+            </a:solidFill>
+            <a:prstDash val="solid"/>
+          </a:ln>
+        </p:spPr>
+      </p:sp>
+      <p:sp>
+        <p:nvSpPr>
+          <p:cNvPr id="17" name="Text 15"/>
+          <p:cNvSpPr/>
+          <p:nvPr/>
+        </p:nvSpPr>
+        <p:spPr>
+          <a:xfrm>
+            <a:off x="9119616" y="4169664"/>
+            <a:ext cx="826008" cy="310896"/>
+          </a:xfrm>
+          <a:prstGeom prst="rect">
+            <a:avLst/>
+          </a:prstGeom>
+          <a:noFill/>
+          <a:ln/>
+        </p:spPr>
+        <p:txBody>
+          <a:bodyPr wrap="square" lIns="0" tIns="0" rIns="0" bIns="0" rtlCol="0" anchor="ctr">
+            <a:normAutofit/>
+          </a:bodyPr>
+          <a:lstStyle/>
+          <a:p>
+            <a:pPr algn="ctr" indent="0" marL="0">
+              <a:buNone/>
+            </a:pPr>
+            <a:r>
+              <a:rPr lang="en-US" sz="1500" b="1" dirty="0">
+                <a:solidFill>
+                  <a:srgbClr val="FFFFFF"/>
+                </a:solidFill>
+                <a:latin typeface="Aptos" pitchFamily="34" charset="0"/>
+                <a:ea typeface="Aptos" pitchFamily="34" charset="-122"/>
+                <a:cs typeface="Aptos" pitchFamily="34" charset="-120"/>
+              </a:rPr>
+              <a:t>Tool</a:t>
+            </a:r>
+            <a:endParaRPr lang="en-US" sz="1500" dirty="0"/>
+          </a:p>
+        </p:txBody>
+      </p:sp>
+      <p:sp>
+        <p:nvSpPr>
+          <p:cNvPr id="18" name="Text 16"/>
+          <p:cNvSpPr/>
+          <p:nvPr/>
+        </p:nvSpPr>
+        <p:spPr>
+          <a:xfrm>
+            <a:off x="10046208" y="4187952"/>
+            <a:ext cx="201168" cy="256032"/>
+          </a:xfrm>
+          <a:prstGeom prst="rect">
+            <a:avLst/>
+          </a:prstGeom>
+          <a:noFill/>
+          <a:ln/>
+        </p:spPr>
+        <p:txBody>
+          <a:bodyPr wrap="square" lIns="0" tIns="0" rIns="0" bIns="0" rtlCol="0" anchor="ctr"/>
+          <a:lstStyle/>
+          <a:p>
+            <a:pPr algn="ctr" indent="0" marL="0">
+              <a:buNone/>
+            </a:pPr>
+            <a:r>
+              <a:rPr lang="en-US" sz="1800" b="1" dirty="0">
+                <a:solidFill>
+                  <a:srgbClr val="0068B7"/>
+                </a:solidFill>
+                <a:latin typeface="Aptos" pitchFamily="34" charset="0"/>
+                <a:ea typeface="Aptos" pitchFamily="34" charset="-122"/>
+                <a:cs typeface="Aptos" pitchFamily="34" charset="-120"/>
+              </a:rPr>
+              <a:t>â†’</a:t>
+            </a:r>
+            <a:endParaRPr lang="en-US" sz="1800" dirty="0"/>
+          </a:p>
+        </p:txBody>
+      </p:sp>
+      <p:sp>
+        <p:nvSpPr>
+          <p:cNvPr id="19" name="Shape 17"/>
+          <p:cNvSpPr/>
+          <p:nvPr/>
+        </p:nvSpPr>
+        <p:spPr>
+          <a:xfrm>
+            <a:off x="10274808" y="3977640"/>
+            <a:ext cx="972312" cy="749808"/>
+          </a:xfrm>
+          <a:prstGeom prst="roundRect">
+            <a:avLst>
+              <a:gd name="adj" fmla="val 14634"/>
+            </a:avLst>
+          </a:prstGeom>
+          <a:solidFill>
+            <a:srgbClr val="D69A2D"/>
+          </a:solidFill>
+          <a:ln w="12700">
+            <a:solidFill>
+              <a:srgbClr val="D69A2D"/>
+            </a:solidFill>
+            <a:prstDash val="solid"/>
+          </a:ln>
+        </p:spPr>
+      </p:sp>
+      <p:sp>
+        <p:nvSpPr>
+          <p:cNvPr id="20" name="Text 18"/>
+          <p:cNvSpPr/>
+          <p:nvPr/>
+        </p:nvSpPr>
+        <p:spPr>
+          <a:xfrm>
+            <a:off x="10347960" y="4169664"/>
+            <a:ext cx="826008" cy="310896"/>
+          </a:xfrm>
+          <a:prstGeom prst="rect">
+            <a:avLst/>
+          </a:prstGeom>
+          <a:noFill/>
+          <a:ln/>
+        </p:spPr>
+        <p:txBody>
+          <a:bodyPr wrap="square" lIns="0" tIns="0" rIns="0" bIns="0" rtlCol="0" anchor="ctr">
+            <a:normAutofit/>
+          </a:bodyPr>
+          <a:lstStyle/>
+          <a:p>
+            <a:pPr algn="ctr" indent="0" marL="0">
+              <a:buNone/>
+            </a:pPr>
+            <a:r>
+              <a:rPr lang="en-US" sz="1500" b="1" dirty="0">
+                <a:solidFill>
+                  <a:srgbClr val="FFFFFF"/>
+                </a:solidFill>
+                <a:latin typeface="Aptos" pitchFamily="34" charset="0"/>
+                <a:ea typeface="Aptos" pitchFamily="34" charset="-122"/>
+                <a:cs typeface="Aptos" pitchFamily="34" charset="-120"/>
+              </a:rPr>
+              <a:t>Artifact</a:t>
+            </a:r>
+            <a:endParaRPr lang="en-US" sz="1500" dirty="0"/>
           </a:p>
         </p:txBody>
       </p:sp>
@@ -12234,7 +13296,7 @@
                 <a:ea typeface="Aptos" pitchFamily="34" charset="-122"/>
                 <a:cs typeface="Aptos" pitchFamily="34" charset="-120"/>
               </a:rPr>
-              <a:t>© Paula Soper</a:t>
+              <a:t>Â© Paula Soper</a:t>
             </a:r>
             <a:endParaRPr lang="en-US" sz="800" dirty="0"/>
           </a:p>
@@ -12242,7 +13304,46 @@
       </p:sp>
       <p:sp>
         <p:nvSpPr>
-          <p:cNvPr id="7" name="Shape 5"/>
+          <p:cNvPr id="7" name="Text 5"/>
+          <p:cNvSpPr/>
+          <p:nvPr/>
+        </p:nvSpPr>
+        <p:spPr>
+          <a:xfrm>
+            <a:off x="11137392" y="6510528"/>
+            <a:ext cx="411480" cy="201168"/>
+          </a:xfrm>
+          <a:prstGeom prst="rect">
+            <a:avLst/>
+          </a:prstGeom>
+          <a:noFill/>
+          <a:ln/>
+        </p:spPr>
+        <p:txBody>
+          <a:bodyPr wrap="square" lIns="0" tIns="0" rIns="0" bIns="0" rtlCol="0" anchor="ctr"/>
+          <a:lstStyle/>
+          <a:p>
+            <a:pPr algn="r" indent="0" marL="0">
+              <a:buNone/>
+            </a:pPr>
+            <a:r>
+              <a:rPr lang="en-US" sz="900" dirty="0">
+                <a:solidFill>
+                  <a:srgbClr val="5F7181"/>
+                </a:solidFill>
+                <a:latin typeface="Aptos" pitchFamily="34" charset="0"/>
+                <a:ea typeface="Aptos" pitchFamily="34" charset="-122"/>
+                <a:cs typeface="Aptos" pitchFamily="34" charset="-120"/>
+              </a:rPr>
+              <a:t>5</a:t>
+            </a:r>
+            <a:endParaRPr lang="en-US" sz="900" dirty="0"/>
+          </a:p>
+        </p:txBody>
+      </p:sp>
+      <p:sp>
+        <p:nvSpPr>
+          <p:cNvPr id="8" name="Shape 6"/>
           <p:cNvSpPr/>
           <p:nvPr/>
         </p:nvSpPr>
@@ -12267,7 +13368,7 @@
       </p:sp>
       <p:sp>
         <p:nvSpPr>
-          <p:cNvPr id="8" name="Text 6"/>
+          <p:cNvPr id="9" name="Text 7"/>
           <p:cNvSpPr/>
           <p:nvPr/>
         </p:nvSpPr>
@@ -12306,14 +13407,14 @@
       </p:sp>
       <p:sp>
         <p:nvSpPr>
-          <p:cNvPr id="9" name="Text 7"/>
+          <p:cNvPr id="10" name="Text 8"/>
           <p:cNvSpPr/>
           <p:nvPr/>
         </p:nvSpPr>
         <p:spPr>
           <a:xfrm>
             <a:off x="640080" y="621792"/>
-            <a:ext cx="10881360" cy="566928"/>
+            <a:ext cx="10881360" cy="713232"/>
           </a:xfrm>
           <a:prstGeom prst="rect">
             <a:avLst/>
@@ -12331,7 +13432,7 @@
               <a:buNone/>
             </a:pPr>
             <a:r>
-              <a:rPr lang="en-US" sz="2700" b="1" dirty="0">
+              <a:rPr lang="en-US" sz="3400" b="1" dirty="0">
                 <a:solidFill>
                   <a:srgbClr val="003A63"/>
                 </a:solidFill>
@@ -12341,20 +13442,20 @@
               </a:rPr>
               <a:t>Learning Objectives</a:t>
             </a:r>
-            <a:endParaRPr lang="en-US" sz="2700" dirty="0"/>
-          </a:p>
-        </p:txBody>
-      </p:sp>
-      <p:sp>
-        <p:nvSpPr>
-          <p:cNvPr id="10" name="Text 8"/>
-          <p:cNvSpPr/>
-          <p:nvPr/>
-        </p:nvSpPr>
-        <p:spPr>
-          <a:xfrm>
-            <a:off x="868680" y="1417320"/>
-            <a:ext cx="6675120" cy="4434840"/>
+            <a:endParaRPr lang="en-US" sz="3400" dirty="0"/>
+          </a:p>
+        </p:txBody>
+      </p:sp>
+      <p:sp>
+        <p:nvSpPr>
+          <p:cNvPr id="11" name="Text 9"/>
+          <p:cNvSpPr/>
+          <p:nvPr/>
+        </p:nvSpPr>
+        <p:spPr>
+          <a:xfrm>
+            <a:off x="868680" y="1508760"/>
+            <a:ext cx="6537960" cy="4160520"/>
           </a:xfrm>
           <a:prstGeom prst="rect">
             <a:avLst/>
@@ -12369,7 +13470,7 @@
           <a:lstStyle/>
           <a:p>
             <a:r>
-              <a:rPr lang="en-US" sz="1700" dirty="0">
+              <a:rPr lang="en-US" sz="2100" dirty="0">
                 <a:solidFill>
                   <a:srgbClr val="17364A"/>
                 </a:solidFill>
@@ -12379,11 +13480,11 @@
               </a:rPr>
               <a:t>Define retrieval-augmented generation in plain language.</a:t>
             </a:r>
-            <a:endParaRPr lang="en-US" sz="1700" dirty="0"/>
-          </a:p>
-          <a:p>
-            <a:r>
-              <a:rPr lang="en-US" sz="1700" dirty="0">
+            <a:endParaRPr lang="en-US" sz="2100" dirty="0"/>
+          </a:p>
+          <a:p>
+            <a:r>
+              <a:rPr lang="en-US" sz="2100" dirty="0">
                 <a:solidFill>
                   <a:srgbClr val="17364A"/>
                 </a:solidFill>
@@ -12391,13 +13492,13 @@
                 <a:ea typeface="Aptos" pitchFamily="34" charset="-122"/>
                 <a:cs typeface="Aptos" pitchFamily="34" charset="-120"/>
               </a:rPr>
-              <a:t>Describe the major components of a RAG system, including document ingestion, chunking, embeddings, vector search, retrieval,.</a:t>
-            </a:r>
-            <a:endParaRPr lang="en-US" sz="1700" dirty="0"/>
-          </a:p>
-          <a:p>
-            <a:r>
-              <a:rPr lang="en-US" sz="1700" dirty="0">
+              <a:t>Describe the major components of a RAG system, including document ingestion, chunking, embeddings,.</a:t>
+            </a:r>
+            <a:endParaRPr lang="en-US" sz="2100" dirty="0"/>
+          </a:p>
+          <a:p>
+            <a:r>
+              <a:rPr lang="en-US" sz="2100" dirty="0">
                 <a:solidFill>
                   <a:srgbClr val="17364A"/>
                 </a:solidFill>
@@ -12407,27 +13508,13 @@
               </a:rPr>
               <a:t>Identify public health use cases where RAG may improve knowledge work.</a:t>
             </a:r>
-            <a:endParaRPr lang="en-US" sz="1700" dirty="0"/>
-          </a:p>
-          <a:p>
-            <a:r>
-              <a:rPr lang="en-US" sz="1700" dirty="0">
-                <a:solidFill>
-                  <a:srgbClr val="17364A"/>
-                </a:solidFill>
-                <a:latin typeface="Aptos" pitchFamily="34" charset="0"/>
-                <a:ea typeface="Aptos" pitchFamily="34" charset="-122"/>
-                <a:cs typeface="Aptos" pitchFamily="34" charset="-120"/>
-              </a:rPr>
-              <a:t>Assess risks related to stale content, access control, retrieval quality, hallucination, and source misuse.</a:t>
-            </a:r>
-            <a:endParaRPr lang="en-US" sz="1700" dirty="0"/>
-          </a:p>
-        </p:txBody>
-      </p:sp>
-      <p:sp>
-        <p:nvSpPr>
-          <p:cNvPr id="11" name="Shape 9"/>
+            <a:endParaRPr lang="en-US" sz="2100" dirty="0"/>
+          </a:p>
+        </p:txBody>
+      </p:sp>
+      <p:sp>
+        <p:nvSpPr>
+          <p:cNvPr id="12" name="Shape 10"/>
           <p:cNvSpPr/>
           <p:nvPr/>
         </p:nvSpPr>
@@ -12454,14 +13541,14 @@
       </p:sp>
       <p:sp>
         <p:nvSpPr>
-          <p:cNvPr id="12" name="Text 10"/>
+          <p:cNvPr id="13" name="Text 11"/>
           <p:cNvSpPr/>
           <p:nvPr/>
         </p:nvSpPr>
         <p:spPr>
           <a:xfrm>
             <a:off x="8074152" y="1563624"/>
-            <a:ext cx="2825496" cy="201168"/>
+            <a:ext cx="2825496" cy="256032"/>
           </a:xfrm>
           <a:prstGeom prst="rect">
             <a:avLst/>
@@ -12477,7 +13564,7 @@
               <a:buNone/>
             </a:pPr>
             <a:r>
-              <a:rPr lang="en-US" sz="950" b="1" dirty="0">
+              <a:rPr lang="en-US" sz="1300" b="1" dirty="0">
                 <a:solidFill>
                   <a:srgbClr val="0068B7"/>
                 </a:solidFill>
@@ -12487,20 +13574,20 @@
               </a:rPr>
               <a:t>Key idea</a:t>
             </a:r>
-            <a:endParaRPr lang="en-US" sz="950" dirty="0"/>
-          </a:p>
-        </p:txBody>
-      </p:sp>
-      <p:sp>
-        <p:nvSpPr>
-          <p:cNvPr id="13" name="Text 11"/>
-          <p:cNvSpPr/>
-          <p:nvPr/>
-        </p:nvSpPr>
-        <p:spPr>
-          <a:xfrm>
-            <a:off x="8074152" y="1856232"/>
-            <a:ext cx="2825496" cy="1261872"/>
+            <a:endParaRPr lang="en-US" sz="1300" dirty="0"/>
+          </a:p>
+        </p:txBody>
+      </p:sp>
+      <p:sp>
+        <p:nvSpPr>
+          <p:cNvPr id="14" name="Text 12"/>
+          <p:cNvSpPr/>
+          <p:nvPr/>
+        </p:nvSpPr>
+        <p:spPr>
+          <a:xfrm>
+            <a:off x="8074152" y="1920240"/>
+            <a:ext cx="2825496" cy="1188720"/>
           </a:xfrm>
           <a:prstGeom prst="rect">
             <a:avLst/>
@@ -12518,7 +13605,7 @@
               <a:buNone/>
             </a:pPr>
             <a:r>
-              <a:rPr lang="en-US" sz="1250" dirty="0">
+              <a:rPr lang="en-US" sz="1550" dirty="0">
                 <a:solidFill>
                   <a:srgbClr val="17364A"/>
                 </a:solidFill>
@@ -12528,13 +13615,13 @@
               </a:rPr>
               <a:t>Define retrieval-augmented generation in plain language.</a:t>
             </a:r>
-            <a:endParaRPr lang="en-US" sz="1250" dirty="0"/>
-          </a:p>
-        </p:txBody>
-      </p:sp>
-      <p:sp>
-        <p:nvSpPr>
-          <p:cNvPr id="14" name="Shape 12"/>
+            <a:endParaRPr lang="en-US" sz="1550" dirty="0"/>
+          </a:p>
+        </p:txBody>
+      </p:sp>
+      <p:sp>
+        <p:nvSpPr>
+          <p:cNvPr id="15" name="Shape 13"/>
           <p:cNvSpPr/>
           <p:nvPr/>
         </p:nvSpPr>
@@ -12561,14 +13648,14 @@
       </p:sp>
       <p:sp>
         <p:nvSpPr>
-          <p:cNvPr id="15" name="Text 13"/>
+          <p:cNvPr id="16" name="Text 14"/>
           <p:cNvSpPr/>
           <p:nvPr/>
         </p:nvSpPr>
         <p:spPr>
           <a:xfrm>
             <a:off x="8074152" y="3666744"/>
-            <a:ext cx="2825496" cy="201168"/>
+            <a:ext cx="2825496" cy="256032"/>
           </a:xfrm>
           <a:prstGeom prst="rect">
             <a:avLst/>
@@ -12584,7 +13671,7 @@
               <a:buNone/>
             </a:pPr>
             <a:r>
-              <a:rPr lang="en-US" sz="950" b="1" dirty="0">
+              <a:rPr lang="en-US" sz="1300" b="1" dirty="0">
                 <a:solidFill>
                   <a:srgbClr val="0068B7"/>
                 </a:solidFill>
@@ -12594,20 +13681,20 @@
               </a:rPr>
               <a:t>Use this for</a:t>
             </a:r>
-            <a:endParaRPr lang="en-US" sz="950" dirty="0"/>
-          </a:p>
-        </p:txBody>
-      </p:sp>
-      <p:sp>
-        <p:nvSpPr>
-          <p:cNvPr id="16" name="Text 14"/>
-          <p:cNvSpPr/>
-          <p:nvPr/>
-        </p:nvSpPr>
-        <p:spPr>
-          <a:xfrm>
-            <a:off x="8074152" y="3959352"/>
-            <a:ext cx="2825496" cy="1170432"/>
+            <a:endParaRPr lang="en-US" sz="1300" dirty="0"/>
+          </a:p>
+        </p:txBody>
+      </p:sp>
+      <p:sp>
+        <p:nvSpPr>
+          <p:cNvPr id="17" name="Text 15"/>
+          <p:cNvSpPr/>
+          <p:nvPr/>
+        </p:nvSpPr>
+        <p:spPr>
+          <a:xfrm>
+            <a:off x="8074152" y="4023360"/>
+            <a:ext cx="2825496" cy="1097280"/>
           </a:xfrm>
           <a:prstGeom prst="rect">
             <a:avLst/>
@@ -12625,7 +13712,7 @@
               <a:buNone/>
             </a:pPr>
             <a:r>
-              <a:rPr lang="en-US" sz="1250" dirty="0">
+              <a:rPr lang="en-US" sz="1550" dirty="0">
                 <a:solidFill>
                   <a:srgbClr val="17364A"/>
                 </a:solidFill>
@@ -12635,7 +13722,7 @@
               </a:rPr>
               <a:t>Connect the concept to public health decisions, safeguards, documentation, or implementation work.</a:t>
             </a:r>
-            <a:endParaRPr lang="en-US" sz="1250" dirty="0"/>
+            <a:endParaRPr lang="en-US" sz="1550" dirty="0"/>
           </a:p>
         </p:txBody>
       </p:sp>
@@ -12832,7 +13919,7 @@
                 <a:ea typeface="Aptos" pitchFamily="34" charset="-122"/>
                 <a:cs typeface="Aptos" pitchFamily="34" charset="-120"/>
               </a:rPr>
-              <a:t>© Paula Soper</a:t>
+              <a:t>Â© Paula Soper</a:t>
             </a:r>
             <a:endParaRPr lang="en-US" sz="800" dirty="0"/>
           </a:p>
@@ -12846,8 +13933,47 @@
         </p:nvSpPr>
         <p:spPr>
           <a:xfrm>
+            <a:off x="11137392" y="6510528"/>
+            <a:ext cx="411480" cy="201168"/>
+          </a:xfrm>
+          <a:prstGeom prst="rect">
+            <a:avLst/>
+          </a:prstGeom>
+          <a:noFill/>
+          <a:ln/>
+        </p:spPr>
+        <p:txBody>
+          <a:bodyPr wrap="square" lIns="0" tIns="0" rIns="0" bIns="0" rtlCol="0" anchor="ctr"/>
+          <a:lstStyle/>
+          <a:p>
+            <a:pPr algn="r" indent="0" marL="0">
+              <a:buNone/>
+            </a:pPr>
+            <a:r>
+              <a:rPr lang="en-US" sz="900" dirty="0">
+                <a:solidFill>
+                  <a:srgbClr val="5F7181"/>
+                </a:solidFill>
+                <a:latin typeface="Aptos" pitchFamily="34" charset="0"/>
+                <a:ea typeface="Aptos" pitchFamily="34" charset="-122"/>
+                <a:cs typeface="Aptos" pitchFamily="34" charset="-120"/>
+              </a:rPr>
+              <a:t>6</a:t>
+            </a:r>
+            <a:endParaRPr lang="en-US" sz="900" dirty="0"/>
+          </a:p>
+        </p:txBody>
+      </p:sp>
+      <p:sp>
+        <p:nvSpPr>
+          <p:cNvPr id="8" name="Text 6"/>
+          <p:cNvSpPr/>
+          <p:nvPr/>
+        </p:nvSpPr>
+        <p:spPr>
+          <a:xfrm>
             <a:off x="640080" y="658368"/>
-            <a:ext cx="10881360" cy="566928"/>
+            <a:ext cx="10881360" cy="713232"/>
           </a:xfrm>
           <a:prstGeom prst="rect">
             <a:avLst/>
@@ -12865,7 +13991,7 @@
               <a:buNone/>
             </a:pPr>
             <a:r>
-              <a:rPr lang="en-US" sz="2700" b="1" dirty="0">
+              <a:rPr lang="en-US" sz="3400" b="1" dirty="0">
                 <a:solidFill>
                   <a:srgbClr val="003A63"/>
                 </a:solidFill>
@@ -12875,20 +14001,20 @@
               </a:rPr>
               <a:t>Learning Objectives Continued</a:t>
             </a:r>
-            <a:endParaRPr lang="en-US" sz="2700" dirty="0"/>
-          </a:p>
-        </p:txBody>
-      </p:sp>
-      <p:sp>
-        <p:nvSpPr>
-          <p:cNvPr id="8" name="Text 6"/>
-          <p:cNvSpPr/>
-          <p:nvPr/>
-        </p:nvSpPr>
-        <p:spPr>
-          <a:xfrm>
-            <a:off x="868680" y="1417320"/>
-            <a:ext cx="6675120" cy="4434840"/>
+            <a:endParaRPr lang="en-US" sz="3400" dirty="0"/>
+          </a:p>
+        </p:txBody>
+      </p:sp>
+      <p:sp>
+        <p:nvSpPr>
+          <p:cNvPr id="9" name="Text 7"/>
+          <p:cNvSpPr/>
+          <p:nvPr/>
+        </p:nvSpPr>
+        <p:spPr>
+          <a:xfrm>
+            <a:off x="868680" y="1508760"/>
+            <a:ext cx="6537960" cy="4160520"/>
           </a:xfrm>
           <a:prstGeom prst="rect">
             <a:avLst/>
@@ -12903,7 +14029,7 @@
           <a:lstStyle/>
           <a:p>
             <a:r>
-              <a:rPr lang="en-US" sz="1700" dirty="0">
+              <a:rPr lang="en-US" sz="2100" dirty="0">
                 <a:solidFill>
                   <a:srgbClr val="17364A"/>
                 </a:solidFill>
@@ -12913,13 +14039,13 @@
               </a:rPr>
               <a:t>Produce a RAG readiness checklist for a public health knowledge workflow.</a:t>
             </a:r>
-            <a:endParaRPr lang="en-US" sz="1700" dirty="0"/>
-          </a:p>
-        </p:txBody>
-      </p:sp>
-      <p:sp>
-        <p:nvSpPr>
-          <p:cNvPr id="9" name="Shape 7"/>
+            <a:endParaRPr lang="en-US" sz="2100" dirty="0"/>
+          </a:p>
+        </p:txBody>
+      </p:sp>
+      <p:sp>
+        <p:nvSpPr>
+          <p:cNvPr id="10" name="Shape 8"/>
           <p:cNvSpPr/>
           <p:nvPr/>
         </p:nvSpPr>
@@ -12946,14 +14072,14 @@
       </p:sp>
       <p:sp>
         <p:nvSpPr>
-          <p:cNvPr id="10" name="Text 8"/>
+          <p:cNvPr id="11" name="Text 9"/>
           <p:cNvSpPr/>
           <p:nvPr/>
         </p:nvSpPr>
         <p:spPr>
           <a:xfrm>
             <a:off x="8074152" y="1563624"/>
-            <a:ext cx="2825496" cy="201168"/>
+            <a:ext cx="2825496" cy="256032"/>
           </a:xfrm>
           <a:prstGeom prst="rect">
             <a:avLst/>
@@ -12969,7 +14095,7 @@
               <a:buNone/>
             </a:pPr>
             <a:r>
-              <a:rPr lang="en-US" sz="950" b="1" dirty="0">
+              <a:rPr lang="en-US" sz="1300" b="1" dirty="0">
                 <a:solidFill>
                   <a:srgbClr val="0068B7"/>
                 </a:solidFill>
@@ -12979,20 +14105,20 @@
               </a:rPr>
               <a:t>Key idea</a:t>
             </a:r>
-            <a:endParaRPr lang="en-US" sz="950" dirty="0"/>
-          </a:p>
-        </p:txBody>
-      </p:sp>
-      <p:sp>
-        <p:nvSpPr>
-          <p:cNvPr id="11" name="Text 9"/>
-          <p:cNvSpPr/>
-          <p:nvPr/>
-        </p:nvSpPr>
-        <p:spPr>
-          <a:xfrm>
-            <a:off x="8074152" y="1856232"/>
-            <a:ext cx="2825496" cy="1261872"/>
+            <a:endParaRPr lang="en-US" sz="1300" dirty="0"/>
+          </a:p>
+        </p:txBody>
+      </p:sp>
+      <p:sp>
+        <p:nvSpPr>
+          <p:cNvPr id="12" name="Text 10"/>
+          <p:cNvSpPr/>
+          <p:nvPr/>
+        </p:nvSpPr>
+        <p:spPr>
+          <a:xfrm>
+            <a:off x="8074152" y="1920240"/>
+            <a:ext cx="2825496" cy="1188720"/>
           </a:xfrm>
           <a:prstGeom prst="rect">
             <a:avLst/>
@@ -13010,7 +14136,7 @@
               <a:buNone/>
             </a:pPr>
             <a:r>
-              <a:rPr lang="en-US" sz="1250" dirty="0">
+              <a:rPr lang="en-US" sz="1550" dirty="0">
                 <a:solidFill>
                   <a:srgbClr val="17364A"/>
                 </a:solidFill>
@@ -13020,13 +14146,13 @@
               </a:rPr>
               <a:t>Produce a RAG readiness checklist for a public health knowledge workflow.</a:t>
             </a:r>
-            <a:endParaRPr lang="en-US" sz="1250" dirty="0"/>
-          </a:p>
-        </p:txBody>
-      </p:sp>
-      <p:sp>
-        <p:nvSpPr>
-          <p:cNvPr id="12" name="Shape 10"/>
+            <a:endParaRPr lang="en-US" sz="1550" dirty="0"/>
+          </a:p>
+        </p:txBody>
+      </p:sp>
+      <p:sp>
+        <p:nvSpPr>
+          <p:cNvPr id="13" name="Shape 11"/>
           <p:cNvSpPr/>
           <p:nvPr/>
         </p:nvSpPr>
@@ -13053,14 +14179,14 @@
       </p:sp>
       <p:sp>
         <p:nvSpPr>
-          <p:cNvPr id="13" name="Text 11"/>
+          <p:cNvPr id="14" name="Text 12"/>
           <p:cNvSpPr/>
           <p:nvPr/>
         </p:nvSpPr>
         <p:spPr>
           <a:xfrm>
             <a:off x="8074152" y="3666744"/>
-            <a:ext cx="2825496" cy="201168"/>
+            <a:ext cx="2825496" cy="256032"/>
           </a:xfrm>
           <a:prstGeom prst="rect">
             <a:avLst/>
@@ -13076,7 +14202,7 @@
               <a:buNone/>
             </a:pPr>
             <a:r>
-              <a:rPr lang="en-US" sz="950" b="1" dirty="0">
+              <a:rPr lang="en-US" sz="1300" b="1" dirty="0">
                 <a:solidFill>
                   <a:srgbClr val="0068B7"/>
                 </a:solidFill>
@@ -13086,20 +14212,20 @@
               </a:rPr>
               <a:t>Use this for</a:t>
             </a:r>
-            <a:endParaRPr lang="en-US" sz="950" dirty="0"/>
-          </a:p>
-        </p:txBody>
-      </p:sp>
-      <p:sp>
-        <p:nvSpPr>
-          <p:cNvPr id="14" name="Text 12"/>
-          <p:cNvSpPr/>
-          <p:nvPr/>
-        </p:nvSpPr>
-        <p:spPr>
-          <a:xfrm>
-            <a:off x="8074152" y="3959352"/>
-            <a:ext cx="2825496" cy="1170432"/>
+            <a:endParaRPr lang="en-US" sz="1300" dirty="0"/>
+          </a:p>
+        </p:txBody>
+      </p:sp>
+      <p:sp>
+        <p:nvSpPr>
+          <p:cNvPr id="15" name="Text 13"/>
+          <p:cNvSpPr/>
+          <p:nvPr/>
+        </p:nvSpPr>
+        <p:spPr>
+          <a:xfrm>
+            <a:off x="8074152" y="4023360"/>
+            <a:ext cx="2825496" cy="1097280"/>
           </a:xfrm>
           <a:prstGeom prst="rect">
             <a:avLst/>
@@ -13117,7 +14243,7 @@
               <a:buNone/>
             </a:pPr>
             <a:r>
-              <a:rPr lang="en-US" sz="1250" dirty="0">
+              <a:rPr lang="en-US" sz="1550" dirty="0">
                 <a:solidFill>
                   <a:srgbClr val="17364A"/>
                 </a:solidFill>
@@ -13127,7 +14253,7 @@
               </a:rPr>
               <a:t>Connect the concept to public health decisions, safeguards, documentation, or implementation work.</a:t>
             </a:r>
-            <a:endParaRPr lang="en-US" sz="1250" dirty="0"/>
+            <a:endParaRPr lang="en-US" sz="1550" dirty="0"/>
           </a:p>
         </p:txBody>
       </p:sp>
@@ -13324,7 +14450,7 @@
                 <a:ea typeface="Aptos" pitchFamily="34" charset="-122"/>
                 <a:cs typeface="Aptos" pitchFamily="34" charset="-120"/>
               </a:rPr>
-              <a:t>© Paula Soper</a:t>
+              <a:t>Â© Paula Soper</a:t>
             </a:r>
             <a:endParaRPr lang="en-US" sz="800" dirty="0"/>
           </a:p>
@@ -13332,7 +14458,46 @@
       </p:sp>
       <p:sp>
         <p:nvSpPr>
-          <p:cNvPr id="7" name="Shape 5"/>
+          <p:cNvPr id="7" name="Text 5"/>
+          <p:cNvSpPr/>
+          <p:nvPr/>
+        </p:nvSpPr>
+        <p:spPr>
+          <a:xfrm>
+            <a:off x="11137392" y="6510528"/>
+            <a:ext cx="411480" cy="201168"/>
+          </a:xfrm>
+          <a:prstGeom prst="rect">
+            <a:avLst/>
+          </a:prstGeom>
+          <a:noFill/>
+          <a:ln/>
+        </p:spPr>
+        <p:txBody>
+          <a:bodyPr wrap="square" lIns="0" tIns="0" rIns="0" bIns="0" rtlCol="0" anchor="ctr"/>
+          <a:lstStyle/>
+          <a:p>
+            <a:pPr algn="r" indent="0" marL="0">
+              <a:buNone/>
+            </a:pPr>
+            <a:r>
+              <a:rPr lang="en-US" sz="900" dirty="0">
+                <a:solidFill>
+                  <a:srgbClr val="5F7181"/>
+                </a:solidFill>
+                <a:latin typeface="Aptos" pitchFamily="34" charset="0"/>
+                <a:ea typeface="Aptos" pitchFamily="34" charset="-122"/>
+                <a:cs typeface="Aptos" pitchFamily="34" charset="-120"/>
+              </a:rPr>
+              <a:t>7</a:t>
+            </a:r>
+            <a:endParaRPr lang="en-US" sz="900" dirty="0"/>
+          </a:p>
+        </p:txBody>
+      </p:sp>
+      <p:sp>
+        <p:nvSpPr>
+          <p:cNvPr id="8" name="Shape 6"/>
           <p:cNvSpPr/>
           <p:nvPr/>
         </p:nvSpPr>
@@ -13357,7 +14522,7 @@
       </p:sp>
       <p:sp>
         <p:nvSpPr>
-          <p:cNvPr id="8" name="Text 6"/>
+          <p:cNvPr id="9" name="Text 7"/>
           <p:cNvSpPr/>
           <p:nvPr/>
         </p:nvSpPr>
@@ -13396,14 +14561,14 @@
       </p:sp>
       <p:sp>
         <p:nvSpPr>
-          <p:cNvPr id="9" name="Text 7"/>
+          <p:cNvPr id="10" name="Text 8"/>
           <p:cNvSpPr/>
           <p:nvPr/>
         </p:nvSpPr>
         <p:spPr>
           <a:xfrm>
             <a:off x="640080" y="621792"/>
-            <a:ext cx="10881360" cy="566928"/>
+            <a:ext cx="10881360" cy="713232"/>
           </a:xfrm>
           <a:prstGeom prst="rect">
             <a:avLst/>
@@ -13421,7 +14586,7 @@
               <a:buNone/>
             </a:pPr>
             <a:r>
-              <a:rPr lang="en-US" sz="2700" b="1" dirty="0">
+              <a:rPr lang="en-US" sz="3400" b="1" dirty="0">
                 <a:solidFill>
                   <a:srgbClr val="003A63"/>
                 </a:solidFill>
@@ -13431,20 +14596,20 @@
               </a:rPr>
               <a:t>Module Overview</a:t>
             </a:r>
-            <a:endParaRPr lang="en-US" sz="2700" dirty="0"/>
-          </a:p>
-        </p:txBody>
-      </p:sp>
-      <p:sp>
-        <p:nvSpPr>
-          <p:cNvPr id="10" name="Text 8"/>
-          <p:cNvSpPr/>
-          <p:nvPr/>
-        </p:nvSpPr>
-        <p:spPr>
-          <a:xfrm>
-            <a:off x="868680" y="1417320"/>
-            <a:ext cx="6675120" cy="4434840"/>
+            <a:endParaRPr lang="en-US" sz="3400" dirty="0"/>
+          </a:p>
+        </p:txBody>
+      </p:sp>
+      <p:sp>
+        <p:nvSpPr>
+          <p:cNvPr id="11" name="Text 9"/>
+          <p:cNvSpPr/>
+          <p:nvPr/>
+        </p:nvSpPr>
+        <p:spPr>
+          <a:xfrm>
+            <a:off x="868680" y="1508760"/>
+            <a:ext cx="6537960" cy="4160520"/>
           </a:xfrm>
           <a:prstGeom prst="rect">
             <a:avLst/>
@@ -13459,7 +14624,7 @@
           <a:lstStyle/>
           <a:p>
             <a:r>
-              <a:rPr lang="en-US" sz="1700" dirty="0">
+              <a:rPr lang="en-US" sz="2100" dirty="0">
                 <a:solidFill>
                   <a:srgbClr val="17364A"/>
                 </a:solidFill>
@@ -13467,13 +14632,13 @@
                 <a:ea typeface="Aptos" pitchFamily="34" charset="-122"/>
                 <a:cs typeface="Aptos" pitchFamily="34" charset="-120"/>
               </a:rPr>
-              <a:t>Retrieval-augmented generation, often called RAG, combines generative AI with retrieval from a defined set of documents or.</a:t>
-            </a:r>
-            <a:endParaRPr lang="en-US" sz="1700" dirty="0"/>
-          </a:p>
-          <a:p>
-            <a:r>
-              <a:rPr lang="en-US" sz="1700" dirty="0">
+              <a:t>Retrieval-augmented generation, often called RAG, combines generative AI with retrieval from a defined.</a:t>
+            </a:r>
+            <a:endParaRPr lang="en-US" sz="2100" dirty="0"/>
+          </a:p>
+          <a:p>
+            <a:r>
+              <a:rPr lang="en-US" sz="2100" dirty="0">
                 <a:solidFill>
                   <a:srgbClr val="17364A"/>
                 </a:solidFill>
@@ -13481,13 +14646,13 @@
                 <a:ea typeface="Aptos" pitchFamily="34" charset="-122"/>
                 <a:cs typeface="Aptos" pitchFamily="34" charset="-120"/>
               </a:rPr>
-              <a:t>Instead of relying only on a model’s general training, a RAG system searches approved content and uses retrieved material.</a:t>
-            </a:r>
-            <a:endParaRPr lang="en-US" sz="1700" dirty="0"/>
-          </a:p>
-          <a:p>
-            <a:r>
-              <a:rPr lang="en-US" sz="1700" dirty="0">
+              <a:t>Instead of relying only on a model’s general training, a RAG system searches approved content and uses.</a:t>
+            </a:r>
+            <a:endParaRPr lang="en-US" sz="2100" dirty="0"/>
+          </a:p>
+          <a:p>
+            <a:r>
+              <a:rPr lang="en-US" sz="2100" dirty="0">
                 <a:solidFill>
                   <a:srgbClr val="17364A"/>
                 </a:solidFill>
@@ -13495,29 +14660,15 @@
                 <a:ea typeface="Aptos" pitchFamily="34" charset="-122"/>
                 <a:cs typeface="Aptos" pitchFamily="34" charset="-120"/>
               </a:rPr>
-              <a:t>In public health, RAG may support policy lookup, protocol interpretation, internal help desks, training support, grant.</a:t>
-            </a:r>
-            <a:endParaRPr lang="en-US" sz="1700" dirty="0"/>
-          </a:p>
-          <a:p>
-            <a:r>
-              <a:rPr lang="en-US" sz="1700" dirty="0">
-                <a:solidFill>
-                  <a:srgbClr val="17364A"/>
-                </a:solidFill>
-                <a:latin typeface="Aptos" pitchFamily="34" charset="0"/>
-                <a:ea typeface="Aptos" pitchFamily="34" charset="-122"/>
-                <a:cs typeface="Aptos" pitchFamily="34" charset="-120"/>
-              </a:rPr>
-              <a:t>RAG can make generative AI more useful and safer when it is designed well.</a:t>
-            </a:r>
-            <a:endParaRPr lang="en-US" sz="1700" dirty="0"/>
-          </a:p>
-        </p:txBody>
-      </p:sp>
-      <p:sp>
-        <p:nvSpPr>
-          <p:cNvPr id="11" name="Shape 9"/>
+              <a:t>In public health, RAG may support policy lookup, protocol interpretation, internal help desks, training.</a:t>
+            </a:r>
+            <a:endParaRPr lang="en-US" sz="2100" dirty="0"/>
+          </a:p>
+        </p:txBody>
+      </p:sp>
+      <p:sp>
+        <p:nvSpPr>
+          <p:cNvPr id="12" name="Shape 10"/>
           <p:cNvSpPr/>
           <p:nvPr/>
         </p:nvSpPr>
@@ -13544,14 +14695,14 @@
       </p:sp>
       <p:sp>
         <p:nvSpPr>
-          <p:cNvPr id="12" name="Text 10"/>
+          <p:cNvPr id="13" name="Text 11"/>
           <p:cNvSpPr/>
           <p:nvPr/>
         </p:nvSpPr>
         <p:spPr>
           <a:xfrm>
             <a:off x="8074152" y="1563624"/>
-            <a:ext cx="2825496" cy="201168"/>
+            <a:ext cx="2825496" cy="256032"/>
           </a:xfrm>
           <a:prstGeom prst="rect">
             <a:avLst/>
@@ -13567,7 +14718,7 @@
               <a:buNone/>
             </a:pPr>
             <a:r>
-              <a:rPr lang="en-US" sz="950" b="1" dirty="0">
+              <a:rPr lang="en-US" sz="1300" b="1" dirty="0">
                 <a:solidFill>
                   <a:srgbClr val="0068B7"/>
                 </a:solidFill>
@@ -13577,20 +14728,20 @@
               </a:rPr>
               <a:t>Key idea</a:t>
             </a:r>
-            <a:endParaRPr lang="en-US" sz="950" dirty="0"/>
-          </a:p>
-        </p:txBody>
-      </p:sp>
-      <p:sp>
-        <p:nvSpPr>
-          <p:cNvPr id="13" name="Text 11"/>
-          <p:cNvSpPr/>
-          <p:nvPr/>
-        </p:nvSpPr>
-        <p:spPr>
-          <a:xfrm>
-            <a:off x="8074152" y="1856232"/>
-            <a:ext cx="2825496" cy="1261872"/>
+            <a:endParaRPr lang="en-US" sz="1300" dirty="0"/>
+          </a:p>
+        </p:txBody>
+      </p:sp>
+      <p:sp>
+        <p:nvSpPr>
+          <p:cNvPr id="14" name="Text 12"/>
+          <p:cNvSpPr/>
+          <p:nvPr/>
+        </p:nvSpPr>
+        <p:spPr>
+          <a:xfrm>
+            <a:off x="8074152" y="1920240"/>
+            <a:ext cx="2825496" cy="1188720"/>
           </a:xfrm>
           <a:prstGeom prst="rect">
             <a:avLst/>
@@ -13608,7 +14759,7 @@
               <a:buNone/>
             </a:pPr>
             <a:r>
-              <a:rPr lang="en-US" sz="1250" dirty="0">
+              <a:rPr lang="en-US" sz="1550" dirty="0">
                 <a:solidFill>
                   <a:srgbClr val="17364A"/>
                 </a:solidFill>
@@ -13616,15 +14767,15 @@
                 <a:ea typeface="Aptos" pitchFamily="34" charset="-122"/>
                 <a:cs typeface="Aptos" pitchFamily="34" charset="-120"/>
               </a:rPr>
-              <a:t>Retrieval-augmented generation, often called RAG, combines generative AI with retrieval from a defined set of documents or.</a:t>
-            </a:r>
-            <a:endParaRPr lang="en-US" sz="1250" dirty="0"/>
-          </a:p>
-        </p:txBody>
-      </p:sp>
-      <p:sp>
-        <p:nvSpPr>
-          <p:cNvPr id="14" name="Shape 12"/>
+              <a:t>Retrieval-augmented generation, often called RAG, combines generative AI with retrieval from a defined.</a:t>
+            </a:r>
+            <a:endParaRPr lang="en-US" sz="1550" dirty="0"/>
+          </a:p>
+        </p:txBody>
+      </p:sp>
+      <p:sp>
+        <p:nvSpPr>
+          <p:cNvPr id="15" name="Shape 13"/>
           <p:cNvSpPr/>
           <p:nvPr/>
         </p:nvSpPr>
@@ -13651,14 +14802,14 @@
       </p:sp>
       <p:sp>
         <p:nvSpPr>
-          <p:cNvPr id="15" name="Text 13"/>
+          <p:cNvPr id="16" name="Text 14"/>
           <p:cNvSpPr/>
           <p:nvPr/>
         </p:nvSpPr>
         <p:spPr>
           <a:xfrm>
             <a:off x="8074152" y="3666744"/>
-            <a:ext cx="2825496" cy="201168"/>
+            <a:ext cx="2825496" cy="256032"/>
           </a:xfrm>
           <a:prstGeom prst="rect">
             <a:avLst/>
@@ -13674,7 +14825,7 @@
               <a:buNone/>
             </a:pPr>
             <a:r>
-              <a:rPr lang="en-US" sz="950" b="1" dirty="0">
+              <a:rPr lang="en-US" sz="1300" b="1" dirty="0">
                 <a:solidFill>
                   <a:srgbClr val="0068B7"/>
                 </a:solidFill>
@@ -13684,20 +14835,20 @@
               </a:rPr>
               <a:t>Use this for</a:t>
             </a:r>
-            <a:endParaRPr lang="en-US" sz="950" dirty="0"/>
-          </a:p>
-        </p:txBody>
-      </p:sp>
-      <p:sp>
-        <p:nvSpPr>
-          <p:cNvPr id="16" name="Text 14"/>
-          <p:cNvSpPr/>
-          <p:nvPr/>
-        </p:nvSpPr>
-        <p:spPr>
-          <a:xfrm>
-            <a:off x="8074152" y="3959352"/>
-            <a:ext cx="2825496" cy="1170432"/>
+            <a:endParaRPr lang="en-US" sz="1300" dirty="0"/>
+          </a:p>
+        </p:txBody>
+      </p:sp>
+      <p:sp>
+        <p:nvSpPr>
+          <p:cNvPr id="17" name="Text 15"/>
+          <p:cNvSpPr/>
+          <p:nvPr/>
+        </p:nvSpPr>
+        <p:spPr>
+          <a:xfrm>
+            <a:off x="8074152" y="4023360"/>
+            <a:ext cx="2825496" cy="1097280"/>
           </a:xfrm>
           <a:prstGeom prst="rect">
             <a:avLst/>
@@ -13715,7 +14866,7 @@
               <a:buNone/>
             </a:pPr>
             <a:r>
-              <a:rPr lang="en-US" sz="1250" dirty="0">
+              <a:rPr lang="en-US" sz="1550" dirty="0">
                 <a:solidFill>
                   <a:srgbClr val="17364A"/>
                 </a:solidFill>
@@ -13725,7 +14876,7 @@
               </a:rPr>
               <a:t>Connect the concept to public health decisions, safeguards, documentation, or implementation work.</a:t>
             </a:r>
-            <a:endParaRPr lang="en-US" sz="1250" dirty="0"/>
+            <a:endParaRPr lang="en-US" sz="1550" dirty="0"/>
           </a:p>
         </p:txBody>
       </p:sp>
@@ -13922,7 +15073,7 @@
                 <a:ea typeface="Aptos" pitchFamily="34" charset="-122"/>
                 <a:cs typeface="Aptos" pitchFamily="34" charset="-120"/>
               </a:rPr>
-              <a:t>© Paula Soper</a:t>
+              <a:t>Â© Paula Soper</a:t>
             </a:r>
             <a:endParaRPr lang="en-US" sz="800" dirty="0"/>
           </a:p>
@@ -13930,7 +15081,46 @@
       </p:sp>
       <p:sp>
         <p:nvSpPr>
-          <p:cNvPr id="7" name="Shape 5"/>
+          <p:cNvPr id="7" name="Text 5"/>
+          <p:cNvSpPr/>
+          <p:nvPr/>
+        </p:nvSpPr>
+        <p:spPr>
+          <a:xfrm>
+            <a:off x="11137392" y="6510528"/>
+            <a:ext cx="411480" cy="201168"/>
+          </a:xfrm>
+          <a:prstGeom prst="rect">
+            <a:avLst/>
+          </a:prstGeom>
+          <a:noFill/>
+          <a:ln/>
+        </p:spPr>
+        <p:txBody>
+          <a:bodyPr wrap="square" lIns="0" tIns="0" rIns="0" bIns="0" rtlCol="0" anchor="ctr"/>
+          <a:lstStyle/>
+          <a:p>
+            <a:pPr algn="r" indent="0" marL="0">
+              <a:buNone/>
+            </a:pPr>
+            <a:r>
+              <a:rPr lang="en-US" sz="900" dirty="0">
+                <a:solidFill>
+                  <a:srgbClr val="5F7181"/>
+                </a:solidFill>
+                <a:latin typeface="Aptos" pitchFamily="34" charset="0"/>
+                <a:ea typeface="Aptos" pitchFamily="34" charset="-122"/>
+                <a:cs typeface="Aptos" pitchFamily="34" charset="-120"/>
+              </a:rPr>
+              <a:t>8</a:t>
+            </a:r>
+            <a:endParaRPr lang="en-US" sz="900" dirty="0"/>
+          </a:p>
+        </p:txBody>
+      </p:sp>
+      <p:sp>
+        <p:nvSpPr>
+          <p:cNvPr id="8" name="Shape 6"/>
           <p:cNvSpPr/>
           <p:nvPr/>
         </p:nvSpPr>
@@ -13955,7 +15145,7 @@
       </p:sp>
       <p:sp>
         <p:nvSpPr>
-          <p:cNvPr id="8" name="Text 6"/>
+          <p:cNvPr id="9" name="Text 7"/>
           <p:cNvSpPr/>
           <p:nvPr/>
         </p:nvSpPr>
@@ -13994,14 +15184,14 @@
       </p:sp>
       <p:sp>
         <p:nvSpPr>
-          <p:cNvPr id="9" name="Text 7"/>
+          <p:cNvPr id="10" name="Text 8"/>
           <p:cNvSpPr/>
           <p:nvPr/>
         </p:nvSpPr>
         <p:spPr>
           <a:xfrm>
             <a:off x="640080" y="621792"/>
-            <a:ext cx="10881360" cy="566928"/>
+            <a:ext cx="10881360" cy="713232"/>
           </a:xfrm>
           <a:prstGeom prst="rect">
             <a:avLst/>
@@ -14019,7 +15209,7 @@
               <a:buNone/>
             </a:pPr>
             <a:r>
-              <a:rPr lang="en-US" sz="2700" b="1" dirty="0">
+              <a:rPr lang="en-US" sz="3400" b="1" dirty="0">
                 <a:solidFill>
                   <a:srgbClr val="003A63"/>
                 </a:solidFill>
@@ -14029,20 +15219,20 @@
               </a:rPr>
               <a:t>Why This Topic Matters for Public Health AI</a:t>
             </a:r>
-            <a:endParaRPr lang="en-US" sz="2700" dirty="0"/>
-          </a:p>
-        </p:txBody>
-      </p:sp>
-      <p:sp>
-        <p:nvSpPr>
-          <p:cNvPr id="10" name="Text 8"/>
-          <p:cNvSpPr/>
-          <p:nvPr/>
-        </p:nvSpPr>
-        <p:spPr>
-          <a:xfrm>
-            <a:off x="868680" y="1417320"/>
-            <a:ext cx="6675120" cy="4434840"/>
+            <a:endParaRPr lang="en-US" sz="3400" dirty="0"/>
+          </a:p>
+        </p:txBody>
+      </p:sp>
+      <p:sp>
+        <p:nvSpPr>
+          <p:cNvPr id="11" name="Text 9"/>
+          <p:cNvSpPr/>
+          <p:nvPr/>
+        </p:nvSpPr>
+        <p:spPr>
+          <a:xfrm>
+            <a:off x="868680" y="1508760"/>
+            <a:ext cx="6537960" cy="4160520"/>
           </a:xfrm>
           <a:prstGeom prst="rect">
             <a:avLst/>
@@ -14057,7 +15247,7 @@
           <a:lstStyle/>
           <a:p>
             <a:r>
-              <a:rPr lang="en-US" sz="1700" dirty="0">
+              <a:rPr lang="en-US" sz="2100" dirty="0">
                 <a:solidFill>
                   <a:srgbClr val="17364A"/>
                 </a:solidFill>
@@ -14065,13 +15255,13 @@
                 <a:ea typeface="Aptos" pitchFamily="34" charset="-122"/>
                 <a:cs typeface="Aptos" pitchFamily="34" charset="-120"/>
               </a:rPr>
-              <a:t>RAG matters because public health agencies manage large collections of guidance, protocols, policies, contracts, plans,.</a:t>
-            </a:r>
-            <a:endParaRPr lang="en-US" sz="1700" dirty="0"/>
-          </a:p>
-          <a:p>
-            <a:r>
-              <a:rPr lang="en-US" sz="1700" dirty="0">
+              <a:t>RAG matters because public health agencies manage large collections of guidance, protocols, policies,.</a:t>
+            </a:r>
+            <a:endParaRPr lang="en-US" sz="2100" dirty="0"/>
+          </a:p>
+          <a:p>
+            <a:r>
+              <a:rPr lang="en-US" sz="2100" dirty="0">
                 <a:solidFill>
                   <a:srgbClr val="17364A"/>
                 </a:solidFill>
@@ -14079,13 +15269,13 @@
                 <a:ea typeface="Aptos" pitchFamily="34" charset="-122"/>
                 <a:cs typeface="Aptos" pitchFamily="34" charset="-120"/>
               </a:rPr>
-              <a:t>Staff may spend substantial time searching for answers across shared drives, websites, portals, and outdated files.</a:t>
-            </a:r>
-            <a:endParaRPr lang="en-US" sz="1700" dirty="0"/>
-          </a:p>
-          <a:p>
-            <a:r>
-              <a:rPr lang="en-US" sz="1700" dirty="0">
+              <a:t>Staff may spend substantial time searching for answers across shared drives, websites, portals, and.</a:t>
+            </a:r>
+            <a:endParaRPr lang="en-US" sz="2100" dirty="0"/>
+          </a:p>
+          <a:p>
+            <a:r>
+              <a:rPr lang="en-US" sz="2100" dirty="0">
                 <a:solidFill>
                   <a:srgbClr val="17364A"/>
                 </a:solidFill>
@@ -14093,29 +15283,15 @@
                 <a:ea typeface="Aptos" pitchFamily="34" charset="-122"/>
                 <a:cs typeface="Aptos" pitchFamily="34" charset="-120"/>
               </a:rPr>
-              <a:t>A well-designed RAG system can help users find relevant guidance and produce concise, source-linked answers.</a:t>
-            </a:r>
-            <a:endParaRPr lang="en-US" sz="1700" dirty="0"/>
-          </a:p>
-          <a:p>
-            <a:r>
-              <a:rPr lang="en-US" sz="1700" dirty="0">
-                <a:solidFill>
-                  <a:srgbClr val="17364A"/>
-                </a:solidFill>
-                <a:latin typeface="Aptos" pitchFamily="34" charset="0"/>
-                <a:ea typeface="Aptos" pitchFamily="34" charset="-122"/>
-                <a:cs typeface="Aptos" pitchFamily="34" charset="-120"/>
-              </a:rPr>
-              <a:t>The public health value of RAG depends on governance.</a:t>
-            </a:r>
-            <a:endParaRPr lang="en-US" sz="1700" dirty="0"/>
-          </a:p>
-        </p:txBody>
-      </p:sp>
-      <p:sp>
-        <p:nvSpPr>
-          <p:cNvPr id="11" name="Shape 9"/>
+              <a:t>A well-designed RAG system can help users find relevant guidance and produce concise, source-linked.</a:t>
+            </a:r>
+            <a:endParaRPr lang="en-US" sz="2100" dirty="0"/>
+          </a:p>
+        </p:txBody>
+      </p:sp>
+      <p:sp>
+        <p:nvSpPr>
+          <p:cNvPr id="12" name="Shape 10"/>
           <p:cNvSpPr/>
           <p:nvPr/>
         </p:nvSpPr>
@@ -14142,14 +15318,14 @@
       </p:sp>
       <p:sp>
         <p:nvSpPr>
-          <p:cNvPr id="12" name="Text 10"/>
+          <p:cNvPr id="13" name="Text 11"/>
           <p:cNvSpPr/>
           <p:nvPr/>
         </p:nvSpPr>
         <p:spPr>
           <a:xfrm>
             <a:off x="8074152" y="1563624"/>
-            <a:ext cx="2825496" cy="201168"/>
+            <a:ext cx="2825496" cy="256032"/>
           </a:xfrm>
           <a:prstGeom prst="rect">
             <a:avLst/>
@@ -14165,7 +15341,7 @@
               <a:buNone/>
             </a:pPr>
             <a:r>
-              <a:rPr lang="en-US" sz="950" b="1" dirty="0">
+              <a:rPr lang="en-US" sz="1300" b="1" dirty="0">
                 <a:solidFill>
                   <a:srgbClr val="0068B7"/>
                 </a:solidFill>
@@ -14175,20 +15351,20 @@
               </a:rPr>
               <a:t>Key idea</a:t>
             </a:r>
-            <a:endParaRPr lang="en-US" sz="950" dirty="0"/>
-          </a:p>
-        </p:txBody>
-      </p:sp>
-      <p:sp>
-        <p:nvSpPr>
-          <p:cNvPr id="13" name="Text 11"/>
-          <p:cNvSpPr/>
-          <p:nvPr/>
-        </p:nvSpPr>
-        <p:spPr>
-          <a:xfrm>
-            <a:off x="8074152" y="1856232"/>
-            <a:ext cx="2825496" cy="1261872"/>
+            <a:endParaRPr lang="en-US" sz="1300" dirty="0"/>
+          </a:p>
+        </p:txBody>
+      </p:sp>
+      <p:sp>
+        <p:nvSpPr>
+          <p:cNvPr id="14" name="Text 12"/>
+          <p:cNvSpPr/>
+          <p:nvPr/>
+        </p:nvSpPr>
+        <p:spPr>
+          <a:xfrm>
+            <a:off x="8074152" y="1920240"/>
+            <a:ext cx="2825496" cy="1188720"/>
           </a:xfrm>
           <a:prstGeom prst="rect">
             <a:avLst/>
@@ -14206,7 +15382,7 @@
               <a:buNone/>
             </a:pPr>
             <a:r>
-              <a:rPr lang="en-US" sz="1250" dirty="0">
+              <a:rPr lang="en-US" sz="1550" dirty="0">
                 <a:solidFill>
                   <a:srgbClr val="17364A"/>
                 </a:solidFill>
@@ -14214,15 +15390,15 @@
                 <a:ea typeface="Aptos" pitchFamily="34" charset="-122"/>
                 <a:cs typeface="Aptos" pitchFamily="34" charset="-120"/>
               </a:rPr>
-              <a:t>RAG matters because public health agencies manage large collections of guidance, protocols, policies, contracts, plans,.</a:t>
-            </a:r>
-            <a:endParaRPr lang="en-US" sz="1250" dirty="0"/>
-          </a:p>
-        </p:txBody>
-      </p:sp>
-      <p:sp>
-        <p:nvSpPr>
-          <p:cNvPr id="14" name="Shape 12"/>
+              <a:t>RAG matters because public health agencies manage large collections of guidance, protocols, policies,.</a:t>
+            </a:r>
+            <a:endParaRPr lang="en-US" sz="1550" dirty="0"/>
+          </a:p>
+        </p:txBody>
+      </p:sp>
+      <p:sp>
+        <p:nvSpPr>
+          <p:cNvPr id="15" name="Shape 13"/>
           <p:cNvSpPr/>
           <p:nvPr/>
         </p:nvSpPr>
@@ -14249,14 +15425,14 @@
       </p:sp>
       <p:sp>
         <p:nvSpPr>
-          <p:cNvPr id="15" name="Text 13"/>
+          <p:cNvPr id="16" name="Text 14"/>
           <p:cNvSpPr/>
           <p:nvPr/>
         </p:nvSpPr>
         <p:spPr>
           <a:xfrm>
             <a:off x="8074152" y="3666744"/>
-            <a:ext cx="2825496" cy="201168"/>
+            <a:ext cx="2825496" cy="256032"/>
           </a:xfrm>
           <a:prstGeom prst="rect">
             <a:avLst/>
@@ -14272,7 +15448,7 @@
               <a:buNone/>
             </a:pPr>
             <a:r>
-              <a:rPr lang="en-US" sz="950" b="1" dirty="0">
+              <a:rPr lang="en-US" sz="1300" b="1" dirty="0">
                 <a:solidFill>
                   <a:srgbClr val="0068B7"/>
                 </a:solidFill>
@@ -14282,20 +15458,20 @@
               </a:rPr>
               <a:t>Use this for</a:t>
             </a:r>
-            <a:endParaRPr lang="en-US" sz="950" dirty="0"/>
-          </a:p>
-        </p:txBody>
-      </p:sp>
-      <p:sp>
-        <p:nvSpPr>
-          <p:cNvPr id="16" name="Text 14"/>
-          <p:cNvSpPr/>
-          <p:nvPr/>
-        </p:nvSpPr>
-        <p:spPr>
-          <a:xfrm>
-            <a:off x="8074152" y="3959352"/>
-            <a:ext cx="2825496" cy="1170432"/>
+            <a:endParaRPr lang="en-US" sz="1300" dirty="0"/>
+          </a:p>
+        </p:txBody>
+      </p:sp>
+      <p:sp>
+        <p:nvSpPr>
+          <p:cNvPr id="17" name="Text 15"/>
+          <p:cNvSpPr/>
+          <p:nvPr/>
+        </p:nvSpPr>
+        <p:spPr>
+          <a:xfrm>
+            <a:off x="8074152" y="4023360"/>
+            <a:ext cx="2825496" cy="1097280"/>
           </a:xfrm>
           <a:prstGeom prst="rect">
             <a:avLst/>
@@ -14313,7 +15489,7 @@
               <a:buNone/>
             </a:pPr>
             <a:r>
-              <a:rPr lang="en-US" sz="1250" dirty="0">
+              <a:rPr lang="en-US" sz="1550" dirty="0">
                 <a:solidFill>
                   <a:srgbClr val="17364A"/>
                 </a:solidFill>
@@ -14323,7 +15499,7 @@
               </a:rPr>
               <a:t>Connect the concept to public health decisions, safeguards, documentation, or implementation work.</a:t>
             </a:r>
-            <a:endParaRPr lang="en-US" sz="1250" dirty="0"/>
+            <a:endParaRPr lang="en-US" sz="1550" dirty="0"/>
           </a:p>
         </p:txBody>
       </p:sp>
@@ -14520,7 +15696,7 @@
                 <a:ea typeface="Aptos" pitchFamily="34" charset="-122"/>
                 <a:cs typeface="Aptos" pitchFamily="34" charset="-120"/>
               </a:rPr>
-              <a:t>© Paula Soper</a:t>
+              <a:t>Â© Paula Soper</a:t>
             </a:r>
             <a:endParaRPr lang="en-US" sz="800" dirty="0"/>
           </a:p>
@@ -14528,7 +15704,46 @@
       </p:sp>
       <p:sp>
         <p:nvSpPr>
-          <p:cNvPr id="7" name="Shape 5"/>
+          <p:cNvPr id="7" name="Text 5"/>
+          <p:cNvSpPr/>
+          <p:nvPr/>
+        </p:nvSpPr>
+        <p:spPr>
+          <a:xfrm>
+            <a:off x="11137392" y="6510528"/>
+            <a:ext cx="411480" cy="201168"/>
+          </a:xfrm>
+          <a:prstGeom prst="rect">
+            <a:avLst/>
+          </a:prstGeom>
+          <a:noFill/>
+          <a:ln/>
+        </p:spPr>
+        <p:txBody>
+          <a:bodyPr wrap="square" lIns="0" tIns="0" rIns="0" bIns="0" rtlCol="0" anchor="ctr"/>
+          <a:lstStyle/>
+          <a:p>
+            <a:pPr algn="r" indent="0" marL="0">
+              <a:buNone/>
+            </a:pPr>
+            <a:r>
+              <a:rPr lang="en-US" sz="900" dirty="0">
+                <a:solidFill>
+                  <a:srgbClr val="5F7181"/>
+                </a:solidFill>
+                <a:latin typeface="Aptos" pitchFamily="34" charset="0"/>
+                <a:ea typeface="Aptos" pitchFamily="34" charset="-122"/>
+                <a:cs typeface="Aptos" pitchFamily="34" charset="-120"/>
+              </a:rPr>
+              <a:t>9</a:t>
+            </a:r>
+            <a:endParaRPr lang="en-US" sz="900" dirty="0"/>
+          </a:p>
+        </p:txBody>
+      </p:sp>
+      <p:sp>
+        <p:nvSpPr>
+          <p:cNvPr id="8" name="Shape 6"/>
           <p:cNvSpPr/>
           <p:nvPr/>
         </p:nvSpPr>
@@ -14553,7 +15768,7 @@
       </p:sp>
       <p:sp>
         <p:nvSpPr>
-          <p:cNvPr id="8" name="Text 6"/>
+          <p:cNvPr id="9" name="Text 7"/>
           <p:cNvSpPr/>
           <p:nvPr/>
         </p:nvSpPr>
@@ -14592,14 +15807,14 @@
       </p:sp>
       <p:sp>
         <p:nvSpPr>
-          <p:cNvPr id="9" name="Text 7"/>
+          <p:cNvPr id="10" name="Text 8"/>
           <p:cNvSpPr/>
           <p:nvPr/>
         </p:nvSpPr>
         <p:spPr>
           <a:xfrm>
             <a:off x="640080" y="621792"/>
-            <a:ext cx="10881360" cy="566928"/>
+            <a:ext cx="10881360" cy="713232"/>
           </a:xfrm>
           <a:prstGeom prst="rect">
             <a:avLst/>
@@ -14617,7 +15832,7 @@
               <a:buNone/>
             </a:pPr>
             <a:r>
-              <a:rPr lang="en-US" sz="2700" b="1" dirty="0">
+              <a:rPr lang="en-US" sz="3400" b="1" dirty="0">
                 <a:solidFill>
                   <a:srgbClr val="003A63"/>
                 </a:solidFill>
@@ -14627,20 +15842,20 @@
               </a:rPr>
               <a:t>Public Health Example</a:t>
             </a:r>
-            <a:endParaRPr lang="en-US" sz="2700" dirty="0"/>
-          </a:p>
-        </p:txBody>
-      </p:sp>
-      <p:sp>
-        <p:nvSpPr>
-          <p:cNvPr id="10" name="Text 8"/>
-          <p:cNvSpPr/>
-          <p:nvPr/>
-        </p:nvSpPr>
-        <p:spPr>
-          <a:xfrm>
-            <a:off x="868680" y="1417320"/>
-            <a:ext cx="6675120" cy="4434840"/>
+            <a:endParaRPr lang="en-US" sz="3400" dirty="0"/>
+          </a:p>
+        </p:txBody>
+      </p:sp>
+      <p:sp>
+        <p:nvSpPr>
+          <p:cNvPr id="11" name="Text 9"/>
+          <p:cNvSpPr/>
+          <p:nvPr/>
+        </p:nvSpPr>
+        <p:spPr>
+          <a:xfrm>
+            <a:off x="868680" y="1508760"/>
+            <a:ext cx="6537960" cy="4160520"/>
           </a:xfrm>
           <a:prstGeom prst="rect">
             <a:avLst/>
@@ -14655,7 +15870,7 @@
           <a:lstStyle/>
           <a:p>
             <a:r>
-              <a:rPr lang="en-US" sz="1700" dirty="0">
+              <a:rPr lang="en-US" sz="2100" dirty="0">
                 <a:solidFill>
                   <a:srgbClr val="17364A"/>
                 </a:solidFill>
@@ -14663,13 +15878,13 @@
                 <a:ea typeface="Aptos" pitchFamily="34" charset="-122"/>
                 <a:cs typeface="Aptos" pitchFamily="34" charset="-120"/>
               </a:rPr>
-              <a:t>A state health department may create an internal RAG assistant to help staff find current infectious disease investigation.</a:t>
-            </a:r>
-            <a:endParaRPr lang="en-US" sz="1700" dirty="0"/>
-          </a:p>
-          <a:p>
-            <a:r>
-              <a:rPr lang="en-US" sz="1700" dirty="0">
+              <a:t>A state health department may create an internal RAG assistant to help staff find current infectious.</a:t>
+            </a:r>
+            <a:endParaRPr lang="en-US" sz="2100" dirty="0"/>
+          </a:p>
+          <a:p>
+            <a:r>
+              <a:rPr lang="en-US" sz="2100" dirty="0">
                 <a:solidFill>
                   <a:srgbClr val="17364A"/>
                 </a:solidFill>
@@ -14677,13 +15892,13 @@
                 <a:ea typeface="Aptos" pitchFamily="34" charset="-122"/>
                 <a:cs typeface="Aptos" pitchFamily="34" charset="-120"/>
               </a:rPr>
-              <a:t>The assistant could search approved protocols, case definitions, reporting rules, and escalation procedures.</a:t>
-            </a:r>
-            <a:endParaRPr lang="en-US" sz="1700" dirty="0"/>
-          </a:p>
-          <a:p>
-            <a:r>
-              <a:rPr lang="en-US" sz="1700" dirty="0">
+              <a:t>The assistant could search approved protocols, case definitions, reporting rules, and escalation.</a:t>
+            </a:r>
+            <a:endParaRPr lang="en-US" sz="2100" dirty="0"/>
+          </a:p>
+          <a:p>
+            <a:r>
+              <a:rPr lang="en-US" sz="2100" dirty="0">
                 <a:solidFill>
                   <a:srgbClr val="17364A"/>
                 </a:solidFill>
@@ -14691,29 +15906,15 @@
                 <a:ea typeface="Aptos" pitchFamily="34" charset="-122"/>
                 <a:cs typeface="Aptos" pitchFamily="34" charset="-120"/>
               </a:rPr>
-              <a:t>When a user asks what steps to take for a suspected condition, the system could summarize relevant guidance and cite the.</a:t>
-            </a:r>
-            <a:endParaRPr lang="en-US" sz="1700" dirty="0"/>
-          </a:p>
-          <a:p>
-            <a:r>
-              <a:rPr lang="en-US" sz="1700" dirty="0">
-                <a:solidFill>
-                  <a:srgbClr val="17364A"/>
-                </a:solidFill>
-                <a:latin typeface="Aptos" pitchFamily="34" charset="0"/>
-                <a:ea typeface="Aptos" pitchFamily="34" charset="-122"/>
-                <a:cs typeface="Aptos" pitchFamily="34" charset="-120"/>
-              </a:rPr>
-              <a:t>This workflow requires strong controls.</a:t>
-            </a:r>
-            <a:endParaRPr lang="en-US" sz="1700" dirty="0"/>
-          </a:p>
-        </p:txBody>
-      </p:sp>
-      <p:sp>
-        <p:nvSpPr>
-          <p:cNvPr id="11" name="Shape 9"/>
+              <a:t>When a user asks what steps to take for a suspected condition, the system could summarize relevant.</a:t>
+            </a:r>
+            <a:endParaRPr lang="en-US" sz="2100" dirty="0"/>
+          </a:p>
+        </p:txBody>
+      </p:sp>
+      <p:sp>
+        <p:nvSpPr>
+          <p:cNvPr id="12" name="Shape 10"/>
           <p:cNvSpPr/>
           <p:nvPr/>
         </p:nvSpPr>
@@ -14740,14 +15941,14 @@
       </p:sp>
       <p:sp>
         <p:nvSpPr>
-          <p:cNvPr id="12" name="Text 10"/>
+          <p:cNvPr id="13" name="Text 11"/>
           <p:cNvSpPr/>
           <p:nvPr/>
         </p:nvSpPr>
         <p:spPr>
           <a:xfrm>
             <a:off x="8074152" y="1563624"/>
-            <a:ext cx="2825496" cy="201168"/>
+            <a:ext cx="2825496" cy="256032"/>
           </a:xfrm>
           <a:prstGeom prst="rect">
             <a:avLst/>
@@ -14763,7 +15964,7 @@
               <a:buNone/>
             </a:pPr>
             <a:r>
-              <a:rPr lang="en-US" sz="950" b="1" dirty="0">
+              <a:rPr lang="en-US" sz="1300" b="1" dirty="0">
                 <a:solidFill>
                   <a:srgbClr val="0068B7"/>
                 </a:solidFill>
@@ -14773,20 +15974,20 @@
               </a:rPr>
               <a:t>Key idea</a:t>
             </a:r>
-            <a:endParaRPr lang="en-US" sz="950" dirty="0"/>
-          </a:p>
-        </p:txBody>
-      </p:sp>
-      <p:sp>
-        <p:nvSpPr>
-          <p:cNvPr id="13" name="Text 11"/>
-          <p:cNvSpPr/>
-          <p:nvPr/>
-        </p:nvSpPr>
-        <p:spPr>
-          <a:xfrm>
-            <a:off x="8074152" y="1856232"/>
-            <a:ext cx="2825496" cy="1261872"/>
+            <a:endParaRPr lang="en-US" sz="1300" dirty="0"/>
+          </a:p>
+        </p:txBody>
+      </p:sp>
+      <p:sp>
+        <p:nvSpPr>
+          <p:cNvPr id="14" name="Text 12"/>
+          <p:cNvSpPr/>
+          <p:nvPr/>
+        </p:nvSpPr>
+        <p:spPr>
+          <a:xfrm>
+            <a:off x="8074152" y="1920240"/>
+            <a:ext cx="2825496" cy="1188720"/>
           </a:xfrm>
           <a:prstGeom prst="rect">
             <a:avLst/>
@@ -14804,7 +16005,7 @@
               <a:buNone/>
             </a:pPr>
             <a:r>
-              <a:rPr lang="en-US" sz="1250" dirty="0">
+              <a:rPr lang="en-US" sz="1550" dirty="0">
                 <a:solidFill>
                   <a:srgbClr val="17364A"/>
                 </a:solidFill>
@@ -14812,15 +16013,15 @@
                 <a:ea typeface="Aptos" pitchFamily="34" charset="-122"/>
                 <a:cs typeface="Aptos" pitchFamily="34" charset="-120"/>
               </a:rPr>
-              <a:t>A state health department may create an internal RAG assistant to help staff find current infectious disease investigation.</a:t>
-            </a:r>
-            <a:endParaRPr lang="en-US" sz="1250" dirty="0"/>
-          </a:p>
-        </p:txBody>
-      </p:sp>
-      <p:sp>
-        <p:nvSpPr>
-          <p:cNvPr id="14" name="Shape 12"/>
+              <a:t>A state health department may create an internal RAG assistant to help staff find current infectious.</a:t>
+            </a:r>
+            <a:endParaRPr lang="en-US" sz="1550" dirty="0"/>
+          </a:p>
+        </p:txBody>
+      </p:sp>
+      <p:sp>
+        <p:nvSpPr>
+          <p:cNvPr id="15" name="Shape 13"/>
           <p:cNvSpPr/>
           <p:nvPr/>
         </p:nvSpPr>
@@ -14847,14 +16048,14 @@
       </p:sp>
       <p:sp>
         <p:nvSpPr>
-          <p:cNvPr id="15" name="Text 13"/>
+          <p:cNvPr id="16" name="Text 14"/>
           <p:cNvSpPr/>
           <p:nvPr/>
         </p:nvSpPr>
         <p:spPr>
           <a:xfrm>
             <a:off x="8074152" y="3666744"/>
-            <a:ext cx="2825496" cy="201168"/>
+            <a:ext cx="2825496" cy="256032"/>
           </a:xfrm>
           <a:prstGeom prst="rect">
             <a:avLst/>
@@ -14870,7 +16071,7 @@
               <a:buNone/>
             </a:pPr>
             <a:r>
-              <a:rPr lang="en-US" sz="950" b="1" dirty="0">
+              <a:rPr lang="en-US" sz="1300" b="1" dirty="0">
                 <a:solidFill>
                   <a:srgbClr val="0068B7"/>
                 </a:solidFill>
@@ -14880,20 +16081,20 @@
               </a:rPr>
               <a:t>Use this for</a:t>
             </a:r>
-            <a:endParaRPr lang="en-US" sz="950" dirty="0"/>
-          </a:p>
-        </p:txBody>
-      </p:sp>
-      <p:sp>
-        <p:nvSpPr>
-          <p:cNvPr id="16" name="Text 14"/>
-          <p:cNvSpPr/>
-          <p:nvPr/>
-        </p:nvSpPr>
-        <p:spPr>
-          <a:xfrm>
-            <a:off x="8074152" y="3959352"/>
-            <a:ext cx="2825496" cy="1170432"/>
+            <a:endParaRPr lang="en-US" sz="1300" dirty="0"/>
+          </a:p>
+        </p:txBody>
+      </p:sp>
+      <p:sp>
+        <p:nvSpPr>
+          <p:cNvPr id="17" name="Text 15"/>
+          <p:cNvSpPr/>
+          <p:nvPr/>
+        </p:nvSpPr>
+        <p:spPr>
+          <a:xfrm>
+            <a:off x="8074152" y="4023360"/>
+            <a:ext cx="2825496" cy="1097280"/>
           </a:xfrm>
           <a:prstGeom prst="rect">
             <a:avLst/>
@@ -14911,7 +16112,7 @@
               <a:buNone/>
             </a:pPr>
             <a:r>
-              <a:rPr lang="en-US" sz="1250" dirty="0">
+              <a:rPr lang="en-US" sz="1550" dirty="0">
                 <a:solidFill>
                   <a:srgbClr val="17364A"/>
                 </a:solidFill>
@@ -14921,7 +16122,7 @@
               </a:rPr>
               <a:t>Connect the concept to public health decisions, safeguards, documentation, or implementation work.</a:t>
             </a:r>
-            <a:endParaRPr lang="en-US" sz="1250" dirty="0"/>
+            <a:endParaRPr lang="en-US" sz="1550" dirty="0"/>
           </a:p>
         </p:txBody>
       </p:sp>
